--- a/报告/开题报告.pptx
+++ b/报告/开题报告.pptx
@@ -2879,7 +2879,7 @@
                 <a:ea typeface="Microsoft YaHei" pitchFamily="34" charset="-122"/>
                 <a:cs typeface="Microsoft YaHei" pitchFamily="34" charset="-120"/>
               </a:rPr>
-              <a:t>创新点</a:t>
+              <a:t>实践创新点</a:t>
             </a:r>
             <a:endParaRPr lang="en-US" sz="1300" dirty="0"/>
           </a:p>
@@ -2887,14 +2887,55 @@
       </p:sp>
       <p:sp>
         <p:nvSpPr>
-          <p:cNvPr id="19" name="Shape 17"/>
-          <p:cNvSpPr/>
-          <p:nvPr/>
-        </p:nvSpPr>
-        <p:spPr>
-          <a:xfrm>
-            <a:off x="4846320" y="1280160"/>
-            <a:ext cx="3931920" cy="658368"/>
+          <p:cNvPr id="19" name="Text 17"/>
+          <p:cNvSpPr/>
+          <p:nvPr/>
+        </p:nvSpPr>
+        <p:spPr>
+          <a:xfrm>
+            <a:off x="4846320" y="1188720"/>
+            <a:ext cx="3840480" cy="182880"/>
+          </a:xfrm>
+          <a:prstGeom prst="rect">
+            <a:avLst/>
+          </a:prstGeom>
+          <a:noFill/>
+          <a:ln/>
+        </p:spPr>
+        <p:txBody>
+          <a:bodyPr wrap="square" rtlCol="0" anchor="ctr">
+            <a:normAutofit/>
+          </a:bodyPr>
+          <a:lstStyle/>
+          <a:p>
+            <a:pPr indent="0" marL="0">
+              <a:buNone/>
+            </a:pPr>
+            <a:r>
+              <a:rPr lang="en-US" sz="800" i="1" dirty="0">
+                <a:solidFill>
+                  <a:srgbClr val="6C757D"/>
+                </a:solidFill>
+                <a:latin typeface="Microsoft YaHei" pitchFamily="34" charset="0"/>
+                <a:ea typeface="Microsoft YaHei" pitchFamily="34" charset="-122"/>
+                <a:cs typeface="Microsoft YaHei" pitchFamily="34" charset="-120"/>
+              </a:rPr>
+              <a:t>（教学范围内的拓展价值，非学术突破）</a:t>
+            </a:r>
+            <a:endParaRPr lang="en-US" sz="800" dirty="0"/>
+          </a:p>
+        </p:txBody>
+      </p:sp>
+      <p:sp>
+        <p:nvSpPr>
+          <p:cNvPr id="20" name="Shape 18"/>
+          <p:cNvSpPr/>
+          <p:nvPr/>
+        </p:nvSpPr>
+        <p:spPr>
+          <a:xfrm>
+            <a:off x="4846320" y="1417320"/>
+            <a:ext cx="3931920" cy="566928"/>
           </a:xfrm>
           <a:prstGeom prst="rect">
             <a:avLst/>
@@ -2912,13 +2953,13 @@
       </p:sp>
       <p:sp>
         <p:nvSpPr>
-          <p:cNvPr id="20" name="Shape 18"/>
-          <p:cNvSpPr/>
-          <p:nvPr/>
-        </p:nvSpPr>
-        <p:spPr>
-          <a:xfrm>
-            <a:off x="4983480" y="1426464"/>
+          <p:cNvPr id="21" name="Shape 19"/>
+          <p:cNvSpPr/>
+          <p:nvPr/>
+        </p:nvSpPr>
+        <p:spPr>
+          <a:xfrm>
+            <a:off x="4983480" y="1563624"/>
             <a:ext cx="365760" cy="365760"/>
           </a:xfrm>
           <a:prstGeom prst="ellipse">
@@ -2932,13 +2973,13 @@
       </p:sp>
       <p:sp>
         <p:nvSpPr>
-          <p:cNvPr id="21" name="Text 19"/>
-          <p:cNvSpPr/>
-          <p:nvPr/>
-        </p:nvSpPr>
-        <p:spPr>
-          <a:xfrm>
-            <a:off x="4983480" y="1426464"/>
+          <p:cNvPr id="22" name="Text 20"/>
+          <p:cNvSpPr/>
+          <p:nvPr/>
+        </p:nvSpPr>
+        <p:spPr>
+          <a:xfrm>
+            <a:off x="4983480" y="1563624"/>
             <a:ext cx="365760" cy="365760"/>
           </a:xfrm>
           <a:prstGeom prst="rect">
@@ -2970,13 +3011,13 @@
       </p:sp>
       <p:sp>
         <p:nvSpPr>
-          <p:cNvPr id="22" name="Text 20"/>
-          <p:cNvSpPr/>
-          <p:nvPr/>
-        </p:nvSpPr>
-        <p:spPr>
-          <a:xfrm>
-            <a:off x="5486400" y="1325880"/>
+          <p:cNvPr id="23" name="Text 21"/>
+          <p:cNvSpPr/>
+          <p:nvPr/>
+        </p:nvSpPr>
+        <p:spPr>
+          <a:xfrm>
+            <a:off x="5486400" y="1463040"/>
             <a:ext cx="3200400" cy="566928"/>
           </a:xfrm>
           <a:prstGeom prst="rect">
@@ -3011,14 +3052,14 @@
       </p:sp>
       <p:sp>
         <p:nvSpPr>
-          <p:cNvPr id="23" name="Shape 21"/>
-          <p:cNvSpPr/>
-          <p:nvPr/>
-        </p:nvSpPr>
-        <p:spPr>
-          <a:xfrm>
-            <a:off x="4846320" y="2057400"/>
-            <a:ext cx="3931920" cy="658368"/>
+          <p:cNvPr id="24" name="Shape 22"/>
+          <p:cNvSpPr/>
+          <p:nvPr/>
+        </p:nvSpPr>
+        <p:spPr>
+          <a:xfrm>
+            <a:off x="4846320" y="2103120"/>
+            <a:ext cx="3931920" cy="566928"/>
           </a:xfrm>
           <a:prstGeom prst="rect">
             <a:avLst/>
@@ -3036,13 +3077,13 @@
       </p:sp>
       <p:sp>
         <p:nvSpPr>
-          <p:cNvPr id="24" name="Shape 22"/>
-          <p:cNvSpPr/>
-          <p:nvPr/>
-        </p:nvSpPr>
-        <p:spPr>
-          <a:xfrm>
-            <a:off x="4983480" y="2203704"/>
+          <p:cNvPr id="25" name="Shape 23"/>
+          <p:cNvSpPr/>
+          <p:nvPr/>
+        </p:nvSpPr>
+        <p:spPr>
+          <a:xfrm>
+            <a:off x="4983480" y="2249424"/>
             <a:ext cx="365760" cy="365760"/>
           </a:xfrm>
           <a:prstGeom prst="ellipse">
@@ -3056,13 +3097,13 @@
       </p:sp>
       <p:sp>
         <p:nvSpPr>
-          <p:cNvPr id="25" name="Text 23"/>
-          <p:cNvSpPr/>
-          <p:nvPr/>
-        </p:nvSpPr>
-        <p:spPr>
-          <a:xfrm>
-            <a:off x="4983480" y="2203704"/>
+          <p:cNvPr id="26" name="Text 24"/>
+          <p:cNvSpPr/>
+          <p:nvPr/>
+        </p:nvSpPr>
+        <p:spPr>
+          <a:xfrm>
+            <a:off x="4983480" y="2249424"/>
             <a:ext cx="365760" cy="365760"/>
           </a:xfrm>
           <a:prstGeom prst="rect">
@@ -3094,13 +3135,13 @@
       </p:sp>
       <p:sp>
         <p:nvSpPr>
-          <p:cNvPr id="26" name="Text 24"/>
-          <p:cNvSpPr/>
-          <p:nvPr/>
-        </p:nvSpPr>
-        <p:spPr>
-          <a:xfrm>
-            <a:off x="5486400" y="2103120"/>
+          <p:cNvPr id="27" name="Text 25"/>
+          <p:cNvSpPr/>
+          <p:nvPr/>
+        </p:nvSpPr>
+        <p:spPr>
+          <a:xfrm>
+            <a:off x="5486400" y="2148840"/>
             <a:ext cx="3200400" cy="566928"/>
           </a:xfrm>
           <a:prstGeom prst="rect">
@@ -3127,7 +3168,7 @@
                 <a:ea typeface="Microsoft YaHei" pitchFamily="34" charset="-122"/>
                 <a:cs typeface="Microsoft YaHei" pitchFamily="34" charset="-120"/>
               </a:rPr>
-              <a:t>ANN-MAC vs SNN-IF硬件开销量化对比</a:t>
+              <a:t>SMIC 0.18μm工艺下晶体管级电路对比案例</a:t>
             </a:r>
             <a:endParaRPr lang="en-US" sz="1000" dirty="0"/>
           </a:p>
@@ -3135,14 +3176,14 @@
       </p:sp>
       <p:sp>
         <p:nvSpPr>
-          <p:cNvPr id="27" name="Shape 25"/>
-          <p:cNvSpPr/>
-          <p:nvPr/>
-        </p:nvSpPr>
-        <p:spPr>
-          <a:xfrm>
-            <a:off x="4846320" y="2834640"/>
-            <a:ext cx="3931920" cy="658368"/>
+          <p:cNvPr id="28" name="Shape 26"/>
+          <p:cNvSpPr/>
+          <p:nvPr/>
+        </p:nvSpPr>
+        <p:spPr>
+          <a:xfrm>
+            <a:off x="4846320" y="2788920"/>
+            <a:ext cx="3931920" cy="566928"/>
           </a:xfrm>
           <a:prstGeom prst="rect">
             <a:avLst/>
@@ -3160,13 +3201,13 @@
       </p:sp>
       <p:sp>
         <p:nvSpPr>
-          <p:cNvPr id="28" name="Shape 26"/>
-          <p:cNvSpPr/>
-          <p:nvPr/>
-        </p:nvSpPr>
-        <p:spPr>
-          <a:xfrm>
-            <a:off x="4983480" y="2980944"/>
+          <p:cNvPr id="29" name="Shape 27"/>
+          <p:cNvSpPr/>
+          <p:nvPr/>
+        </p:nvSpPr>
+        <p:spPr>
+          <a:xfrm>
+            <a:off x="4983480" y="2935224"/>
             <a:ext cx="365760" cy="365760"/>
           </a:xfrm>
           <a:prstGeom prst="ellipse">
@@ -3180,13 +3221,13 @@
       </p:sp>
       <p:sp>
         <p:nvSpPr>
-          <p:cNvPr id="29" name="Text 27"/>
-          <p:cNvSpPr/>
-          <p:nvPr/>
-        </p:nvSpPr>
-        <p:spPr>
-          <a:xfrm>
-            <a:off x="4983480" y="2980944"/>
+          <p:cNvPr id="30" name="Text 28"/>
+          <p:cNvSpPr/>
+          <p:nvPr/>
+        </p:nvSpPr>
+        <p:spPr>
+          <a:xfrm>
+            <a:off x="4983480" y="2935224"/>
             <a:ext cx="365760" cy="365760"/>
           </a:xfrm>
           <a:prstGeom prst="rect">
@@ -3218,13 +3259,13 @@
       </p:sp>
       <p:sp>
         <p:nvSpPr>
-          <p:cNvPr id="30" name="Text 28"/>
-          <p:cNvSpPr/>
-          <p:nvPr/>
-        </p:nvSpPr>
-        <p:spPr>
-          <a:xfrm>
-            <a:off x="5486400" y="2880360"/>
+          <p:cNvPr id="31" name="Text 29"/>
+          <p:cNvSpPr/>
+          <p:nvPr/>
+        </p:nvSpPr>
+        <p:spPr>
+          <a:xfrm>
+            <a:off x="5486400" y="2834640"/>
             <a:ext cx="3200400" cy="566928"/>
           </a:xfrm>
           <a:prstGeom prst="rect">
@@ -3251,7 +3292,7 @@
                 <a:ea typeface="Microsoft YaHei" pitchFamily="34" charset="-122"/>
                 <a:cs typeface="Microsoft YaHei" pitchFamily="34" charset="-120"/>
               </a:rPr>
-              <a:t>准确率-功耗定量trade-off曲线（核心贡献）</a:t>
+              <a:t>自建电路实测功耗拟合准确率-功耗关系（实证验证）</a:t>
             </a:r>
             <a:endParaRPr lang="en-US" sz="1000" dirty="0"/>
           </a:p>
@@ -3259,14 +3300,14 @@
       </p:sp>
       <p:sp>
         <p:nvSpPr>
-          <p:cNvPr id="31" name="Shape 29"/>
-          <p:cNvSpPr/>
-          <p:nvPr/>
-        </p:nvSpPr>
-        <p:spPr>
-          <a:xfrm>
-            <a:off x="4846320" y="3611880"/>
-            <a:ext cx="3931920" cy="658368"/>
+          <p:cNvPr id="32" name="Shape 30"/>
+          <p:cNvSpPr/>
+          <p:nvPr/>
+        </p:nvSpPr>
+        <p:spPr>
+          <a:xfrm>
+            <a:off x="4846320" y="3474720"/>
+            <a:ext cx="3931920" cy="566928"/>
           </a:xfrm>
           <a:prstGeom prst="rect">
             <a:avLst/>
@@ -3284,13 +3325,13 @@
       </p:sp>
       <p:sp>
         <p:nvSpPr>
-          <p:cNvPr id="32" name="Shape 30"/>
-          <p:cNvSpPr/>
-          <p:nvPr/>
-        </p:nvSpPr>
-        <p:spPr>
-          <a:xfrm>
-            <a:off x="4983480" y="3758184"/>
+          <p:cNvPr id="33" name="Shape 31"/>
+          <p:cNvSpPr/>
+          <p:nvPr/>
+        </p:nvSpPr>
+        <p:spPr>
+          <a:xfrm>
+            <a:off x="4983480" y="3621024"/>
             <a:ext cx="365760" cy="365760"/>
           </a:xfrm>
           <a:prstGeom prst="ellipse">
@@ -3304,13 +3345,13 @@
       </p:sp>
       <p:sp>
         <p:nvSpPr>
-          <p:cNvPr id="33" name="Text 31"/>
-          <p:cNvSpPr/>
-          <p:nvPr/>
-        </p:nvSpPr>
-        <p:spPr>
-          <a:xfrm>
-            <a:off x="4983480" y="3758184"/>
+          <p:cNvPr id="34" name="Text 32"/>
+          <p:cNvSpPr/>
+          <p:nvPr/>
+        </p:nvSpPr>
+        <p:spPr>
+          <a:xfrm>
+            <a:off x="4983480" y="3621024"/>
             <a:ext cx="365760" cy="365760"/>
           </a:xfrm>
           <a:prstGeom prst="rect">
@@ -3342,13 +3383,13 @@
       </p:sp>
       <p:sp>
         <p:nvSpPr>
-          <p:cNvPr id="34" name="Text 32"/>
-          <p:cNvSpPr/>
-          <p:nvPr/>
-        </p:nvSpPr>
-        <p:spPr>
-          <a:xfrm>
-            <a:off x="5486400" y="3657600"/>
+          <p:cNvPr id="35" name="Text 33"/>
+          <p:cNvSpPr/>
+          <p:nvPr/>
+        </p:nvSpPr>
+        <p:spPr>
+          <a:xfrm>
+            <a:off x="5486400" y="3520440"/>
             <a:ext cx="3200400" cy="566928"/>
           </a:xfrm>
           <a:prstGeom prst="rect">
@@ -8928,7 +8969,7 @@
                 <a:ea typeface="Songti SC" pitchFamily="34" charset="-122"/>
                 <a:cs typeface="Songti SC" pitchFamily="34" charset="-120"/>
               </a:rPr>
-              <a:t>三、存在的问题</a:t>
+              <a:t>三、现有进展与本课题定位</a:t>
             </a:r>
             <a:endParaRPr lang="en-US" sz="2600" dirty="0"/>
           </a:p>
@@ -8969,7 +9010,7 @@
                 <a:ea typeface="Microsoft YaHei" pitchFamily="34" charset="-122"/>
                 <a:cs typeface="Microsoft YaHei" pitchFamily="34" charset="-120"/>
               </a:rPr>
-              <a:t>Gaps in Current Research</a:t>
+              <a:t>Existing Progress &amp; Our Positioning</a:t>
             </a:r>
             <a:endParaRPr lang="en-US" sz="1300" dirty="0"/>
           </a:p>
@@ -8983,8 +9024,159 @@
         </p:nvSpPr>
         <p:spPr>
           <a:xfrm>
-            <a:off x="457200" y="1188720"/>
-            <a:ext cx="3931920" cy="1325880"/>
+            <a:off x="457200" y="1005840"/>
+            <a:ext cx="8229600" cy="777240"/>
+          </a:xfrm>
+          <a:prstGeom prst="rect">
+            <a:avLst/>
+          </a:prstGeom>
+          <a:solidFill>
+            <a:srgbClr val="E8F8F8"/>
+          </a:solidFill>
+          <a:ln w="12700">
+            <a:solidFill>
+              <a:srgbClr val="00B4D8"/>
+            </a:solidFill>
+            <a:prstDash val="solid"/>
+          </a:ln>
+        </p:spPr>
+      </p:sp>
+      <p:sp>
+        <p:nvSpPr>
+          <p:cNvPr id="6" name="Text 4"/>
+          <p:cNvSpPr/>
+          <p:nvPr/>
+        </p:nvSpPr>
+        <p:spPr>
+          <a:xfrm>
+            <a:off x="640080" y="1051560"/>
+            <a:ext cx="1828800" cy="274320"/>
+          </a:xfrm>
+          <a:prstGeom prst="rect">
+            <a:avLst/>
+          </a:prstGeom>
+          <a:noFill/>
+          <a:ln/>
+        </p:spPr>
+        <p:txBody>
+          <a:bodyPr wrap="square" rtlCol="0" anchor="ctr">
+            <a:normAutofit/>
+          </a:bodyPr>
+          <a:lstStyle/>
+          <a:p>
+            <a:pPr indent="0" marL="0">
+              <a:buNone/>
+            </a:pPr>
+            <a:r>
+              <a:rPr lang="en-US" sz="1200" b="1" dirty="0">
+                <a:solidFill>
+                  <a:srgbClr val="1C7293"/>
+                </a:solidFill>
+                <a:latin typeface="Microsoft YaHei" pitchFamily="34" charset="0"/>
+                <a:ea typeface="Microsoft YaHei" pitchFamily="34" charset="-122"/>
+                <a:cs typeface="Microsoft YaHei" pitchFamily="34" charset="-120"/>
+              </a:rPr>
+              <a:t>已有研究进展</a:t>
+            </a:r>
+            <a:endParaRPr lang="en-US" sz="1200" dirty="0"/>
+          </a:p>
+        </p:txBody>
+      </p:sp>
+      <p:sp>
+        <p:nvSpPr>
+          <p:cNvPr id="7" name="Text 5"/>
+          <p:cNvSpPr/>
+          <p:nvPr/>
+        </p:nvSpPr>
+        <p:spPr>
+          <a:xfrm>
+            <a:off x="640080" y="1325880"/>
+            <a:ext cx="7863840" cy="411480"/>
+          </a:xfrm>
+          <a:prstGeom prst="rect">
+            <a:avLst/>
+          </a:prstGeom>
+          <a:noFill/>
+          <a:ln/>
+        </p:spPr>
+        <p:txBody>
+          <a:bodyPr wrap="square" rtlCol="0" anchor="t">
+            <a:normAutofit/>
+          </a:bodyPr>
+          <a:lstStyle/>
+          <a:p>
+            <a:pPr algn="l" indent="0" marL="0">
+              <a:lnSpc>
+                <a:spcPct val="115000"/>
+              </a:lnSpc>
+              <a:buNone/>
+            </a:pPr>
+            <a:r>
+              <a:rPr lang="en-US" sz="1000" dirty="0">
+                <a:solidFill>
+                  <a:srgbClr val="1A1A2E"/>
+                </a:solidFill>
+                <a:latin typeface="Microsoft YaHei" pitchFamily="34" charset="0"/>
+                <a:ea typeface="Microsoft YaHei" pitchFamily="34" charset="-122"/>
+                <a:cs typeface="Microsoft YaHei" pitchFamily="34" charset="-120"/>
+              </a:rPr>
+              <a:t>SNN与ANN能效对比已较为充分：Shen(2023)提出Bit Budget框架质疑"SNN天然更省电"；Xu(2024)在SENECA上完成硬件级实测对比；NeuroBench(2025, Nature Comm.)建立标准化基准；snnTorch(2023)等训练框架已成熟。</a:t>
+            </a:r>
+            <a:endParaRPr lang="en-US" sz="1000" dirty="0"/>
+          </a:p>
+        </p:txBody>
+      </p:sp>
+      <p:sp>
+        <p:nvSpPr>
+          <p:cNvPr id="8" name="Text 6"/>
+          <p:cNvSpPr/>
+          <p:nvPr/>
+        </p:nvSpPr>
+        <p:spPr>
+          <a:xfrm>
+            <a:off x="457200" y="1920240"/>
+            <a:ext cx="8229600" cy="274320"/>
+          </a:xfrm>
+          <a:prstGeom prst="rect">
+            <a:avLst/>
+          </a:prstGeom>
+          <a:noFill/>
+          <a:ln/>
+        </p:spPr>
+        <p:txBody>
+          <a:bodyPr wrap="square" rtlCol="0" anchor="ctr">
+            <a:normAutofit/>
+          </a:bodyPr>
+          <a:lstStyle/>
+          <a:p>
+            <a:pPr algn="ctr" indent="0" marL="0">
+              <a:buNone/>
+            </a:pPr>
+            <a:r>
+              <a:rPr lang="en-US" sz="1200" b="1" dirty="0">
+                <a:solidFill>
+                  <a:srgbClr val="065A82"/>
+                </a:solidFill>
+                <a:latin typeface="Microsoft YaHei" pitchFamily="34" charset="0"/>
+                <a:ea typeface="Microsoft YaHei" pitchFamily="34" charset="-122"/>
+                <a:cs typeface="Microsoft YaHei" pitchFamily="34" charset="-120"/>
+              </a:rPr>
+              <a:t>本课题定位：教学级复现性验证（不声称填补研究空白）</a:t>
+            </a:r>
+            <a:endParaRPr lang="en-US" sz="1200" dirty="0"/>
+          </a:p>
+        </p:txBody>
+      </p:sp>
+      <p:sp>
+        <p:nvSpPr>
+          <p:cNvPr id="9" name="Shape 7"/>
+          <p:cNvSpPr/>
+          <p:nvPr/>
+        </p:nvSpPr>
+        <p:spPr>
+          <a:xfrm>
+            <a:off x="457200" y="2286000"/>
+            <a:ext cx="3931920" cy="1143000"/>
           </a:xfrm>
           <a:prstGeom prst="rect">
             <a:avLst/>
@@ -9002,14 +9194,14 @@
       </p:sp>
       <p:sp>
         <p:nvSpPr>
-          <p:cNvPr id="6" name="Text 4"/>
-          <p:cNvSpPr/>
-          <p:nvPr/>
-        </p:nvSpPr>
-        <p:spPr>
-          <a:xfrm>
-            <a:off x="594360" y="1298448"/>
-            <a:ext cx="548640" cy="365760"/>
+          <p:cNvPr id="10" name="Text 8"/>
+          <p:cNvSpPr/>
+          <p:nvPr/>
+        </p:nvSpPr>
+        <p:spPr>
+          <a:xfrm>
+            <a:off x="594360" y="2377440"/>
+            <a:ext cx="548640" cy="320040"/>
           </a:xfrm>
           <a:prstGeom prst="rect">
             <a:avLst/>
@@ -9027,7 +9219,7 @@
               <a:buNone/>
             </a:pPr>
             <a:r>
-              <a:rPr lang="en-US" sz="2200" b="1" dirty="0">
+              <a:rPr lang="en-US" sz="2000" b="1" dirty="0">
                 <a:solidFill>
                   <a:srgbClr val="00B4D8"/>
                 </a:solidFill>
@@ -9037,20 +9229,20 @@
               </a:rPr>
               <a:t>01</a:t>
             </a:r>
-            <a:endParaRPr lang="en-US" sz="2200" dirty="0"/>
-          </a:p>
-        </p:txBody>
-      </p:sp>
-      <p:sp>
-        <p:nvSpPr>
-          <p:cNvPr id="7" name="Text 5"/>
-          <p:cNvSpPr/>
-          <p:nvPr/>
-        </p:nvSpPr>
-        <p:spPr>
-          <a:xfrm>
-            <a:off x="1188720" y="1298448"/>
-            <a:ext cx="3017520" cy="320040"/>
+            <a:endParaRPr lang="en-US" sz="2000" dirty="0"/>
+          </a:p>
+        </p:txBody>
+      </p:sp>
+      <p:sp>
+        <p:nvSpPr>
+          <p:cNvPr id="11" name="Text 9"/>
+          <p:cNvSpPr/>
+          <p:nvPr/>
+        </p:nvSpPr>
+        <p:spPr>
+          <a:xfrm>
+            <a:off x="1188720" y="2377440"/>
+            <a:ext cx="3017520" cy="274320"/>
           </a:xfrm>
           <a:prstGeom prst="rect">
             <a:avLst/>
@@ -9068,7 +9260,7 @@
               <a:buNone/>
             </a:pPr>
             <a:r>
-              <a:rPr lang="en-US" sz="1300" b="1" dirty="0">
+              <a:rPr lang="en-US" sz="1200" b="1" dirty="0">
                 <a:solidFill>
                   <a:srgbClr val="065A82"/>
                 </a:solidFill>
@@ -9076,22 +9268,22 @@
                 <a:ea typeface="Microsoft YaHei" pitchFamily="34" charset="-122"/>
                 <a:cs typeface="Microsoft YaHei" pitchFamily="34" charset="-120"/>
               </a:rPr>
-              <a:t>硬件对比研究少</a:t>
-            </a:r>
-            <a:endParaRPr lang="en-US" sz="1300" dirty="0"/>
-          </a:p>
-        </p:txBody>
-      </p:sp>
-      <p:sp>
-        <p:nvSpPr>
-          <p:cNvPr id="8" name="Text 6"/>
-          <p:cNvSpPr/>
-          <p:nvPr/>
-        </p:nvSpPr>
-        <p:spPr>
-          <a:xfrm>
-            <a:off x="640080" y="1691640"/>
-            <a:ext cx="3566160" cy="731520"/>
+              <a:t>工艺窄缝</a:t>
+            </a:r>
+            <a:endParaRPr lang="en-US" sz="1200" dirty="0"/>
+          </a:p>
+        </p:txBody>
+      </p:sp>
+      <p:sp>
+        <p:nvSpPr>
+          <p:cNvPr id="12" name="Text 10"/>
+          <p:cNvSpPr/>
+          <p:nvPr/>
+        </p:nvSpPr>
+        <p:spPr>
+          <a:xfrm>
+            <a:off x="640080" y="2724912"/>
+            <a:ext cx="3566160" cy="640080"/>
           </a:xfrm>
           <a:prstGeom prst="rect">
             <a:avLst/>
@@ -9107,12 +9299,12 @@
           <a:p>
             <a:pPr indent="0" marL="0">
               <a:lnSpc>
-                <a:spcPct val="120000"/>
+                <a:spcPct val="115000"/>
               </a:lnSpc>
               <a:buNone/>
             </a:pPr>
             <a:r>
-              <a:rPr lang="en-US" sz="1000" dirty="0">
+              <a:rPr lang="en-US" sz="950" dirty="0">
                 <a:solidFill>
                   <a:srgbClr val="1A1A2E"/>
                 </a:solidFill>
@@ -9120,22 +9312,22 @@
                 <a:ea typeface="Microsoft YaHei" pitchFamily="34" charset="-122"/>
                 <a:cs typeface="Microsoft YaHei" pitchFamily="34" charset="-120"/>
               </a:rPr>
-              <a:t>现有研究多聚焦SNN软件算法或ANN硬件加速，两者在硬件电路层面的定量对比研究较少</a:t>
-            </a:r>
-            <a:endParaRPr lang="en-US" sz="1000" dirty="0"/>
-          </a:p>
-        </p:txBody>
-      </p:sp>
-      <p:sp>
-        <p:nvSpPr>
-          <p:cNvPr id="9" name="Shape 7"/>
-          <p:cNvSpPr/>
-          <p:nvPr/>
-        </p:nvSpPr>
-        <p:spPr>
-          <a:xfrm>
-            <a:off x="4663440" y="1188720"/>
-            <a:ext cx="3931920" cy="1325880"/>
+              <a:t>现有对比多针对专用芯片（Loihi/SENECA），在SMIC 0.18μm工艺下针对MLP的晶体管级复现案例较少</a:t>
+            </a:r>
+            <a:endParaRPr lang="en-US" sz="950" dirty="0"/>
+          </a:p>
+        </p:txBody>
+      </p:sp>
+      <p:sp>
+        <p:nvSpPr>
+          <p:cNvPr id="13" name="Shape 11"/>
+          <p:cNvSpPr/>
+          <p:nvPr/>
+        </p:nvSpPr>
+        <p:spPr>
+          <a:xfrm>
+            <a:off x="4663440" y="2286000"/>
+            <a:ext cx="3931920" cy="1143000"/>
           </a:xfrm>
           <a:prstGeom prst="rect">
             <a:avLst/>
@@ -9153,14 +9345,14 @@
       </p:sp>
       <p:sp>
         <p:nvSpPr>
-          <p:cNvPr id="10" name="Text 8"/>
-          <p:cNvSpPr/>
-          <p:nvPr/>
-        </p:nvSpPr>
-        <p:spPr>
-          <a:xfrm>
-            <a:off x="4800600" y="1298448"/>
-            <a:ext cx="548640" cy="365760"/>
+          <p:cNvPr id="14" name="Text 12"/>
+          <p:cNvSpPr/>
+          <p:nvPr/>
+        </p:nvSpPr>
+        <p:spPr>
+          <a:xfrm>
+            <a:off x="4800600" y="2377440"/>
+            <a:ext cx="548640" cy="320040"/>
           </a:xfrm>
           <a:prstGeom prst="rect">
             <a:avLst/>
@@ -9178,7 +9370,7 @@
               <a:buNone/>
             </a:pPr>
             <a:r>
-              <a:rPr lang="en-US" sz="2200" b="1" dirty="0">
+              <a:rPr lang="en-US" sz="2000" b="1" dirty="0">
                 <a:solidFill>
                   <a:srgbClr val="00B4D8"/>
                 </a:solidFill>
@@ -9188,20 +9380,20 @@
               </a:rPr>
               <a:t>02</a:t>
             </a:r>
-            <a:endParaRPr lang="en-US" sz="2200" dirty="0"/>
-          </a:p>
-        </p:txBody>
-      </p:sp>
-      <p:sp>
-        <p:nvSpPr>
-          <p:cNvPr id="11" name="Text 9"/>
-          <p:cNvSpPr/>
-          <p:nvPr/>
-        </p:nvSpPr>
-        <p:spPr>
-          <a:xfrm>
-            <a:off x="5394960" y="1298448"/>
-            <a:ext cx="3017520" cy="320040"/>
+            <a:endParaRPr lang="en-US" sz="2000" dirty="0"/>
+          </a:p>
+        </p:txBody>
+      </p:sp>
+      <p:sp>
+        <p:nvSpPr>
+          <p:cNvPr id="15" name="Text 13"/>
+          <p:cNvSpPr/>
+          <p:nvPr/>
+        </p:nvSpPr>
+        <p:spPr>
+          <a:xfrm>
+            <a:off x="5394960" y="2377440"/>
+            <a:ext cx="3017520" cy="274320"/>
           </a:xfrm>
           <a:prstGeom prst="rect">
             <a:avLst/>
@@ -9219,7 +9411,7 @@
               <a:buNone/>
             </a:pPr>
             <a:r>
-              <a:rPr lang="en-US" sz="1300" b="1" dirty="0">
+              <a:rPr lang="en-US" sz="1200" b="1" dirty="0">
                 <a:solidFill>
                   <a:srgbClr val="065A82"/>
                 </a:solidFill>
@@ -9227,22 +9419,22 @@
                 <a:ea typeface="Microsoft YaHei" pitchFamily="34" charset="-122"/>
                 <a:cs typeface="Microsoft YaHei" pitchFamily="34" charset="-120"/>
               </a:rPr>
-              <a:t>量化关系缺失</a:t>
-            </a:r>
-            <a:endParaRPr lang="en-US" sz="1300" dirty="0"/>
-          </a:p>
-        </p:txBody>
-      </p:sp>
-      <p:sp>
-        <p:nvSpPr>
-          <p:cNvPr id="12" name="Text 10"/>
-          <p:cNvSpPr/>
-          <p:nvPr/>
-        </p:nvSpPr>
-        <p:spPr>
-          <a:xfrm>
-            <a:off x="4846320" y="1691640"/>
-            <a:ext cx="3566160" cy="731520"/>
+              <a:t>教学级数据</a:t>
+            </a:r>
+            <a:endParaRPr lang="en-US" sz="1200" dirty="0"/>
+          </a:p>
+        </p:txBody>
+      </p:sp>
+      <p:sp>
+        <p:nvSpPr>
+          <p:cNvPr id="16" name="Text 14"/>
+          <p:cNvSpPr/>
+          <p:nvPr/>
+        </p:nvSpPr>
+        <p:spPr>
+          <a:xfrm>
+            <a:off x="4846320" y="2724912"/>
+            <a:ext cx="3566160" cy="640080"/>
           </a:xfrm>
           <a:prstGeom prst="rect">
             <a:avLst/>
@@ -9258,12 +9450,12 @@
           <a:p>
             <a:pPr indent="0" marL="0">
               <a:lnSpc>
-                <a:spcPct val="120000"/>
+                <a:spcPct val="115000"/>
               </a:lnSpc>
               <a:buNone/>
             </a:pPr>
             <a:r>
-              <a:rPr lang="en-US" sz="1000" dirty="0">
+              <a:rPr lang="en-US" sz="950" dirty="0">
                 <a:solidFill>
                   <a:srgbClr val="1A1A2E"/>
                 </a:solidFill>
@@ -9271,22 +9463,22 @@
                 <a:ea typeface="Microsoft YaHei" pitchFamily="34" charset="-122"/>
                 <a:cs typeface="Microsoft YaHei" pitchFamily="34" charset="-120"/>
               </a:rPr>
-              <a:t>"SNN更省电"是定性结论，"省多少电、换多少准确率"的量化关系缺乏实验数据支撑</a:t>
-            </a:r>
-            <a:endParaRPr lang="en-US" sz="1000" dirty="0"/>
-          </a:p>
-        </p:txBody>
-      </p:sp>
-      <p:sp>
-        <p:nvSpPr>
-          <p:cNvPr id="13" name="Shape 11"/>
-          <p:cNvSpPr/>
-          <p:nvPr/>
-        </p:nvSpPr>
-        <p:spPr>
-          <a:xfrm>
-            <a:off x="457200" y="2697480"/>
-            <a:ext cx="3931920" cy="1325880"/>
+              <a:t>准确率-能耗关系已有理论框架，但软件准确率与自建电路实测功耗对应的完整教学案例仍稀缺</a:t>
+            </a:r>
+            <a:endParaRPr lang="en-US" sz="950" dirty="0"/>
+          </a:p>
+        </p:txBody>
+      </p:sp>
+      <p:sp>
+        <p:nvSpPr>
+          <p:cNvPr id="17" name="Shape 15"/>
+          <p:cNvSpPr/>
+          <p:nvPr/>
+        </p:nvSpPr>
+        <p:spPr>
+          <a:xfrm>
+            <a:off x="457200" y="3566160"/>
+            <a:ext cx="3931920" cy="1143000"/>
           </a:xfrm>
           <a:prstGeom prst="rect">
             <a:avLst/>
@@ -9304,14 +9496,14 @@
       </p:sp>
       <p:sp>
         <p:nvSpPr>
-          <p:cNvPr id="14" name="Text 12"/>
-          <p:cNvSpPr/>
-          <p:nvPr/>
-        </p:nvSpPr>
-        <p:spPr>
-          <a:xfrm>
-            <a:off x="594360" y="2807208"/>
-            <a:ext cx="548640" cy="365760"/>
+          <p:cNvPr id="18" name="Text 16"/>
+          <p:cNvSpPr/>
+          <p:nvPr/>
+        </p:nvSpPr>
+        <p:spPr>
+          <a:xfrm>
+            <a:off x="594360" y="3657600"/>
+            <a:ext cx="548640" cy="320040"/>
           </a:xfrm>
           <a:prstGeom prst="rect">
             <a:avLst/>
@@ -9329,7 +9521,7 @@
               <a:buNone/>
             </a:pPr>
             <a:r>
-              <a:rPr lang="en-US" sz="2200" b="1" dirty="0">
+              <a:rPr lang="en-US" sz="2000" b="1" dirty="0">
                 <a:solidFill>
                   <a:srgbClr val="00B4D8"/>
                 </a:solidFill>
@@ -9339,20 +9531,20 @@
               </a:rPr>
               <a:t>03</a:t>
             </a:r>
-            <a:endParaRPr lang="en-US" sz="2200" dirty="0"/>
-          </a:p>
-        </p:txBody>
-      </p:sp>
-      <p:sp>
-        <p:nvSpPr>
-          <p:cNvPr id="15" name="Text 13"/>
-          <p:cNvSpPr/>
-          <p:nvPr/>
-        </p:nvSpPr>
-        <p:spPr>
-          <a:xfrm>
-            <a:off x="1188720" y="2807208"/>
-            <a:ext cx="3017520" cy="320040"/>
+            <a:endParaRPr lang="en-US" sz="2000" dirty="0"/>
+          </a:p>
+        </p:txBody>
+      </p:sp>
+      <p:sp>
+        <p:nvSpPr>
+          <p:cNvPr id="19" name="Text 17"/>
+          <p:cNvSpPr/>
+          <p:nvPr/>
+        </p:nvSpPr>
+        <p:spPr>
+          <a:xfrm>
+            <a:off x="1188720" y="3657600"/>
+            <a:ext cx="3017520" cy="274320"/>
           </a:xfrm>
           <a:prstGeom prst="rect">
             <a:avLst/>
@@ -9370,7 +9562,7 @@
               <a:buNone/>
             </a:pPr>
             <a:r>
-              <a:rPr lang="en-US" sz="1300" b="1" dirty="0">
+              <a:rPr lang="en-US" sz="1200" b="1" dirty="0">
                 <a:solidFill>
                   <a:srgbClr val="065A82"/>
                 </a:solidFill>
@@ -9378,22 +9570,22 @@
                 <a:ea typeface="Microsoft YaHei" pitchFamily="34" charset="-122"/>
                 <a:cs typeface="Microsoft YaHei" pitchFamily="34" charset="-120"/>
               </a:rPr>
-              <a:t>转换精度损失</a:t>
-            </a:r>
-            <a:endParaRPr lang="en-US" sz="1300" dirty="0"/>
-          </a:p>
-        </p:txBody>
-      </p:sp>
-      <p:sp>
-        <p:nvSpPr>
-          <p:cNvPr id="16" name="Text 14"/>
-          <p:cNvSpPr/>
-          <p:nvPr/>
-        </p:nvSpPr>
-        <p:spPr>
-          <a:xfrm>
-            <a:off x="640080" y="3200400"/>
-            <a:ext cx="3566160" cy="731520"/>
+              <a:t>应用而非改进</a:t>
+            </a:r>
+            <a:endParaRPr lang="en-US" sz="1200" dirty="0"/>
+          </a:p>
+        </p:txBody>
+      </p:sp>
+      <p:sp>
+        <p:nvSpPr>
+          <p:cNvPr id="20" name="Text 18"/>
+          <p:cNvSpPr/>
+          <p:nvPr/>
+        </p:nvSpPr>
+        <p:spPr>
+          <a:xfrm>
+            <a:off x="640080" y="4005072"/>
+            <a:ext cx="3566160" cy="640080"/>
           </a:xfrm>
           <a:prstGeom prst="rect">
             <a:avLst/>
@@ -9409,12 +9601,12 @@
           <a:p>
             <a:pPr indent="0" marL="0">
               <a:lnSpc>
-                <a:spcPct val="120000"/>
+                <a:spcPct val="115000"/>
               </a:lnSpc>
               <a:buNone/>
             </a:pPr>
             <a:r>
-              <a:rPr lang="en-US" sz="1000" dirty="0">
+              <a:rPr lang="en-US" sz="950" dirty="0">
                 <a:solidFill>
                   <a:srgbClr val="1A1A2E"/>
                 </a:solidFill>
@@ -9422,22 +9614,22 @@
                 <a:ea typeface="Microsoft YaHei" pitchFamily="34" charset="-122"/>
                 <a:cs typeface="Microsoft YaHei" pitchFamily="34" charset="-120"/>
               </a:rPr>
-              <a:t>ANN-to-SNN转换存在精度损失，不同归一化方法和参数选择对准确率影响显著</a:t>
-            </a:r>
-            <a:endParaRPr lang="en-US" sz="1000" dirty="0"/>
-          </a:p>
-        </p:txBody>
-      </p:sp>
-      <p:sp>
-        <p:nvSpPr>
-          <p:cNvPr id="17" name="Shape 15"/>
-          <p:cNvSpPr/>
-          <p:nvPr/>
-        </p:nvSpPr>
-        <p:spPr>
-          <a:xfrm>
-            <a:off x="4663440" y="2697480"/>
-            <a:ext cx="3931920" cy="1325880"/>
+              <a:t>转换精度损失是经典已解问题，本课题直接应用Rueckauer(2017)标准方法，关注自建电路上的表现</a:t>
+            </a:r>
+            <a:endParaRPr lang="en-US" sz="950" dirty="0"/>
+          </a:p>
+        </p:txBody>
+      </p:sp>
+      <p:sp>
+        <p:nvSpPr>
+          <p:cNvPr id="21" name="Shape 19"/>
+          <p:cNvSpPr/>
+          <p:nvPr/>
+        </p:nvSpPr>
+        <p:spPr>
+          <a:xfrm>
+            <a:off x="4663440" y="3566160"/>
+            <a:ext cx="3931920" cy="1143000"/>
           </a:xfrm>
           <a:prstGeom prst="rect">
             <a:avLst/>
@@ -9455,14 +9647,14 @@
       </p:sp>
       <p:sp>
         <p:nvSpPr>
-          <p:cNvPr id="18" name="Text 16"/>
-          <p:cNvSpPr/>
-          <p:nvPr/>
-        </p:nvSpPr>
-        <p:spPr>
-          <a:xfrm>
-            <a:off x="4800600" y="2807208"/>
-            <a:ext cx="548640" cy="365760"/>
+          <p:cNvPr id="22" name="Text 20"/>
+          <p:cNvSpPr/>
+          <p:nvPr/>
+        </p:nvSpPr>
+        <p:spPr>
+          <a:xfrm>
+            <a:off x="4800600" y="3657600"/>
+            <a:ext cx="548640" cy="320040"/>
           </a:xfrm>
           <a:prstGeom prst="rect">
             <a:avLst/>
@@ -9480,7 +9672,7 @@
               <a:buNone/>
             </a:pPr>
             <a:r>
-              <a:rPr lang="en-US" sz="2200" b="1" dirty="0">
+              <a:rPr lang="en-US" sz="2000" b="1" dirty="0">
                 <a:solidFill>
                   <a:srgbClr val="00B4D8"/>
                 </a:solidFill>
@@ -9490,20 +9682,20 @@
               </a:rPr>
               <a:t>04</a:t>
             </a:r>
-            <a:endParaRPr lang="en-US" sz="2200" dirty="0"/>
-          </a:p>
-        </p:txBody>
-      </p:sp>
-      <p:sp>
-        <p:nvSpPr>
-          <p:cNvPr id="19" name="Text 17"/>
-          <p:cNvSpPr/>
-          <p:nvPr/>
-        </p:nvSpPr>
-        <p:spPr>
-          <a:xfrm>
-            <a:off x="5394960" y="2807208"/>
-            <a:ext cx="3017520" cy="320040"/>
+            <a:endParaRPr lang="en-US" sz="2000" dirty="0"/>
+          </a:p>
+        </p:txBody>
+      </p:sp>
+      <p:sp>
+        <p:nvSpPr>
+          <p:cNvPr id="23" name="Text 21"/>
+          <p:cNvSpPr/>
+          <p:nvPr/>
+        </p:nvSpPr>
+        <p:spPr>
+          <a:xfrm>
+            <a:off x="5394960" y="3657600"/>
+            <a:ext cx="3017520" cy="274320"/>
           </a:xfrm>
           <a:prstGeom prst="rect">
             <a:avLst/>
@@ -9521,7 +9713,7 @@
               <a:buNone/>
             </a:pPr>
             <a:r>
-              <a:rPr lang="en-US" sz="1300" b="1" dirty="0">
+              <a:rPr lang="en-US" sz="1200" b="1" dirty="0">
                 <a:solidFill>
                   <a:srgbClr val="065A82"/>
                 </a:solidFill>
@@ -9529,22 +9721,22 @@
                 <a:ea typeface="Microsoft YaHei" pitchFamily="34" charset="-122"/>
                 <a:cs typeface="Microsoft YaHei" pitchFamily="34" charset="-120"/>
               </a:rPr>
-              <a:t>硬件生态不成熟</a:t>
-            </a:r>
-            <a:endParaRPr lang="en-US" sz="1300" dirty="0"/>
-          </a:p>
-        </p:txBody>
-      </p:sp>
-      <p:sp>
-        <p:nvSpPr>
-          <p:cNvPr id="20" name="Text 18"/>
-          <p:cNvSpPr/>
-          <p:nvPr/>
-        </p:nvSpPr>
-        <p:spPr>
-          <a:xfrm>
-            <a:off x="4846320" y="3200400"/>
-            <a:ext cx="3566160" cy="731520"/>
+              <a:t>教学资源补充</a:t>
+            </a:r>
+            <a:endParaRPr lang="en-US" sz="1200" dirty="0"/>
+          </a:p>
+        </p:txBody>
+      </p:sp>
+      <p:sp>
+        <p:nvSpPr>
+          <p:cNvPr id="24" name="Text 22"/>
+          <p:cNvSpPr/>
+          <p:nvPr/>
+        </p:nvSpPr>
+        <p:spPr>
+          <a:xfrm>
+            <a:off x="4846320" y="4005072"/>
+            <a:ext cx="3566160" cy="640080"/>
           </a:xfrm>
           <a:prstGeom prst="rect">
             <a:avLst/>
@@ -9560,12 +9752,12 @@
           <a:p>
             <a:pPr indent="0" marL="0">
               <a:lnSpc>
-                <a:spcPct val="120000"/>
+                <a:spcPct val="115000"/>
               </a:lnSpc>
               <a:buNone/>
             </a:pPr>
             <a:r>
-              <a:rPr lang="en-US" sz="1000" dirty="0">
+              <a:rPr lang="en-US" sz="950" dirty="0">
                 <a:solidFill>
                   <a:srgbClr val="1A1A2E"/>
                 </a:solidFill>
@@ -9573,9 +9765,9 @@
                 <a:ea typeface="Microsoft YaHei" pitchFamily="34" charset="-122"/>
                 <a:cs typeface="Microsoft YaHei" pitchFamily="34" charset="-120"/>
               </a:rPr>
-              <a:t>SNN硬件缺乏标准化设计工具链和公开的电路级功耗基准数据</a:t>
-            </a:r>
-            <a:endParaRPr lang="en-US" sz="1000" dirty="0"/>
+              <a:t>NeuroBench面向系统级评测，晶体管级数字电路的完整教学设计案例仍稀缺，本课题可作参考</a:t>
+            </a:r>
+            <a:endParaRPr lang="en-US" sz="950" dirty="0"/>
           </a:p>
         </p:txBody>
       </p:sp>

--- a/报告/开题报告.pptx
+++ b/报告/开题报告.pptx
@@ -6194,7 +6194,7 @@
                 <a:ea typeface="Microsoft YaHei" pitchFamily="34" charset="-122"/>
                 <a:cs typeface="Microsoft YaHei" pitchFamily="34" charset="-120"/>
               </a:rPr>
-              <a:t>查阅文献发现，"SNN更省电"是定性结论，但量化关系缺乏实验数据——这正是本课题要探索的。</a:t>
+              <a:t>查阅文献发现，"SNN更省电"已有大量研究，但我想通过自建电路亲自验证这个结论。</a:t>
             </a:r>
             <a:endParaRPr lang="en-US" sz="1000" dirty="0"/>
           </a:p>
@@ -7216,7 +7216,7 @@
                 <a:ea typeface="Microsoft YaHei" pitchFamily="34" charset="-122"/>
                 <a:cs typeface="Microsoft YaHei" pitchFamily="34" charset="-120"/>
               </a:rPr>
-              <a:t>定量分析</a:t>
+              <a:t>实证验证</a:t>
             </a:r>
             <a:endParaRPr lang="en-US" sz="1300" dirty="0"/>
           </a:p>
@@ -7260,7 +7260,7 @@
                 <a:ea typeface="Microsoft YaHei" pitchFamily="34" charset="-122"/>
                 <a:cs typeface="Microsoft YaHei" pitchFamily="34" charset="-120"/>
               </a:rPr>
-              <a:t>将"SNN更省电"的定性结论</a:t>
+              <a:t>通过自建电路实测功耗</a:t>
             </a:r>
             <a:endParaRPr lang="en-US" sz="1000" dirty="0"/>
           </a:p>
@@ -7280,7 +7280,7 @@
                 <a:ea typeface="Microsoft YaHei" pitchFamily="34" charset="-122"/>
                 <a:cs typeface="Microsoft YaHei" pitchFamily="34" charset="-120"/>
               </a:rPr>
-              <a:t>升维为量化模型，回答</a:t>
+              <a:t>验证"SNN更省电"课堂结论</a:t>
             </a:r>
             <a:endParaRPr lang="en-US" sz="1000" dirty="0"/>
           </a:p>
@@ -7300,7 +7300,7 @@
                 <a:ea typeface="Microsoft YaHei" pitchFamily="34" charset="-122"/>
                 <a:cs typeface="Microsoft YaHei" pitchFamily="34" charset="-120"/>
               </a:rPr>
-              <a:t>"每降1%准确率省多少功耗"</a:t>
+              <a:t>加深对类脑计算的理解</a:t>
             </a:r>
             <a:endParaRPr lang="en-US" sz="1000" dirty="0"/>
           </a:p>
@@ -12768,7 +12768,7 @@
                 <a:ea typeface="Microsoft YaHei" pitchFamily="34" charset="-122"/>
                 <a:cs typeface="Microsoft YaHei" pitchFamily="34" charset="-120"/>
               </a:rPr>
-              <a:t>• 需要乘法器：否（MUX代替，省~75%晶体管）</a:t>
+              <a:t>• 需要乘法器：否（MUX代替，显著降低硬件资源）</a:t>
             </a:r>
             <a:endParaRPr lang="en-US" sz="1000" dirty="0"/>
           </a:p>

--- a/报告/开题报告.pptx
+++ b/报告/开题报告.pptx
@@ -1,26 +1,26 @@
 
 <file path=ppt/presentation.xml><?xml version="1.0" encoding="utf-8"?>
-<p:presentation xmlns:a="http://schemas.openxmlformats.org/drawingml/2006/main" xmlns:r="http://schemas.openxmlformats.org/officeDocument/2006/relationships" xmlns:p="http://schemas.openxmlformats.org/presentationml/2006/main" saveSubsetFonts="1" autoCompressPictures="0">
+<p:presentation xmlns:a="http://schemas.openxmlformats.org/drawingml/2006/main" xmlns:r="http://schemas.openxmlformats.org/officeDocument/2006/relationships" xmlns:p="http://schemas.openxmlformats.org/presentationml/2006/main" autoCompressPictures="0">
   <p:sldMasterIdLst>
     <p:sldMasterId id="2147483648" r:id="rId1"/>
   </p:sldMasterIdLst>
+  <p:notesMasterIdLst>
+    <p:notesMasterId r:id="rId4"/>
+  </p:notesMasterIdLst>
   <p:sldIdLst>
-    <p:sldId id="256" r:id="rId2"/>
-    <p:sldId id="257" r:id="rId3"/>
-    <p:sldId id="258" r:id="rId4"/>
-    <p:sldId id="259" r:id="rId5"/>
-    <p:sldId id="260" r:id="rId6"/>
-    <p:sldId id="261" r:id="rId7"/>
-    <p:sldId id="262" r:id="rId8"/>
-    <p:sldId id="263" r:id="rId9"/>
-    <p:sldId id="264" r:id="rId10"/>
-    <p:sldId id="265" r:id="rId11"/>
-    <p:sldId id="266" r:id="rId12"/>
-    <p:sldId id="267" r:id="rId13"/>
+    <p:sldId id="256" r:id="rId3"/>
+    <p:sldId id="257" r:id="rId5"/>
+    <p:sldId id="258" r:id="rId6"/>
+    <p:sldId id="259" r:id="rId7"/>
+    <p:sldId id="260" r:id="rId8"/>
+    <p:sldId id="261" r:id="rId9"/>
+    <p:sldId id="262" r:id="rId10"/>
+    <p:sldId id="263" r:id="rId11"/>
+    <p:sldId id="264" r:id="rId12"/>
+    <p:sldId id="265" r:id="rId13"/>
+    <p:sldId id="266" r:id="rId14"/>
+    <p:sldId id="267" r:id="rId15"/>
   </p:sldIdLst>
-  <p:notesMasterIdLst>
-    <p:notesMasterId r:id="rId14"/>
-  </p:notesMasterIdLst>
   <p:sldSz cx="9144000" cy="5143500"/>
   <p:notesSz cx="5143500" cy="9144000"/>
   <p:defaultTextStyle>
@@ -200,7 +200,6 @@
           <a:p>
             <a:fld id="{5282F153-3F37-0F45-9E97-73ACFA13230C}" type="datetimeFigureOut">
               <a:rPr lang="en-US"/>
-              <a:t>7/23/19</a:t>
             </a:fld>
             <a:endParaRPr lang="en-US"/>
           </a:p>
@@ -267,6 +266,7 @@
               <a:rPr lang="en-US"/>
               <a:t>Click to edit Master text styles</a:t>
             </a:r>
+            <a:endParaRPr lang="en-US"/>
           </a:p>
           <a:p>
             <a:pPr lvl="1"/>
@@ -274,6 +274,7 @@
               <a:rPr lang="en-US"/>
               <a:t>Second level</a:t>
             </a:r>
+            <a:endParaRPr lang="en-US"/>
           </a:p>
           <a:p>
             <a:pPr lvl="2"/>
@@ -281,6 +282,7 @@
               <a:rPr lang="en-US"/>
               <a:t>Third level</a:t>
             </a:r>
+            <a:endParaRPr lang="en-US"/>
           </a:p>
           <a:p>
             <a:pPr lvl="3"/>
@@ -288,6 +290,7 @@
               <a:rPr lang="en-US"/>
               <a:t>Fourth level</a:t>
             </a:r>
+            <a:endParaRPr lang="en-US"/>
           </a:p>
           <a:p>
             <a:pPr lvl="4"/>
@@ -295,6 +298,7 @@
               <a:rPr lang="en-US"/>
               <a:t>Fifth level</a:t>
             </a:r>
+            <a:endParaRPr lang="en-US"/>
           </a:p>
         </p:txBody>
       </p:sp>
@@ -358,18 +362,12 @@
           <a:p>
             <a:fld id="{CE5E9CC1-C706-0F49-92D6-E571CC5EEA8F}" type="slidenum">
               <a:rPr lang="en-US"/>
-              <a:t>‹#›</a:t>
             </a:fld>
             <a:endParaRPr lang="en-US"/>
           </a:p>
         </p:txBody>
       </p:sp>
     </p:spTree>
-    <p:extLst>
-      <p:ext uri="{BB962C8B-B14F-4D97-AF65-F5344CB8AC3E}">
-        <p14:creationId xmlns:p14="http://schemas.microsoft.com/office/powerpoint/2010/main" val="1024086991"/>
-      </p:ext>
-    </p:extLst>
   </p:cSld>
   <p:clrMap bg1="lt1" tx1="dk1" bg2="lt2" tx2="dk2" accent1="accent1" accent2="accent2" accent3="accent3" accent4="accent4" accent5="accent5" accent6="accent6" hlink="hlink" folHlink="folHlink"/>
   <p:notesStyle>
@@ -511,11 +509,7 @@
           <a:bodyPr/>
           <a:lstStyle/>
           <a:p>
-            <a:r>
-              <a:rPr lang="en-US" dirty="0"/>
-              <a:t/>
-            </a:r>
-            <a:endParaRPr lang="en-US" dirty="0"/>
+            <a:endParaRPr lang="zh-CN" altLang="en-US" dirty="0"/>
           </a:p>
         </p:txBody>
       </p:sp>
@@ -536,18 +530,12 @@
           <a:p>
             <a:fld id="{F7021451-1387-4CA6-816F-3879F97B5CBC}" type="slidenum">
               <a:rPr lang="en-US"/>
-              <a:t>1</a:t>
             </a:fld>
             <a:endParaRPr lang="en-US"/>
           </a:p>
         </p:txBody>
       </p:sp>
     </p:spTree>
-    <p:extLst>
-      <p:ext uri="{BB962C8B-B14F-4D97-AF65-F5344CB8AC3E}">
-        <p14:creationId xmlns:p14="http://schemas.microsoft.com/office/powerpoint/2010/main" val="1024086991"/>
-      </p:ext>
-    </p:extLst>
   </p:cSld>
   <p:clrMapOvr>
     <a:masterClrMapping/>
@@ -599,11 +587,7 @@
           <a:bodyPr/>
           <a:lstStyle/>
           <a:p>
-            <a:r>
-              <a:rPr lang="en-US" dirty="0"/>
-              <a:t/>
-            </a:r>
-            <a:endParaRPr lang="en-US" dirty="0"/>
+            <a:endParaRPr lang="zh-CN" altLang="en-US" dirty="0"/>
           </a:p>
         </p:txBody>
       </p:sp>
@@ -624,18 +608,12 @@
           <a:p>
             <a:fld id="{F7021451-1387-4CA6-816F-3879F97B5CBC}" type="slidenum">
               <a:rPr lang="en-US"/>
-              <a:t>10</a:t>
             </a:fld>
             <a:endParaRPr lang="en-US"/>
           </a:p>
         </p:txBody>
       </p:sp>
     </p:spTree>
-    <p:extLst>
-      <p:ext uri="{BB962C8B-B14F-4D97-AF65-F5344CB8AC3E}">
-        <p14:creationId xmlns:p14="http://schemas.microsoft.com/office/powerpoint/2010/main" val="1024086991"/>
-      </p:ext>
-    </p:extLst>
   </p:cSld>
   <p:clrMapOvr>
     <a:masterClrMapping/>
@@ -687,11 +665,7 @@
           <a:bodyPr/>
           <a:lstStyle/>
           <a:p>
-            <a:r>
-              <a:rPr lang="en-US" dirty="0"/>
-              <a:t/>
-            </a:r>
-            <a:endParaRPr lang="en-US" dirty="0"/>
+            <a:endParaRPr lang="zh-CN" altLang="en-US" dirty="0"/>
           </a:p>
         </p:txBody>
       </p:sp>
@@ -712,18 +686,12 @@
           <a:p>
             <a:fld id="{F7021451-1387-4CA6-816F-3879F97B5CBC}" type="slidenum">
               <a:rPr lang="en-US"/>
-              <a:t>11</a:t>
             </a:fld>
             <a:endParaRPr lang="en-US"/>
           </a:p>
         </p:txBody>
       </p:sp>
     </p:spTree>
-    <p:extLst>
-      <p:ext uri="{BB962C8B-B14F-4D97-AF65-F5344CB8AC3E}">
-        <p14:creationId xmlns:p14="http://schemas.microsoft.com/office/powerpoint/2010/main" val="1024086991"/>
-      </p:ext>
-    </p:extLst>
   </p:cSld>
   <p:clrMapOvr>
     <a:masterClrMapping/>
@@ -775,11 +743,7 @@
           <a:bodyPr/>
           <a:lstStyle/>
           <a:p>
-            <a:r>
-              <a:rPr lang="en-US" dirty="0"/>
-              <a:t/>
-            </a:r>
-            <a:endParaRPr lang="en-US" dirty="0"/>
+            <a:endParaRPr lang="zh-CN" altLang="en-US" dirty="0"/>
           </a:p>
         </p:txBody>
       </p:sp>
@@ -800,18 +764,12 @@
           <a:p>
             <a:fld id="{F7021451-1387-4CA6-816F-3879F97B5CBC}" type="slidenum">
               <a:rPr lang="en-US"/>
-              <a:t>12</a:t>
             </a:fld>
             <a:endParaRPr lang="en-US"/>
           </a:p>
         </p:txBody>
       </p:sp>
     </p:spTree>
-    <p:extLst>
-      <p:ext uri="{BB962C8B-B14F-4D97-AF65-F5344CB8AC3E}">
-        <p14:creationId xmlns:p14="http://schemas.microsoft.com/office/powerpoint/2010/main" val="1024086991"/>
-      </p:ext>
-    </p:extLst>
   </p:cSld>
   <p:clrMapOvr>
     <a:masterClrMapping/>
@@ -863,11 +821,7 @@
           <a:bodyPr/>
           <a:lstStyle/>
           <a:p>
-            <a:r>
-              <a:rPr lang="en-US" dirty="0"/>
-              <a:t/>
-            </a:r>
-            <a:endParaRPr lang="en-US" dirty="0"/>
+            <a:endParaRPr lang="zh-CN" altLang="en-US" dirty="0"/>
           </a:p>
         </p:txBody>
       </p:sp>
@@ -888,18 +842,12 @@
           <a:p>
             <a:fld id="{F7021451-1387-4CA6-816F-3879F97B5CBC}" type="slidenum">
               <a:rPr lang="en-US"/>
-              <a:t>2</a:t>
             </a:fld>
             <a:endParaRPr lang="en-US"/>
           </a:p>
         </p:txBody>
       </p:sp>
     </p:spTree>
-    <p:extLst>
-      <p:ext uri="{BB962C8B-B14F-4D97-AF65-F5344CB8AC3E}">
-        <p14:creationId xmlns:p14="http://schemas.microsoft.com/office/powerpoint/2010/main" val="1024086991"/>
-      </p:ext>
-    </p:extLst>
   </p:cSld>
   <p:clrMapOvr>
     <a:masterClrMapping/>
@@ -951,11 +899,7 @@
           <a:bodyPr/>
           <a:lstStyle/>
           <a:p>
-            <a:r>
-              <a:rPr lang="en-US" dirty="0"/>
-              <a:t/>
-            </a:r>
-            <a:endParaRPr lang="en-US" dirty="0"/>
+            <a:endParaRPr lang="zh-CN" altLang="en-US" dirty="0"/>
           </a:p>
         </p:txBody>
       </p:sp>
@@ -976,18 +920,12 @@
           <a:p>
             <a:fld id="{F7021451-1387-4CA6-816F-3879F97B5CBC}" type="slidenum">
               <a:rPr lang="en-US"/>
-              <a:t>3</a:t>
             </a:fld>
             <a:endParaRPr lang="en-US"/>
           </a:p>
         </p:txBody>
       </p:sp>
     </p:spTree>
-    <p:extLst>
-      <p:ext uri="{BB962C8B-B14F-4D97-AF65-F5344CB8AC3E}">
-        <p14:creationId xmlns:p14="http://schemas.microsoft.com/office/powerpoint/2010/main" val="1024086991"/>
-      </p:ext>
-    </p:extLst>
   </p:cSld>
   <p:clrMapOvr>
     <a:masterClrMapping/>
@@ -1039,11 +977,7 @@
           <a:bodyPr/>
           <a:lstStyle/>
           <a:p>
-            <a:r>
-              <a:rPr lang="en-US" dirty="0"/>
-              <a:t/>
-            </a:r>
-            <a:endParaRPr lang="en-US" dirty="0"/>
+            <a:endParaRPr lang="zh-CN" altLang="en-US" dirty="0"/>
           </a:p>
         </p:txBody>
       </p:sp>
@@ -1064,18 +998,12 @@
           <a:p>
             <a:fld id="{F7021451-1387-4CA6-816F-3879F97B5CBC}" type="slidenum">
               <a:rPr lang="en-US"/>
-              <a:t>4</a:t>
             </a:fld>
             <a:endParaRPr lang="en-US"/>
           </a:p>
         </p:txBody>
       </p:sp>
     </p:spTree>
-    <p:extLst>
-      <p:ext uri="{BB962C8B-B14F-4D97-AF65-F5344CB8AC3E}">
-        <p14:creationId xmlns:p14="http://schemas.microsoft.com/office/powerpoint/2010/main" val="1024086991"/>
-      </p:ext>
-    </p:extLst>
   </p:cSld>
   <p:clrMapOvr>
     <a:masterClrMapping/>
@@ -1127,11 +1055,7 @@
           <a:bodyPr/>
           <a:lstStyle/>
           <a:p>
-            <a:r>
-              <a:rPr lang="en-US" dirty="0"/>
-              <a:t/>
-            </a:r>
-            <a:endParaRPr lang="en-US" dirty="0"/>
+            <a:endParaRPr lang="zh-CN" altLang="en-US" dirty="0"/>
           </a:p>
         </p:txBody>
       </p:sp>
@@ -1152,18 +1076,12 @@
           <a:p>
             <a:fld id="{F7021451-1387-4CA6-816F-3879F97B5CBC}" type="slidenum">
               <a:rPr lang="en-US"/>
-              <a:t>5</a:t>
             </a:fld>
             <a:endParaRPr lang="en-US"/>
           </a:p>
         </p:txBody>
       </p:sp>
     </p:spTree>
-    <p:extLst>
-      <p:ext uri="{BB962C8B-B14F-4D97-AF65-F5344CB8AC3E}">
-        <p14:creationId xmlns:p14="http://schemas.microsoft.com/office/powerpoint/2010/main" val="1024086991"/>
-      </p:ext>
-    </p:extLst>
   </p:cSld>
   <p:clrMapOvr>
     <a:masterClrMapping/>
@@ -1215,11 +1133,7 @@
           <a:bodyPr/>
           <a:lstStyle/>
           <a:p>
-            <a:r>
-              <a:rPr lang="en-US" dirty="0"/>
-              <a:t/>
-            </a:r>
-            <a:endParaRPr lang="en-US" dirty="0"/>
+            <a:endParaRPr lang="zh-CN" altLang="en-US" dirty="0"/>
           </a:p>
         </p:txBody>
       </p:sp>
@@ -1240,18 +1154,12 @@
           <a:p>
             <a:fld id="{F7021451-1387-4CA6-816F-3879F97B5CBC}" type="slidenum">
               <a:rPr lang="en-US"/>
-              <a:t>6</a:t>
             </a:fld>
             <a:endParaRPr lang="en-US"/>
           </a:p>
         </p:txBody>
       </p:sp>
     </p:spTree>
-    <p:extLst>
-      <p:ext uri="{BB962C8B-B14F-4D97-AF65-F5344CB8AC3E}">
-        <p14:creationId xmlns:p14="http://schemas.microsoft.com/office/powerpoint/2010/main" val="1024086991"/>
-      </p:ext>
-    </p:extLst>
   </p:cSld>
   <p:clrMapOvr>
     <a:masterClrMapping/>
@@ -1303,11 +1211,7 @@
           <a:bodyPr/>
           <a:lstStyle/>
           <a:p>
-            <a:r>
-              <a:rPr lang="en-US" dirty="0"/>
-              <a:t/>
-            </a:r>
-            <a:endParaRPr lang="en-US" dirty="0"/>
+            <a:endParaRPr lang="zh-CN" altLang="en-US" dirty="0"/>
           </a:p>
         </p:txBody>
       </p:sp>
@@ -1328,18 +1232,12 @@
           <a:p>
             <a:fld id="{F7021451-1387-4CA6-816F-3879F97B5CBC}" type="slidenum">
               <a:rPr lang="en-US"/>
-              <a:t>7</a:t>
             </a:fld>
             <a:endParaRPr lang="en-US"/>
           </a:p>
         </p:txBody>
       </p:sp>
     </p:spTree>
-    <p:extLst>
-      <p:ext uri="{BB962C8B-B14F-4D97-AF65-F5344CB8AC3E}">
-        <p14:creationId xmlns:p14="http://schemas.microsoft.com/office/powerpoint/2010/main" val="1024086991"/>
-      </p:ext>
-    </p:extLst>
   </p:cSld>
   <p:clrMapOvr>
     <a:masterClrMapping/>
@@ -1391,11 +1289,7 @@
           <a:bodyPr/>
           <a:lstStyle/>
           <a:p>
-            <a:r>
-              <a:rPr lang="en-US" dirty="0"/>
-              <a:t/>
-            </a:r>
-            <a:endParaRPr lang="en-US" dirty="0"/>
+            <a:endParaRPr lang="zh-CN" altLang="en-US" dirty="0"/>
           </a:p>
         </p:txBody>
       </p:sp>
@@ -1416,18 +1310,12 @@
           <a:p>
             <a:fld id="{F7021451-1387-4CA6-816F-3879F97B5CBC}" type="slidenum">
               <a:rPr lang="en-US"/>
-              <a:t>8</a:t>
             </a:fld>
             <a:endParaRPr lang="en-US"/>
           </a:p>
         </p:txBody>
       </p:sp>
     </p:spTree>
-    <p:extLst>
-      <p:ext uri="{BB962C8B-B14F-4D97-AF65-F5344CB8AC3E}">
-        <p14:creationId xmlns:p14="http://schemas.microsoft.com/office/powerpoint/2010/main" val="1024086991"/>
-      </p:ext>
-    </p:extLst>
   </p:cSld>
   <p:clrMapOvr>
     <a:masterClrMapping/>
@@ -1479,11 +1367,7 @@
           <a:bodyPr/>
           <a:lstStyle/>
           <a:p>
-            <a:r>
-              <a:rPr lang="en-US" dirty="0"/>
-              <a:t/>
-            </a:r>
-            <a:endParaRPr lang="en-US" dirty="0"/>
+            <a:endParaRPr lang="zh-CN" altLang="en-US" dirty="0"/>
           </a:p>
         </p:txBody>
       </p:sp>
@@ -1504,18 +1388,12 @@
           <a:p>
             <a:fld id="{F7021451-1387-4CA6-816F-3879F97B5CBC}" type="slidenum">
               <a:rPr lang="en-US"/>
-              <a:t>9</a:t>
             </a:fld>
             <a:endParaRPr lang="en-US"/>
           </a:p>
         </p:txBody>
       </p:sp>
     </p:spTree>
-    <p:extLst>
-      <p:ext uri="{BB962C8B-B14F-4D97-AF65-F5344CB8AC3E}">
-        <p14:creationId xmlns:p14="http://schemas.microsoft.com/office/powerpoint/2010/main" val="1024086991"/>
-      </p:ext>
-    </p:extLst>
   </p:cSld>
   <p:clrMapOvr>
     <a:masterClrMapping/>
@@ -1556,6 +1434,11 @@
 <file path=ppt/slideMasters/slideMaster1.xml><?xml version="1.0" encoding="utf-8"?>
 <p:sldMaster xmlns:a="http://schemas.openxmlformats.org/drawingml/2006/main" xmlns:r="http://schemas.openxmlformats.org/officeDocument/2006/relationships" xmlns:p="http://schemas.openxmlformats.org/presentationml/2006/main">
   <p:cSld>
+    <p:bg>
+      <p:bgRef idx="1001">
+        <a:schemeClr val="bg1"/>
+      </p:bgRef>
+    </p:bg>
     <p:spTree>
       <p:nvGrpSpPr>
         <p:cNvPr id="1" name=""/>
@@ -1599,7 +1482,7 @@
         <a:spcBef>
           <a:spcPct val="20000"/>
         </a:spcBef>
-        <a:buFont typeface="Arial" pitchFamily="34" charset="0"/>
+        <a:buFont typeface="Arial" panose="020B0604020202090204" pitchFamily="34" charset="0"/>
         <a:buChar char="•"/>
         <a:defRPr sz="3200" kern="1200">
           <a:solidFill>
@@ -1614,7 +1497,7 @@
         <a:spcBef>
           <a:spcPct val="20000"/>
         </a:spcBef>
-        <a:buFont typeface="Arial" pitchFamily="34" charset="0"/>
+        <a:buFont typeface="Arial" panose="020B0604020202090204" pitchFamily="34" charset="0"/>
         <a:buChar char="–"/>
         <a:defRPr sz="2800" kern="1200">
           <a:solidFill>
@@ -1629,7 +1512,7 @@
         <a:spcBef>
           <a:spcPct val="20000"/>
         </a:spcBef>
-        <a:buFont typeface="Arial" pitchFamily="34" charset="0"/>
+        <a:buFont typeface="Arial" panose="020B0604020202090204" pitchFamily="34" charset="0"/>
         <a:buChar char="•"/>
         <a:defRPr sz="2400" kern="1200">
           <a:solidFill>
@@ -1644,7 +1527,7 @@
         <a:spcBef>
           <a:spcPct val="20000"/>
         </a:spcBef>
-        <a:buFont typeface="Arial" pitchFamily="34" charset="0"/>
+        <a:buFont typeface="Arial" panose="020B0604020202090204" pitchFamily="34" charset="0"/>
         <a:buChar char="–"/>
         <a:defRPr sz="2000" kern="1200">
           <a:solidFill>
@@ -1659,7 +1542,7 @@
         <a:spcBef>
           <a:spcPct val="20000"/>
         </a:spcBef>
-        <a:buFont typeface="Arial" pitchFamily="34" charset="0"/>
+        <a:buFont typeface="Arial" panose="020B0604020202090204" pitchFamily="34" charset="0"/>
         <a:buChar char="»"/>
         <a:defRPr sz="2000" kern="1200">
           <a:solidFill>
@@ -1674,7 +1557,7 @@
         <a:spcBef>
           <a:spcPct val="20000"/>
         </a:spcBef>
-        <a:buFont typeface="Arial" pitchFamily="34" charset="0"/>
+        <a:buFont typeface="Arial" panose="020B0604020202090204" pitchFamily="34" charset="0"/>
         <a:buChar char="•"/>
         <a:defRPr sz="2000" kern="1200">
           <a:solidFill>
@@ -1689,7 +1572,7 @@
         <a:spcBef>
           <a:spcPct val="20000"/>
         </a:spcBef>
-        <a:buFont typeface="Arial" pitchFamily="34" charset="0"/>
+        <a:buFont typeface="Arial" panose="020B0604020202090204" pitchFamily="34" charset="0"/>
         <a:buChar char="•"/>
         <a:defRPr sz="2000" kern="1200">
           <a:solidFill>
@@ -1704,7 +1587,7 @@
         <a:spcBef>
           <a:spcPct val="20000"/>
         </a:spcBef>
-        <a:buFont typeface="Arial" pitchFamily="34" charset="0"/>
+        <a:buFont typeface="Arial" panose="020B0604020202090204" pitchFamily="34" charset="0"/>
         <a:buChar char="•"/>
         <a:defRPr sz="2000" kern="1200">
           <a:solidFill>
@@ -1719,7 +1602,7 @@
         <a:spcBef>
           <a:spcPct val="20000"/>
         </a:spcBef>
-        <a:buFont typeface="Arial" pitchFamily="34" charset="0"/>
+        <a:buFont typeface="Arial" panose="020B0604020202090204" pitchFamily="34" charset="0"/>
         <a:buChar char="•"/>
         <a:defRPr sz="2000" kern="1200">
           <a:solidFill>
@@ -1832,7 +1715,7 @@
 
 <file path=ppt/slides/slide1.xml><?xml version="1.0" encoding="utf-8"?>
 <p:sld xmlns:a="http://schemas.openxmlformats.org/drawingml/2006/main" xmlns:r="http://schemas.openxmlformats.org/officeDocument/2006/relationships" xmlns:p="http://schemas.openxmlformats.org/presentationml/2006/main">
-  <p:cSld name="Slide 1">
+  <p:cSld>
     <p:bg>
       <p:bgPr>
         <a:blipFill dpi="0" rotWithShape="1">
@@ -1880,7 +1763,6 @@
               <a:alpha val="60000"/>
             </a:srgbClr>
           </a:solidFill>
-          <a:ln/>
         </p:spPr>
       </p:sp>
       <p:sp>
@@ -1898,25 +1780,24 @@
             <a:avLst/>
           </a:prstGeom>
           <a:noFill/>
-          <a:ln/>
-        </p:spPr>
-        <p:txBody>
-          <a:bodyPr wrap="square" rtlCol="0" anchor="ctr">
-            <a:normAutofit/>
-          </a:bodyPr>
-          <a:lstStyle/>
-          <a:p>
-            <a:pPr algn="ctr" indent="0" marL="0">
-              <a:buNone/>
-            </a:pPr>
-            <a:r>
-              <a:rPr lang="en-US" sz="2000" spc="300" kern="0" dirty="0">
+        </p:spPr>
+        <p:txBody>
+          <a:bodyPr wrap="square" rtlCol="0" anchor="ctr">
+            <a:normAutofit/>
+          </a:bodyPr>
+          <a:lstStyle/>
+          <a:p>
+            <a:pPr marL="0" indent="0" algn="ctr">
+              <a:buNone/>
+            </a:pPr>
+            <a:r>
+              <a:rPr lang="en-US" sz="2000" kern="0" spc="300" dirty="0">
                 <a:solidFill>
                   <a:srgbClr val="00B4D8"/>
                 </a:solidFill>
-                <a:latin typeface="Microsoft YaHei" pitchFamily="34" charset="0"/>
-                <a:ea typeface="Microsoft YaHei" pitchFamily="34" charset="-122"/>
-                <a:cs typeface="Microsoft YaHei" pitchFamily="34" charset="-120"/>
+                <a:latin typeface="微软雅黑" pitchFamily="34" charset="0"/>
+                <a:ea typeface="微软雅黑" pitchFamily="34" charset="-122"/>
+                <a:cs typeface="微软雅黑" pitchFamily="34" charset="-120"/>
               </a:rPr>
               <a:t>开题报告</a:t>
             </a:r>
@@ -1939,25 +1820,24 @@
             <a:avLst/>
           </a:prstGeom>
           <a:noFill/>
-          <a:ln/>
-        </p:spPr>
-        <p:txBody>
-          <a:bodyPr wrap="square" rtlCol="0" anchor="ctr">
-            <a:normAutofit/>
-          </a:bodyPr>
-          <a:lstStyle/>
-          <a:p>
-            <a:pPr algn="ctr" indent="0" marL="0">
-              <a:buNone/>
-            </a:pPr>
-            <a:r>
-              <a:rPr lang="en-US" sz="3000" b="1" spc="200" kern="0" dirty="0">
+        </p:spPr>
+        <p:txBody>
+          <a:bodyPr wrap="square" rtlCol="0" anchor="ctr">
+            <a:normAutofit/>
+          </a:bodyPr>
+          <a:lstStyle/>
+          <a:p>
+            <a:pPr marL="0" indent="0" algn="ctr">
+              <a:buNone/>
+            </a:pPr>
+            <a:r>
+              <a:rPr lang="en-US" sz="3000" b="1" kern="0" spc="200" dirty="0">
                 <a:solidFill>
                   <a:srgbClr val="FFFFFF"/>
                 </a:solidFill>
-                <a:latin typeface="Songti SC" pitchFamily="34" charset="0"/>
-                <a:ea typeface="Songti SC" pitchFamily="34" charset="-122"/>
-                <a:cs typeface="Songti SC" pitchFamily="34" charset="-120"/>
+                <a:latin typeface="Songti SC" panose="02010800040101010101" pitchFamily="34" charset="-122"/>
+                <a:ea typeface="Songti SC" panose="02010800040101010101" pitchFamily="34" charset="-122"/>
+                <a:cs typeface="Songti SC" panose="02010800040101010101" pitchFamily="34" charset="-120"/>
               </a:rPr>
               <a:t>类脑脉冲神经网络与传统人工神经网络的</a:t>
             </a:r>
@@ -1980,25 +1860,24 @@
             <a:avLst/>
           </a:prstGeom>
           <a:noFill/>
-          <a:ln/>
-        </p:spPr>
-        <p:txBody>
-          <a:bodyPr wrap="square" rtlCol="0" anchor="ctr">
-            <a:normAutofit/>
-          </a:bodyPr>
-          <a:lstStyle/>
-          <a:p>
-            <a:pPr algn="ctr" indent="0" marL="0">
-              <a:buNone/>
-            </a:pPr>
-            <a:r>
-              <a:rPr lang="en-US" sz="3000" b="1" spc="200" kern="0" dirty="0">
+        </p:spPr>
+        <p:txBody>
+          <a:bodyPr wrap="square" rtlCol="0" anchor="ctr">
+            <a:normAutofit/>
+          </a:bodyPr>
+          <a:lstStyle/>
+          <a:p>
+            <a:pPr marL="0" indent="0" algn="ctr">
+              <a:buNone/>
+            </a:pPr>
+            <a:r>
+              <a:rPr lang="en-US" sz="3000" b="1" kern="0" spc="200" dirty="0">
                 <a:solidFill>
                   <a:srgbClr val="FFFFFF"/>
                 </a:solidFill>
-                <a:latin typeface="Songti SC" pitchFamily="34" charset="0"/>
-                <a:ea typeface="Songti SC" pitchFamily="34" charset="-122"/>
-                <a:cs typeface="Songti SC" pitchFamily="34" charset="-120"/>
+                <a:latin typeface="Songti SC" panose="02010800040101010101" pitchFamily="34" charset="-122"/>
+                <a:ea typeface="Songti SC" panose="02010800040101010101" pitchFamily="34" charset="-122"/>
+                <a:cs typeface="Songti SC" panose="02010800040101010101" pitchFamily="34" charset="-120"/>
               </a:rPr>
               <a:t>电路实现对比研究</a:t>
             </a:r>
@@ -2023,7 +1902,6 @@
           <a:solidFill>
             <a:srgbClr val="00B4D8"/>
           </a:solidFill>
-          <a:ln/>
         </p:spPr>
       </p:sp>
       <p:sp>
@@ -2041,15 +1919,14 @@
             <a:avLst/>
           </a:prstGeom>
           <a:noFill/>
-          <a:ln/>
-        </p:spPr>
-        <p:txBody>
-          <a:bodyPr wrap="square" rtlCol="0" anchor="ctr">
-            <a:normAutofit/>
-          </a:bodyPr>
-          <a:lstStyle/>
-          <a:p>
-            <a:pPr algn="ctr" indent="0" marL="0">
+        </p:spPr>
+        <p:txBody>
+          <a:bodyPr wrap="square" rtlCol="0" anchor="ctr">
+            <a:normAutofit/>
+          </a:bodyPr>
+          <a:lstStyle/>
+          <a:p>
+            <a:pPr marL="0" indent="0" algn="ctr">
               <a:buNone/>
             </a:pPr>
             <a:r>
@@ -2057,9 +1934,9 @@
                 <a:solidFill>
                   <a:srgbClr val="B0D0E0"/>
                 </a:solidFill>
-                <a:latin typeface="Georgia" pitchFamily="34" charset="0"/>
-                <a:ea typeface="Georgia" pitchFamily="34" charset="-122"/>
-                <a:cs typeface="Georgia" pitchFamily="34" charset="-120"/>
+                <a:latin typeface="Georgia" panose="02040502050405090303" pitchFamily="34" charset="0"/>
+                <a:ea typeface="Georgia" panose="02040502050405090303" pitchFamily="34" charset="-122"/>
+                <a:cs typeface="Georgia" panose="02040502050405090303" pitchFamily="34" charset="-120"/>
               </a:rPr>
               <a:t>A Comparative Study on Circuit Implementation of SNN and ANN</a:t>
             </a:r>
@@ -2082,15 +1959,14 @@
             <a:avLst/>
           </a:prstGeom>
           <a:noFill/>
-          <a:ln/>
-        </p:spPr>
-        <p:txBody>
-          <a:bodyPr wrap="square" rtlCol="0" anchor="ctr">
-            <a:normAutofit/>
-          </a:bodyPr>
-          <a:lstStyle/>
-          <a:p>
-            <a:pPr algn="ctr" indent="0" marL="0">
+        </p:spPr>
+        <p:txBody>
+          <a:bodyPr wrap="square" rtlCol="0" anchor="ctr">
+            <a:normAutofit/>
+          </a:bodyPr>
+          <a:lstStyle/>
+          <a:p>
+            <a:pPr marL="0" indent="0" algn="ctr">
               <a:buNone/>
             </a:pPr>
             <a:r>
@@ -2098,11 +1974,11 @@
                 <a:solidFill>
                   <a:srgbClr val="FFFFFF"/>
                 </a:solidFill>
-                <a:latin typeface="Microsoft YaHei" pitchFamily="34" charset="0"/>
-                <a:ea typeface="Microsoft YaHei" pitchFamily="34" charset="-122"/>
-                <a:cs typeface="Microsoft YaHei" pitchFamily="34" charset="-120"/>
-              </a:rPr>
-              <a:t>林意哲  |  上海市金陵中学  |  金陵实践点</a:t>
+                <a:latin typeface="微软雅黑" pitchFamily="34" charset="0"/>
+                <a:ea typeface="微软雅黑" pitchFamily="34" charset="-122"/>
+                <a:cs typeface="微软雅黑" pitchFamily="34" charset="-120"/>
+              </a:rPr>
+              <a:t>林意哲  |  金陵实践点</a:t>
             </a:r>
             <a:endParaRPr lang="en-US" sz="1400" dirty="0"/>
           </a:p>
@@ -2123,15 +1999,14 @@
             <a:avLst/>
           </a:prstGeom>
           <a:noFill/>
-          <a:ln/>
-        </p:spPr>
-        <p:txBody>
-          <a:bodyPr wrap="square" rtlCol="0" anchor="ctr">
-            <a:normAutofit/>
-          </a:bodyPr>
-          <a:lstStyle/>
-          <a:p>
-            <a:pPr algn="ctr" indent="0" marL="0">
+        </p:spPr>
+        <p:txBody>
+          <a:bodyPr wrap="square" rtlCol="0" anchor="ctr">
+            <a:normAutofit/>
+          </a:bodyPr>
+          <a:lstStyle/>
+          <a:p>
+            <a:pPr marL="0" indent="0" algn="ctr">
               <a:buNone/>
             </a:pPr>
             <a:r>
@@ -2139,13 +2014,49 @@
                 <a:solidFill>
                   <a:srgbClr val="B0D0E0"/>
                 </a:solidFill>
-                <a:latin typeface="Microsoft YaHei" pitchFamily="34" charset="0"/>
-                <a:ea typeface="Microsoft YaHei" pitchFamily="34" charset="-122"/>
-                <a:cs typeface="Microsoft YaHei" pitchFamily="34" charset="-120"/>
+                <a:latin typeface="微软雅黑" pitchFamily="34" charset="0"/>
+                <a:ea typeface="微软雅黑" pitchFamily="34" charset="-122"/>
+                <a:cs typeface="微软雅黑" pitchFamily="34" charset="-120"/>
               </a:rPr>
               <a:t>智能芯片与信息技术实践工作站  |  2026年7月</a:t>
             </a:r>
             <a:endParaRPr lang="en-US" sz="1200" dirty="0"/>
+          </a:p>
+        </p:txBody>
+      </p:sp>
+      <p:sp>
+        <p:nvSpPr>
+          <p:cNvPr id="10" name="Watermark"/>
+          <p:cNvSpPr txBox="1"/>
+          <p:nvPr/>
+        </p:nvSpPr>
+        <p:spPr>
+          <a:xfrm>
+            <a:off x="6836000" y="4685500"/>
+            <a:ext cx="2200000" cy="350000"/>
+          </a:xfrm>
+          <a:prstGeom prst="rect">
+            <a:avLst/>
+          </a:prstGeom>
+          <a:noFill/>
+          <a:ln>
+            <a:noFill/>
+          </a:ln>
+        </p:spPr>
+        <p:txBody>
+          <a:bodyPr wrap="square" lIns="0" tIns="0" rIns="91440" bIns="45720" rtlCol="0" anchor="b"/>
+          <a:lstStyle/>
+          <a:p>
+            <a:pPr algn="r"/>
+            <a:endParaRPr lang="zh-CN" sz="1600" dirty="0">
+              <a:solidFill>
+                <a:srgbClr val="808080">
+                  <a:alpha val="19999"/>
+                </a:srgbClr>
+              </a:solidFill>
+              <a:latin typeface="Arial" panose="020B0604020202090204"/>
+              <a:ea typeface="宋体"/>
+            </a:endParaRPr>
           </a:p>
         </p:txBody>
       </p:sp>
@@ -2159,12 +2070,13 @@
 
 <file path=ppt/slides/slide10.xml><?xml version="1.0" encoding="utf-8"?>
 <p:sld xmlns:a="http://schemas.openxmlformats.org/drawingml/2006/main" xmlns:r="http://schemas.openxmlformats.org/officeDocument/2006/relationships" xmlns:p="http://schemas.openxmlformats.org/presentationml/2006/main">
-  <p:cSld name="Slide 10">
+  <p:cSld>
     <p:bg>
       <p:bgPr>
         <a:solidFill>
           <a:srgbClr val="FFFFFF"/>
         </a:solidFill>
+        <a:effectLst/>
       </p:bgPr>
     </p:bg>
     <p:spTree>
@@ -2198,7 +2110,6 @@
           <a:solidFill>
             <a:srgbClr val="065A82"/>
           </a:solidFill>
-          <a:ln/>
         </p:spPr>
       </p:sp>
       <p:sp>
@@ -2216,15 +2127,14 @@
             <a:avLst/>
           </a:prstGeom>
           <a:noFill/>
-          <a:ln/>
-        </p:spPr>
-        <p:txBody>
-          <a:bodyPr wrap="square" rtlCol="0" anchor="ctr">
-            <a:normAutofit/>
-          </a:bodyPr>
-          <a:lstStyle/>
-          <a:p>
-            <a:pPr algn="l" indent="0" marL="0">
+        </p:spPr>
+        <p:txBody>
+          <a:bodyPr wrap="square" rtlCol="0" anchor="ctr">
+            <a:normAutofit/>
+          </a:bodyPr>
+          <a:lstStyle/>
+          <a:p>
+            <a:pPr marL="0" indent="0" algn="l">
               <a:buNone/>
             </a:pPr>
             <a:r>
@@ -2232,9 +2142,9 @@
                 <a:solidFill>
                   <a:srgbClr val="FFFFFF"/>
                 </a:solidFill>
-                <a:latin typeface="Songti SC" pitchFamily="34" charset="0"/>
-                <a:ea typeface="Songti SC" pitchFamily="34" charset="-122"/>
-                <a:cs typeface="Songti SC" pitchFamily="34" charset="-120"/>
+                <a:latin typeface="Songti SC" panose="02010800040101010101" pitchFamily="34" charset="-122"/>
+                <a:ea typeface="Songti SC" panose="02010800040101010101" pitchFamily="34" charset="-122"/>
+                <a:cs typeface="Songti SC" panose="02010800040101010101" pitchFamily="34" charset="-120"/>
               </a:rPr>
               <a:t>六、预期成果和创新点</a:t>
             </a:r>
@@ -2257,15 +2167,14 @@
             <a:avLst/>
           </a:prstGeom>
           <a:noFill/>
-          <a:ln/>
-        </p:spPr>
-        <p:txBody>
-          <a:bodyPr wrap="square" rtlCol="0" anchor="ctr">
-            <a:normAutofit/>
-          </a:bodyPr>
-          <a:lstStyle/>
-          <a:p>
-            <a:pPr algn="l" indent="0" marL="0">
+        </p:spPr>
+        <p:txBody>
+          <a:bodyPr wrap="square" rtlCol="0" anchor="ctr">
+            <a:normAutofit/>
+          </a:bodyPr>
+          <a:lstStyle/>
+          <a:p>
+            <a:pPr marL="0" indent="0" algn="l">
               <a:buNone/>
             </a:pPr>
             <a:r>
@@ -2273,9 +2182,9 @@
                 <a:solidFill>
                   <a:srgbClr val="B0D0E0"/>
                 </a:solidFill>
-                <a:latin typeface="Microsoft YaHei" pitchFamily="34" charset="0"/>
-                <a:ea typeface="Microsoft YaHei" pitchFamily="34" charset="-122"/>
-                <a:cs typeface="Microsoft YaHei" pitchFamily="34" charset="-120"/>
+                <a:latin typeface="微软雅黑" pitchFamily="34" charset="0"/>
+                <a:ea typeface="微软雅黑" pitchFamily="34" charset="-122"/>
+                <a:cs typeface="微软雅黑" pitchFamily="34" charset="-120"/>
               </a:rPr>
               <a:t>Expected Outcomes &amp; Innovations</a:t>
             </a:r>
@@ -2298,15 +2207,14 @@
             <a:avLst/>
           </a:prstGeom>
           <a:noFill/>
-          <a:ln/>
-        </p:spPr>
-        <p:txBody>
-          <a:bodyPr wrap="square" rtlCol="0" anchor="ctr">
-            <a:normAutofit/>
-          </a:bodyPr>
-          <a:lstStyle/>
-          <a:p>
-            <a:pPr indent="0" marL="0">
+        </p:spPr>
+        <p:txBody>
+          <a:bodyPr wrap="square" rtlCol="0" anchor="ctr">
+            <a:normAutofit/>
+          </a:bodyPr>
+          <a:lstStyle/>
+          <a:p>
+            <a:pPr marL="0" indent="0">
               <a:buNone/>
             </a:pPr>
             <a:r>
@@ -2314,9 +2222,9 @@
                 <a:solidFill>
                   <a:srgbClr val="1C7293"/>
                 </a:solidFill>
-                <a:latin typeface="Microsoft YaHei" pitchFamily="34" charset="0"/>
-                <a:ea typeface="Microsoft YaHei" pitchFamily="34" charset="-122"/>
-                <a:cs typeface="Microsoft YaHei" pitchFamily="34" charset="-120"/>
+                <a:latin typeface="微软雅黑" pitchFamily="34" charset="0"/>
+                <a:ea typeface="微软雅黑" pitchFamily="34" charset="-122"/>
+                <a:cs typeface="微软雅黑" pitchFamily="34" charset="-120"/>
               </a:rPr>
               <a:t>预期成果</a:t>
             </a:r>
@@ -2364,15 +2272,14 @@
             <a:avLst/>
           </a:prstGeom>
           <a:noFill/>
-          <a:ln/>
-        </p:spPr>
-        <p:txBody>
-          <a:bodyPr wrap="square" rtlCol="0" anchor="ctr">
-            <a:normAutofit/>
-          </a:bodyPr>
-          <a:lstStyle/>
-          <a:p>
-            <a:pPr indent="0" marL="0">
+        </p:spPr>
+        <p:txBody>
+          <a:bodyPr wrap="square" rtlCol="0" anchor="ctr">
+            <a:normAutofit/>
+          </a:bodyPr>
+          <a:lstStyle/>
+          <a:p>
+            <a:pPr marL="0" indent="0">
               <a:buNone/>
             </a:pPr>
             <a:r>
@@ -2380,9 +2287,9 @@
                 <a:solidFill>
                   <a:srgbClr val="065A82"/>
                 </a:solidFill>
-                <a:latin typeface="Microsoft YaHei" pitchFamily="34" charset="0"/>
-                <a:ea typeface="Microsoft YaHei" pitchFamily="34" charset="-122"/>
-                <a:cs typeface="Microsoft YaHei" pitchFamily="34" charset="-120"/>
+                <a:latin typeface="微软雅黑" pitchFamily="34" charset="0"/>
+                <a:ea typeface="微软雅黑" pitchFamily="34" charset="-122"/>
+                <a:cs typeface="微软雅黑" pitchFamily="34" charset="-120"/>
               </a:rPr>
               <a:t>软件</a:t>
             </a:r>
@@ -2405,15 +2312,14 @@
             <a:avLst/>
           </a:prstGeom>
           <a:noFill/>
-          <a:ln/>
-        </p:spPr>
-        <p:txBody>
-          <a:bodyPr wrap="square" rtlCol="0" anchor="ctr">
-            <a:normAutofit/>
-          </a:bodyPr>
-          <a:lstStyle/>
-          <a:p>
-            <a:pPr indent="0" marL="0">
+        </p:spPr>
+        <p:txBody>
+          <a:bodyPr wrap="square" rtlCol="0" anchor="ctr">
+            <a:normAutofit/>
+          </a:bodyPr>
+          <a:lstStyle/>
+          <a:p>
+            <a:pPr marL="0" indent="0">
               <a:lnSpc>
                 <a:spcPct val="110000"/>
               </a:lnSpc>
@@ -2424,16 +2330,16 @@
                 <a:solidFill>
                   <a:srgbClr val="1A1A2E"/>
                 </a:solidFill>
-                <a:latin typeface="Microsoft YaHei" pitchFamily="34" charset="0"/>
-                <a:ea typeface="Microsoft YaHei" pitchFamily="34" charset="-122"/>
-                <a:cs typeface="Microsoft YaHei" pitchFamily="34" charset="-120"/>
+                <a:latin typeface="微软雅黑" pitchFamily="34" charset="0"/>
+                <a:ea typeface="微软雅黑" pitchFamily="34" charset="-122"/>
+                <a:cs typeface="微软雅黑" pitchFamily="34" charset="-120"/>
               </a:rPr>
               <a:t>ANN训练代码+SNN转换代码</a:t>
             </a:r>
             <a:endParaRPr lang="en-US" sz="950" dirty="0"/>
           </a:p>
           <a:p>
-            <a:pPr indent="0" marL="0">
+            <a:pPr marL="0" indent="0">
               <a:lnSpc>
                 <a:spcPct val="110000"/>
               </a:lnSpc>
@@ -2444,9 +2350,9 @@
                 <a:solidFill>
                   <a:srgbClr val="1A1A2E"/>
                 </a:solidFill>
-                <a:latin typeface="Microsoft YaHei" pitchFamily="34" charset="0"/>
-                <a:ea typeface="Microsoft YaHei" pitchFamily="34" charset="-122"/>
-                <a:cs typeface="Microsoft YaHei" pitchFamily="34" charset="-120"/>
+                <a:latin typeface="微软雅黑" pitchFamily="34" charset="0"/>
+                <a:ea typeface="微软雅黑" pitchFamily="34" charset="-122"/>
+                <a:cs typeface="微软雅黑" pitchFamily="34" charset="-120"/>
               </a:rPr>
               <a:t>MNIST准确率数据+脉冲稀疏性</a:t>
             </a:r>
@@ -2494,15 +2400,14 @@
             <a:avLst/>
           </a:prstGeom>
           <a:noFill/>
-          <a:ln/>
-        </p:spPr>
-        <p:txBody>
-          <a:bodyPr wrap="square" rtlCol="0" anchor="ctr">
-            <a:normAutofit/>
-          </a:bodyPr>
-          <a:lstStyle/>
-          <a:p>
-            <a:pPr indent="0" marL="0">
+        </p:spPr>
+        <p:txBody>
+          <a:bodyPr wrap="square" rtlCol="0" anchor="ctr">
+            <a:normAutofit/>
+          </a:bodyPr>
+          <a:lstStyle/>
+          <a:p>
+            <a:pPr marL="0" indent="0">
               <a:buNone/>
             </a:pPr>
             <a:r>
@@ -2510,9 +2415,9 @@
                 <a:solidFill>
                   <a:srgbClr val="065A82"/>
                 </a:solidFill>
-                <a:latin typeface="Microsoft YaHei" pitchFamily="34" charset="0"/>
-                <a:ea typeface="Microsoft YaHei" pitchFamily="34" charset="-122"/>
-                <a:cs typeface="Microsoft YaHei" pitchFamily="34" charset="-120"/>
+                <a:latin typeface="微软雅黑" pitchFamily="34" charset="0"/>
+                <a:ea typeface="微软雅黑" pitchFamily="34" charset="-122"/>
+                <a:cs typeface="微软雅黑" pitchFamily="34" charset="-120"/>
               </a:rPr>
               <a:t>硬件</a:t>
             </a:r>
@@ -2535,15 +2440,14 @@
             <a:avLst/>
           </a:prstGeom>
           <a:noFill/>
-          <a:ln/>
-        </p:spPr>
-        <p:txBody>
-          <a:bodyPr wrap="square" rtlCol="0" anchor="ctr">
-            <a:normAutofit/>
-          </a:bodyPr>
-          <a:lstStyle/>
-          <a:p>
-            <a:pPr indent="0" marL="0">
+        </p:spPr>
+        <p:txBody>
+          <a:bodyPr wrap="square" rtlCol="0" anchor="ctr">
+            <a:normAutofit/>
+          </a:bodyPr>
+          <a:lstStyle/>
+          <a:p>
+            <a:pPr marL="0" indent="0">
               <a:lnSpc>
                 <a:spcPct val="110000"/>
               </a:lnSpc>
@@ -2554,16 +2458,16 @@
                 <a:solidFill>
                   <a:srgbClr val="1A1A2E"/>
                 </a:solidFill>
-                <a:latin typeface="Microsoft YaHei" pitchFamily="34" charset="0"/>
-                <a:ea typeface="Microsoft YaHei" pitchFamily="34" charset="-122"/>
-                <a:cs typeface="Microsoft YaHei" pitchFamily="34" charset="-120"/>
+                <a:latin typeface="微软雅黑" pitchFamily="34" charset="0"/>
+                <a:ea typeface="微软雅黑" pitchFamily="34" charset="-122"/>
+                <a:cs typeface="微软雅黑" pitchFamily="34" charset="-120"/>
               </a:rPr>
               <a:t>ANN-MAC电路+SNN-IF电路</a:t>
             </a:r>
             <a:endParaRPr lang="en-US" sz="950" dirty="0"/>
           </a:p>
           <a:p>
-            <a:pPr indent="0" marL="0">
+            <a:pPr marL="0" indent="0">
               <a:lnSpc>
                 <a:spcPct val="110000"/>
               </a:lnSpc>
@@ -2574,9 +2478,9 @@
                 <a:solidFill>
                   <a:srgbClr val="1A1A2E"/>
                 </a:solidFill>
-                <a:latin typeface="Microsoft YaHei" pitchFamily="34" charset="0"/>
-                <a:ea typeface="Microsoft YaHei" pitchFamily="34" charset="-122"/>
-                <a:cs typeface="Microsoft YaHei" pitchFamily="34" charset="-120"/>
+                <a:latin typeface="微软雅黑" pitchFamily="34" charset="0"/>
+                <a:ea typeface="微软雅黑" pitchFamily="34" charset="-122"/>
+                <a:cs typeface="微软雅黑" pitchFamily="34" charset="-120"/>
               </a:rPr>
               <a:t>Cadence原理图+仿真波形</a:t>
             </a:r>
@@ -2624,15 +2528,14 @@
             <a:avLst/>
           </a:prstGeom>
           <a:noFill/>
-          <a:ln/>
-        </p:spPr>
-        <p:txBody>
-          <a:bodyPr wrap="square" rtlCol="0" anchor="ctr">
-            <a:normAutofit/>
-          </a:bodyPr>
-          <a:lstStyle/>
-          <a:p>
-            <a:pPr indent="0" marL="0">
+        </p:spPr>
+        <p:txBody>
+          <a:bodyPr wrap="square" rtlCol="0" anchor="ctr">
+            <a:normAutofit/>
+          </a:bodyPr>
+          <a:lstStyle/>
+          <a:p>
+            <a:pPr marL="0" indent="0">
               <a:buNone/>
             </a:pPr>
             <a:r>
@@ -2640,9 +2543,9 @@
                 <a:solidFill>
                   <a:srgbClr val="065A82"/>
                 </a:solidFill>
-                <a:latin typeface="Microsoft YaHei" pitchFamily="34" charset="0"/>
-                <a:ea typeface="Microsoft YaHei" pitchFamily="34" charset="-122"/>
-                <a:cs typeface="Microsoft YaHei" pitchFamily="34" charset="-120"/>
+                <a:latin typeface="微软雅黑" pitchFamily="34" charset="0"/>
+                <a:ea typeface="微软雅黑" pitchFamily="34" charset="-122"/>
+                <a:cs typeface="微软雅黑" pitchFamily="34" charset="-120"/>
               </a:rPr>
               <a:t>分析</a:t>
             </a:r>
@@ -2665,15 +2568,14 @@
             <a:avLst/>
           </a:prstGeom>
           <a:noFill/>
-          <a:ln/>
-        </p:spPr>
-        <p:txBody>
-          <a:bodyPr wrap="square" rtlCol="0" anchor="ctr">
-            <a:normAutofit/>
-          </a:bodyPr>
-          <a:lstStyle/>
-          <a:p>
-            <a:pPr indent="0" marL="0">
+        </p:spPr>
+        <p:txBody>
+          <a:bodyPr wrap="square" rtlCol="0" anchor="ctr">
+            <a:normAutofit/>
+          </a:bodyPr>
+          <a:lstStyle/>
+          <a:p>
+            <a:pPr marL="0" indent="0">
               <a:lnSpc>
                 <a:spcPct val="110000"/>
               </a:lnSpc>
@@ -2684,16 +2586,16 @@
                 <a:solidFill>
                   <a:srgbClr val="1A1A2E"/>
                 </a:solidFill>
-                <a:latin typeface="Microsoft YaHei" pitchFamily="34" charset="0"/>
-                <a:ea typeface="Microsoft YaHei" pitchFamily="34" charset="-122"/>
-                <a:cs typeface="Microsoft YaHei" pitchFamily="34" charset="-120"/>
+                <a:latin typeface="微软雅黑" pitchFamily="34" charset="0"/>
+                <a:ea typeface="微软雅黑" pitchFamily="34" charset="-122"/>
+                <a:cs typeface="微软雅黑" pitchFamily="34" charset="-120"/>
               </a:rPr>
               <a:t>硬件开销对比表</a:t>
             </a:r>
             <a:endParaRPr lang="en-US" sz="950" dirty="0"/>
           </a:p>
           <a:p>
-            <a:pPr indent="0" marL="0">
+            <a:pPr marL="0" indent="0">
               <a:lnSpc>
                 <a:spcPct val="110000"/>
               </a:lnSpc>
@@ -2704,9 +2606,9 @@
                 <a:solidFill>
                   <a:srgbClr val="1A1A2E"/>
                 </a:solidFill>
-                <a:latin typeface="Microsoft YaHei" pitchFamily="34" charset="0"/>
-                <a:ea typeface="Microsoft YaHei" pitchFamily="34" charset="-122"/>
-                <a:cs typeface="Microsoft YaHei" pitchFamily="34" charset="-120"/>
+                <a:latin typeface="微软雅黑" pitchFamily="34" charset="0"/>
+                <a:ea typeface="微软雅黑" pitchFamily="34" charset="-122"/>
+                <a:cs typeface="微软雅黑" pitchFamily="34" charset="-120"/>
               </a:rPr>
               <a:t>准确率-功耗trade-off曲线</a:t>
             </a:r>
@@ -2754,15 +2656,14 @@
             <a:avLst/>
           </a:prstGeom>
           <a:noFill/>
-          <a:ln/>
-        </p:spPr>
-        <p:txBody>
-          <a:bodyPr wrap="square" rtlCol="0" anchor="ctr">
-            <a:normAutofit/>
-          </a:bodyPr>
-          <a:lstStyle/>
-          <a:p>
-            <a:pPr indent="0" marL="0">
+        </p:spPr>
+        <p:txBody>
+          <a:bodyPr wrap="square" rtlCol="0" anchor="ctr">
+            <a:normAutofit/>
+          </a:bodyPr>
+          <a:lstStyle/>
+          <a:p>
+            <a:pPr marL="0" indent="0">
               <a:buNone/>
             </a:pPr>
             <a:r>
@@ -2770,9 +2671,9 @@
                 <a:solidFill>
                   <a:srgbClr val="065A82"/>
                 </a:solidFill>
-                <a:latin typeface="Microsoft YaHei" pitchFamily="34" charset="0"/>
-                <a:ea typeface="Microsoft YaHei" pitchFamily="34" charset="-122"/>
-                <a:cs typeface="Microsoft YaHei" pitchFamily="34" charset="-120"/>
+                <a:latin typeface="微软雅黑" pitchFamily="34" charset="0"/>
+                <a:ea typeface="微软雅黑" pitchFamily="34" charset="-122"/>
+                <a:cs typeface="微软雅黑" pitchFamily="34" charset="-120"/>
               </a:rPr>
               <a:t>文档</a:t>
             </a:r>
@@ -2795,15 +2696,14 @@
             <a:avLst/>
           </a:prstGeom>
           <a:noFill/>
-          <a:ln/>
-        </p:spPr>
-        <p:txBody>
-          <a:bodyPr wrap="square" rtlCol="0" anchor="ctr">
-            <a:normAutofit/>
-          </a:bodyPr>
-          <a:lstStyle/>
-          <a:p>
-            <a:pPr indent="0" marL="0">
+        </p:spPr>
+        <p:txBody>
+          <a:bodyPr wrap="square" rtlCol="0" anchor="ctr">
+            <a:normAutofit/>
+          </a:bodyPr>
+          <a:lstStyle/>
+          <a:p>
+            <a:pPr marL="0" indent="0">
               <a:lnSpc>
                 <a:spcPct val="110000"/>
               </a:lnSpc>
@@ -2814,16 +2714,16 @@
                 <a:solidFill>
                   <a:srgbClr val="1A1A2E"/>
                 </a:solidFill>
-                <a:latin typeface="Microsoft YaHei" pitchFamily="34" charset="0"/>
-                <a:ea typeface="Microsoft YaHei" pitchFamily="34" charset="-122"/>
-                <a:cs typeface="Microsoft YaHei" pitchFamily="34" charset="-120"/>
+                <a:latin typeface="微软雅黑" pitchFamily="34" charset="0"/>
+                <a:ea typeface="微软雅黑" pitchFamily="34" charset="-122"/>
+                <a:cs typeface="微软雅黑" pitchFamily="34" charset="-120"/>
               </a:rPr>
               <a:t>开题报告+结题报告</a:t>
             </a:r>
             <a:endParaRPr lang="en-US" sz="950" dirty="0"/>
           </a:p>
           <a:p>
-            <a:pPr indent="0" marL="0">
+            <a:pPr marL="0" indent="0">
               <a:lnSpc>
                 <a:spcPct val="110000"/>
               </a:lnSpc>
@@ -2834,9 +2734,9 @@
                 <a:solidFill>
                   <a:srgbClr val="1A1A2E"/>
                 </a:solidFill>
-                <a:latin typeface="Microsoft YaHei" pitchFamily="34" charset="0"/>
-                <a:ea typeface="Microsoft YaHei" pitchFamily="34" charset="-122"/>
-                <a:cs typeface="Microsoft YaHei" pitchFamily="34" charset="-120"/>
+                <a:latin typeface="微软雅黑" pitchFamily="34" charset="0"/>
+                <a:ea typeface="微软雅黑" pitchFamily="34" charset="-122"/>
+                <a:cs typeface="微软雅黑" pitchFamily="34" charset="-120"/>
               </a:rPr>
               <a:t>答辩PPT</a:t>
             </a:r>
@@ -2859,15 +2759,14 @@
             <a:avLst/>
           </a:prstGeom>
           <a:noFill/>
-          <a:ln/>
-        </p:spPr>
-        <p:txBody>
-          <a:bodyPr wrap="square" rtlCol="0" anchor="ctr">
-            <a:normAutofit/>
-          </a:bodyPr>
-          <a:lstStyle/>
-          <a:p>
-            <a:pPr indent="0" marL="0">
+        </p:spPr>
+        <p:txBody>
+          <a:bodyPr wrap="square" rtlCol="0" anchor="ctr">
+            <a:normAutofit/>
+          </a:bodyPr>
+          <a:lstStyle/>
+          <a:p>
+            <a:pPr marL="0" indent="0">
               <a:buNone/>
             </a:pPr>
             <a:r>
@@ -2875,54 +2774,13 @@
                 <a:solidFill>
                   <a:srgbClr val="1C7293"/>
                 </a:solidFill>
-                <a:latin typeface="Microsoft YaHei" pitchFamily="34" charset="0"/>
-                <a:ea typeface="Microsoft YaHei" pitchFamily="34" charset="-122"/>
-                <a:cs typeface="Microsoft YaHei" pitchFamily="34" charset="-120"/>
+                <a:latin typeface="微软雅黑" pitchFamily="34" charset="0"/>
+                <a:ea typeface="微软雅黑" pitchFamily="34" charset="-122"/>
+                <a:cs typeface="微软雅黑" pitchFamily="34" charset="-120"/>
               </a:rPr>
               <a:t>实践创新点</a:t>
             </a:r>
             <a:endParaRPr lang="en-US" sz="1300" dirty="0"/>
-          </a:p>
-        </p:txBody>
-      </p:sp>
-      <p:sp>
-        <p:nvSpPr>
-          <p:cNvPr id="19" name="Text 17"/>
-          <p:cNvSpPr/>
-          <p:nvPr/>
-        </p:nvSpPr>
-        <p:spPr>
-          <a:xfrm>
-            <a:off x="4846320" y="1188720"/>
-            <a:ext cx="3840480" cy="182880"/>
-          </a:xfrm>
-          <a:prstGeom prst="rect">
-            <a:avLst/>
-          </a:prstGeom>
-          <a:noFill/>
-          <a:ln/>
-        </p:spPr>
-        <p:txBody>
-          <a:bodyPr wrap="square" rtlCol="0" anchor="ctr">
-            <a:normAutofit/>
-          </a:bodyPr>
-          <a:lstStyle/>
-          <a:p>
-            <a:pPr indent="0" marL="0">
-              <a:buNone/>
-            </a:pPr>
-            <a:r>
-              <a:rPr lang="en-US" sz="800" i="1" dirty="0">
-                <a:solidFill>
-                  <a:srgbClr val="6C757D"/>
-                </a:solidFill>
-                <a:latin typeface="Microsoft YaHei" pitchFamily="34" charset="0"/>
-                <a:ea typeface="Microsoft YaHei" pitchFamily="34" charset="-122"/>
-                <a:cs typeface="Microsoft YaHei" pitchFamily="34" charset="-120"/>
-              </a:rPr>
-              <a:t>（教学范围内的拓展价值，非学术突破）</a:t>
-            </a:r>
-            <a:endParaRPr lang="en-US" sz="800" dirty="0"/>
           </a:p>
         </p:txBody>
       </p:sp>
@@ -2968,7 +2826,6 @@
           <a:solidFill>
             <a:srgbClr val="00B4D8"/>
           </a:solidFill>
-          <a:ln/>
         </p:spPr>
       </p:sp>
       <p:sp>
@@ -2986,15 +2843,14 @@
             <a:avLst/>
           </a:prstGeom>
           <a:noFill/>
-          <a:ln/>
-        </p:spPr>
-        <p:txBody>
-          <a:bodyPr wrap="square" rtlCol="0" anchor="ctr">
-            <a:normAutofit/>
-          </a:bodyPr>
-          <a:lstStyle/>
-          <a:p>
-            <a:pPr algn="ctr" indent="0" marL="0">
+        </p:spPr>
+        <p:txBody>
+          <a:bodyPr wrap="square" rtlCol="0" anchor="ctr">
+            <a:normAutofit/>
+          </a:bodyPr>
+          <a:lstStyle/>
+          <a:p>
+            <a:pPr marL="0" indent="0" algn="ctr">
               <a:buNone/>
             </a:pPr>
             <a:r>
@@ -3024,15 +2880,14 @@
             <a:avLst/>
           </a:prstGeom>
           <a:noFill/>
-          <a:ln/>
-        </p:spPr>
-        <p:txBody>
-          <a:bodyPr wrap="square" rtlCol="0" anchor="ctr">
-            <a:normAutofit/>
-          </a:bodyPr>
-          <a:lstStyle/>
-          <a:p>
-            <a:pPr indent="0" marL="0">
+        </p:spPr>
+        <p:txBody>
+          <a:bodyPr wrap="square" rtlCol="0" anchor="ctr">
+            <a:normAutofit/>
+          </a:bodyPr>
+          <a:lstStyle/>
+          <a:p>
+            <a:pPr marL="0" indent="0">
               <a:buNone/>
             </a:pPr>
             <a:r>
@@ -3040,9 +2895,9 @@
                 <a:solidFill>
                   <a:srgbClr val="1A1A2E"/>
                 </a:solidFill>
-                <a:latin typeface="Microsoft YaHei" pitchFamily="34" charset="0"/>
-                <a:ea typeface="Microsoft YaHei" pitchFamily="34" charset="-122"/>
-                <a:cs typeface="Microsoft YaHei" pitchFamily="34" charset="-120"/>
+                <a:latin typeface="微软雅黑" pitchFamily="34" charset="0"/>
+                <a:ea typeface="微软雅黑" pitchFamily="34" charset="-122"/>
+                <a:cs typeface="微软雅黑" pitchFamily="34" charset="-120"/>
               </a:rPr>
               <a:t>首次在本课题组实现IF脉冲神经元数字电路</a:t>
             </a:r>
@@ -3092,7 +2947,6 @@
           <a:solidFill>
             <a:srgbClr val="00B4D8"/>
           </a:solidFill>
-          <a:ln/>
         </p:spPr>
       </p:sp>
       <p:sp>
@@ -3110,15 +2964,14 @@
             <a:avLst/>
           </a:prstGeom>
           <a:noFill/>
-          <a:ln/>
-        </p:spPr>
-        <p:txBody>
-          <a:bodyPr wrap="square" rtlCol="0" anchor="ctr">
-            <a:normAutofit/>
-          </a:bodyPr>
-          <a:lstStyle/>
-          <a:p>
-            <a:pPr algn="ctr" indent="0" marL="0">
+        </p:spPr>
+        <p:txBody>
+          <a:bodyPr wrap="square" rtlCol="0" anchor="ctr">
+            <a:normAutofit/>
+          </a:bodyPr>
+          <a:lstStyle/>
+          <a:p>
+            <a:pPr marL="0" indent="0" algn="ctr">
               <a:buNone/>
             </a:pPr>
             <a:r>
@@ -3148,15 +3001,14 @@
             <a:avLst/>
           </a:prstGeom>
           <a:noFill/>
-          <a:ln/>
-        </p:spPr>
-        <p:txBody>
-          <a:bodyPr wrap="square" rtlCol="0" anchor="ctr">
-            <a:normAutofit/>
-          </a:bodyPr>
-          <a:lstStyle/>
-          <a:p>
-            <a:pPr indent="0" marL="0">
+        </p:spPr>
+        <p:txBody>
+          <a:bodyPr wrap="square" rtlCol="0" anchor="ctr">
+            <a:normAutofit/>
+          </a:bodyPr>
+          <a:lstStyle/>
+          <a:p>
+            <a:pPr marL="0" indent="0">
               <a:buNone/>
             </a:pPr>
             <a:r>
@@ -3164,9 +3016,9 @@
                 <a:solidFill>
                   <a:srgbClr val="1A1A2E"/>
                 </a:solidFill>
-                <a:latin typeface="Microsoft YaHei" pitchFamily="34" charset="0"/>
-                <a:ea typeface="Microsoft YaHei" pitchFamily="34" charset="-122"/>
-                <a:cs typeface="Microsoft YaHei" pitchFamily="34" charset="-120"/>
+                <a:latin typeface="微软雅黑" pitchFamily="34" charset="0"/>
+                <a:ea typeface="微软雅黑" pitchFamily="34" charset="-122"/>
+                <a:cs typeface="微软雅黑" pitchFamily="34" charset="-120"/>
               </a:rPr>
               <a:t>SMIC 0.18μm工艺下晶体管级电路对比案例</a:t>
             </a:r>
@@ -3216,7 +3068,6 @@
           <a:solidFill>
             <a:srgbClr val="00B4D8"/>
           </a:solidFill>
-          <a:ln/>
         </p:spPr>
       </p:sp>
       <p:sp>
@@ -3234,15 +3085,14 @@
             <a:avLst/>
           </a:prstGeom>
           <a:noFill/>
-          <a:ln/>
-        </p:spPr>
-        <p:txBody>
-          <a:bodyPr wrap="square" rtlCol="0" anchor="ctr">
-            <a:normAutofit/>
-          </a:bodyPr>
-          <a:lstStyle/>
-          <a:p>
-            <a:pPr algn="ctr" indent="0" marL="0">
+        </p:spPr>
+        <p:txBody>
+          <a:bodyPr wrap="square" rtlCol="0" anchor="ctr">
+            <a:normAutofit/>
+          </a:bodyPr>
+          <a:lstStyle/>
+          <a:p>
+            <a:pPr marL="0" indent="0" algn="ctr">
               <a:buNone/>
             </a:pPr>
             <a:r>
@@ -3272,15 +3122,14 @@
             <a:avLst/>
           </a:prstGeom>
           <a:noFill/>
-          <a:ln/>
-        </p:spPr>
-        <p:txBody>
-          <a:bodyPr wrap="square" rtlCol="0" anchor="ctr">
-            <a:normAutofit/>
-          </a:bodyPr>
-          <a:lstStyle/>
-          <a:p>
-            <a:pPr indent="0" marL="0">
+        </p:spPr>
+        <p:txBody>
+          <a:bodyPr wrap="square" rtlCol="0" anchor="ctr">
+            <a:normAutofit/>
+          </a:bodyPr>
+          <a:lstStyle/>
+          <a:p>
+            <a:pPr marL="0" indent="0">
               <a:buNone/>
             </a:pPr>
             <a:r>
@@ -3288,9 +3137,9 @@
                 <a:solidFill>
                   <a:srgbClr val="1A1A2E"/>
                 </a:solidFill>
-                <a:latin typeface="Microsoft YaHei" pitchFamily="34" charset="0"/>
-                <a:ea typeface="Microsoft YaHei" pitchFamily="34" charset="-122"/>
-                <a:cs typeface="Microsoft YaHei" pitchFamily="34" charset="-120"/>
+                <a:latin typeface="微软雅黑" pitchFamily="34" charset="0"/>
+                <a:ea typeface="微软雅黑" pitchFamily="34" charset="-122"/>
+                <a:cs typeface="微软雅黑" pitchFamily="34" charset="-120"/>
               </a:rPr>
               <a:t>自建电路实测功耗拟合准确率-功耗关系（实证验证）</a:t>
             </a:r>
@@ -3340,7 +3189,6 @@
           <a:solidFill>
             <a:srgbClr val="00B4D8"/>
           </a:solidFill>
-          <a:ln/>
         </p:spPr>
       </p:sp>
       <p:sp>
@@ -3358,15 +3206,14 @@
             <a:avLst/>
           </a:prstGeom>
           <a:noFill/>
-          <a:ln/>
-        </p:spPr>
-        <p:txBody>
-          <a:bodyPr wrap="square" rtlCol="0" anchor="ctr">
-            <a:normAutofit/>
-          </a:bodyPr>
-          <a:lstStyle/>
-          <a:p>
-            <a:pPr algn="ctr" indent="0" marL="0">
+        </p:spPr>
+        <p:txBody>
+          <a:bodyPr wrap="square" rtlCol="0" anchor="ctr">
+            <a:normAutofit/>
+          </a:bodyPr>
+          <a:lstStyle/>
+          <a:p>
+            <a:pPr marL="0" indent="0" algn="ctr">
               <a:buNone/>
             </a:pPr>
             <a:r>
@@ -3396,15 +3243,14 @@
             <a:avLst/>
           </a:prstGeom>
           <a:noFill/>
-          <a:ln/>
-        </p:spPr>
-        <p:txBody>
-          <a:bodyPr wrap="square" rtlCol="0" anchor="ctr">
-            <a:normAutofit/>
-          </a:bodyPr>
-          <a:lstStyle/>
-          <a:p>
-            <a:pPr indent="0" marL="0">
+        </p:spPr>
+        <p:txBody>
+          <a:bodyPr wrap="square" rtlCol="0" anchor="ctr">
+            <a:normAutofit/>
+          </a:bodyPr>
+          <a:lstStyle/>
+          <a:p>
+            <a:pPr marL="0" indent="0">
               <a:buNone/>
             </a:pPr>
             <a:r>
@@ -3412,9 +3258,9 @@
                 <a:solidFill>
                   <a:srgbClr val="1A1A2E"/>
                 </a:solidFill>
-                <a:latin typeface="Microsoft YaHei" pitchFamily="34" charset="0"/>
-                <a:ea typeface="Microsoft YaHei" pitchFamily="34" charset="-122"/>
-                <a:cs typeface="Microsoft YaHei" pitchFamily="34" charset="-120"/>
+                <a:latin typeface="微软雅黑" pitchFamily="34" charset="0"/>
+                <a:ea typeface="微软雅黑" pitchFamily="34" charset="-122"/>
+                <a:cs typeface="微软雅黑" pitchFamily="34" charset="-120"/>
               </a:rPr>
               <a:t>IF电路两阶段递进实现，降低技术风险</a:t>
             </a:r>
@@ -3432,12 +3278,13 @@
 
 <file path=ppt/slides/slide11.xml><?xml version="1.0" encoding="utf-8"?>
 <p:sld xmlns:a="http://schemas.openxmlformats.org/drawingml/2006/main" xmlns:r="http://schemas.openxmlformats.org/officeDocument/2006/relationships" xmlns:p="http://schemas.openxmlformats.org/presentationml/2006/main">
-  <p:cSld name="Slide 11">
+  <p:cSld>
     <p:bg>
       <p:bgPr>
         <a:solidFill>
           <a:srgbClr val="FFFFFF"/>
         </a:solidFill>
+        <a:effectLst/>
       </p:bgPr>
     </p:bg>
     <p:spTree>
@@ -3471,7 +3318,6 @@
           <a:solidFill>
             <a:srgbClr val="065A82"/>
           </a:solidFill>
-          <a:ln/>
         </p:spPr>
       </p:sp>
       <p:sp>
@@ -3489,15 +3335,14 @@
             <a:avLst/>
           </a:prstGeom>
           <a:noFill/>
-          <a:ln/>
-        </p:spPr>
-        <p:txBody>
-          <a:bodyPr wrap="square" rtlCol="0" anchor="ctr">
-            <a:normAutofit/>
-          </a:bodyPr>
-          <a:lstStyle/>
-          <a:p>
-            <a:pPr algn="l" indent="0" marL="0">
+        </p:spPr>
+        <p:txBody>
+          <a:bodyPr wrap="square" rtlCol="0" anchor="ctr">
+            <a:normAutofit/>
+          </a:bodyPr>
+          <a:lstStyle/>
+          <a:p>
+            <a:pPr marL="0" indent="0" algn="l">
               <a:buNone/>
             </a:pPr>
             <a:r>
@@ -3505,9 +3350,9 @@
                 <a:solidFill>
                   <a:srgbClr val="FFFFFF"/>
                 </a:solidFill>
-                <a:latin typeface="Songti SC" pitchFamily="34" charset="0"/>
-                <a:ea typeface="Songti SC" pitchFamily="34" charset="-122"/>
-                <a:cs typeface="Songti SC" pitchFamily="34" charset="-120"/>
+                <a:latin typeface="Songti SC" panose="02010800040101010101" pitchFamily="34" charset="-122"/>
+                <a:ea typeface="Songti SC" panose="02010800040101010101" pitchFamily="34" charset="-122"/>
+                <a:cs typeface="Songti SC" panose="02010800040101010101" pitchFamily="34" charset="-120"/>
               </a:rPr>
               <a:t>七、研究进度安排</a:t>
             </a:r>
@@ -3530,15 +3375,14 @@
             <a:avLst/>
           </a:prstGeom>
           <a:noFill/>
-          <a:ln/>
-        </p:spPr>
-        <p:txBody>
-          <a:bodyPr wrap="square" rtlCol="0" anchor="ctr">
-            <a:normAutofit/>
-          </a:bodyPr>
-          <a:lstStyle/>
-          <a:p>
-            <a:pPr algn="l" indent="0" marL="0">
+        </p:spPr>
+        <p:txBody>
+          <a:bodyPr wrap="square" rtlCol="0" anchor="ctr">
+            <a:normAutofit/>
+          </a:bodyPr>
+          <a:lstStyle/>
+          <a:p>
+            <a:pPr marL="0" indent="0" algn="l">
               <a:buNone/>
             </a:pPr>
             <a:r>
@@ -3546,9 +3390,9 @@
                 <a:solidFill>
                   <a:srgbClr val="B0D0E0"/>
                 </a:solidFill>
-                <a:latin typeface="Microsoft YaHei" pitchFamily="34" charset="0"/>
-                <a:ea typeface="Microsoft YaHei" pitchFamily="34" charset="-122"/>
-                <a:cs typeface="Microsoft YaHei" pitchFamily="34" charset="-120"/>
+                <a:latin typeface="微软雅黑" pitchFamily="34" charset="0"/>
+                <a:ea typeface="微软雅黑" pitchFamily="34" charset="-122"/>
+                <a:cs typeface="微软雅黑" pitchFamily="34" charset="-120"/>
               </a:rPr>
               <a:t>Research Schedule</a:t>
             </a:r>
@@ -3573,7 +3417,6 @@
           <a:solidFill>
             <a:srgbClr val="B0C4D8"/>
           </a:solidFill>
-          <a:ln/>
         </p:spPr>
       </p:sp>
       <p:sp>
@@ -3593,7 +3436,6 @@
           <a:solidFill>
             <a:srgbClr val="00B4D8"/>
           </a:solidFill>
-          <a:ln/>
         </p:spPr>
       </p:sp>
       <p:sp>
@@ -3611,15 +3453,14 @@
             <a:avLst/>
           </a:prstGeom>
           <a:noFill/>
-          <a:ln/>
-        </p:spPr>
-        <p:txBody>
-          <a:bodyPr wrap="square" rtlCol="0" anchor="ctr">
-            <a:normAutofit/>
-          </a:bodyPr>
-          <a:lstStyle/>
-          <a:p>
-            <a:pPr algn="r" indent="0" marL="0">
+        </p:spPr>
+        <p:txBody>
+          <a:bodyPr wrap="square" rtlCol="0" anchor="ctr">
+            <a:normAutofit/>
+          </a:bodyPr>
+          <a:lstStyle/>
+          <a:p>
+            <a:pPr marL="0" indent="0" algn="r">
               <a:lnSpc>
                 <a:spcPct val="100000"/>
               </a:lnSpc>
@@ -3630,31 +3471,11 @@
                 <a:solidFill>
                   <a:srgbClr val="065A82"/>
                 </a:solidFill>
-                <a:latin typeface="Microsoft YaHei" pitchFamily="34" charset="0"/>
-                <a:ea typeface="Microsoft YaHei" pitchFamily="34" charset="-122"/>
-                <a:cs typeface="Microsoft YaHei" pitchFamily="34" charset="-120"/>
+                <a:latin typeface="微软雅黑" pitchFamily="34" charset="0"/>
+                <a:ea typeface="微软雅黑" pitchFamily="34" charset="-122"/>
+                <a:cs typeface="微软雅黑" pitchFamily="34" charset="-120"/>
               </a:rPr>
               <a:t>第一阶段</a:t>
-            </a:r>
-            <a:endParaRPr lang="en-US" sz="900" dirty="0"/>
-          </a:p>
-          <a:p>
-            <a:pPr algn="r" indent="0" marL="0">
-              <a:lnSpc>
-                <a:spcPct val="100000"/>
-              </a:lnSpc>
-              <a:buNone/>
-            </a:pPr>
-            <a:r>
-              <a:rPr lang="en-US" sz="900" b="1" dirty="0">
-                <a:solidFill>
-                  <a:srgbClr val="065A82"/>
-                </a:solidFill>
-                <a:latin typeface="Microsoft YaHei" pitchFamily="34" charset="0"/>
-                <a:ea typeface="Microsoft YaHei" pitchFamily="34" charset="-122"/>
-                <a:cs typeface="Microsoft YaHei" pitchFamily="34" charset="-120"/>
-              </a:rPr>
-              <a:t>2026年7月</a:t>
             </a:r>
             <a:endParaRPr lang="en-US" sz="900" dirty="0"/>
           </a:p>
@@ -3700,15 +3521,14 @@
             <a:avLst/>
           </a:prstGeom>
           <a:noFill/>
-          <a:ln/>
-        </p:spPr>
-        <p:txBody>
-          <a:bodyPr wrap="square" rtlCol="0" anchor="ctr">
-            <a:normAutofit/>
-          </a:bodyPr>
-          <a:lstStyle/>
-          <a:p>
-            <a:pPr indent="0" marL="0">
+        </p:spPr>
+        <p:txBody>
+          <a:bodyPr wrap="square" rtlCol="0" anchor="ctr">
+            <a:normAutofit/>
+          </a:bodyPr>
+          <a:lstStyle/>
+          <a:p>
+            <a:pPr marL="0" indent="0">
               <a:lnSpc>
                 <a:spcPct val="105000"/>
               </a:lnSpc>
@@ -3719,16 +3539,16 @@
                 <a:solidFill>
                   <a:srgbClr val="1A1A2E"/>
                 </a:solidFill>
-                <a:latin typeface="Microsoft YaHei" pitchFamily="34" charset="0"/>
-                <a:ea typeface="Microsoft YaHei" pitchFamily="34" charset="-122"/>
-                <a:cs typeface="Microsoft YaHei" pitchFamily="34" charset="-120"/>
+                <a:latin typeface="微软雅黑" pitchFamily="34" charset="0"/>
+                <a:ea typeface="微软雅黑" pitchFamily="34" charset="-122"/>
+                <a:cs typeface="微软雅黑" pitchFamily="34" charset="-120"/>
               </a:rPr>
               <a:t>ANN-MLP基线训练</a:t>
             </a:r>
             <a:endParaRPr lang="en-US" sz="950" dirty="0"/>
           </a:p>
           <a:p>
-            <a:pPr indent="0" marL="0">
+            <a:pPr marL="0" indent="0">
               <a:lnSpc>
                 <a:spcPct val="105000"/>
               </a:lnSpc>
@@ -3739,9 +3559,9 @@
                 <a:solidFill>
                   <a:srgbClr val="1A1A2E"/>
                 </a:solidFill>
-                <a:latin typeface="Microsoft YaHei" pitchFamily="34" charset="0"/>
-                <a:ea typeface="Microsoft YaHei" pitchFamily="34" charset="-122"/>
-                <a:cs typeface="Microsoft YaHei" pitchFamily="34" charset="-120"/>
+                <a:latin typeface="微软雅黑" pitchFamily="34" charset="0"/>
+                <a:ea typeface="微软雅黑" pitchFamily="34" charset="-122"/>
+                <a:cs typeface="微软雅黑" pitchFamily="34" charset="-120"/>
               </a:rPr>
               <a:t>ANN-MAC电路搭建与仿真</a:t>
             </a:r>
@@ -3764,15 +3584,14 @@
             <a:avLst/>
           </a:prstGeom>
           <a:noFill/>
-          <a:ln/>
-        </p:spPr>
-        <p:txBody>
-          <a:bodyPr wrap="square" rtlCol="0" anchor="ctr">
-            <a:normAutofit/>
-          </a:bodyPr>
-          <a:lstStyle/>
-          <a:p>
-            <a:pPr indent="0" marL="0">
+        </p:spPr>
+        <p:txBody>
+          <a:bodyPr wrap="square" rtlCol="0" anchor="ctr">
+            <a:normAutofit/>
+          </a:bodyPr>
+          <a:lstStyle/>
+          <a:p>
+            <a:pPr marL="0" indent="0">
               <a:lnSpc>
                 <a:spcPct val="105000"/>
               </a:lnSpc>
@@ -3783,16 +3602,16 @@
                 <a:solidFill>
                   <a:srgbClr val="6C757D"/>
                 </a:solidFill>
-                <a:latin typeface="Microsoft YaHei" pitchFamily="34" charset="0"/>
-                <a:ea typeface="Microsoft YaHei" pitchFamily="34" charset="-122"/>
-                <a:cs typeface="Microsoft YaHei" pitchFamily="34" charset="-120"/>
+                <a:latin typeface="微软雅黑" pitchFamily="34" charset="0"/>
+                <a:ea typeface="微软雅黑" pitchFamily="34" charset="-122"/>
+                <a:cs typeface="微软雅黑" pitchFamily="34" charset="-120"/>
               </a:rPr>
               <a:t>→ MLP模型+权重</a:t>
             </a:r>
             <a:endParaRPr lang="en-US" sz="900" dirty="0"/>
           </a:p>
           <a:p>
-            <a:pPr indent="0" marL="0">
+            <a:pPr marL="0" indent="0">
               <a:lnSpc>
                 <a:spcPct val="105000"/>
               </a:lnSpc>
@@ -3803,9 +3622,9 @@
                 <a:solidFill>
                   <a:srgbClr val="6C757D"/>
                 </a:solidFill>
-                <a:latin typeface="Microsoft YaHei" pitchFamily="34" charset="0"/>
-                <a:ea typeface="Microsoft YaHei" pitchFamily="34" charset="-122"/>
-                <a:cs typeface="Microsoft YaHei" pitchFamily="34" charset="-120"/>
+                <a:latin typeface="微软雅黑" pitchFamily="34" charset="0"/>
+                <a:ea typeface="微软雅黑" pitchFamily="34" charset="-122"/>
+                <a:cs typeface="微软雅黑" pitchFamily="34" charset="-120"/>
               </a:rPr>
               <a:t>MAC原理图+仿真波形</a:t>
             </a:r>
@@ -3830,7 +3649,6 @@
           <a:solidFill>
             <a:srgbClr val="1C7293"/>
           </a:solidFill>
-          <a:ln/>
         </p:spPr>
       </p:sp>
       <p:sp>
@@ -3848,15 +3666,14 @@
             <a:avLst/>
           </a:prstGeom>
           <a:noFill/>
-          <a:ln/>
-        </p:spPr>
-        <p:txBody>
-          <a:bodyPr wrap="square" rtlCol="0" anchor="ctr">
-            <a:normAutofit/>
-          </a:bodyPr>
-          <a:lstStyle/>
-          <a:p>
-            <a:pPr algn="r" indent="0" marL="0">
+        </p:spPr>
+        <p:txBody>
+          <a:bodyPr wrap="square" rtlCol="0" anchor="ctr">
+            <a:normAutofit/>
+          </a:bodyPr>
+          <a:lstStyle/>
+          <a:p>
+            <a:pPr marL="0" indent="0" algn="r">
               <a:lnSpc>
                 <a:spcPct val="100000"/>
               </a:lnSpc>
@@ -3867,31 +3684,11 @@
                 <a:solidFill>
                   <a:srgbClr val="065A82"/>
                 </a:solidFill>
-                <a:latin typeface="Microsoft YaHei" pitchFamily="34" charset="0"/>
-                <a:ea typeface="Microsoft YaHei" pitchFamily="34" charset="-122"/>
-                <a:cs typeface="Microsoft YaHei" pitchFamily="34" charset="-120"/>
+                <a:latin typeface="微软雅黑" pitchFamily="34" charset="0"/>
+                <a:ea typeface="微软雅黑" pitchFamily="34" charset="-122"/>
+                <a:cs typeface="微软雅黑" pitchFamily="34" charset="-120"/>
               </a:rPr>
               <a:t>第二阶段</a:t>
-            </a:r>
-            <a:endParaRPr lang="en-US" sz="900" dirty="0"/>
-          </a:p>
-          <a:p>
-            <a:pPr algn="r" indent="0" marL="0">
-              <a:lnSpc>
-                <a:spcPct val="100000"/>
-              </a:lnSpc>
-              <a:buNone/>
-            </a:pPr>
-            <a:r>
-              <a:rPr lang="en-US" sz="900" b="1" dirty="0">
-                <a:solidFill>
-                  <a:srgbClr val="065A82"/>
-                </a:solidFill>
-                <a:latin typeface="Microsoft YaHei" pitchFamily="34" charset="0"/>
-                <a:ea typeface="Microsoft YaHei" pitchFamily="34" charset="-122"/>
-                <a:cs typeface="Microsoft YaHei" pitchFamily="34" charset="-120"/>
-              </a:rPr>
-              <a:t>2026年8月</a:t>
             </a:r>
             <a:endParaRPr lang="en-US" sz="900" dirty="0"/>
           </a:p>
@@ -3937,15 +3734,14 @@
             <a:avLst/>
           </a:prstGeom>
           <a:noFill/>
-          <a:ln/>
-        </p:spPr>
-        <p:txBody>
-          <a:bodyPr wrap="square" rtlCol="0" anchor="ctr">
-            <a:normAutofit/>
-          </a:bodyPr>
-          <a:lstStyle/>
-          <a:p>
-            <a:pPr indent="0" marL="0">
+        </p:spPr>
+        <p:txBody>
+          <a:bodyPr wrap="square" rtlCol="0" anchor="ctr">
+            <a:normAutofit/>
+          </a:bodyPr>
+          <a:lstStyle/>
+          <a:p>
+            <a:pPr marL="0" indent="0">
               <a:lnSpc>
                 <a:spcPct val="105000"/>
               </a:lnSpc>
@@ -3956,16 +3752,16 @@
                 <a:solidFill>
                   <a:srgbClr val="1A1A2E"/>
                 </a:solidFill>
-                <a:latin typeface="Microsoft YaHei" pitchFamily="34" charset="0"/>
-                <a:ea typeface="Microsoft YaHei" pitchFamily="34" charset="-122"/>
-                <a:cs typeface="Microsoft YaHei" pitchFamily="34" charset="-120"/>
+                <a:latin typeface="微软雅黑" pitchFamily="34" charset="0"/>
+                <a:ea typeface="微软雅黑" pitchFamily="34" charset="-122"/>
+                <a:cs typeface="微软雅黑" pitchFamily="34" charset="-120"/>
               </a:rPr>
               <a:t>ANN-to-SNN转换</a:t>
             </a:r>
             <a:endParaRPr lang="en-US" sz="950" dirty="0"/>
           </a:p>
           <a:p>
-            <a:pPr indent="0" marL="0">
+            <a:pPr marL="0" indent="0">
               <a:lnSpc>
                 <a:spcPct val="105000"/>
               </a:lnSpc>
@@ -3976,9 +3772,9 @@
                 <a:solidFill>
                   <a:srgbClr val="1A1A2E"/>
                 </a:solidFill>
-                <a:latin typeface="Microsoft YaHei" pitchFamily="34" charset="0"/>
-                <a:ea typeface="Microsoft YaHei" pitchFamily="34" charset="-122"/>
-                <a:cs typeface="Microsoft YaHei" pitchFamily="34" charset="-120"/>
+                <a:latin typeface="微软雅黑" pitchFamily="34" charset="0"/>
+                <a:ea typeface="微软雅黑" pitchFamily="34" charset="-122"/>
+                <a:cs typeface="微软雅黑" pitchFamily="34" charset="-120"/>
               </a:rPr>
               <a:t>SNN软件仿真与验证</a:t>
             </a:r>
@@ -4001,15 +3797,14 @@
             <a:avLst/>
           </a:prstGeom>
           <a:noFill/>
-          <a:ln/>
-        </p:spPr>
-        <p:txBody>
-          <a:bodyPr wrap="square" rtlCol="0" anchor="ctr">
-            <a:normAutofit/>
-          </a:bodyPr>
-          <a:lstStyle/>
-          <a:p>
-            <a:pPr indent="0" marL="0">
+        </p:spPr>
+        <p:txBody>
+          <a:bodyPr wrap="square" rtlCol="0" anchor="ctr">
+            <a:normAutofit/>
+          </a:bodyPr>
+          <a:lstStyle/>
+          <a:p>
+            <a:pPr marL="0" indent="0">
               <a:lnSpc>
                 <a:spcPct val="105000"/>
               </a:lnSpc>
@@ -4020,16 +3815,16 @@
                 <a:solidFill>
                   <a:srgbClr val="6C757D"/>
                 </a:solidFill>
-                <a:latin typeface="Microsoft YaHei" pitchFamily="34" charset="0"/>
-                <a:ea typeface="Microsoft YaHei" pitchFamily="34" charset="-122"/>
-                <a:cs typeface="Microsoft YaHei" pitchFamily="34" charset="-120"/>
+                <a:latin typeface="微软雅黑" pitchFamily="34" charset="0"/>
+                <a:ea typeface="微软雅黑" pitchFamily="34" charset="-122"/>
+                <a:cs typeface="微软雅黑" pitchFamily="34" charset="-120"/>
               </a:rPr>
               <a:t>→ SNN代码+准确率数据</a:t>
             </a:r>
             <a:endParaRPr lang="en-US" sz="900" dirty="0"/>
           </a:p>
           <a:p>
-            <a:pPr indent="0" marL="0">
+            <a:pPr marL="0" indent="0">
               <a:lnSpc>
                 <a:spcPct val="105000"/>
               </a:lnSpc>
@@ -4040,9 +3835,9 @@
                 <a:solidFill>
                   <a:srgbClr val="6C757D"/>
                 </a:solidFill>
-                <a:latin typeface="Microsoft YaHei" pitchFamily="34" charset="0"/>
-                <a:ea typeface="Microsoft YaHei" pitchFamily="34" charset="-122"/>
-                <a:cs typeface="Microsoft YaHei" pitchFamily="34" charset="-120"/>
+                <a:latin typeface="微软雅黑" pitchFamily="34" charset="0"/>
+                <a:ea typeface="微软雅黑" pitchFamily="34" charset="-122"/>
+                <a:cs typeface="微软雅黑" pitchFamily="34" charset="-120"/>
               </a:rPr>
               <a:t>脉冲稀疏性统计</a:t>
             </a:r>
@@ -4067,7 +3862,6 @@
           <a:solidFill>
             <a:srgbClr val="1C7293"/>
           </a:solidFill>
-          <a:ln/>
         </p:spPr>
       </p:sp>
       <p:sp>
@@ -4085,15 +3879,14 @@
             <a:avLst/>
           </a:prstGeom>
           <a:noFill/>
-          <a:ln/>
-        </p:spPr>
-        <p:txBody>
-          <a:bodyPr wrap="square" rtlCol="0" anchor="ctr">
-            <a:normAutofit/>
-          </a:bodyPr>
-          <a:lstStyle/>
-          <a:p>
-            <a:pPr algn="r" indent="0" marL="0">
+        </p:spPr>
+        <p:txBody>
+          <a:bodyPr wrap="square" rtlCol="0" anchor="ctr">
+            <a:normAutofit/>
+          </a:bodyPr>
+          <a:lstStyle/>
+          <a:p>
+            <a:pPr marL="0" indent="0" algn="r">
               <a:lnSpc>
                 <a:spcPct val="100000"/>
               </a:lnSpc>
@@ -4104,31 +3897,11 @@
                 <a:solidFill>
                   <a:srgbClr val="065A82"/>
                 </a:solidFill>
-                <a:latin typeface="Microsoft YaHei" pitchFamily="34" charset="0"/>
-                <a:ea typeface="Microsoft YaHei" pitchFamily="34" charset="-122"/>
-                <a:cs typeface="Microsoft YaHei" pitchFamily="34" charset="-120"/>
+                <a:latin typeface="微软雅黑" pitchFamily="34" charset="0"/>
+                <a:ea typeface="微软雅黑" pitchFamily="34" charset="-122"/>
+                <a:cs typeface="微软雅黑" pitchFamily="34" charset="-120"/>
               </a:rPr>
               <a:t>第三阶段</a:t>
-            </a:r>
-            <a:endParaRPr lang="en-US" sz="900" dirty="0"/>
-          </a:p>
-          <a:p>
-            <a:pPr algn="r" indent="0" marL="0">
-              <a:lnSpc>
-                <a:spcPct val="100000"/>
-              </a:lnSpc>
-              <a:buNone/>
-            </a:pPr>
-            <a:r>
-              <a:rPr lang="en-US" sz="900" b="1" dirty="0">
-                <a:solidFill>
-                  <a:srgbClr val="065A82"/>
-                </a:solidFill>
-                <a:latin typeface="Microsoft YaHei" pitchFamily="34" charset="0"/>
-                <a:ea typeface="Microsoft YaHei" pitchFamily="34" charset="-122"/>
-                <a:cs typeface="Microsoft YaHei" pitchFamily="34" charset="-120"/>
-              </a:rPr>
-              <a:t>2026年9月</a:t>
             </a:r>
             <a:endParaRPr lang="en-US" sz="900" dirty="0"/>
           </a:p>
@@ -4174,15 +3947,14 @@
             <a:avLst/>
           </a:prstGeom>
           <a:noFill/>
-          <a:ln/>
-        </p:spPr>
-        <p:txBody>
-          <a:bodyPr wrap="square" rtlCol="0" anchor="ctr">
-            <a:normAutofit/>
-          </a:bodyPr>
-          <a:lstStyle/>
-          <a:p>
-            <a:pPr indent="0" marL="0">
+        </p:spPr>
+        <p:txBody>
+          <a:bodyPr wrap="square" rtlCol="0" anchor="ctr">
+            <a:normAutofit/>
+          </a:bodyPr>
+          <a:lstStyle/>
+          <a:p>
+            <a:pPr marL="0" indent="0">
               <a:lnSpc>
                 <a:spcPct val="105000"/>
               </a:lnSpc>
@@ -4193,16 +3965,16 @@
                 <a:solidFill>
                   <a:srgbClr val="1A1A2E"/>
                 </a:solidFill>
-                <a:latin typeface="Microsoft YaHei" pitchFamily="34" charset="0"/>
-                <a:ea typeface="Microsoft YaHei" pitchFamily="34" charset="-122"/>
-                <a:cs typeface="Microsoft YaHei" pitchFamily="34" charset="-120"/>
+                <a:latin typeface="微软雅黑" pitchFamily="34" charset="0"/>
+                <a:ea typeface="微软雅黑" pitchFamily="34" charset="-122"/>
+                <a:cs typeface="微软雅黑" pitchFamily="34" charset="-120"/>
               </a:rPr>
               <a:t>积分器电路搭建</a:t>
             </a:r>
             <a:endParaRPr lang="en-US" sz="950" dirty="0"/>
           </a:p>
           <a:p>
-            <a:pPr indent="0" marL="0">
+            <a:pPr marL="0" indent="0">
               <a:lnSpc>
                 <a:spcPct val="105000"/>
               </a:lnSpc>
@@ -4213,9 +3985,9 @@
                 <a:solidFill>
                   <a:srgbClr val="1A1A2E"/>
                 </a:solidFill>
-                <a:latin typeface="Microsoft YaHei" pitchFamily="34" charset="0"/>
-                <a:ea typeface="Microsoft YaHei" pitchFamily="34" charset="-122"/>
-                <a:cs typeface="Microsoft YaHei" pitchFamily="34" charset="-120"/>
+                <a:latin typeface="微软雅黑" pitchFamily="34" charset="0"/>
+                <a:ea typeface="微软雅黑" pitchFamily="34" charset="-122"/>
+                <a:cs typeface="微软雅黑" pitchFamily="34" charset="-120"/>
               </a:rPr>
               <a:t>IF神经元电路搭建</a:t>
             </a:r>
@@ -4238,15 +4010,14 @@
             <a:avLst/>
           </a:prstGeom>
           <a:noFill/>
-          <a:ln/>
-        </p:spPr>
-        <p:txBody>
-          <a:bodyPr wrap="square" rtlCol="0" anchor="ctr">
-            <a:normAutofit/>
-          </a:bodyPr>
-          <a:lstStyle/>
-          <a:p>
-            <a:pPr indent="0" marL="0">
+        </p:spPr>
+        <p:txBody>
+          <a:bodyPr wrap="square" rtlCol="0" anchor="ctr">
+            <a:normAutofit/>
+          </a:bodyPr>
+          <a:lstStyle/>
+          <a:p>
+            <a:pPr marL="0" indent="0">
               <a:lnSpc>
                 <a:spcPct val="105000"/>
               </a:lnSpc>
@@ -4257,16 +4028,16 @@
                 <a:solidFill>
                   <a:srgbClr val="6C757D"/>
                 </a:solidFill>
-                <a:latin typeface="Microsoft YaHei" pitchFamily="34" charset="0"/>
-                <a:ea typeface="Microsoft YaHei" pitchFamily="34" charset="-122"/>
-                <a:cs typeface="Microsoft YaHei" pitchFamily="34" charset="-120"/>
+                <a:latin typeface="微软雅黑" pitchFamily="34" charset="0"/>
+                <a:ea typeface="微软雅黑" pitchFamily="34" charset="-122"/>
+                <a:cs typeface="微软雅黑" pitchFamily="34" charset="-120"/>
               </a:rPr>
               <a:t>→ 积分器+IF原理图</a:t>
             </a:r>
             <a:endParaRPr lang="en-US" sz="900" dirty="0"/>
           </a:p>
           <a:p>
-            <a:pPr indent="0" marL="0">
+            <a:pPr marL="0" indent="0">
               <a:lnSpc>
                 <a:spcPct val="105000"/>
               </a:lnSpc>
@@ -4277,9 +4048,9 @@
                 <a:solidFill>
                   <a:srgbClr val="6C757D"/>
                 </a:solidFill>
-                <a:latin typeface="Microsoft YaHei" pitchFamily="34" charset="0"/>
-                <a:ea typeface="Microsoft YaHei" pitchFamily="34" charset="-122"/>
-                <a:cs typeface="Microsoft YaHei" pitchFamily="34" charset="-120"/>
+                <a:latin typeface="微软雅黑" pitchFamily="34" charset="0"/>
+                <a:ea typeface="微软雅黑" pitchFamily="34" charset="-122"/>
+                <a:cs typeface="微软雅黑" pitchFamily="34" charset="-120"/>
               </a:rPr>
               <a:t>仿真波形+硬件指标</a:t>
             </a:r>
@@ -4304,7 +4075,6 @@
           <a:solidFill>
             <a:srgbClr val="1C7293"/>
           </a:solidFill>
-          <a:ln/>
         </p:spPr>
       </p:sp>
       <p:sp>
@@ -4322,15 +4092,14 @@
             <a:avLst/>
           </a:prstGeom>
           <a:noFill/>
-          <a:ln/>
-        </p:spPr>
-        <p:txBody>
-          <a:bodyPr wrap="square" rtlCol="0" anchor="ctr">
-            <a:normAutofit/>
-          </a:bodyPr>
-          <a:lstStyle/>
-          <a:p>
-            <a:pPr algn="r" indent="0" marL="0">
+        </p:spPr>
+        <p:txBody>
+          <a:bodyPr wrap="square" rtlCol="0" anchor="ctr">
+            <a:normAutofit/>
+          </a:bodyPr>
+          <a:lstStyle/>
+          <a:p>
+            <a:pPr marL="0" indent="0" algn="r">
               <a:lnSpc>
                 <a:spcPct val="100000"/>
               </a:lnSpc>
@@ -4341,31 +4110,11 @@
                 <a:solidFill>
                   <a:srgbClr val="065A82"/>
                 </a:solidFill>
-                <a:latin typeface="Microsoft YaHei" pitchFamily="34" charset="0"/>
-                <a:ea typeface="Microsoft YaHei" pitchFamily="34" charset="-122"/>
-                <a:cs typeface="Microsoft YaHei" pitchFamily="34" charset="-120"/>
+                <a:latin typeface="微软雅黑" pitchFamily="34" charset="0"/>
+                <a:ea typeface="微软雅黑" pitchFamily="34" charset="-122"/>
+                <a:cs typeface="微软雅黑" pitchFamily="34" charset="-120"/>
               </a:rPr>
               <a:t>第四阶段</a:t>
-            </a:r>
-            <a:endParaRPr lang="en-US" sz="900" dirty="0"/>
-          </a:p>
-          <a:p>
-            <a:pPr algn="r" indent="0" marL="0">
-              <a:lnSpc>
-                <a:spcPct val="100000"/>
-              </a:lnSpc>
-              <a:buNone/>
-            </a:pPr>
-            <a:r>
-              <a:rPr lang="en-US" sz="900" b="1" dirty="0">
-                <a:solidFill>
-                  <a:srgbClr val="065A82"/>
-                </a:solidFill>
-                <a:latin typeface="Microsoft YaHei" pitchFamily="34" charset="0"/>
-                <a:ea typeface="Microsoft YaHei" pitchFamily="34" charset="-122"/>
-                <a:cs typeface="Microsoft YaHei" pitchFamily="34" charset="-120"/>
-              </a:rPr>
-              <a:t>2026年10月</a:t>
             </a:r>
             <a:endParaRPr lang="en-US" sz="900" dirty="0"/>
           </a:p>
@@ -4411,15 +4160,14 @@
             <a:avLst/>
           </a:prstGeom>
           <a:noFill/>
-          <a:ln/>
-        </p:spPr>
-        <p:txBody>
-          <a:bodyPr wrap="square" rtlCol="0" anchor="ctr">
-            <a:normAutofit/>
-          </a:bodyPr>
-          <a:lstStyle/>
-          <a:p>
-            <a:pPr indent="0" marL="0">
+        </p:spPr>
+        <p:txBody>
+          <a:bodyPr wrap="square" rtlCol="0" anchor="ctr">
+            <a:normAutofit/>
+          </a:bodyPr>
+          <a:lstStyle/>
+          <a:p>
+            <a:pPr marL="0" indent="0">
               <a:lnSpc>
                 <a:spcPct val="105000"/>
               </a:lnSpc>
@@ -4430,16 +4178,16 @@
                 <a:solidFill>
                   <a:srgbClr val="1A1A2E"/>
                 </a:solidFill>
-                <a:latin typeface="Microsoft YaHei" pitchFamily="34" charset="0"/>
-                <a:ea typeface="Microsoft YaHei" pitchFamily="34" charset="-122"/>
-                <a:cs typeface="Microsoft YaHei" pitchFamily="34" charset="-120"/>
+                <a:latin typeface="微软雅黑" pitchFamily="34" charset="0"/>
+                <a:ea typeface="微软雅黑" pitchFamily="34" charset="-122"/>
+                <a:cs typeface="微软雅黑" pitchFamily="34" charset="-120"/>
               </a:rPr>
               <a:t>硬件对比分析</a:t>
             </a:r>
             <a:endParaRPr lang="en-US" sz="950" dirty="0"/>
           </a:p>
           <a:p>
-            <a:pPr indent="0" marL="0">
+            <a:pPr marL="0" indent="0">
               <a:lnSpc>
                 <a:spcPct val="105000"/>
               </a:lnSpc>
@@ -4450,9 +4198,9 @@
                 <a:solidFill>
                   <a:srgbClr val="1A1A2E"/>
                 </a:solidFill>
-                <a:latin typeface="Microsoft YaHei" pitchFamily="34" charset="0"/>
-                <a:ea typeface="Microsoft YaHei" pitchFamily="34" charset="-122"/>
-                <a:cs typeface="Microsoft YaHei" pitchFamily="34" charset="-120"/>
+                <a:latin typeface="微软雅黑" pitchFamily="34" charset="0"/>
+                <a:ea typeface="微软雅黑" pitchFamily="34" charset="-122"/>
+                <a:cs typeface="微软雅黑" pitchFamily="34" charset="-120"/>
               </a:rPr>
               <a:t>Trade-off曲线拟合</a:t>
             </a:r>
@@ -4475,15 +4223,14 @@
             <a:avLst/>
           </a:prstGeom>
           <a:noFill/>
-          <a:ln/>
-        </p:spPr>
-        <p:txBody>
-          <a:bodyPr wrap="square" rtlCol="0" anchor="ctr">
-            <a:normAutofit/>
-          </a:bodyPr>
-          <a:lstStyle/>
-          <a:p>
-            <a:pPr indent="0" marL="0">
+        </p:spPr>
+        <p:txBody>
+          <a:bodyPr wrap="square" rtlCol="0" anchor="ctr">
+            <a:normAutofit/>
+          </a:bodyPr>
+          <a:lstStyle/>
+          <a:p>
+            <a:pPr marL="0" indent="0">
               <a:lnSpc>
                 <a:spcPct val="105000"/>
               </a:lnSpc>
@@ -4494,16 +4241,16 @@
                 <a:solidFill>
                   <a:srgbClr val="6C757D"/>
                 </a:solidFill>
-                <a:latin typeface="Microsoft YaHei" pitchFamily="34" charset="0"/>
-                <a:ea typeface="Microsoft YaHei" pitchFamily="34" charset="-122"/>
-                <a:cs typeface="Microsoft YaHei" pitchFamily="34" charset="-120"/>
+                <a:latin typeface="微软雅黑" pitchFamily="34" charset="0"/>
+                <a:ea typeface="微软雅黑" pitchFamily="34" charset="-122"/>
+                <a:cs typeface="微软雅黑" pitchFamily="34" charset="-120"/>
               </a:rPr>
               <a:t>→ 对比表+trade-off曲线</a:t>
             </a:r>
             <a:endParaRPr lang="en-US" sz="900" dirty="0"/>
           </a:p>
           <a:p>
-            <a:pPr indent="0" marL="0">
+            <a:pPr marL="0" indent="0">
               <a:lnSpc>
                 <a:spcPct val="105000"/>
               </a:lnSpc>
@@ -4514,9 +4261,9 @@
                 <a:solidFill>
                   <a:srgbClr val="6C757D"/>
                 </a:solidFill>
-                <a:latin typeface="Microsoft YaHei" pitchFamily="34" charset="0"/>
-                <a:ea typeface="Microsoft YaHei" pitchFamily="34" charset="-122"/>
-                <a:cs typeface="Microsoft YaHei" pitchFamily="34" charset="-120"/>
+                <a:latin typeface="微软雅黑" pitchFamily="34" charset="0"/>
+                <a:ea typeface="微软雅黑" pitchFamily="34" charset="-122"/>
+                <a:cs typeface="微软雅黑" pitchFamily="34" charset="-120"/>
               </a:rPr>
               <a:t>定量结论</a:t>
             </a:r>
@@ -4541,7 +4288,6 @@
           <a:solidFill>
             <a:srgbClr val="1C7293"/>
           </a:solidFill>
-          <a:ln/>
         </p:spPr>
       </p:sp>
       <p:sp>
@@ -4559,15 +4305,14 @@
             <a:avLst/>
           </a:prstGeom>
           <a:noFill/>
-          <a:ln/>
-        </p:spPr>
-        <p:txBody>
-          <a:bodyPr wrap="square" rtlCol="0" anchor="ctr">
-            <a:normAutofit/>
-          </a:bodyPr>
-          <a:lstStyle/>
-          <a:p>
-            <a:pPr algn="r" indent="0" marL="0">
+        </p:spPr>
+        <p:txBody>
+          <a:bodyPr wrap="square" rtlCol="0" anchor="ctr">
+            <a:normAutofit/>
+          </a:bodyPr>
+          <a:lstStyle/>
+          <a:p>
+            <a:pPr marL="0" indent="0" algn="r">
               <a:lnSpc>
                 <a:spcPct val="100000"/>
               </a:lnSpc>
@@ -4578,31 +4323,11 @@
                 <a:solidFill>
                   <a:srgbClr val="065A82"/>
                 </a:solidFill>
-                <a:latin typeface="Microsoft YaHei" pitchFamily="34" charset="0"/>
-                <a:ea typeface="Microsoft YaHei" pitchFamily="34" charset="-122"/>
-                <a:cs typeface="Microsoft YaHei" pitchFamily="34" charset="-120"/>
+                <a:latin typeface="微软雅黑" pitchFamily="34" charset="0"/>
+                <a:ea typeface="微软雅黑" pitchFamily="34" charset="-122"/>
+                <a:cs typeface="微软雅黑" pitchFamily="34" charset="-120"/>
               </a:rPr>
               <a:t>第五阶段</a:t>
-            </a:r>
-            <a:endParaRPr lang="en-US" sz="900" dirty="0"/>
-          </a:p>
-          <a:p>
-            <a:pPr algn="r" indent="0" marL="0">
-              <a:lnSpc>
-                <a:spcPct val="100000"/>
-              </a:lnSpc>
-              <a:buNone/>
-            </a:pPr>
-            <a:r>
-              <a:rPr lang="en-US" sz="900" b="1" dirty="0">
-                <a:solidFill>
-                  <a:srgbClr val="065A82"/>
-                </a:solidFill>
-                <a:latin typeface="Microsoft YaHei" pitchFamily="34" charset="0"/>
-                <a:ea typeface="Microsoft YaHei" pitchFamily="34" charset="-122"/>
-                <a:cs typeface="Microsoft YaHei" pitchFamily="34" charset="-120"/>
-              </a:rPr>
-              <a:t>2026年11月</a:t>
             </a:r>
             <a:endParaRPr lang="en-US" sz="900" dirty="0"/>
           </a:p>
@@ -4648,15 +4373,14 @@
             <a:avLst/>
           </a:prstGeom>
           <a:noFill/>
-          <a:ln/>
-        </p:spPr>
-        <p:txBody>
-          <a:bodyPr wrap="square" rtlCol="0" anchor="ctr">
-            <a:normAutofit/>
-          </a:bodyPr>
-          <a:lstStyle/>
-          <a:p>
-            <a:pPr indent="0" marL="0">
+        </p:spPr>
+        <p:txBody>
+          <a:bodyPr wrap="square" rtlCol="0" anchor="ctr">
+            <a:normAutofit/>
+          </a:bodyPr>
+          <a:lstStyle/>
+          <a:p>
+            <a:pPr marL="0" indent="0">
               <a:lnSpc>
                 <a:spcPct val="105000"/>
               </a:lnSpc>
@@ -4667,16 +4391,16 @@
                 <a:solidFill>
                   <a:srgbClr val="1A1A2E"/>
                 </a:solidFill>
-                <a:latin typeface="Microsoft YaHei" pitchFamily="34" charset="0"/>
-                <a:ea typeface="Microsoft YaHei" pitchFamily="34" charset="-122"/>
-                <a:cs typeface="Microsoft YaHei" pitchFamily="34" charset="-120"/>
+                <a:latin typeface="微软雅黑" pitchFamily="34" charset="0"/>
+                <a:ea typeface="微软雅黑" pitchFamily="34" charset="-122"/>
+                <a:cs typeface="微软雅黑" pitchFamily="34" charset="-120"/>
               </a:rPr>
               <a:t>撰写结题报告</a:t>
             </a:r>
             <a:endParaRPr lang="en-US" sz="950" dirty="0"/>
           </a:p>
           <a:p>
-            <a:pPr indent="0" marL="0">
+            <a:pPr marL="0" indent="0">
               <a:lnSpc>
                 <a:spcPct val="105000"/>
               </a:lnSpc>
@@ -4687,9 +4411,9 @@
                 <a:solidFill>
                   <a:srgbClr val="1A1A2E"/>
                 </a:solidFill>
-                <a:latin typeface="Microsoft YaHei" pitchFamily="34" charset="0"/>
-                <a:ea typeface="Microsoft YaHei" pitchFamily="34" charset="-122"/>
-                <a:cs typeface="Microsoft YaHei" pitchFamily="34" charset="-120"/>
+                <a:latin typeface="微软雅黑" pitchFamily="34" charset="0"/>
+                <a:ea typeface="微软雅黑" pitchFamily="34" charset="-122"/>
+                <a:cs typeface="微软雅黑" pitchFamily="34" charset="-120"/>
               </a:rPr>
               <a:t>制作答辩PPT</a:t>
             </a:r>
@@ -4712,15 +4436,14 @@
             <a:avLst/>
           </a:prstGeom>
           <a:noFill/>
-          <a:ln/>
-        </p:spPr>
-        <p:txBody>
-          <a:bodyPr wrap="square" rtlCol="0" anchor="ctr">
-            <a:normAutofit/>
-          </a:bodyPr>
-          <a:lstStyle/>
-          <a:p>
-            <a:pPr indent="0" marL="0">
+        </p:spPr>
+        <p:txBody>
+          <a:bodyPr wrap="square" rtlCol="0" anchor="ctr">
+            <a:normAutofit/>
+          </a:bodyPr>
+          <a:lstStyle/>
+          <a:p>
+            <a:pPr marL="0" indent="0">
               <a:lnSpc>
                 <a:spcPct val="105000"/>
               </a:lnSpc>
@@ -4731,9 +4454,9 @@
                 <a:solidFill>
                   <a:srgbClr val="6C757D"/>
                 </a:solidFill>
-                <a:latin typeface="Microsoft YaHei" pitchFamily="34" charset="0"/>
-                <a:ea typeface="Microsoft YaHei" pitchFamily="34" charset="-122"/>
-                <a:cs typeface="Microsoft YaHei" pitchFamily="34" charset="-120"/>
+                <a:latin typeface="微软雅黑" pitchFamily="34" charset="0"/>
+                <a:ea typeface="微软雅黑" pitchFamily="34" charset="-122"/>
+                <a:cs typeface="微软雅黑" pitchFamily="34" charset="-120"/>
               </a:rPr>
               <a:t>→ 结题报告+答辩PPT</a:t>
             </a:r>
@@ -4751,7 +4474,7 @@
 
 <file path=ppt/slides/slide12.xml><?xml version="1.0" encoding="utf-8"?>
 <p:sld xmlns:a="http://schemas.openxmlformats.org/drawingml/2006/main" xmlns:r="http://schemas.openxmlformats.org/officeDocument/2006/relationships" xmlns:p="http://schemas.openxmlformats.org/presentationml/2006/main">
-  <p:cSld name="Slide 12">
+  <p:cSld>
     <p:bg>
       <p:bgPr>
         <a:blipFill dpi="0" rotWithShape="1">
@@ -4799,8 +4522,13 @@
               <a:alpha val="60000"/>
             </a:srgbClr>
           </a:solidFill>
-          <a:ln/>
-        </p:spPr>
+        </p:spPr>
+        <p:txBody>
+          <a:bodyPr/>
+          <a:p>
+            <a:endParaRPr lang="zh-CN" altLang="en-US"/>
+          </a:p>
+        </p:txBody>
       </p:sp>
       <p:sp>
         <p:nvSpPr>
@@ -4817,25 +4545,24 @@
             <a:avLst/>
           </a:prstGeom>
           <a:noFill/>
-          <a:ln/>
-        </p:spPr>
-        <p:txBody>
-          <a:bodyPr wrap="square" rtlCol="0" anchor="ctr">
-            <a:normAutofit/>
-          </a:bodyPr>
-          <a:lstStyle/>
-          <a:p>
-            <a:pPr algn="ctr" indent="0" marL="0">
-              <a:buNone/>
-            </a:pPr>
-            <a:r>
-              <a:rPr lang="en-US" sz="4000" b="1" spc="500" kern="0" dirty="0">
+        </p:spPr>
+        <p:txBody>
+          <a:bodyPr wrap="square" rtlCol="0" anchor="ctr">
+            <a:normAutofit/>
+          </a:bodyPr>
+          <a:lstStyle/>
+          <a:p>
+            <a:pPr marL="0" indent="0" algn="ctr">
+              <a:buNone/>
+            </a:pPr>
+            <a:r>
+              <a:rPr lang="en-US" sz="4000" b="1" kern="0" spc="500" dirty="0">
                 <a:solidFill>
                   <a:srgbClr val="FFFFFF"/>
                 </a:solidFill>
-                <a:latin typeface="Songti SC" pitchFamily="34" charset="0"/>
-                <a:ea typeface="Songti SC" pitchFamily="34" charset="-122"/>
-                <a:cs typeface="Songti SC" pitchFamily="34" charset="-120"/>
+                <a:latin typeface="Songti SC" panose="02010800040101010101" pitchFamily="34" charset="-122"/>
+                <a:ea typeface="Songti SC" panose="02010800040101010101" pitchFamily="34" charset="-122"/>
+                <a:cs typeface="Songti SC" panose="02010800040101010101" pitchFamily="34" charset="-120"/>
               </a:rPr>
               <a:t>感谢聆听</a:t>
             </a:r>
@@ -4860,7 +4587,6 @@
           <a:solidFill>
             <a:srgbClr val="00B4D8"/>
           </a:solidFill>
-          <a:ln/>
         </p:spPr>
       </p:sp>
       <p:sp>
@@ -4878,15 +4604,14 @@
             <a:avLst/>
           </a:prstGeom>
           <a:noFill/>
-          <a:ln/>
-        </p:spPr>
-        <p:txBody>
-          <a:bodyPr wrap="square" rtlCol="0" anchor="ctr">
-            <a:normAutofit/>
-          </a:bodyPr>
-          <a:lstStyle/>
-          <a:p>
-            <a:pPr algn="ctr" indent="0" marL="0">
+        </p:spPr>
+        <p:txBody>
+          <a:bodyPr wrap="square" rtlCol="0" anchor="ctr">
+            <a:normAutofit/>
+          </a:bodyPr>
+          <a:lstStyle/>
+          <a:p>
+            <a:pPr marL="0" indent="0" algn="ctr">
               <a:buNone/>
             </a:pPr>
             <a:r>
@@ -4894,9 +4619,9 @@
                 <a:solidFill>
                   <a:srgbClr val="B0D0E0"/>
                 </a:solidFill>
-                <a:latin typeface="Microsoft YaHei" pitchFamily="34" charset="0"/>
-                <a:ea typeface="Microsoft YaHei" pitchFamily="34" charset="-122"/>
-                <a:cs typeface="Microsoft YaHei" pitchFamily="34" charset="-120"/>
+                <a:latin typeface="微软雅黑" pitchFamily="34" charset="0"/>
+                <a:ea typeface="微软雅黑" pitchFamily="34" charset="-122"/>
+                <a:cs typeface="微软雅黑" pitchFamily="34" charset="-120"/>
               </a:rPr>
               <a:t>敬请各位老师批评指正</a:t>
             </a:r>
@@ -4919,15 +4644,14 @@
             <a:avLst/>
           </a:prstGeom>
           <a:noFill/>
-          <a:ln/>
-        </p:spPr>
-        <p:txBody>
-          <a:bodyPr wrap="square" rtlCol="0" anchor="ctr">
-            <a:normAutofit/>
-          </a:bodyPr>
-          <a:lstStyle/>
-          <a:p>
-            <a:pPr algn="ctr" indent="0" marL="0">
+        </p:spPr>
+        <p:txBody>
+          <a:bodyPr wrap="square" rtlCol="0" anchor="ctr">
+            <a:normAutofit/>
+          </a:bodyPr>
+          <a:lstStyle/>
+          <a:p>
+            <a:pPr marL="0" indent="0" algn="ctr">
               <a:buNone/>
             </a:pPr>
             <a:r>
@@ -4935,11 +4659,11 @@
                 <a:solidFill>
                   <a:srgbClr val="80A0B0"/>
                 </a:solidFill>
-                <a:latin typeface="Microsoft YaHei" pitchFamily="34" charset="0"/>
-                <a:ea typeface="Microsoft YaHei" pitchFamily="34" charset="-122"/>
-                <a:cs typeface="Microsoft YaHei" pitchFamily="34" charset="-120"/>
-              </a:rPr>
-              <a:t>林意哲  |  上海市金陵中学  |  2026年7月</a:t>
+                <a:latin typeface="微软雅黑" pitchFamily="34" charset="0"/>
+                <a:ea typeface="微软雅黑" pitchFamily="34" charset="-122"/>
+                <a:cs typeface="微软雅黑" pitchFamily="34" charset="-120"/>
+              </a:rPr>
+              <a:t>林意哲  |  2026年7月</a:t>
             </a:r>
             <a:endParaRPr lang="en-US" sz="1200" dirty="0"/>
           </a:p>
@@ -4955,12 +4679,13 @@
 
 <file path=ppt/slides/slide2.xml><?xml version="1.0" encoding="utf-8"?>
 <p:sld xmlns:a="http://schemas.openxmlformats.org/drawingml/2006/main" xmlns:r="http://schemas.openxmlformats.org/officeDocument/2006/relationships" xmlns:p="http://schemas.openxmlformats.org/presentationml/2006/main">
-  <p:cSld name="Slide 2">
+  <p:cSld>
     <p:bg>
       <p:bgPr>
         <a:solidFill>
           <a:srgbClr val="FFFFFF"/>
         </a:solidFill>
+        <a:effectLst/>
       </p:bgPr>
     </p:bg>
     <p:spTree>
@@ -4994,7 +4719,6 @@
           <a:solidFill>
             <a:srgbClr val="065A82"/>
           </a:solidFill>
-          <a:ln/>
         </p:spPr>
       </p:sp>
       <p:sp>
@@ -5012,15 +4736,14 @@
             <a:avLst/>
           </a:prstGeom>
           <a:noFill/>
-          <a:ln/>
-        </p:spPr>
-        <p:txBody>
-          <a:bodyPr wrap="square" rtlCol="0" anchor="ctr">
-            <a:normAutofit/>
-          </a:bodyPr>
-          <a:lstStyle/>
-          <a:p>
-            <a:pPr algn="l" indent="0" marL="0">
+        </p:spPr>
+        <p:txBody>
+          <a:bodyPr wrap="square" rtlCol="0" anchor="ctr">
+            <a:normAutofit/>
+          </a:bodyPr>
+          <a:lstStyle/>
+          <a:p>
+            <a:pPr marL="0" indent="0" algn="l">
               <a:buNone/>
             </a:pPr>
             <a:r>
@@ -5028,9 +4751,9 @@
                 <a:solidFill>
                   <a:srgbClr val="FFFFFF"/>
                 </a:solidFill>
-                <a:latin typeface="Songti SC" pitchFamily="34" charset="0"/>
-                <a:ea typeface="Songti SC" pitchFamily="34" charset="-122"/>
-                <a:cs typeface="Songti SC" pitchFamily="34" charset="-120"/>
+                <a:latin typeface="Songti SC" panose="02010800040101010101" pitchFamily="34" charset="-122"/>
+                <a:ea typeface="Songti SC" panose="02010800040101010101" pitchFamily="34" charset="-122"/>
+                <a:cs typeface="Songti SC" panose="02010800040101010101" pitchFamily="34" charset="-120"/>
               </a:rPr>
               <a:t>目录</a:t>
             </a:r>
@@ -5053,15 +4776,14 @@
             <a:avLst/>
           </a:prstGeom>
           <a:noFill/>
-          <a:ln/>
-        </p:spPr>
-        <p:txBody>
-          <a:bodyPr wrap="square" rtlCol="0" anchor="ctr">
-            <a:normAutofit/>
-          </a:bodyPr>
-          <a:lstStyle/>
-          <a:p>
-            <a:pPr algn="l" indent="0" marL="0">
+        </p:spPr>
+        <p:txBody>
+          <a:bodyPr wrap="square" rtlCol="0" anchor="ctr">
+            <a:normAutofit/>
+          </a:bodyPr>
+          <a:lstStyle/>
+          <a:p>
+            <a:pPr marL="0" indent="0" algn="l">
               <a:buNone/>
             </a:pPr>
             <a:r>
@@ -5069,9 +4791,9 @@
                 <a:solidFill>
                   <a:srgbClr val="B0D0E0"/>
                 </a:solidFill>
-                <a:latin typeface="Microsoft YaHei" pitchFamily="34" charset="0"/>
-                <a:ea typeface="Microsoft YaHei" pitchFamily="34" charset="-122"/>
-                <a:cs typeface="Microsoft YaHei" pitchFamily="34" charset="-120"/>
+                <a:latin typeface="微软雅黑" pitchFamily="34" charset="0"/>
+                <a:ea typeface="微软雅黑" pitchFamily="34" charset="-122"/>
+                <a:cs typeface="微软雅黑" pitchFamily="34" charset="-120"/>
               </a:rPr>
               <a:t>CONTENTS</a:t>
             </a:r>
@@ -5083,7 +4805,11 @@
         <p:nvSpPr>
           <p:cNvPr id="5" name="Shape 3"/>
           <p:cNvSpPr/>
-          <p:nvPr/>
+          <p:nvPr>
+            <p:custDataLst>
+              <p:tags r:id="rId1"/>
+            </p:custDataLst>
+          </p:nvPr>
         </p:nvSpPr>
         <p:spPr>
           <a:xfrm>
@@ -5108,7 +4834,11 @@
         <p:nvSpPr>
           <p:cNvPr id="6" name="Text 4"/>
           <p:cNvSpPr/>
-          <p:nvPr/>
+          <p:nvPr>
+            <p:custDataLst>
+              <p:tags r:id="rId2"/>
+            </p:custDataLst>
+          </p:nvPr>
         </p:nvSpPr>
         <p:spPr>
           <a:xfrm>
@@ -5119,15 +4849,14 @@
             <a:avLst/>
           </a:prstGeom>
           <a:noFill/>
-          <a:ln/>
-        </p:spPr>
-        <p:txBody>
-          <a:bodyPr wrap="square" rtlCol="0" anchor="ctr">
-            <a:normAutofit/>
-          </a:bodyPr>
-          <a:lstStyle/>
-          <a:p>
-            <a:pPr algn="ctr" indent="0" marL="0">
+        </p:spPr>
+        <p:txBody>
+          <a:bodyPr wrap="square" rtlCol="0" anchor="ctr">
+            <a:normAutofit/>
+          </a:bodyPr>
+          <a:lstStyle/>
+          <a:p>
+            <a:pPr marL="0" indent="0" algn="ctr">
               <a:buNone/>
             </a:pPr>
             <a:r>
@@ -5135,9 +4864,9 @@
                 <a:solidFill>
                   <a:srgbClr val="1C7293"/>
                 </a:solidFill>
-                <a:latin typeface="Georgia" pitchFamily="34" charset="0"/>
-                <a:ea typeface="Georgia" pitchFamily="34" charset="-122"/>
-                <a:cs typeface="Georgia" pitchFamily="34" charset="-120"/>
+                <a:latin typeface="Georgia" panose="02040502050405090303" pitchFamily="34" charset="0"/>
+                <a:ea typeface="Georgia" panose="02040502050405090303" pitchFamily="34" charset="-122"/>
+                <a:cs typeface="Georgia" panose="02040502050405090303" pitchFamily="34" charset="-120"/>
               </a:rPr>
               <a:t>1</a:t>
             </a:r>
@@ -5149,7 +4878,11 @@
         <p:nvSpPr>
           <p:cNvPr id="7" name="Text 5"/>
           <p:cNvSpPr/>
-          <p:nvPr/>
+          <p:nvPr>
+            <p:custDataLst>
+              <p:tags r:id="rId3"/>
+            </p:custDataLst>
+          </p:nvPr>
         </p:nvSpPr>
         <p:spPr>
           <a:xfrm>
@@ -5160,15 +4893,14 @@
             <a:avLst/>
           </a:prstGeom>
           <a:noFill/>
-          <a:ln/>
-        </p:spPr>
-        <p:txBody>
-          <a:bodyPr wrap="square" rtlCol="0" anchor="ctr">
-            <a:normAutofit/>
-          </a:bodyPr>
-          <a:lstStyle/>
-          <a:p>
-            <a:pPr algn="l" indent="0" marL="0">
+        </p:spPr>
+        <p:txBody>
+          <a:bodyPr wrap="square" rtlCol="0" anchor="ctr">
+            <a:normAutofit/>
+          </a:bodyPr>
+          <a:lstStyle/>
+          <a:p>
+            <a:pPr marL="0" indent="0" algn="l">
               <a:buNone/>
             </a:pPr>
             <a:r>
@@ -5176,11 +4908,11 @@
                 <a:solidFill>
                   <a:srgbClr val="1A1A2E"/>
                 </a:solidFill>
-                <a:latin typeface="Microsoft YaHei" pitchFamily="34" charset="0"/>
-                <a:ea typeface="Microsoft YaHei" pitchFamily="34" charset="-122"/>
-                <a:cs typeface="Microsoft YaHei" pitchFamily="34" charset="-120"/>
-              </a:rPr>
-              <a:t>一、课题来源（选题依据）</a:t>
+                <a:latin typeface="微软雅黑" pitchFamily="34" charset="0"/>
+                <a:ea typeface="微软雅黑" pitchFamily="34" charset="-122"/>
+                <a:cs typeface="微软雅黑" pitchFamily="34" charset="-120"/>
+              </a:rPr>
+              <a:t>一、课题来源</a:t>
             </a:r>
             <a:endParaRPr lang="en-US" sz="1400" dirty="0"/>
           </a:p>
@@ -5190,7 +4922,11 @@
         <p:nvSpPr>
           <p:cNvPr id="8" name="Shape 6"/>
           <p:cNvSpPr/>
-          <p:nvPr/>
+          <p:nvPr>
+            <p:custDataLst>
+              <p:tags r:id="rId4"/>
+            </p:custDataLst>
+          </p:nvPr>
         </p:nvSpPr>
         <p:spPr>
           <a:xfrm>
@@ -5215,7 +4951,11 @@
         <p:nvSpPr>
           <p:cNvPr id="9" name="Text 7"/>
           <p:cNvSpPr/>
-          <p:nvPr/>
+          <p:nvPr>
+            <p:custDataLst>
+              <p:tags r:id="rId5"/>
+            </p:custDataLst>
+          </p:nvPr>
         </p:nvSpPr>
         <p:spPr>
           <a:xfrm>
@@ -5226,15 +4966,14 @@
             <a:avLst/>
           </a:prstGeom>
           <a:noFill/>
-          <a:ln/>
-        </p:spPr>
-        <p:txBody>
-          <a:bodyPr wrap="square" rtlCol="0" anchor="ctr">
-            <a:normAutofit/>
-          </a:bodyPr>
-          <a:lstStyle/>
-          <a:p>
-            <a:pPr algn="ctr" indent="0" marL="0">
+        </p:spPr>
+        <p:txBody>
+          <a:bodyPr wrap="square" rtlCol="0" anchor="ctr">
+            <a:normAutofit/>
+          </a:bodyPr>
+          <a:lstStyle/>
+          <a:p>
+            <a:pPr marL="0" indent="0" algn="ctr">
               <a:buNone/>
             </a:pPr>
             <a:r>
@@ -5242,9 +4981,9 @@
                 <a:solidFill>
                   <a:srgbClr val="1C7293"/>
                 </a:solidFill>
-                <a:latin typeface="Georgia" pitchFamily="34" charset="0"/>
-                <a:ea typeface="Georgia" pitchFamily="34" charset="-122"/>
-                <a:cs typeface="Georgia" pitchFamily="34" charset="-120"/>
+                <a:latin typeface="Georgia" panose="02040502050405090303" pitchFamily="34" charset="0"/>
+                <a:ea typeface="Georgia" panose="02040502050405090303" pitchFamily="34" charset="-122"/>
+                <a:cs typeface="Georgia" panose="02040502050405090303" pitchFamily="34" charset="-120"/>
               </a:rPr>
               <a:t>2</a:t>
             </a:r>
@@ -5256,7 +4995,11 @@
         <p:nvSpPr>
           <p:cNvPr id="10" name="Text 8"/>
           <p:cNvSpPr/>
-          <p:nvPr/>
+          <p:nvPr>
+            <p:custDataLst>
+              <p:tags r:id="rId6"/>
+            </p:custDataLst>
+          </p:nvPr>
         </p:nvSpPr>
         <p:spPr>
           <a:xfrm>
@@ -5267,15 +5010,14 @@
             <a:avLst/>
           </a:prstGeom>
           <a:noFill/>
-          <a:ln/>
-        </p:spPr>
-        <p:txBody>
-          <a:bodyPr wrap="square" rtlCol="0" anchor="ctr">
-            <a:normAutofit/>
-          </a:bodyPr>
-          <a:lstStyle/>
-          <a:p>
-            <a:pPr algn="l" indent="0" marL="0">
+        </p:spPr>
+        <p:txBody>
+          <a:bodyPr wrap="square" rtlCol="0" anchor="ctr">
+            <a:normAutofit/>
+          </a:bodyPr>
+          <a:lstStyle/>
+          <a:p>
+            <a:pPr marL="0" indent="0" algn="l">
               <a:buNone/>
             </a:pPr>
             <a:r>
@@ -5283,9 +5025,9 @@
                 <a:solidFill>
                   <a:srgbClr val="1A1A2E"/>
                 </a:solidFill>
-                <a:latin typeface="Microsoft YaHei" pitchFamily="34" charset="0"/>
-                <a:ea typeface="Microsoft YaHei" pitchFamily="34" charset="-122"/>
-                <a:cs typeface="Microsoft YaHei" pitchFamily="34" charset="-120"/>
+                <a:latin typeface="微软雅黑" pitchFamily="34" charset="0"/>
+                <a:ea typeface="微软雅黑" pitchFamily="34" charset="-122"/>
+                <a:cs typeface="微软雅黑" pitchFamily="34" charset="-120"/>
               </a:rPr>
               <a:t>二、课题研究的目的和意义</a:t>
             </a:r>
@@ -5297,7 +5039,11 @@
         <p:nvSpPr>
           <p:cNvPr id="11" name="Shape 9"/>
           <p:cNvSpPr/>
-          <p:nvPr/>
+          <p:nvPr>
+            <p:custDataLst>
+              <p:tags r:id="rId7"/>
+            </p:custDataLst>
+          </p:nvPr>
         </p:nvSpPr>
         <p:spPr>
           <a:xfrm>
@@ -5322,7 +5068,11 @@
         <p:nvSpPr>
           <p:cNvPr id="12" name="Text 10"/>
           <p:cNvSpPr/>
-          <p:nvPr/>
+          <p:nvPr>
+            <p:custDataLst>
+              <p:tags r:id="rId8"/>
+            </p:custDataLst>
+          </p:nvPr>
         </p:nvSpPr>
         <p:spPr>
           <a:xfrm>
@@ -5333,15 +5083,14 @@
             <a:avLst/>
           </a:prstGeom>
           <a:noFill/>
-          <a:ln/>
-        </p:spPr>
-        <p:txBody>
-          <a:bodyPr wrap="square" rtlCol="0" anchor="ctr">
-            <a:normAutofit/>
-          </a:bodyPr>
-          <a:lstStyle/>
-          <a:p>
-            <a:pPr algn="ctr" indent="0" marL="0">
+        </p:spPr>
+        <p:txBody>
+          <a:bodyPr wrap="square" rtlCol="0" anchor="ctr">
+            <a:normAutofit/>
+          </a:bodyPr>
+          <a:lstStyle/>
+          <a:p>
+            <a:pPr marL="0" indent="0" algn="ctr">
               <a:buNone/>
             </a:pPr>
             <a:r>
@@ -5349,9 +5098,9 @@
                 <a:solidFill>
                   <a:srgbClr val="1C7293"/>
                 </a:solidFill>
-                <a:latin typeface="Georgia" pitchFamily="34" charset="0"/>
-                <a:ea typeface="Georgia" pitchFamily="34" charset="-122"/>
-                <a:cs typeface="Georgia" pitchFamily="34" charset="-120"/>
+                <a:latin typeface="Georgia" panose="02040502050405090303" pitchFamily="34" charset="0"/>
+                <a:ea typeface="Georgia" panose="02040502050405090303" pitchFamily="34" charset="-122"/>
+                <a:cs typeface="Georgia" panose="02040502050405090303" pitchFamily="34" charset="-120"/>
               </a:rPr>
               <a:t>3</a:t>
             </a:r>
@@ -5363,7 +5112,11 @@
         <p:nvSpPr>
           <p:cNvPr id="13" name="Text 11"/>
           <p:cNvSpPr/>
-          <p:nvPr/>
+          <p:nvPr>
+            <p:custDataLst>
+              <p:tags r:id="rId9"/>
+            </p:custDataLst>
+          </p:nvPr>
         </p:nvSpPr>
         <p:spPr>
           <a:xfrm>
@@ -5374,15 +5127,14 @@
             <a:avLst/>
           </a:prstGeom>
           <a:noFill/>
-          <a:ln/>
-        </p:spPr>
-        <p:txBody>
-          <a:bodyPr wrap="square" rtlCol="0" anchor="ctr">
-            <a:normAutofit/>
-          </a:bodyPr>
-          <a:lstStyle/>
-          <a:p>
-            <a:pPr algn="l" indent="0" marL="0">
+        </p:spPr>
+        <p:txBody>
+          <a:bodyPr wrap="square" rtlCol="0" anchor="ctr">
+            <a:normAutofit/>
+          </a:bodyPr>
+          <a:lstStyle/>
+          <a:p>
+            <a:pPr marL="0" indent="0" algn="l">
               <a:buNone/>
             </a:pPr>
             <a:r>
@@ -5390,9 +5142,9 @@
                 <a:solidFill>
                   <a:srgbClr val="1A1A2E"/>
                 </a:solidFill>
-                <a:latin typeface="Microsoft YaHei" pitchFamily="34" charset="0"/>
-                <a:ea typeface="Microsoft YaHei" pitchFamily="34" charset="-122"/>
-                <a:cs typeface="Microsoft YaHei" pitchFamily="34" charset="-120"/>
+                <a:latin typeface="微软雅黑" pitchFamily="34" charset="0"/>
+                <a:ea typeface="微软雅黑" pitchFamily="34" charset="-122"/>
+                <a:cs typeface="微软雅黑" pitchFamily="34" charset="-120"/>
               </a:rPr>
               <a:t>三、国内外研究现状与存在的问题</a:t>
             </a:r>
@@ -5404,7 +5156,11 @@
         <p:nvSpPr>
           <p:cNvPr id="14" name="Shape 12"/>
           <p:cNvSpPr/>
-          <p:nvPr/>
+          <p:nvPr>
+            <p:custDataLst>
+              <p:tags r:id="rId10"/>
+            </p:custDataLst>
+          </p:nvPr>
         </p:nvSpPr>
         <p:spPr>
           <a:xfrm>
@@ -5429,7 +5185,11 @@
         <p:nvSpPr>
           <p:cNvPr id="15" name="Text 13"/>
           <p:cNvSpPr/>
-          <p:nvPr/>
+          <p:nvPr>
+            <p:custDataLst>
+              <p:tags r:id="rId11"/>
+            </p:custDataLst>
+          </p:nvPr>
         </p:nvSpPr>
         <p:spPr>
           <a:xfrm>
@@ -5440,15 +5200,14 @@
             <a:avLst/>
           </a:prstGeom>
           <a:noFill/>
-          <a:ln/>
-        </p:spPr>
-        <p:txBody>
-          <a:bodyPr wrap="square" rtlCol="0" anchor="ctr">
-            <a:normAutofit/>
-          </a:bodyPr>
-          <a:lstStyle/>
-          <a:p>
-            <a:pPr algn="ctr" indent="0" marL="0">
+        </p:spPr>
+        <p:txBody>
+          <a:bodyPr wrap="square" rtlCol="0" anchor="ctr">
+            <a:normAutofit/>
+          </a:bodyPr>
+          <a:lstStyle/>
+          <a:p>
+            <a:pPr marL="0" indent="0" algn="ctr">
               <a:buNone/>
             </a:pPr>
             <a:r>
@@ -5456,9 +5215,9 @@
                 <a:solidFill>
                   <a:srgbClr val="1C7293"/>
                 </a:solidFill>
-                <a:latin typeface="Georgia" pitchFamily="34" charset="0"/>
-                <a:ea typeface="Georgia" pitchFamily="34" charset="-122"/>
-                <a:cs typeface="Georgia" pitchFamily="34" charset="-120"/>
+                <a:latin typeface="Georgia" panose="02040502050405090303" pitchFamily="34" charset="0"/>
+                <a:ea typeface="Georgia" panose="02040502050405090303" pitchFamily="34" charset="-122"/>
+                <a:cs typeface="Georgia" panose="02040502050405090303" pitchFamily="34" charset="-120"/>
               </a:rPr>
               <a:t>4</a:t>
             </a:r>
@@ -5470,7 +5229,11 @@
         <p:nvSpPr>
           <p:cNvPr id="16" name="Text 14"/>
           <p:cNvSpPr/>
-          <p:nvPr/>
+          <p:nvPr>
+            <p:custDataLst>
+              <p:tags r:id="rId12"/>
+            </p:custDataLst>
+          </p:nvPr>
         </p:nvSpPr>
         <p:spPr>
           <a:xfrm>
@@ -5481,15 +5244,14 @@
             <a:avLst/>
           </a:prstGeom>
           <a:noFill/>
-          <a:ln/>
-        </p:spPr>
-        <p:txBody>
-          <a:bodyPr wrap="square" rtlCol="0" anchor="ctr">
-            <a:normAutofit/>
-          </a:bodyPr>
-          <a:lstStyle/>
-          <a:p>
-            <a:pPr algn="l" indent="0" marL="0">
+        </p:spPr>
+        <p:txBody>
+          <a:bodyPr wrap="square" rtlCol="0" anchor="ctr">
+            <a:normAutofit/>
+          </a:bodyPr>
+          <a:lstStyle/>
+          <a:p>
+            <a:pPr marL="0" indent="0" algn="l">
               <a:buNone/>
             </a:pPr>
             <a:r>
@@ -5497,9 +5259,9 @@
                 <a:solidFill>
                   <a:srgbClr val="1A1A2E"/>
                 </a:solidFill>
-                <a:latin typeface="Microsoft YaHei" pitchFamily="34" charset="0"/>
-                <a:ea typeface="Microsoft YaHei" pitchFamily="34" charset="-122"/>
-                <a:cs typeface="Microsoft YaHei" pitchFamily="34" charset="-120"/>
+                <a:latin typeface="微软雅黑" pitchFamily="34" charset="0"/>
+                <a:ea typeface="微软雅黑" pitchFamily="34" charset="-122"/>
+                <a:cs typeface="微软雅黑" pitchFamily="34" charset="-120"/>
               </a:rPr>
               <a:t>四、研究内容和拟解决的关键问题</a:t>
             </a:r>
@@ -5511,7 +5273,11 @@
         <p:nvSpPr>
           <p:cNvPr id="17" name="Shape 15"/>
           <p:cNvSpPr/>
-          <p:nvPr/>
+          <p:nvPr>
+            <p:custDataLst>
+              <p:tags r:id="rId13"/>
+            </p:custDataLst>
+          </p:nvPr>
         </p:nvSpPr>
         <p:spPr>
           <a:xfrm>
@@ -5536,7 +5302,11 @@
         <p:nvSpPr>
           <p:cNvPr id="18" name="Text 16"/>
           <p:cNvSpPr/>
-          <p:nvPr/>
+          <p:nvPr>
+            <p:custDataLst>
+              <p:tags r:id="rId14"/>
+            </p:custDataLst>
+          </p:nvPr>
         </p:nvSpPr>
         <p:spPr>
           <a:xfrm>
@@ -5547,15 +5317,14 @@
             <a:avLst/>
           </a:prstGeom>
           <a:noFill/>
-          <a:ln/>
-        </p:spPr>
-        <p:txBody>
-          <a:bodyPr wrap="square" rtlCol="0" anchor="ctr">
-            <a:normAutofit/>
-          </a:bodyPr>
-          <a:lstStyle/>
-          <a:p>
-            <a:pPr algn="ctr" indent="0" marL="0">
+        </p:spPr>
+        <p:txBody>
+          <a:bodyPr wrap="square" rtlCol="0" anchor="ctr">
+            <a:normAutofit/>
+          </a:bodyPr>
+          <a:lstStyle/>
+          <a:p>
+            <a:pPr marL="0" indent="0" algn="ctr">
               <a:buNone/>
             </a:pPr>
             <a:r>
@@ -5563,9 +5332,9 @@
                 <a:solidFill>
                   <a:srgbClr val="1C7293"/>
                 </a:solidFill>
-                <a:latin typeface="Georgia" pitchFamily="34" charset="0"/>
-                <a:ea typeface="Georgia" pitchFamily="34" charset="-122"/>
-                <a:cs typeface="Georgia" pitchFamily="34" charset="-120"/>
+                <a:latin typeface="Georgia" panose="02040502050405090303" pitchFamily="34" charset="0"/>
+                <a:ea typeface="Georgia" panose="02040502050405090303" pitchFamily="34" charset="-122"/>
+                <a:cs typeface="Georgia" panose="02040502050405090303" pitchFamily="34" charset="-120"/>
               </a:rPr>
               <a:t>5</a:t>
             </a:r>
@@ -5577,7 +5346,11 @@
         <p:nvSpPr>
           <p:cNvPr id="19" name="Text 17"/>
           <p:cNvSpPr/>
-          <p:nvPr/>
+          <p:nvPr>
+            <p:custDataLst>
+              <p:tags r:id="rId15"/>
+            </p:custDataLst>
+          </p:nvPr>
         </p:nvSpPr>
         <p:spPr>
           <a:xfrm>
@@ -5588,15 +5361,14 @@
             <a:avLst/>
           </a:prstGeom>
           <a:noFill/>
-          <a:ln/>
-        </p:spPr>
-        <p:txBody>
-          <a:bodyPr wrap="square" rtlCol="0" anchor="ctr">
-            <a:normAutofit/>
-          </a:bodyPr>
-          <a:lstStyle/>
-          <a:p>
-            <a:pPr algn="l" indent="0" marL="0">
+        </p:spPr>
+        <p:txBody>
+          <a:bodyPr wrap="square" rtlCol="0" anchor="ctr">
+            <a:normAutofit/>
+          </a:bodyPr>
+          <a:lstStyle/>
+          <a:p>
+            <a:pPr marL="0" indent="0" algn="l">
               <a:buNone/>
             </a:pPr>
             <a:r>
@@ -5604,9 +5376,9 @@
                 <a:solidFill>
                   <a:srgbClr val="1A1A2E"/>
                 </a:solidFill>
-                <a:latin typeface="Microsoft YaHei" pitchFamily="34" charset="0"/>
-                <a:ea typeface="Microsoft YaHei" pitchFamily="34" charset="-122"/>
-                <a:cs typeface="Microsoft YaHei" pitchFamily="34" charset="-120"/>
+                <a:latin typeface="微软雅黑" pitchFamily="34" charset="0"/>
+                <a:ea typeface="微软雅黑" pitchFamily="34" charset="-122"/>
+                <a:cs typeface="微软雅黑" pitchFamily="34" charset="-120"/>
               </a:rPr>
               <a:t>五、研究方法与技术路线</a:t>
             </a:r>
@@ -5618,7 +5390,11 @@
         <p:nvSpPr>
           <p:cNvPr id="20" name="Shape 18"/>
           <p:cNvSpPr/>
-          <p:nvPr/>
+          <p:nvPr>
+            <p:custDataLst>
+              <p:tags r:id="rId16"/>
+            </p:custDataLst>
+          </p:nvPr>
         </p:nvSpPr>
         <p:spPr>
           <a:xfrm>
@@ -5643,7 +5419,11 @@
         <p:nvSpPr>
           <p:cNvPr id="21" name="Text 19"/>
           <p:cNvSpPr/>
-          <p:nvPr/>
+          <p:nvPr>
+            <p:custDataLst>
+              <p:tags r:id="rId17"/>
+            </p:custDataLst>
+          </p:nvPr>
         </p:nvSpPr>
         <p:spPr>
           <a:xfrm>
@@ -5654,15 +5434,14 @@
             <a:avLst/>
           </a:prstGeom>
           <a:noFill/>
-          <a:ln/>
-        </p:spPr>
-        <p:txBody>
-          <a:bodyPr wrap="square" rtlCol="0" anchor="ctr">
-            <a:normAutofit/>
-          </a:bodyPr>
-          <a:lstStyle/>
-          <a:p>
-            <a:pPr algn="ctr" indent="0" marL="0">
+        </p:spPr>
+        <p:txBody>
+          <a:bodyPr wrap="square" rtlCol="0" anchor="ctr">
+            <a:normAutofit/>
+          </a:bodyPr>
+          <a:lstStyle/>
+          <a:p>
+            <a:pPr marL="0" indent="0" algn="ctr">
               <a:buNone/>
             </a:pPr>
             <a:r>
@@ -5670,9 +5449,9 @@
                 <a:solidFill>
                   <a:srgbClr val="1C7293"/>
                 </a:solidFill>
-                <a:latin typeface="Georgia" pitchFamily="34" charset="0"/>
-                <a:ea typeface="Georgia" pitchFamily="34" charset="-122"/>
-                <a:cs typeface="Georgia" pitchFamily="34" charset="-120"/>
+                <a:latin typeface="Georgia" panose="02040502050405090303" pitchFamily="34" charset="0"/>
+                <a:ea typeface="Georgia" panose="02040502050405090303" pitchFamily="34" charset="-122"/>
+                <a:cs typeface="Georgia" panose="02040502050405090303" pitchFamily="34" charset="-120"/>
               </a:rPr>
               <a:t>6</a:t>
             </a:r>
@@ -5684,7 +5463,11 @@
         <p:nvSpPr>
           <p:cNvPr id="22" name="Text 20"/>
           <p:cNvSpPr/>
-          <p:nvPr/>
+          <p:nvPr>
+            <p:custDataLst>
+              <p:tags r:id="rId18"/>
+            </p:custDataLst>
+          </p:nvPr>
         </p:nvSpPr>
         <p:spPr>
           <a:xfrm>
@@ -5695,15 +5478,14 @@
             <a:avLst/>
           </a:prstGeom>
           <a:noFill/>
-          <a:ln/>
-        </p:spPr>
-        <p:txBody>
-          <a:bodyPr wrap="square" rtlCol="0" anchor="ctr">
-            <a:normAutofit/>
-          </a:bodyPr>
-          <a:lstStyle/>
-          <a:p>
-            <a:pPr algn="l" indent="0" marL="0">
+        </p:spPr>
+        <p:txBody>
+          <a:bodyPr wrap="square" rtlCol="0" anchor="ctr">
+            <a:normAutofit/>
+          </a:bodyPr>
+          <a:lstStyle/>
+          <a:p>
+            <a:pPr marL="0" indent="0" algn="l">
               <a:buNone/>
             </a:pPr>
             <a:r>
@@ -5711,9 +5493,9 @@
                 <a:solidFill>
                   <a:srgbClr val="1A1A2E"/>
                 </a:solidFill>
-                <a:latin typeface="Microsoft YaHei" pitchFamily="34" charset="0"/>
-                <a:ea typeface="Microsoft YaHei" pitchFamily="34" charset="-122"/>
-                <a:cs typeface="Microsoft YaHei" pitchFamily="34" charset="-120"/>
+                <a:latin typeface="微软雅黑" pitchFamily="34" charset="0"/>
+                <a:ea typeface="微软雅黑" pitchFamily="34" charset="-122"/>
+                <a:cs typeface="微软雅黑" pitchFamily="34" charset="-120"/>
               </a:rPr>
               <a:t>六、预期研究成果和创新点</a:t>
             </a:r>
@@ -5725,7 +5507,11 @@
         <p:nvSpPr>
           <p:cNvPr id="23" name="Shape 21"/>
           <p:cNvSpPr/>
-          <p:nvPr/>
+          <p:nvPr>
+            <p:custDataLst>
+              <p:tags r:id="rId19"/>
+            </p:custDataLst>
+          </p:nvPr>
         </p:nvSpPr>
         <p:spPr>
           <a:xfrm>
@@ -5750,7 +5536,11 @@
         <p:nvSpPr>
           <p:cNvPr id="24" name="Text 22"/>
           <p:cNvSpPr/>
-          <p:nvPr/>
+          <p:nvPr>
+            <p:custDataLst>
+              <p:tags r:id="rId20"/>
+            </p:custDataLst>
+          </p:nvPr>
         </p:nvSpPr>
         <p:spPr>
           <a:xfrm>
@@ -5761,15 +5551,14 @@
             <a:avLst/>
           </a:prstGeom>
           <a:noFill/>
-          <a:ln/>
-        </p:spPr>
-        <p:txBody>
-          <a:bodyPr wrap="square" rtlCol="0" anchor="ctr">
-            <a:normAutofit/>
-          </a:bodyPr>
-          <a:lstStyle/>
-          <a:p>
-            <a:pPr algn="ctr" indent="0" marL="0">
+        </p:spPr>
+        <p:txBody>
+          <a:bodyPr wrap="square" rtlCol="0" anchor="ctr">
+            <a:normAutofit/>
+          </a:bodyPr>
+          <a:lstStyle/>
+          <a:p>
+            <a:pPr marL="0" indent="0" algn="ctr">
               <a:buNone/>
             </a:pPr>
             <a:r>
@@ -5777,9 +5566,9 @@
                 <a:solidFill>
                   <a:srgbClr val="1C7293"/>
                 </a:solidFill>
-                <a:latin typeface="Georgia" pitchFamily="34" charset="0"/>
-                <a:ea typeface="Georgia" pitchFamily="34" charset="-122"/>
-                <a:cs typeface="Georgia" pitchFamily="34" charset="-120"/>
+                <a:latin typeface="Georgia" panose="02040502050405090303" pitchFamily="34" charset="0"/>
+                <a:ea typeface="Georgia" panose="02040502050405090303" pitchFamily="34" charset="-122"/>
+                <a:cs typeface="Georgia" panose="02040502050405090303" pitchFamily="34" charset="-120"/>
               </a:rPr>
               <a:t>7</a:t>
             </a:r>
@@ -5791,7 +5580,11 @@
         <p:nvSpPr>
           <p:cNvPr id="25" name="Text 23"/>
           <p:cNvSpPr/>
-          <p:nvPr/>
+          <p:nvPr>
+            <p:custDataLst>
+              <p:tags r:id="rId21"/>
+            </p:custDataLst>
+          </p:nvPr>
         </p:nvSpPr>
         <p:spPr>
           <a:xfrm>
@@ -5802,15 +5595,14 @@
             <a:avLst/>
           </a:prstGeom>
           <a:noFill/>
-          <a:ln/>
-        </p:spPr>
-        <p:txBody>
-          <a:bodyPr wrap="square" rtlCol="0" anchor="ctr">
-            <a:normAutofit/>
-          </a:bodyPr>
-          <a:lstStyle/>
-          <a:p>
-            <a:pPr algn="l" indent="0" marL="0">
+        </p:spPr>
+        <p:txBody>
+          <a:bodyPr wrap="square" rtlCol="0" anchor="ctr">
+            <a:normAutofit/>
+          </a:bodyPr>
+          <a:lstStyle/>
+          <a:p>
+            <a:pPr marL="0" indent="0" algn="l">
               <a:buNone/>
             </a:pPr>
             <a:r>
@@ -5818,9 +5610,9 @@
                 <a:solidFill>
                   <a:srgbClr val="1A1A2E"/>
                 </a:solidFill>
-                <a:latin typeface="Microsoft YaHei" pitchFamily="34" charset="0"/>
-                <a:ea typeface="Microsoft YaHei" pitchFamily="34" charset="-122"/>
-                <a:cs typeface="Microsoft YaHei" pitchFamily="34" charset="-120"/>
+                <a:latin typeface="微软雅黑" pitchFamily="34" charset="0"/>
+                <a:ea typeface="微软雅黑" pitchFamily="34" charset="-122"/>
+                <a:cs typeface="微软雅黑" pitchFamily="34" charset="-120"/>
               </a:rPr>
               <a:t>七、研究进度安排</a:t>
             </a:r>
@@ -5838,12 +5630,13 @@
 
 <file path=ppt/slides/slide3.xml><?xml version="1.0" encoding="utf-8"?>
 <p:sld xmlns:a="http://schemas.openxmlformats.org/drawingml/2006/main" xmlns:r="http://schemas.openxmlformats.org/officeDocument/2006/relationships" xmlns:p="http://schemas.openxmlformats.org/presentationml/2006/main">
-  <p:cSld name="Slide 3">
+  <p:cSld>
     <p:bg>
       <p:bgPr>
         <a:solidFill>
           <a:srgbClr val="FFFFFF"/>
         </a:solidFill>
+        <a:effectLst/>
       </p:bgPr>
     </p:bg>
     <p:spTree>
@@ -5877,7 +5670,6 @@
           <a:solidFill>
             <a:srgbClr val="065A82"/>
           </a:solidFill>
-          <a:ln/>
         </p:spPr>
       </p:sp>
       <p:sp>
@@ -5895,15 +5687,14 @@
             <a:avLst/>
           </a:prstGeom>
           <a:noFill/>
-          <a:ln/>
-        </p:spPr>
-        <p:txBody>
-          <a:bodyPr wrap="square" rtlCol="0" anchor="ctr">
-            <a:normAutofit/>
-          </a:bodyPr>
-          <a:lstStyle/>
-          <a:p>
-            <a:pPr algn="l" indent="0" marL="0">
+        </p:spPr>
+        <p:txBody>
+          <a:bodyPr wrap="square" rtlCol="0" anchor="ctr">
+            <a:normAutofit/>
+          </a:bodyPr>
+          <a:lstStyle/>
+          <a:p>
+            <a:pPr marL="0" indent="0" algn="l">
               <a:buNone/>
             </a:pPr>
             <a:r>
@@ -5911,9 +5702,9 @@
                 <a:solidFill>
                   <a:srgbClr val="FFFFFF"/>
                 </a:solidFill>
-                <a:latin typeface="Songti SC" pitchFamily="34" charset="0"/>
-                <a:ea typeface="Songti SC" pitchFamily="34" charset="-122"/>
-                <a:cs typeface="Songti SC" pitchFamily="34" charset="-120"/>
+                <a:latin typeface="Songti SC" panose="02010800040101010101" pitchFamily="34" charset="-122"/>
+                <a:ea typeface="Songti SC" panose="02010800040101010101" pitchFamily="34" charset="-122"/>
+                <a:cs typeface="Songti SC" panose="02010800040101010101" pitchFamily="34" charset="-120"/>
               </a:rPr>
               <a:t>一、课题来源（选题依据）</a:t>
             </a:r>
@@ -5936,15 +5727,14 @@
             <a:avLst/>
           </a:prstGeom>
           <a:noFill/>
-          <a:ln/>
-        </p:spPr>
-        <p:txBody>
-          <a:bodyPr wrap="square" rtlCol="0" anchor="ctr">
-            <a:normAutofit/>
-          </a:bodyPr>
-          <a:lstStyle/>
-          <a:p>
-            <a:pPr algn="l" indent="0" marL="0">
+        </p:spPr>
+        <p:txBody>
+          <a:bodyPr wrap="square" rtlCol="0" anchor="ctr">
+            <a:normAutofit/>
+          </a:bodyPr>
+          <a:lstStyle/>
+          <a:p>
+            <a:pPr marL="0" indent="0" algn="l">
               <a:buNone/>
             </a:pPr>
             <a:r>
@@ -5952,9 +5742,9 @@
                 <a:solidFill>
                   <a:srgbClr val="B0D0E0"/>
                 </a:solidFill>
-                <a:latin typeface="Microsoft YaHei" pitchFamily="34" charset="0"/>
-                <a:ea typeface="Microsoft YaHei" pitchFamily="34" charset="-122"/>
-                <a:cs typeface="Microsoft YaHei" pitchFamily="34" charset="-120"/>
+                <a:latin typeface="微软雅黑" pitchFamily="34" charset="0"/>
+                <a:ea typeface="微软雅黑" pitchFamily="34" charset="-122"/>
+                <a:cs typeface="微软雅黑" pitchFamily="34" charset="-120"/>
               </a:rPr>
               <a:t>Origin of the Research Topic</a:t>
             </a:r>
@@ -5964,7 +5754,7 @@
       </p:sp>
       <p:pic>
         <p:nvPicPr>
-          <p:cNvPr id="5" name="Image 0" descr="/Users/ethanlin/.trae-cn/work/6a5af1bd2c266e811f3f6f8b/images/image-neuron_4x3.jpg">    </p:cNvPr>
+          <p:cNvPr id="5" name="Image 0" descr="/Users/ethanlin/.trae-cn/work/6a5af1bd2c266e811f3f6f8b/images/image-neuron_4x3.jpg"/>
           <p:cNvPicPr>
             <a:picLocks noChangeAspect="1"/>
           </p:cNvPicPr>
@@ -5972,8 +5762,10 @@
         </p:nvPicPr>
         <p:blipFill>
           <a:blip r:embed="rId1"/>
-          <a:srcRect l="0" r="0" t="0" b="0"/>
-          <a:stretch/>
+          <a:srcRect/>
+          <a:stretch>
+            <a:fillRect/>
+          </a:stretch>
         </p:blipFill>
         <p:spPr>
           <a:xfrm>
@@ -6025,15 +5817,14 @@
             <a:avLst/>
           </a:prstGeom>
           <a:noFill/>
-          <a:ln/>
-        </p:spPr>
-        <p:txBody>
-          <a:bodyPr wrap="square" rtlCol="0" anchor="ctr">
-            <a:normAutofit/>
-          </a:bodyPr>
-          <a:lstStyle/>
-          <a:p>
-            <a:pPr indent="0" marL="0">
+        </p:spPr>
+        <p:txBody>
+          <a:bodyPr wrap="square" rtlCol="0" anchor="ctr">
+            <a:normAutofit/>
+          </a:bodyPr>
+          <a:lstStyle/>
+          <a:p>
+            <a:pPr marL="0" indent="0">
               <a:buNone/>
             </a:pPr>
             <a:r>
@@ -6041,9 +5832,9 @@
                 <a:solidFill>
                   <a:srgbClr val="065A82"/>
                 </a:solidFill>
-                <a:latin typeface="Microsoft YaHei" pitchFamily="34" charset="0"/>
-                <a:ea typeface="Microsoft YaHei" pitchFamily="34" charset="-122"/>
-                <a:cs typeface="Microsoft YaHei" pitchFamily="34" charset="-120"/>
+                <a:latin typeface="微软雅黑" pitchFamily="34" charset="0"/>
+                <a:ea typeface="微软雅黑" pitchFamily="34" charset="-122"/>
+                <a:cs typeface="微软雅黑" pitchFamily="34" charset="-120"/>
               </a:rPr>
               <a:t>选题缘起</a:t>
             </a:r>
@@ -6066,7 +5857,6 @@
             <a:avLst/>
           </a:prstGeom>
           <a:noFill/>
-          <a:ln/>
         </p:spPr>
         <p:txBody>
           <a:bodyPr wrap="square" rtlCol="0" anchor="t">
@@ -6074,7 +5864,7 @@
           </a:bodyPr>
           <a:lstStyle/>
           <a:p>
-            <a:pPr algn="l" indent="0" marL="0">
+            <a:pPr marL="0" indent="0" algn="l">
               <a:lnSpc>
                 <a:spcPct val="110000"/>
               </a:lnSpc>
@@ -6085,114 +5875,84 @@
                 <a:solidFill>
                   <a:srgbClr val="1A1A2E"/>
                 </a:solidFill>
-                <a:latin typeface="Microsoft YaHei" pitchFamily="34" charset="0"/>
-                <a:ea typeface="Microsoft YaHei" pitchFamily="34" charset="-122"/>
-                <a:cs typeface="Microsoft YaHei" pitchFamily="34" charset="-120"/>
+                <a:latin typeface="微软雅黑" pitchFamily="34" charset="0"/>
+                <a:ea typeface="微软雅黑" pitchFamily="34" charset="-122"/>
+                <a:cs typeface="微软雅黑" pitchFamily="34" charset="-120"/>
               </a:rPr>
               <a:t>在课题组学习中，我先后学习了生物神经元（单元一）、ANN算法（单元二、三）和数字电路MAC单元（单元四至六）。
 </a:t>
             </a:r>
-            <a:pPr algn="l" indent="0" marL="0">
+            <a:r>
+              <a:rPr lang="en-US" sz="1000" dirty="0">
+                <a:solidFill>
+                  <a:srgbClr val="1A1A2E"/>
+                </a:solidFill>
+                <a:latin typeface="微软雅黑" pitchFamily="34" charset="0"/>
+                <a:ea typeface="微软雅黑" pitchFamily="34" charset="-122"/>
+                <a:cs typeface="微软雅黑" pitchFamily="34" charset="-120"/>
+              </a:rPr>
+              <a:t>单元一课堂上，老师提到：</a:t>
+            </a:r>
+            <a:r>
+              <a:rPr lang="en-US" sz="1000" b="1" dirty="0">
+                <a:solidFill>
+                  <a:srgbClr val="1C7293"/>
+                </a:solidFill>
+                <a:latin typeface="微软雅黑" pitchFamily="34" charset="0"/>
+                <a:ea typeface="微软雅黑" pitchFamily="34" charset="-122"/>
+                <a:cs typeface="微软雅黑" pitchFamily="34" charset="-120"/>
+              </a:rPr>
+              <a:t>"SNN比ANN功耗更低，是前沿方向"</a:t>
+            </a:r>
+            <a:r>
+              <a:rPr lang="en-US" sz="1000" dirty="0">
+                <a:solidFill>
+                  <a:srgbClr val="1A1A2E"/>
+                </a:solidFill>
+                <a:latin typeface="微软雅黑" pitchFamily="34" charset="0"/>
+                <a:ea typeface="微软雅黑" pitchFamily="34" charset="-122"/>
+                <a:cs typeface="微软雅黑" pitchFamily="34" charset="-120"/>
+              </a:rPr>
+              <a:t>。这句话引发了我的好奇——
+</a:t>
+            </a:r>
+            <a:r>
+              <a:rPr lang="en-US" sz="1100" b="1" dirty="0">
+                <a:solidFill>
+                  <a:srgbClr val="00B4D8"/>
+                </a:solidFill>
+                <a:latin typeface="微软雅黑" pitchFamily="34" charset="0"/>
+                <a:ea typeface="微软雅黑" pitchFamily="34" charset="-122"/>
+                <a:cs typeface="微软雅黑" pitchFamily="34" charset="-120"/>
+              </a:rPr>
+              <a:t>SNN到底能省多少电？代价是什么？</a:t>
+            </a:r>
+            <a:endParaRPr lang="en-US" sz="1000" dirty="0"/>
+          </a:p>
+          <a:p>
+            <a:pPr marL="0" indent="0" algn="l">
               <a:lnSpc>
                 <a:spcPct val="110000"/>
               </a:lnSpc>
               <a:buNone/>
             </a:pPr>
-            <a:r>
-              <a:rPr lang="en-US" sz="1000" dirty="0">
-                <a:solidFill>
-                  <a:srgbClr val="1A1A2E"/>
-                </a:solidFill>
-                <a:latin typeface="Microsoft YaHei" pitchFamily="34" charset="0"/>
-                <a:ea typeface="Microsoft YaHei" pitchFamily="34" charset="-122"/>
-                <a:cs typeface="Microsoft YaHei" pitchFamily="34" charset="-120"/>
-              </a:rPr>
-              <a:t>单元一课堂上，老师提到：</a:t>
-            </a:r>
-            <a:pPr algn="l" indent="0" marL="0">
+            <a:endParaRPr lang="en-US" sz="1000" dirty="0"/>
+          </a:p>
+          <a:p>
+            <a:pPr marL="0" indent="0" algn="l">
               <a:lnSpc>
                 <a:spcPct val="110000"/>
               </a:lnSpc>
               <a:buNone/>
             </a:pPr>
             <a:r>
-              <a:rPr lang="en-US" sz="1000" b="1" dirty="0">
-                <a:solidFill>
-                  <a:srgbClr val="1C7293"/>
-                </a:solidFill>
-                <a:latin typeface="Microsoft YaHei" pitchFamily="34" charset="0"/>
-                <a:ea typeface="Microsoft YaHei" pitchFamily="34" charset="-122"/>
-                <a:cs typeface="Microsoft YaHei" pitchFamily="34" charset="-120"/>
-              </a:rPr>
-              <a:t>"SNN比ANN功耗更低，是前沿方向"</a:t>
-            </a:r>
-            <a:pPr algn="l" indent="0" marL="0">
-              <a:lnSpc>
-                <a:spcPct val="110000"/>
-              </a:lnSpc>
-              <a:buNone/>
-            </a:pPr>
-            <a:r>
               <a:rPr lang="en-US" sz="1000" dirty="0">
                 <a:solidFill>
                   <a:srgbClr val="1A1A2E"/>
                 </a:solidFill>
-                <a:latin typeface="Microsoft YaHei" pitchFamily="34" charset="0"/>
-                <a:ea typeface="Microsoft YaHei" pitchFamily="34" charset="-122"/>
-                <a:cs typeface="Microsoft YaHei" pitchFamily="34" charset="-120"/>
-              </a:rPr>
-              <a:t>。这句话引发了我的好奇——
-</a:t>
-            </a:r>
-            <a:pPr algn="l" indent="0" marL="0">
-              <a:lnSpc>
-                <a:spcPct val="110000"/>
-              </a:lnSpc>
-              <a:buNone/>
-            </a:pPr>
-            <a:r>
-              <a:rPr lang="en-US" sz="1100" b="1" dirty="0">
-                <a:solidFill>
-                  <a:srgbClr val="00B4D8"/>
-                </a:solidFill>
-                <a:latin typeface="Microsoft YaHei" pitchFamily="34" charset="0"/>
-                <a:ea typeface="Microsoft YaHei" pitchFamily="34" charset="-122"/>
-                <a:cs typeface="Microsoft YaHei" pitchFamily="34" charset="-120"/>
-              </a:rPr>
-              <a:t>SNN到底能省多少电？代价是什么？</a:t>
-            </a:r>
-            <a:pPr algn="l" indent="0" marL="0">
-              <a:lnSpc>
-                <a:spcPct val="110000"/>
-              </a:lnSpc>
-              <a:buNone/>
-            </a:pPr>
-            <a:endParaRPr lang="en-US" sz="1000" dirty="0"/>
-          </a:p>
-          <a:p>
-            <a:pPr algn="l" indent="0" marL="0">
-              <a:lnSpc>
-                <a:spcPct val="110000"/>
-              </a:lnSpc>
-              <a:buNone/>
-            </a:pPr>
-            <a:endParaRPr lang="en-US" sz="1000" dirty="0"/>
-          </a:p>
-          <a:p>
-            <a:pPr algn="l" indent="0" marL="0">
-              <a:lnSpc>
-                <a:spcPct val="110000"/>
-              </a:lnSpc>
-              <a:buNone/>
-            </a:pPr>
-            <a:r>
-              <a:rPr lang="en-US" sz="1000" dirty="0">
-                <a:solidFill>
-                  <a:srgbClr val="1A1A2E"/>
-                </a:solidFill>
-                <a:latin typeface="Microsoft YaHei" pitchFamily="34" charset="0"/>
-                <a:ea typeface="Microsoft YaHei" pitchFamily="34" charset="-122"/>
-                <a:cs typeface="Microsoft YaHei" pitchFamily="34" charset="-120"/>
+                <a:latin typeface="微软雅黑" pitchFamily="34" charset="0"/>
+                <a:ea typeface="微软雅黑" pitchFamily="34" charset="-122"/>
+                <a:cs typeface="微软雅黑" pitchFamily="34" charset="-120"/>
               </a:rPr>
               <a:t>查阅文献发现，"SNN更省电"已有大量研究，但我想通过自建电路亲自验证这个结论。</a:t>
             </a:r>
@@ -6210,12 +5970,13 @@
 
 <file path=ppt/slides/slide4.xml><?xml version="1.0" encoding="utf-8"?>
 <p:sld xmlns:a="http://schemas.openxmlformats.org/drawingml/2006/main" xmlns:r="http://schemas.openxmlformats.org/officeDocument/2006/relationships" xmlns:p="http://schemas.openxmlformats.org/presentationml/2006/main">
-  <p:cSld name="Slide 4">
+  <p:cSld>
     <p:bg>
       <p:bgPr>
         <a:solidFill>
           <a:srgbClr val="FFFFFF"/>
         </a:solidFill>
+        <a:effectLst/>
       </p:bgPr>
     </p:bg>
     <p:spTree>
@@ -6249,7 +6010,6 @@
           <a:solidFill>
             <a:srgbClr val="065A82"/>
           </a:solidFill>
-          <a:ln/>
         </p:spPr>
       </p:sp>
       <p:sp>
@@ -6267,15 +6027,14 @@
             <a:avLst/>
           </a:prstGeom>
           <a:noFill/>
-          <a:ln/>
-        </p:spPr>
-        <p:txBody>
-          <a:bodyPr wrap="square" rtlCol="0" anchor="ctr">
-            <a:normAutofit/>
-          </a:bodyPr>
-          <a:lstStyle/>
-          <a:p>
-            <a:pPr algn="l" indent="0" marL="0">
+        </p:spPr>
+        <p:txBody>
+          <a:bodyPr wrap="square" rtlCol="0" anchor="ctr">
+            <a:normAutofit/>
+          </a:bodyPr>
+          <a:lstStyle/>
+          <a:p>
+            <a:pPr marL="0" indent="0" algn="l">
               <a:buNone/>
             </a:pPr>
             <a:r>
@@ -6283,9 +6042,9 @@
                 <a:solidFill>
                   <a:srgbClr val="FFFFFF"/>
                 </a:solidFill>
-                <a:latin typeface="Songti SC" pitchFamily="34" charset="0"/>
-                <a:ea typeface="Songti SC" pitchFamily="34" charset="-122"/>
-                <a:cs typeface="Songti SC" pitchFamily="34" charset="-120"/>
+                <a:latin typeface="Songti SC" panose="02010800040101010101" pitchFamily="34" charset="-122"/>
+                <a:ea typeface="Songti SC" panose="02010800040101010101" pitchFamily="34" charset="-122"/>
+                <a:cs typeface="Songti SC" panose="02010800040101010101" pitchFamily="34" charset="-120"/>
               </a:rPr>
               <a:t>二、课题研究的目的和意义</a:t>
             </a:r>
@@ -6308,15 +6067,14 @@
             <a:avLst/>
           </a:prstGeom>
           <a:noFill/>
-          <a:ln/>
-        </p:spPr>
-        <p:txBody>
-          <a:bodyPr wrap="square" rtlCol="0" anchor="ctr">
-            <a:normAutofit/>
-          </a:bodyPr>
-          <a:lstStyle/>
-          <a:p>
-            <a:pPr algn="l" indent="0" marL="0">
+        </p:spPr>
+        <p:txBody>
+          <a:bodyPr wrap="square" rtlCol="0" anchor="ctr">
+            <a:normAutofit/>
+          </a:bodyPr>
+          <a:lstStyle/>
+          <a:p>
+            <a:pPr marL="0" indent="0" algn="l">
               <a:buNone/>
             </a:pPr>
             <a:r>
@@ -6324,9 +6082,9 @@
                 <a:solidFill>
                   <a:srgbClr val="B0D0E0"/>
                 </a:solidFill>
-                <a:latin typeface="Microsoft YaHei" pitchFamily="34" charset="0"/>
-                <a:ea typeface="Microsoft YaHei" pitchFamily="34" charset="-122"/>
-                <a:cs typeface="Microsoft YaHei" pitchFamily="34" charset="-120"/>
+                <a:latin typeface="微软雅黑" pitchFamily="34" charset="0"/>
+                <a:ea typeface="微软雅黑" pitchFamily="34" charset="-122"/>
+                <a:cs typeface="微软雅黑" pitchFamily="34" charset="-120"/>
               </a:rPr>
               <a:t>Research Objectives &amp; Significance</a:t>
             </a:r>
@@ -6349,15 +6107,14 @@
             <a:avLst/>
           </a:prstGeom>
           <a:noFill/>
-          <a:ln/>
-        </p:spPr>
-        <p:txBody>
-          <a:bodyPr wrap="square" rtlCol="0" anchor="ctr">
-            <a:normAutofit/>
-          </a:bodyPr>
-          <a:lstStyle/>
-          <a:p>
-            <a:pPr indent="0" marL="0">
+        </p:spPr>
+        <p:txBody>
+          <a:bodyPr wrap="square" rtlCol="0" anchor="ctr">
+            <a:normAutofit/>
+          </a:bodyPr>
+          <a:lstStyle/>
+          <a:p>
+            <a:pPr marL="0" indent="0">
               <a:buNone/>
             </a:pPr>
             <a:r>
@@ -6365,9 +6122,9 @@
                 <a:solidFill>
                   <a:srgbClr val="1C7293"/>
                 </a:solidFill>
-                <a:latin typeface="Microsoft YaHei" pitchFamily="34" charset="0"/>
-                <a:ea typeface="Microsoft YaHei" pitchFamily="34" charset="-122"/>
-                <a:cs typeface="Microsoft YaHei" pitchFamily="34" charset="-120"/>
+                <a:latin typeface="微软雅黑" pitchFamily="34" charset="0"/>
+                <a:ea typeface="微软雅黑" pitchFamily="34" charset="-122"/>
+                <a:cs typeface="微软雅黑" pitchFamily="34" charset="-120"/>
               </a:rPr>
               <a:t>研究目的</a:t>
             </a:r>
@@ -6392,7 +6149,6 @@
           <a:solidFill>
             <a:srgbClr val="1C7293"/>
           </a:solidFill>
-          <a:ln/>
         </p:spPr>
       </p:sp>
       <p:sp>
@@ -6410,15 +6166,14 @@
             <a:avLst/>
           </a:prstGeom>
           <a:noFill/>
-          <a:ln/>
-        </p:spPr>
-        <p:txBody>
-          <a:bodyPr wrap="square" rtlCol="0" anchor="ctr">
-            <a:normAutofit/>
-          </a:bodyPr>
-          <a:lstStyle/>
-          <a:p>
-            <a:pPr algn="ctr" indent="0" marL="0">
+        </p:spPr>
+        <p:txBody>
+          <a:bodyPr wrap="square" rtlCol="0" anchor="ctr">
+            <a:normAutofit/>
+          </a:bodyPr>
+          <a:lstStyle/>
+          <a:p>
+            <a:pPr marL="0" indent="0" algn="ctr">
               <a:buNone/>
             </a:pPr>
             <a:r>
@@ -6448,15 +6203,14 @@
             <a:avLst/>
           </a:prstGeom>
           <a:noFill/>
-          <a:ln/>
-        </p:spPr>
-        <p:txBody>
-          <a:bodyPr wrap="square" rtlCol="0" anchor="ctr">
-            <a:normAutofit/>
-          </a:bodyPr>
-          <a:lstStyle/>
-          <a:p>
-            <a:pPr indent="0" marL="0">
+        </p:spPr>
+        <p:txBody>
+          <a:bodyPr wrap="square" rtlCol="0" anchor="ctr">
+            <a:normAutofit/>
+          </a:bodyPr>
+          <a:lstStyle/>
+          <a:p>
+            <a:pPr marL="0" indent="0">
               <a:buNone/>
             </a:pPr>
             <a:r>
@@ -6464,9 +6218,9 @@
                 <a:solidFill>
                   <a:srgbClr val="065A82"/>
                 </a:solidFill>
-                <a:latin typeface="Microsoft YaHei" pitchFamily="34" charset="0"/>
-                <a:ea typeface="Microsoft YaHei" pitchFamily="34" charset="-122"/>
-                <a:cs typeface="Microsoft YaHei" pitchFamily="34" charset="-120"/>
+                <a:latin typeface="微软雅黑" pitchFamily="34" charset="0"/>
+                <a:ea typeface="微软雅黑" pitchFamily="34" charset="-122"/>
+                <a:cs typeface="微软雅黑" pitchFamily="34" charset="-120"/>
               </a:rPr>
               <a:t>ANN基线</a:t>
             </a:r>
@@ -6489,15 +6243,14 @@
             <a:avLst/>
           </a:prstGeom>
           <a:noFill/>
-          <a:ln/>
-        </p:spPr>
-        <p:txBody>
-          <a:bodyPr wrap="square" rtlCol="0" anchor="ctr">
-            <a:normAutofit/>
-          </a:bodyPr>
-          <a:lstStyle/>
-          <a:p>
-            <a:pPr indent="0" marL="0">
+        </p:spPr>
+        <p:txBody>
+          <a:bodyPr wrap="square" rtlCol="0" anchor="ctr">
+            <a:normAutofit/>
+          </a:bodyPr>
+          <a:lstStyle/>
+          <a:p>
+            <a:pPr marL="0" indent="0">
               <a:buNone/>
             </a:pPr>
             <a:r>
@@ -6505,9 +6258,9 @@
                 <a:solidFill>
                   <a:srgbClr val="1A1A2E"/>
                 </a:solidFill>
-                <a:latin typeface="Microsoft YaHei" pitchFamily="34" charset="0"/>
-                <a:ea typeface="Microsoft YaHei" pitchFamily="34" charset="-122"/>
-                <a:cs typeface="Microsoft YaHei" pitchFamily="34" charset="-120"/>
+                <a:latin typeface="微软雅黑" pitchFamily="34" charset="0"/>
+                <a:ea typeface="微软雅黑" pitchFamily="34" charset="-122"/>
+                <a:cs typeface="微软雅黑" pitchFamily="34" charset="-120"/>
               </a:rPr>
               <a:t>Python手写MLP(784-300-10)，MNIST准确率≥95%</a:t>
             </a:r>
@@ -6532,7 +6285,6 @@
           <a:solidFill>
             <a:srgbClr val="1C7293"/>
           </a:solidFill>
-          <a:ln/>
         </p:spPr>
       </p:sp>
       <p:sp>
@@ -6550,15 +6302,14 @@
             <a:avLst/>
           </a:prstGeom>
           <a:noFill/>
-          <a:ln/>
-        </p:spPr>
-        <p:txBody>
-          <a:bodyPr wrap="square" rtlCol="0" anchor="ctr">
-            <a:normAutofit/>
-          </a:bodyPr>
-          <a:lstStyle/>
-          <a:p>
-            <a:pPr algn="ctr" indent="0" marL="0">
+        </p:spPr>
+        <p:txBody>
+          <a:bodyPr wrap="square" rtlCol="0" anchor="ctr">
+            <a:normAutofit/>
+          </a:bodyPr>
+          <a:lstStyle/>
+          <a:p>
+            <a:pPr marL="0" indent="0" algn="ctr">
               <a:buNone/>
             </a:pPr>
             <a:r>
@@ -6588,15 +6339,14 @@
             <a:avLst/>
           </a:prstGeom>
           <a:noFill/>
-          <a:ln/>
-        </p:spPr>
-        <p:txBody>
-          <a:bodyPr wrap="square" rtlCol="0" anchor="ctr">
-            <a:normAutofit/>
-          </a:bodyPr>
-          <a:lstStyle/>
-          <a:p>
-            <a:pPr indent="0" marL="0">
+        </p:spPr>
+        <p:txBody>
+          <a:bodyPr wrap="square" rtlCol="0" anchor="ctr">
+            <a:normAutofit/>
+          </a:bodyPr>
+          <a:lstStyle/>
+          <a:p>
+            <a:pPr marL="0" indent="0">
               <a:buNone/>
             </a:pPr>
             <a:r>
@@ -6604,9 +6354,9 @@
                 <a:solidFill>
                   <a:srgbClr val="065A82"/>
                 </a:solidFill>
-                <a:latin typeface="Microsoft YaHei" pitchFamily="34" charset="0"/>
-                <a:ea typeface="Microsoft YaHei" pitchFamily="34" charset="-122"/>
-                <a:cs typeface="Microsoft YaHei" pitchFamily="34" charset="-120"/>
+                <a:latin typeface="微软雅黑" pitchFamily="34" charset="0"/>
+                <a:ea typeface="微软雅黑" pitchFamily="34" charset="-122"/>
+                <a:cs typeface="微软雅黑" pitchFamily="34" charset="-120"/>
               </a:rPr>
               <a:t>SNN转换</a:t>
             </a:r>
@@ -6629,15 +6379,14 @@
             <a:avLst/>
           </a:prstGeom>
           <a:noFill/>
-          <a:ln/>
-        </p:spPr>
-        <p:txBody>
-          <a:bodyPr wrap="square" rtlCol="0" anchor="ctr">
-            <a:normAutofit/>
-          </a:bodyPr>
-          <a:lstStyle/>
-          <a:p>
-            <a:pPr indent="0" marL="0">
+        </p:spPr>
+        <p:txBody>
+          <a:bodyPr wrap="square" rtlCol="0" anchor="ctr">
+            <a:normAutofit/>
+          </a:bodyPr>
+          <a:lstStyle/>
+          <a:p>
+            <a:pPr marL="0" indent="0">
               <a:buNone/>
             </a:pPr>
             <a:r>
@@ -6645,9 +6394,9 @@
                 <a:solidFill>
                   <a:srgbClr val="1A1A2E"/>
                 </a:solidFill>
-                <a:latin typeface="Microsoft YaHei" pitchFamily="34" charset="0"/>
-                <a:ea typeface="Microsoft YaHei" pitchFamily="34" charset="-122"/>
-                <a:cs typeface="Microsoft YaHei" pitchFamily="34" charset="-120"/>
+                <a:latin typeface="微软雅黑" pitchFamily="34" charset="0"/>
+                <a:ea typeface="微软雅黑" pitchFamily="34" charset="-122"/>
+                <a:cs typeface="微软雅黑" pitchFamily="34" charset="-120"/>
               </a:rPr>
               <a:t>ANN-to-SNN转换，验证SNN识别能力，准确率≥85%</a:t>
             </a:r>
@@ -6672,7 +6421,6 @@
           <a:solidFill>
             <a:srgbClr val="1C7293"/>
           </a:solidFill>
-          <a:ln/>
         </p:spPr>
       </p:sp>
       <p:sp>
@@ -6690,15 +6438,14 @@
             <a:avLst/>
           </a:prstGeom>
           <a:noFill/>
-          <a:ln/>
-        </p:spPr>
-        <p:txBody>
-          <a:bodyPr wrap="square" rtlCol="0" anchor="ctr">
-            <a:normAutofit/>
-          </a:bodyPr>
-          <a:lstStyle/>
-          <a:p>
-            <a:pPr algn="ctr" indent="0" marL="0">
+        </p:spPr>
+        <p:txBody>
+          <a:bodyPr wrap="square" rtlCol="0" anchor="ctr">
+            <a:normAutofit/>
+          </a:bodyPr>
+          <a:lstStyle/>
+          <a:p>
+            <a:pPr marL="0" indent="0" algn="ctr">
               <a:buNone/>
             </a:pPr>
             <a:r>
@@ -6728,15 +6475,14 @@
             <a:avLst/>
           </a:prstGeom>
           <a:noFill/>
-          <a:ln/>
-        </p:spPr>
-        <p:txBody>
-          <a:bodyPr wrap="square" rtlCol="0" anchor="ctr">
-            <a:normAutofit/>
-          </a:bodyPr>
-          <a:lstStyle/>
-          <a:p>
-            <a:pPr indent="0" marL="0">
+        </p:spPr>
+        <p:txBody>
+          <a:bodyPr wrap="square" rtlCol="0" anchor="ctr">
+            <a:normAutofit/>
+          </a:bodyPr>
+          <a:lstStyle/>
+          <a:p>
+            <a:pPr marL="0" indent="0">
               <a:buNone/>
             </a:pPr>
             <a:r>
@@ -6744,9 +6490,9 @@
                 <a:solidFill>
                   <a:srgbClr val="065A82"/>
                 </a:solidFill>
-                <a:latin typeface="Microsoft YaHei" pitchFamily="34" charset="0"/>
-                <a:ea typeface="Microsoft YaHei" pitchFamily="34" charset="-122"/>
-                <a:cs typeface="Microsoft YaHei" pitchFamily="34" charset="-120"/>
+                <a:latin typeface="微软雅黑" pitchFamily="34" charset="0"/>
+                <a:ea typeface="微软雅黑" pitchFamily="34" charset="-122"/>
+                <a:cs typeface="微软雅黑" pitchFamily="34" charset="-120"/>
               </a:rPr>
               <a:t>硬件电路</a:t>
             </a:r>
@@ -6769,15 +6515,14 @@
             <a:avLst/>
           </a:prstGeom>
           <a:noFill/>
-          <a:ln/>
-        </p:spPr>
-        <p:txBody>
-          <a:bodyPr wrap="square" rtlCol="0" anchor="ctr">
-            <a:normAutofit/>
-          </a:bodyPr>
-          <a:lstStyle/>
-          <a:p>
-            <a:pPr indent="0" marL="0">
+        </p:spPr>
+        <p:txBody>
+          <a:bodyPr wrap="square" rtlCol="0" anchor="ctr">
+            <a:normAutofit/>
+          </a:bodyPr>
+          <a:lstStyle/>
+          <a:p>
+            <a:pPr marL="0" indent="0">
               <a:buNone/>
             </a:pPr>
             <a:r>
@@ -6785,9 +6530,9 @@
                 <a:solidFill>
                   <a:srgbClr val="1A1A2E"/>
                 </a:solidFill>
-                <a:latin typeface="Microsoft YaHei" pitchFamily="34" charset="0"/>
-                <a:ea typeface="Microsoft YaHei" pitchFamily="34" charset="-122"/>
-                <a:cs typeface="Microsoft YaHei" pitchFamily="34" charset="-120"/>
+                <a:latin typeface="微软雅黑" pitchFamily="34" charset="0"/>
+                <a:ea typeface="微软雅黑" pitchFamily="34" charset="-122"/>
+                <a:cs typeface="微软雅黑" pitchFamily="34" charset="-120"/>
               </a:rPr>
               <a:t>Cadence搭建ANN-MAC与SNN-IF电路，提取硬件指标</a:t>
             </a:r>
@@ -6812,7 +6557,6 @@
           <a:solidFill>
             <a:srgbClr val="1C7293"/>
           </a:solidFill>
-          <a:ln/>
         </p:spPr>
       </p:sp>
       <p:sp>
@@ -6830,15 +6574,14 @@
             <a:avLst/>
           </a:prstGeom>
           <a:noFill/>
-          <a:ln/>
-        </p:spPr>
-        <p:txBody>
-          <a:bodyPr wrap="square" rtlCol="0" anchor="ctr">
-            <a:normAutofit/>
-          </a:bodyPr>
-          <a:lstStyle/>
-          <a:p>
-            <a:pPr algn="ctr" indent="0" marL="0">
+        </p:spPr>
+        <p:txBody>
+          <a:bodyPr wrap="square" rtlCol="0" anchor="ctr">
+            <a:normAutofit/>
+          </a:bodyPr>
+          <a:lstStyle/>
+          <a:p>
+            <a:pPr marL="0" indent="0" algn="ctr">
               <a:buNone/>
             </a:pPr>
             <a:r>
@@ -6868,15 +6611,14 @@
             <a:avLst/>
           </a:prstGeom>
           <a:noFill/>
-          <a:ln/>
-        </p:spPr>
-        <p:txBody>
-          <a:bodyPr wrap="square" rtlCol="0" anchor="ctr">
-            <a:normAutofit/>
-          </a:bodyPr>
-          <a:lstStyle/>
-          <a:p>
-            <a:pPr indent="0" marL="0">
+        </p:spPr>
+        <p:txBody>
+          <a:bodyPr wrap="square" rtlCol="0" anchor="ctr">
+            <a:normAutofit/>
+          </a:bodyPr>
+          <a:lstStyle/>
+          <a:p>
+            <a:pPr marL="0" indent="0">
               <a:buNone/>
             </a:pPr>
             <a:r>
@@ -6884,9 +6626,9 @@
                 <a:solidFill>
                   <a:srgbClr val="065A82"/>
                 </a:solidFill>
-                <a:latin typeface="Microsoft YaHei" pitchFamily="34" charset="0"/>
-                <a:ea typeface="Microsoft YaHei" pitchFamily="34" charset="-122"/>
-                <a:cs typeface="Microsoft YaHei" pitchFamily="34" charset="-120"/>
+                <a:latin typeface="微软雅黑" pitchFamily="34" charset="0"/>
+                <a:ea typeface="微软雅黑" pitchFamily="34" charset="-122"/>
+                <a:cs typeface="微软雅黑" pitchFamily="34" charset="-120"/>
               </a:rPr>
               <a:t>对比分析</a:t>
             </a:r>
@@ -6909,15 +6651,14 @@
             <a:avLst/>
           </a:prstGeom>
           <a:noFill/>
-          <a:ln/>
-        </p:spPr>
-        <p:txBody>
-          <a:bodyPr wrap="square" rtlCol="0" anchor="ctr">
-            <a:normAutofit/>
-          </a:bodyPr>
-          <a:lstStyle/>
-          <a:p>
-            <a:pPr indent="0" marL="0">
+        </p:spPr>
+        <p:txBody>
+          <a:bodyPr wrap="square" rtlCol="0" anchor="ctr">
+            <a:normAutofit/>
+          </a:bodyPr>
+          <a:lstStyle/>
+          <a:p>
+            <a:pPr marL="0" indent="0">
               <a:buNone/>
             </a:pPr>
             <a:r>
@@ -6925,9 +6666,9 @@
                 <a:solidFill>
                   <a:srgbClr val="1A1A2E"/>
                 </a:solidFill>
-                <a:latin typeface="Microsoft YaHei" pitchFamily="34" charset="0"/>
-                <a:ea typeface="Microsoft YaHei" pitchFamily="34" charset="-122"/>
-                <a:cs typeface="Microsoft YaHei" pitchFamily="34" charset="-120"/>
+                <a:latin typeface="微软雅黑" pitchFamily="34" charset="0"/>
+                <a:ea typeface="微软雅黑" pitchFamily="34" charset="-122"/>
+                <a:cs typeface="微软雅黑" pitchFamily="34" charset="-120"/>
               </a:rPr>
               <a:t>量化对比两种计算范式的硬件开销差异</a:t>
             </a:r>
@@ -6952,7 +6693,6 @@
           <a:solidFill>
             <a:srgbClr val="1C7293"/>
           </a:solidFill>
-          <a:ln/>
         </p:spPr>
       </p:sp>
       <p:sp>
@@ -6970,15 +6710,14 @@
             <a:avLst/>
           </a:prstGeom>
           <a:noFill/>
-          <a:ln/>
-        </p:spPr>
-        <p:txBody>
-          <a:bodyPr wrap="square" rtlCol="0" anchor="ctr">
-            <a:normAutofit/>
-          </a:bodyPr>
-          <a:lstStyle/>
-          <a:p>
-            <a:pPr algn="ctr" indent="0" marL="0">
+        </p:spPr>
+        <p:txBody>
+          <a:bodyPr wrap="square" rtlCol="0" anchor="ctr">
+            <a:normAutofit/>
+          </a:bodyPr>
+          <a:lstStyle/>
+          <a:p>
+            <a:pPr marL="0" indent="0" algn="ctr">
               <a:buNone/>
             </a:pPr>
             <a:r>
@@ -7008,15 +6747,14 @@
             <a:avLst/>
           </a:prstGeom>
           <a:noFill/>
-          <a:ln/>
-        </p:spPr>
-        <p:txBody>
-          <a:bodyPr wrap="square" rtlCol="0" anchor="ctr">
-            <a:normAutofit/>
-          </a:bodyPr>
-          <a:lstStyle/>
-          <a:p>
-            <a:pPr indent="0" marL="0">
+        </p:spPr>
+        <p:txBody>
+          <a:bodyPr wrap="square" rtlCol="0" anchor="ctr">
+            <a:normAutofit/>
+          </a:bodyPr>
+          <a:lstStyle/>
+          <a:p>
+            <a:pPr marL="0" indent="0">
               <a:buNone/>
             </a:pPr>
             <a:r>
@@ -7024,9 +6762,9 @@
                 <a:solidFill>
                   <a:srgbClr val="065A82"/>
                 </a:solidFill>
-                <a:latin typeface="Microsoft YaHei" pitchFamily="34" charset="0"/>
-                <a:ea typeface="Microsoft YaHei" pitchFamily="34" charset="-122"/>
-                <a:cs typeface="Microsoft YaHei" pitchFamily="34" charset="-120"/>
+                <a:latin typeface="微软雅黑" pitchFamily="34" charset="0"/>
+                <a:ea typeface="微软雅黑" pitchFamily="34" charset="-122"/>
+                <a:cs typeface="微软雅黑" pitchFamily="34" charset="-120"/>
               </a:rPr>
               <a:t>Trade-off</a:t>
             </a:r>
@@ -7049,15 +6787,14 @@
             <a:avLst/>
           </a:prstGeom>
           <a:noFill/>
-          <a:ln/>
-        </p:spPr>
-        <p:txBody>
-          <a:bodyPr wrap="square" rtlCol="0" anchor="ctr">
-            <a:normAutofit/>
-          </a:bodyPr>
-          <a:lstStyle/>
-          <a:p>
-            <a:pPr indent="0" marL="0">
+        </p:spPr>
+        <p:txBody>
+          <a:bodyPr wrap="square" rtlCol="0" anchor="ctr">
+            <a:normAutofit/>
+          </a:bodyPr>
+          <a:lstStyle/>
+          <a:p>
+            <a:pPr marL="0" indent="0">
               <a:buNone/>
             </a:pPr>
             <a:r>
@@ -7065,9 +6802,9 @@
                 <a:solidFill>
                   <a:srgbClr val="1A1A2E"/>
                 </a:solidFill>
-                <a:latin typeface="Microsoft YaHei" pitchFamily="34" charset="0"/>
-                <a:ea typeface="Microsoft YaHei" pitchFamily="34" charset="-122"/>
-                <a:cs typeface="Microsoft YaHei" pitchFamily="34" charset="-120"/>
+                <a:latin typeface="微软雅黑" pitchFamily="34" charset="0"/>
+                <a:ea typeface="微软雅黑" pitchFamily="34" charset="-122"/>
+                <a:cs typeface="微软雅黑" pitchFamily="34" charset="-120"/>
               </a:rPr>
               <a:t>拟合准确率-功耗定量关系曲线（最终结论）</a:t>
             </a:r>
@@ -7092,7 +6829,6 @@
           <a:solidFill>
             <a:srgbClr val="B0C4D8"/>
           </a:solidFill>
-          <a:ln/>
         </p:spPr>
       </p:sp>
       <p:sp>
@@ -7110,15 +6846,14 @@
             <a:avLst/>
           </a:prstGeom>
           <a:noFill/>
-          <a:ln/>
-        </p:spPr>
-        <p:txBody>
-          <a:bodyPr wrap="square" rtlCol="0" anchor="ctr">
-            <a:normAutofit/>
-          </a:bodyPr>
-          <a:lstStyle/>
-          <a:p>
-            <a:pPr indent="0" marL="0">
+        </p:spPr>
+        <p:txBody>
+          <a:bodyPr wrap="square" rtlCol="0" anchor="ctr">
+            <a:normAutofit/>
+          </a:bodyPr>
+          <a:lstStyle/>
+          <a:p>
+            <a:pPr marL="0" indent="0">
               <a:buNone/>
             </a:pPr>
             <a:r>
@@ -7126,9 +6861,9 @@
                 <a:solidFill>
                   <a:srgbClr val="1C7293"/>
                 </a:solidFill>
-                <a:latin typeface="Microsoft YaHei" pitchFamily="34" charset="0"/>
-                <a:ea typeface="Microsoft YaHei" pitchFamily="34" charset="-122"/>
-                <a:cs typeface="Microsoft YaHei" pitchFamily="34" charset="-120"/>
+                <a:latin typeface="微软雅黑" pitchFamily="34" charset="0"/>
+                <a:ea typeface="微软雅黑" pitchFamily="34" charset="-122"/>
+                <a:cs typeface="微软雅黑" pitchFamily="34" charset="-120"/>
               </a:rPr>
               <a:t>研究意义</a:t>
             </a:r>
@@ -7178,7 +6913,6 @@
           <a:solidFill>
             <a:srgbClr val="00B4D8"/>
           </a:solidFill>
-          <a:ln/>
         </p:spPr>
       </p:sp>
       <p:sp>
@@ -7196,15 +6930,14 @@
             <a:avLst/>
           </a:prstGeom>
           <a:noFill/>
-          <a:ln/>
-        </p:spPr>
-        <p:txBody>
-          <a:bodyPr wrap="square" rtlCol="0" anchor="ctr">
-            <a:normAutofit/>
-          </a:bodyPr>
-          <a:lstStyle/>
-          <a:p>
-            <a:pPr indent="0" marL="0">
+        </p:spPr>
+        <p:txBody>
+          <a:bodyPr wrap="square" rtlCol="0" anchor="ctr">
+            <a:normAutofit/>
+          </a:bodyPr>
+          <a:lstStyle/>
+          <a:p>
+            <a:pPr marL="0" indent="0">
               <a:buNone/>
             </a:pPr>
             <a:r>
@@ -7212,9 +6945,9 @@
                 <a:solidFill>
                   <a:srgbClr val="065A82"/>
                 </a:solidFill>
-                <a:latin typeface="Microsoft YaHei" pitchFamily="34" charset="0"/>
-                <a:ea typeface="Microsoft YaHei" pitchFamily="34" charset="-122"/>
-                <a:cs typeface="Microsoft YaHei" pitchFamily="34" charset="-120"/>
+                <a:latin typeface="微软雅黑" pitchFamily="34" charset="0"/>
+                <a:ea typeface="微软雅黑" pitchFamily="34" charset="-122"/>
+                <a:cs typeface="微软雅黑" pitchFamily="34" charset="-120"/>
               </a:rPr>
               <a:t>实证验证</a:t>
             </a:r>
@@ -7237,15 +6970,14 @@
             <a:avLst/>
           </a:prstGeom>
           <a:noFill/>
-          <a:ln/>
-        </p:spPr>
-        <p:txBody>
-          <a:bodyPr wrap="square" rtlCol="0" anchor="ctr">
-            <a:normAutofit/>
-          </a:bodyPr>
-          <a:lstStyle/>
-          <a:p>
-            <a:pPr indent="0" marL="0">
+        </p:spPr>
+        <p:txBody>
+          <a:bodyPr wrap="square" rtlCol="0" anchor="ctr">
+            <a:normAutofit/>
+          </a:bodyPr>
+          <a:lstStyle/>
+          <a:p>
+            <a:pPr marL="0" indent="0">
               <a:lnSpc>
                 <a:spcPct val="110000"/>
               </a:lnSpc>
@@ -7256,16 +6988,16 @@
                 <a:solidFill>
                   <a:srgbClr val="1A1A2E"/>
                 </a:solidFill>
-                <a:latin typeface="Microsoft YaHei" pitchFamily="34" charset="0"/>
-                <a:ea typeface="Microsoft YaHei" pitchFamily="34" charset="-122"/>
-                <a:cs typeface="Microsoft YaHei" pitchFamily="34" charset="-120"/>
+                <a:latin typeface="微软雅黑" pitchFamily="34" charset="0"/>
+                <a:ea typeface="微软雅黑" pitchFamily="34" charset="-122"/>
+                <a:cs typeface="微软雅黑" pitchFamily="34" charset="-120"/>
               </a:rPr>
               <a:t>通过自建电路实测功耗</a:t>
             </a:r>
             <a:endParaRPr lang="en-US" sz="1000" dirty="0"/>
           </a:p>
           <a:p>
-            <a:pPr indent="0" marL="0">
+            <a:pPr marL="0" indent="0">
               <a:lnSpc>
                 <a:spcPct val="110000"/>
               </a:lnSpc>
@@ -7276,16 +7008,16 @@
                 <a:solidFill>
                   <a:srgbClr val="1A1A2E"/>
                 </a:solidFill>
-                <a:latin typeface="Microsoft YaHei" pitchFamily="34" charset="0"/>
-                <a:ea typeface="Microsoft YaHei" pitchFamily="34" charset="-122"/>
-                <a:cs typeface="Microsoft YaHei" pitchFamily="34" charset="-120"/>
+                <a:latin typeface="微软雅黑" pitchFamily="34" charset="0"/>
+                <a:ea typeface="微软雅黑" pitchFamily="34" charset="-122"/>
+                <a:cs typeface="微软雅黑" pitchFamily="34" charset="-120"/>
               </a:rPr>
               <a:t>验证"SNN更省电"课堂结论</a:t>
             </a:r>
             <a:endParaRPr lang="en-US" sz="1000" dirty="0"/>
           </a:p>
           <a:p>
-            <a:pPr indent="0" marL="0">
+            <a:pPr marL="0" indent="0">
               <a:lnSpc>
                 <a:spcPct val="110000"/>
               </a:lnSpc>
@@ -7296,9 +7028,9 @@
                 <a:solidFill>
                   <a:srgbClr val="1A1A2E"/>
                 </a:solidFill>
-                <a:latin typeface="Microsoft YaHei" pitchFamily="34" charset="0"/>
-                <a:ea typeface="Microsoft YaHei" pitchFamily="34" charset="-122"/>
-                <a:cs typeface="Microsoft YaHei" pitchFamily="34" charset="-120"/>
+                <a:latin typeface="微软雅黑" pitchFamily="34" charset="0"/>
+                <a:ea typeface="微软雅黑" pitchFamily="34" charset="-122"/>
+                <a:cs typeface="微软雅黑" pitchFamily="34" charset="-120"/>
               </a:rPr>
               <a:t>加深对类脑计算的理解</a:t>
             </a:r>
@@ -7348,7 +7080,6 @@
           <a:solidFill>
             <a:srgbClr val="00B4D8"/>
           </a:solidFill>
-          <a:ln/>
         </p:spPr>
       </p:sp>
       <p:sp>
@@ -7366,15 +7097,14 @@
             <a:avLst/>
           </a:prstGeom>
           <a:noFill/>
-          <a:ln/>
-        </p:spPr>
-        <p:txBody>
-          <a:bodyPr wrap="square" rtlCol="0" anchor="ctr">
-            <a:normAutofit/>
-          </a:bodyPr>
-          <a:lstStyle/>
-          <a:p>
-            <a:pPr indent="0" marL="0">
+        </p:spPr>
+        <p:txBody>
+          <a:bodyPr wrap="square" rtlCol="0" anchor="ctr">
+            <a:normAutofit/>
+          </a:bodyPr>
+          <a:lstStyle/>
+          <a:p>
+            <a:pPr marL="0" indent="0">
               <a:buNone/>
             </a:pPr>
             <a:r>
@@ -7382,9 +7112,9 @@
                 <a:solidFill>
                   <a:srgbClr val="065A82"/>
                 </a:solidFill>
-                <a:latin typeface="Microsoft YaHei" pitchFamily="34" charset="0"/>
-                <a:ea typeface="Microsoft YaHei" pitchFamily="34" charset="-122"/>
-                <a:cs typeface="Microsoft YaHei" pitchFamily="34" charset="-120"/>
+                <a:latin typeface="微软雅黑" pitchFamily="34" charset="0"/>
+                <a:ea typeface="微软雅黑" pitchFamily="34" charset="-122"/>
+                <a:cs typeface="微软雅黑" pitchFamily="34" charset="-120"/>
               </a:rPr>
               <a:t>软硬结合</a:t>
             </a:r>
@@ -7407,15 +7137,14 @@
             <a:avLst/>
           </a:prstGeom>
           <a:noFill/>
-          <a:ln/>
-        </p:spPr>
-        <p:txBody>
-          <a:bodyPr wrap="square" rtlCol="0" anchor="ctr">
-            <a:normAutofit/>
-          </a:bodyPr>
-          <a:lstStyle/>
-          <a:p>
-            <a:pPr indent="0" marL="0">
+        </p:spPr>
+        <p:txBody>
+          <a:bodyPr wrap="square" rtlCol="0" anchor="ctr">
+            <a:normAutofit/>
+          </a:bodyPr>
+          <a:lstStyle/>
+          <a:p>
+            <a:pPr marL="0" indent="0">
               <a:lnSpc>
                 <a:spcPct val="110000"/>
               </a:lnSpc>
@@ -7426,16 +7155,16 @@
                 <a:solidFill>
                   <a:srgbClr val="1A1A2E"/>
                 </a:solidFill>
-                <a:latin typeface="Microsoft YaHei" pitchFamily="34" charset="0"/>
-                <a:ea typeface="Microsoft YaHei" pitchFamily="34" charset="-122"/>
-                <a:cs typeface="Microsoft YaHei" pitchFamily="34" charset="-120"/>
+                <a:latin typeface="微软雅黑" pitchFamily="34" charset="0"/>
+                <a:ea typeface="微软雅黑" pitchFamily="34" charset="-122"/>
+                <a:cs typeface="微软雅黑" pitchFamily="34" charset="-120"/>
               </a:rPr>
               <a:t>Python软件仿真+</a:t>
             </a:r>
             <a:endParaRPr lang="en-US" sz="1000" dirty="0"/>
           </a:p>
           <a:p>
-            <a:pPr indent="0" marL="0">
+            <a:pPr marL="0" indent="0">
               <a:lnSpc>
                 <a:spcPct val="110000"/>
               </a:lnSpc>
@@ -7446,16 +7175,16 @@
                 <a:solidFill>
                   <a:srgbClr val="1A1A2E"/>
                 </a:solidFill>
-                <a:latin typeface="Microsoft YaHei" pitchFamily="34" charset="0"/>
-                <a:ea typeface="Microsoft YaHei" pitchFamily="34" charset="-122"/>
-                <a:cs typeface="Microsoft YaHei" pitchFamily="34" charset="-120"/>
+                <a:latin typeface="微软雅黑" pitchFamily="34" charset="0"/>
+                <a:ea typeface="微软雅黑" pitchFamily="34" charset="-122"/>
+                <a:cs typeface="微软雅黑" pitchFamily="34" charset="-120"/>
               </a:rPr>
               <a:t>Cadence硬件设计</a:t>
             </a:r>
             <a:endParaRPr lang="en-US" sz="1000" dirty="0"/>
           </a:p>
           <a:p>
-            <a:pPr indent="0" marL="0">
+            <a:pPr marL="0" indent="0">
               <a:lnSpc>
                 <a:spcPct val="110000"/>
               </a:lnSpc>
@@ -7466,9 +7195,9 @@
                 <a:solidFill>
                   <a:srgbClr val="1A1A2E"/>
                 </a:solidFill>
-                <a:latin typeface="Microsoft YaHei" pitchFamily="34" charset="0"/>
-                <a:ea typeface="Microsoft YaHei" pitchFamily="34" charset="-122"/>
-                <a:cs typeface="Microsoft YaHei" pitchFamily="34" charset="-120"/>
+                <a:latin typeface="微软雅黑" pitchFamily="34" charset="0"/>
+                <a:ea typeface="微软雅黑" pitchFamily="34" charset="-122"/>
+                <a:cs typeface="微软雅黑" pitchFamily="34" charset="-120"/>
               </a:rPr>
               <a:t>跨工具跨领域综合实践</a:t>
             </a:r>
@@ -7518,7 +7247,6 @@
           <a:solidFill>
             <a:srgbClr val="00B4D8"/>
           </a:solidFill>
-          <a:ln/>
         </p:spPr>
       </p:sp>
       <p:sp>
@@ -7536,15 +7264,14 @@
             <a:avLst/>
           </a:prstGeom>
           <a:noFill/>
-          <a:ln/>
-        </p:spPr>
-        <p:txBody>
-          <a:bodyPr wrap="square" rtlCol="0" anchor="ctr">
-            <a:normAutofit/>
-          </a:bodyPr>
-          <a:lstStyle/>
-          <a:p>
-            <a:pPr indent="0" marL="0">
+        </p:spPr>
+        <p:txBody>
+          <a:bodyPr wrap="square" rtlCol="0" anchor="ctr">
+            <a:normAutofit/>
+          </a:bodyPr>
+          <a:lstStyle/>
+          <a:p>
+            <a:pPr marL="0" indent="0">
               <a:buNone/>
             </a:pPr>
             <a:r>
@@ -7552,9 +7279,9 @@
                 <a:solidFill>
                   <a:srgbClr val="065A82"/>
                 </a:solidFill>
-                <a:latin typeface="Microsoft YaHei" pitchFamily="34" charset="0"/>
-                <a:ea typeface="Microsoft YaHei" pitchFamily="34" charset="-122"/>
-                <a:cs typeface="Microsoft YaHei" pitchFamily="34" charset="-120"/>
+                <a:latin typeface="微软雅黑" pitchFamily="34" charset="0"/>
+                <a:ea typeface="微软雅黑" pitchFamily="34" charset="-122"/>
+                <a:cs typeface="微软雅黑" pitchFamily="34" charset="-120"/>
               </a:rPr>
               <a:t>类脑扣题</a:t>
             </a:r>
@@ -7577,15 +7304,14 @@
             <a:avLst/>
           </a:prstGeom>
           <a:noFill/>
-          <a:ln/>
-        </p:spPr>
-        <p:txBody>
-          <a:bodyPr wrap="square" rtlCol="0" anchor="ctr">
-            <a:normAutofit/>
-          </a:bodyPr>
-          <a:lstStyle/>
-          <a:p>
-            <a:pPr indent="0" marL="0">
+        </p:spPr>
+        <p:txBody>
+          <a:bodyPr wrap="square" rtlCol="0" anchor="ctr">
+            <a:normAutofit/>
+          </a:bodyPr>
+          <a:lstStyle/>
+          <a:p>
+            <a:pPr marL="0" indent="0">
               <a:lnSpc>
                 <a:spcPct val="110000"/>
               </a:lnSpc>
@@ -7596,16 +7322,16 @@
                 <a:solidFill>
                   <a:srgbClr val="1A1A2E"/>
                 </a:solidFill>
-                <a:latin typeface="Microsoft YaHei" pitchFamily="34" charset="0"/>
-                <a:ea typeface="Microsoft YaHei" pitchFamily="34" charset="-122"/>
-                <a:cs typeface="Microsoft YaHei" pitchFamily="34" charset="-120"/>
+                <a:latin typeface="微软雅黑" pitchFamily="34" charset="0"/>
+                <a:ea typeface="微软雅黑" pitchFamily="34" charset="-122"/>
+                <a:cs typeface="微软雅黑" pitchFamily="34" charset="-120"/>
               </a:rPr>
               <a:t>SNN是最类脑的计算模型</a:t>
             </a:r>
             <a:endParaRPr lang="en-US" sz="1000" dirty="0"/>
           </a:p>
           <a:p>
-            <a:pPr indent="0" marL="0">
+            <a:pPr marL="0" indent="0">
               <a:lnSpc>
                 <a:spcPct val="110000"/>
               </a:lnSpc>
@@ -7616,16 +7342,16 @@
                 <a:solidFill>
                   <a:srgbClr val="1A1A2E"/>
                 </a:solidFill>
-                <a:latin typeface="Microsoft YaHei" pitchFamily="34" charset="0"/>
-                <a:ea typeface="Microsoft YaHei" pitchFamily="34" charset="-122"/>
-                <a:cs typeface="Microsoft YaHei" pitchFamily="34" charset="-120"/>
+                <a:latin typeface="微软雅黑" pitchFamily="34" charset="0"/>
+                <a:ea typeface="微软雅黑" pitchFamily="34" charset="-122"/>
+                <a:cs typeface="微软雅黑" pitchFamily="34" charset="-120"/>
               </a:rPr>
               <a:t>从硬件层面研究SNN</a:t>
             </a:r>
             <a:endParaRPr lang="en-US" sz="1000" dirty="0"/>
           </a:p>
           <a:p>
-            <a:pPr indent="0" marL="0">
+            <a:pPr marL="0" indent="0">
               <a:lnSpc>
                 <a:spcPct val="110000"/>
               </a:lnSpc>
@@ -7636,9 +7362,9 @@
                 <a:solidFill>
                   <a:srgbClr val="1A1A2E"/>
                 </a:solidFill>
-                <a:latin typeface="Microsoft YaHei" pitchFamily="34" charset="0"/>
-                <a:ea typeface="Microsoft YaHei" pitchFamily="34" charset="-122"/>
-                <a:cs typeface="Microsoft YaHei" pitchFamily="34" charset="-120"/>
+                <a:latin typeface="微软雅黑" pitchFamily="34" charset="0"/>
+                <a:ea typeface="微软雅黑" pitchFamily="34" charset="-122"/>
+                <a:cs typeface="微软雅黑" pitchFamily="34" charset="-120"/>
               </a:rPr>
               <a:t>优势与代价，紧扣主题</a:t>
             </a:r>
@@ -7656,12 +7382,13 @@
 
 <file path=ppt/slides/slide5.xml><?xml version="1.0" encoding="utf-8"?>
 <p:sld xmlns:a="http://schemas.openxmlformats.org/drawingml/2006/main" xmlns:r="http://schemas.openxmlformats.org/officeDocument/2006/relationships" xmlns:p="http://schemas.openxmlformats.org/presentationml/2006/main">
-  <p:cSld name="Slide 5">
+  <p:cSld>
     <p:bg>
       <p:bgPr>
         <a:solidFill>
           <a:srgbClr val="FFFFFF"/>
         </a:solidFill>
+        <a:effectLst/>
       </p:bgPr>
     </p:bg>
     <p:spTree>
@@ -7695,7 +7422,6 @@
           <a:solidFill>
             <a:srgbClr val="065A82"/>
           </a:solidFill>
-          <a:ln/>
         </p:spPr>
       </p:sp>
       <p:sp>
@@ -7713,15 +7439,14 @@
             <a:avLst/>
           </a:prstGeom>
           <a:noFill/>
-          <a:ln/>
-        </p:spPr>
-        <p:txBody>
-          <a:bodyPr wrap="square" rtlCol="0" anchor="ctr">
-            <a:normAutofit/>
-          </a:bodyPr>
-          <a:lstStyle/>
-          <a:p>
-            <a:pPr algn="l" indent="0" marL="0">
+        </p:spPr>
+        <p:txBody>
+          <a:bodyPr wrap="square" rtlCol="0" anchor="ctr">
+            <a:normAutofit/>
+          </a:bodyPr>
+          <a:lstStyle/>
+          <a:p>
+            <a:pPr marL="0" indent="0" algn="l">
               <a:buNone/>
             </a:pPr>
             <a:r>
@@ -7729,9 +7454,9 @@
                 <a:solidFill>
                   <a:srgbClr val="FFFFFF"/>
                 </a:solidFill>
-                <a:latin typeface="Songti SC" pitchFamily="34" charset="0"/>
-                <a:ea typeface="Songti SC" pitchFamily="34" charset="-122"/>
-                <a:cs typeface="Songti SC" pitchFamily="34" charset="-120"/>
+                <a:latin typeface="Songti SC" panose="02010800040101010101" pitchFamily="34" charset="-122"/>
+                <a:ea typeface="Songti SC" panose="02010800040101010101" pitchFamily="34" charset="-122"/>
+                <a:cs typeface="Songti SC" panose="02010800040101010101" pitchFamily="34" charset="-120"/>
               </a:rPr>
               <a:t>三、国内外研究现状</a:t>
             </a:r>
@@ -7754,15 +7479,14 @@
             <a:avLst/>
           </a:prstGeom>
           <a:noFill/>
-          <a:ln/>
-        </p:spPr>
-        <p:txBody>
-          <a:bodyPr wrap="square" rtlCol="0" anchor="ctr">
-            <a:normAutofit/>
-          </a:bodyPr>
-          <a:lstStyle/>
-          <a:p>
-            <a:pPr algn="l" indent="0" marL="0">
+        </p:spPr>
+        <p:txBody>
+          <a:bodyPr wrap="square" rtlCol="0" anchor="ctr">
+            <a:normAutofit/>
+          </a:bodyPr>
+          <a:lstStyle/>
+          <a:p>
+            <a:pPr marL="0" indent="0" algn="l">
               <a:buNone/>
             </a:pPr>
             <a:r>
@@ -7770,9 +7494,9 @@
                 <a:solidFill>
                   <a:srgbClr val="B0D0E0"/>
                 </a:solidFill>
-                <a:latin typeface="Microsoft YaHei" pitchFamily="34" charset="0"/>
-                <a:ea typeface="Microsoft YaHei" pitchFamily="34" charset="-122"/>
-                <a:cs typeface="Microsoft YaHei" pitchFamily="34" charset="-120"/>
+                <a:latin typeface="微软雅黑" pitchFamily="34" charset="0"/>
+                <a:ea typeface="微软雅黑" pitchFamily="34" charset="-122"/>
+                <a:cs typeface="微软雅黑" pitchFamily="34" charset="-120"/>
               </a:rPr>
               <a:t>State of the Art at Home and Abroad</a:t>
             </a:r>
@@ -7795,15 +7519,14 @@
             <a:avLst/>
           </a:prstGeom>
           <a:noFill/>
-          <a:ln/>
-        </p:spPr>
-        <p:txBody>
-          <a:bodyPr wrap="square" rtlCol="0" anchor="ctr">
-            <a:normAutofit/>
-          </a:bodyPr>
-          <a:lstStyle/>
-          <a:p>
-            <a:pPr indent="0" marL="0">
+        </p:spPr>
+        <p:txBody>
+          <a:bodyPr wrap="square" rtlCol="0" anchor="ctr">
+            <a:normAutofit/>
+          </a:bodyPr>
+          <a:lstStyle/>
+          <a:p>
+            <a:pPr marL="0" indent="0">
               <a:buNone/>
             </a:pPr>
             <a:r>
@@ -7811,9 +7534,9 @@
                 <a:solidFill>
                   <a:srgbClr val="1C7293"/>
                 </a:solidFill>
-                <a:latin typeface="Microsoft YaHei" pitchFamily="34" charset="0"/>
-                <a:ea typeface="Microsoft YaHei" pitchFamily="34" charset="-122"/>
-                <a:cs typeface="Microsoft YaHei" pitchFamily="34" charset="-120"/>
+                <a:latin typeface="微软雅黑" pitchFamily="34" charset="0"/>
+                <a:ea typeface="微软雅黑" pitchFamily="34" charset="-122"/>
+                <a:cs typeface="微软雅黑" pitchFamily="34" charset="-120"/>
               </a:rPr>
               <a:t>国际进展</a:t>
             </a:r>
@@ -7863,7 +7586,6 @@
           <a:solidFill>
             <a:srgbClr val="065A82"/>
           </a:solidFill>
-          <a:ln/>
         </p:spPr>
       </p:sp>
       <p:sp>
@@ -7881,15 +7603,14 @@
             <a:avLst/>
           </a:prstGeom>
           <a:noFill/>
-          <a:ln/>
-        </p:spPr>
-        <p:txBody>
-          <a:bodyPr wrap="square" rtlCol="0" anchor="ctr">
-            <a:normAutofit/>
-          </a:bodyPr>
-          <a:lstStyle/>
-          <a:p>
-            <a:pPr indent="0" marL="0">
+        </p:spPr>
+        <p:txBody>
+          <a:bodyPr wrap="square" rtlCol="0" anchor="ctr">
+            <a:normAutofit/>
+          </a:bodyPr>
+          <a:lstStyle/>
+          <a:p>
+            <a:pPr marL="0" indent="0">
               <a:buNone/>
             </a:pPr>
             <a:r>
@@ -7897,9 +7618,9 @@
                 <a:solidFill>
                   <a:srgbClr val="065A82"/>
                 </a:solidFill>
-                <a:latin typeface="Microsoft YaHei" pitchFamily="34" charset="0"/>
-                <a:ea typeface="Microsoft YaHei" pitchFamily="34" charset="-122"/>
-                <a:cs typeface="Microsoft YaHei" pitchFamily="34" charset="-120"/>
+                <a:latin typeface="微软雅黑" pitchFamily="34" charset="0"/>
+                <a:ea typeface="微软雅黑" pitchFamily="34" charset="-122"/>
+                <a:cs typeface="微软雅黑" pitchFamily="34" charset="-120"/>
               </a:rPr>
               <a:t>TrueNorth (2014)</a:t>
             </a:r>
@@ -7922,15 +7643,14 @@
             <a:avLst/>
           </a:prstGeom>
           <a:noFill/>
-          <a:ln/>
-        </p:spPr>
-        <p:txBody>
-          <a:bodyPr wrap="square" rtlCol="0" anchor="ctr">
-            <a:normAutofit/>
-          </a:bodyPr>
-          <a:lstStyle/>
-          <a:p>
-            <a:pPr indent="0" marL="0">
+        </p:spPr>
+        <p:txBody>
+          <a:bodyPr wrap="square" rtlCol="0" anchor="ctr">
+            <a:normAutofit/>
+          </a:bodyPr>
+          <a:lstStyle/>
+          <a:p>
+            <a:pPr marL="0" indent="0">
               <a:lnSpc>
                 <a:spcPct val="110000"/>
               </a:lnSpc>
@@ -7941,16 +7661,16 @@
                 <a:solidFill>
                   <a:srgbClr val="1A1A2E"/>
                 </a:solidFill>
-                <a:latin typeface="Microsoft YaHei" pitchFamily="34" charset="0"/>
-                <a:ea typeface="Microsoft YaHei" pitchFamily="34" charset="-122"/>
-                <a:cs typeface="Microsoft YaHei" pitchFamily="34" charset="-120"/>
+                <a:latin typeface="微软雅黑" pitchFamily="34" charset="0"/>
+                <a:ea typeface="微软雅黑" pitchFamily="34" charset="-122"/>
+                <a:cs typeface="微软雅黑" pitchFamily="34" charset="-120"/>
               </a:rPr>
               <a:t>IBM, 28nm, 100万神经元</a:t>
             </a:r>
             <a:endParaRPr lang="en-US" sz="950" dirty="0"/>
           </a:p>
           <a:p>
-            <a:pPr indent="0" marL="0">
+            <a:pPr marL="0" indent="0">
               <a:lnSpc>
                 <a:spcPct val="110000"/>
               </a:lnSpc>
@@ -7961,16 +7681,16 @@
                 <a:solidFill>
                   <a:srgbClr val="1A1A2E"/>
                 </a:solidFill>
-                <a:latin typeface="Microsoft YaHei" pitchFamily="34" charset="0"/>
-                <a:ea typeface="Microsoft YaHei" pitchFamily="34" charset="-122"/>
-                <a:cs typeface="Microsoft YaHei" pitchFamily="34" charset="-120"/>
+                <a:latin typeface="微软雅黑" pitchFamily="34" charset="0"/>
+                <a:ea typeface="微软雅黑" pitchFamily="34" charset="-122"/>
+                <a:cs typeface="微软雅黑" pitchFamily="34" charset="-120"/>
               </a:rPr>
               <a:t>72mW, 每突触事件26pJ</a:t>
             </a:r>
             <a:endParaRPr lang="en-US" sz="950" dirty="0"/>
           </a:p>
           <a:p>
-            <a:pPr indent="0" marL="0">
+            <a:pPr marL="0" indent="0">
               <a:lnSpc>
                 <a:spcPct val="110000"/>
               </a:lnSpc>
@@ -7981,9 +7701,9 @@
                 <a:solidFill>
                   <a:srgbClr val="1A1A2E"/>
                 </a:solidFill>
-                <a:latin typeface="Microsoft YaHei" pitchFamily="34" charset="0"/>
-                <a:ea typeface="Microsoft YaHei" pitchFamily="34" charset="-122"/>
-                <a:cs typeface="Microsoft YaHei" pitchFamily="34" charset="-120"/>
+                <a:latin typeface="微软雅黑" pitchFamily="34" charset="0"/>
+                <a:ea typeface="微软雅黑" pitchFamily="34" charset="-122"/>
+                <a:cs typeface="微软雅黑" pitchFamily="34" charset="-120"/>
               </a:rPr>
               <a:t>能耗低176,000倍</a:t>
             </a:r>
@@ -8033,7 +7753,6 @@
           <a:solidFill>
             <a:srgbClr val="065A82"/>
           </a:solidFill>
-          <a:ln/>
         </p:spPr>
       </p:sp>
       <p:sp>
@@ -8051,15 +7770,14 @@
             <a:avLst/>
           </a:prstGeom>
           <a:noFill/>
-          <a:ln/>
-        </p:spPr>
-        <p:txBody>
-          <a:bodyPr wrap="square" rtlCol="0" anchor="ctr">
-            <a:normAutofit/>
-          </a:bodyPr>
-          <a:lstStyle/>
-          <a:p>
-            <a:pPr indent="0" marL="0">
+        </p:spPr>
+        <p:txBody>
+          <a:bodyPr wrap="square" rtlCol="0" anchor="ctr">
+            <a:normAutofit/>
+          </a:bodyPr>
+          <a:lstStyle/>
+          <a:p>
+            <a:pPr marL="0" indent="0">
               <a:buNone/>
             </a:pPr>
             <a:r>
@@ -8067,9 +7785,9 @@
                 <a:solidFill>
                   <a:srgbClr val="065A82"/>
                 </a:solidFill>
-                <a:latin typeface="Microsoft YaHei" pitchFamily="34" charset="0"/>
-                <a:ea typeface="Microsoft YaHei" pitchFamily="34" charset="-122"/>
-                <a:cs typeface="Microsoft YaHei" pitchFamily="34" charset="-120"/>
+                <a:latin typeface="微软雅黑" pitchFamily="34" charset="0"/>
+                <a:ea typeface="微软雅黑" pitchFamily="34" charset="-122"/>
+                <a:cs typeface="微软雅黑" pitchFamily="34" charset="-120"/>
               </a:rPr>
               <a:t>Loihi (2018/2021)</a:t>
             </a:r>
@@ -8092,15 +7810,14 @@
             <a:avLst/>
           </a:prstGeom>
           <a:noFill/>
-          <a:ln/>
-        </p:spPr>
-        <p:txBody>
-          <a:bodyPr wrap="square" rtlCol="0" anchor="ctr">
-            <a:normAutofit/>
-          </a:bodyPr>
-          <a:lstStyle/>
-          <a:p>
-            <a:pPr indent="0" marL="0">
+        </p:spPr>
+        <p:txBody>
+          <a:bodyPr wrap="square" rtlCol="0" anchor="ctr">
+            <a:normAutofit/>
+          </a:bodyPr>
+          <a:lstStyle/>
+          <a:p>
+            <a:pPr marL="0" indent="0">
               <a:lnSpc>
                 <a:spcPct val="110000"/>
               </a:lnSpc>
@@ -8111,16 +7828,16 @@
                 <a:solidFill>
                   <a:srgbClr val="1A1A2E"/>
                 </a:solidFill>
-                <a:latin typeface="Microsoft YaHei" pitchFamily="34" charset="0"/>
-                <a:ea typeface="Microsoft YaHei" pitchFamily="34" charset="-122"/>
-                <a:cs typeface="Microsoft YaHei" pitchFamily="34" charset="-120"/>
+                <a:latin typeface="微软雅黑" pitchFamily="34" charset="0"/>
+                <a:ea typeface="微软雅黑" pitchFamily="34" charset="-122"/>
+                <a:cs typeface="微软雅黑" pitchFamily="34" charset="-120"/>
               </a:rPr>
               <a:t>Intel, 14nm→Intel 4</a:t>
             </a:r>
             <a:endParaRPr lang="en-US" sz="950" dirty="0"/>
           </a:p>
           <a:p>
-            <a:pPr indent="0" marL="0">
+            <a:pPr marL="0" indent="0">
               <a:lnSpc>
                 <a:spcPct val="110000"/>
               </a:lnSpc>
@@ -8131,16 +7848,16 @@
                 <a:solidFill>
                   <a:srgbClr val="1A1A2E"/>
                 </a:solidFill>
-                <a:latin typeface="Microsoft YaHei" pitchFamily="34" charset="0"/>
-                <a:ea typeface="Microsoft YaHei" pitchFamily="34" charset="-122"/>
-                <a:cs typeface="Microsoft YaHei" pitchFamily="34" charset="-120"/>
+                <a:latin typeface="微软雅黑" pitchFamily="34" charset="0"/>
+                <a:ea typeface="微软雅黑" pitchFamily="34" charset="-122"/>
+                <a:cs typeface="微软雅黑" pitchFamily="34" charset="-120"/>
               </a:rPr>
               <a:t>128核心→100万神经元</a:t>
             </a:r>
             <a:endParaRPr lang="en-US" sz="950" dirty="0"/>
           </a:p>
           <a:p>
-            <a:pPr indent="0" marL="0">
+            <a:pPr marL="0" indent="0">
               <a:lnSpc>
                 <a:spcPct val="110000"/>
               </a:lnSpc>
@@ -8151,9 +7868,9 @@
                 <a:solidFill>
                   <a:srgbClr val="1A1A2E"/>
                 </a:solidFill>
-                <a:latin typeface="Microsoft YaHei" pitchFamily="34" charset="0"/>
-                <a:ea typeface="Microsoft YaHei" pitchFamily="34" charset="-122"/>
-                <a:cs typeface="Microsoft YaHei" pitchFamily="34" charset="-120"/>
+                <a:latin typeface="微软雅黑" pitchFamily="34" charset="0"/>
+                <a:ea typeface="微软雅黑" pitchFamily="34" charset="-122"/>
+                <a:cs typeface="微软雅黑" pitchFamily="34" charset="-120"/>
               </a:rPr>
               <a:t>首个片上学习类脑芯片</a:t>
             </a:r>
@@ -8203,7 +7920,6 @@
           <a:solidFill>
             <a:srgbClr val="065A82"/>
           </a:solidFill>
-          <a:ln/>
         </p:spPr>
       </p:sp>
       <p:sp>
@@ -8221,15 +7937,14 @@
             <a:avLst/>
           </a:prstGeom>
           <a:noFill/>
-          <a:ln/>
-        </p:spPr>
-        <p:txBody>
-          <a:bodyPr wrap="square" rtlCol="0" anchor="ctr">
-            <a:normAutofit/>
-          </a:bodyPr>
-          <a:lstStyle/>
-          <a:p>
-            <a:pPr indent="0" marL="0">
+        </p:spPr>
+        <p:txBody>
+          <a:bodyPr wrap="square" rtlCol="0" anchor="ctr">
+            <a:normAutofit/>
+          </a:bodyPr>
+          <a:lstStyle/>
+          <a:p>
+            <a:pPr marL="0" indent="0">
               <a:buNone/>
             </a:pPr>
             <a:r>
@@ -8237,9 +7952,9 @@
                 <a:solidFill>
                   <a:srgbClr val="065A82"/>
                 </a:solidFill>
-                <a:latin typeface="Microsoft YaHei" pitchFamily="34" charset="0"/>
-                <a:ea typeface="Microsoft YaHei" pitchFamily="34" charset="-122"/>
-                <a:cs typeface="Microsoft YaHei" pitchFamily="34" charset="-120"/>
+                <a:latin typeface="微软雅黑" pitchFamily="34" charset="0"/>
+                <a:ea typeface="微软雅黑" pitchFamily="34" charset="-122"/>
+                <a:cs typeface="微软雅黑" pitchFamily="34" charset="-120"/>
               </a:rPr>
               <a:t>Hala Point (2024)</a:t>
             </a:r>
@@ -8262,15 +7977,14 @@
             <a:avLst/>
           </a:prstGeom>
           <a:noFill/>
-          <a:ln/>
-        </p:spPr>
-        <p:txBody>
-          <a:bodyPr wrap="square" rtlCol="0" anchor="ctr">
-            <a:normAutofit/>
-          </a:bodyPr>
-          <a:lstStyle/>
-          <a:p>
-            <a:pPr indent="0" marL="0">
+        </p:spPr>
+        <p:txBody>
+          <a:bodyPr wrap="square" rtlCol="0" anchor="ctr">
+            <a:normAutofit/>
+          </a:bodyPr>
+          <a:lstStyle/>
+          <a:p>
+            <a:pPr marL="0" indent="0">
               <a:lnSpc>
                 <a:spcPct val="110000"/>
               </a:lnSpc>
@@ -8281,16 +7995,16 @@
                 <a:solidFill>
                   <a:srgbClr val="1A1A2E"/>
                 </a:solidFill>
-                <a:latin typeface="Microsoft YaHei" pitchFamily="34" charset="0"/>
-                <a:ea typeface="Microsoft YaHei" pitchFamily="34" charset="-122"/>
-                <a:cs typeface="Microsoft YaHei" pitchFamily="34" charset="-120"/>
+                <a:latin typeface="微软雅黑" pitchFamily="34" charset="0"/>
+                <a:ea typeface="微软雅黑" pitchFamily="34" charset="-122"/>
+                <a:cs typeface="微软雅黑" pitchFamily="34" charset="-120"/>
               </a:rPr>
               <a:t>Intel+桑迪亚国家实验室</a:t>
             </a:r>
             <a:endParaRPr lang="en-US" sz="950" dirty="0"/>
           </a:p>
           <a:p>
-            <a:pPr indent="0" marL="0">
+            <a:pPr marL="0" indent="0">
               <a:lnSpc>
                 <a:spcPct val="110000"/>
               </a:lnSpc>
@@ -8301,16 +8015,16 @@
                 <a:solidFill>
                   <a:srgbClr val="1A1A2E"/>
                 </a:solidFill>
-                <a:latin typeface="Microsoft YaHei" pitchFamily="34" charset="0"/>
-                <a:ea typeface="Microsoft YaHei" pitchFamily="34" charset="-122"/>
-                <a:cs typeface="Microsoft YaHei" pitchFamily="34" charset="-120"/>
+                <a:latin typeface="微软雅黑" pitchFamily="34" charset="0"/>
+                <a:ea typeface="微软雅黑" pitchFamily="34" charset="-122"/>
+                <a:cs typeface="微软雅黑" pitchFamily="34" charset="-120"/>
               </a:rPr>
               <a:t>11.5亿神经元</a:t>
             </a:r>
             <a:endParaRPr lang="en-US" sz="950" dirty="0"/>
           </a:p>
           <a:p>
-            <a:pPr indent="0" marL="0">
+            <a:pPr marL="0" indent="0">
               <a:lnSpc>
                 <a:spcPct val="110000"/>
               </a:lnSpc>
@@ -8321,9 +8035,9 @@
                 <a:solidFill>
                   <a:srgbClr val="1A1A2E"/>
                 </a:solidFill>
-                <a:latin typeface="Microsoft YaHei" pitchFamily="34" charset="0"/>
-                <a:ea typeface="Microsoft YaHei" pitchFamily="34" charset="-122"/>
-                <a:cs typeface="Microsoft YaHei" pitchFamily="34" charset="-120"/>
+                <a:latin typeface="微软雅黑" pitchFamily="34" charset="0"/>
+                <a:ea typeface="微软雅黑" pitchFamily="34" charset="-122"/>
+                <a:cs typeface="微软雅黑" pitchFamily="34" charset="-120"/>
               </a:rPr>
               <a:t>全球最大神经形态系统</a:t>
             </a:r>
@@ -8346,15 +8060,14 @@
             <a:avLst/>
           </a:prstGeom>
           <a:noFill/>
-          <a:ln/>
-        </p:spPr>
-        <p:txBody>
-          <a:bodyPr wrap="square" rtlCol="0" anchor="ctr">
-            <a:normAutofit/>
-          </a:bodyPr>
-          <a:lstStyle/>
-          <a:p>
-            <a:pPr indent="0" marL="0">
+        </p:spPr>
+        <p:txBody>
+          <a:bodyPr wrap="square" rtlCol="0" anchor="ctr">
+            <a:normAutofit/>
+          </a:bodyPr>
+          <a:lstStyle/>
+          <a:p>
+            <a:pPr marL="0" indent="0">
               <a:buNone/>
             </a:pPr>
             <a:r>
@@ -8362,9 +8075,9 @@
                 <a:solidFill>
                   <a:srgbClr val="1C7293"/>
                 </a:solidFill>
-                <a:latin typeface="Microsoft YaHei" pitchFamily="34" charset="0"/>
-                <a:ea typeface="Microsoft YaHei" pitchFamily="34" charset="-122"/>
-                <a:cs typeface="Microsoft YaHei" pitchFamily="34" charset="-120"/>
+                <a:latin typeface="微软雅黑" pitchFamily="34" charset="0"/>
+                <a:ea typeface="微软雅黑" pitchFamily="34" charset="-122"/>
+                <a:cs typeface="微软雅黑" pitchFamily="34" charset="-120"/>
               </a:rPr>
               <a:t>国内进展</a:t>
             </a:r>
@@ -8414,7 +8127,6 @@
           <a:solidFill>
             <a:srgbClr val="00B4D8"/>
           </a:solidFill>
-          <a:ln/>
         </p:spPr>
       </p:sp>
       <p:sp>
@@ -8432,15 +8144,14 @@
             <a:avLst/>
           </a:prstGeom>
           <a:noFill/>
-          <a:ln/>
-        </p:spPr>
-        <p:txBody>
-          <a:bodyPr wrap="square" rtlCol="0" anchor="ctr">
-            <a:normAutofit/>
-          </a:bodyPr>
-          <a:lstStyle/>
-          <a:p>
-            <a:pPr indent="0" marL="0">
+        </p:spPr>
+        <p:txBody>
+          <a:bodyPr wrap="square" rtlCol="0" anchor="ctr">
+            <a:normAutofit/>
+          </a:bodyPr>
+          <a:lstStyle/>
+          <a:p>
+            <a:pPr marL="0" indent="0">
               <a:buNone/>
             </a:pPr>
             <a:r>
@@ -8448,9 +8159,9 @@
                 <a:solidFill>
                   <a:srgbClr val="065A82"/>
                 </a:solidFill>
-                <a:latin typeface="Microsoft YaHei" pitchFamily="34" charset="0"/>
-                <a:ea typeface="Microsoft YaHei" pitchFamily="34" charset="-122"/>
-                <a:cs typeface="Microsoft YaHei" pitchFamily="34" charset="-120"/>
+                <a:latin typeface="微软雅黑" pitchFamily="34" charset="0"/>
+                <a:ea typeface="微软雅黑" pitchFamily="34" charset="-122"/>
+                <a:cs typeface="微软雅黑" pitchFamily="34" charset="-120"/>
               </a:rPr>
               <a:t>天机芯 Tianjic (2019)</a:t>
             </a:r>
@@ -8473,15 +8184,14 @@
             <a:avLst/>
           </a:prstGeom>
           <a:noFill/>
-          <a:ln/>
-        </p:spPr>
-        <p:txBody>
-          <a:bodyPr wrap="square" rtlCol="0" anchor="ctr">
-            <a:normAutofit/>
-          </a:bodyPr>
-          <a:lstStyle/>
-          <a:p>
-            <a:pPr indent="0" marL="0">
+        </p:spPr>
+        <p:txBody>
+          <a:bodyPr wrap="square" rtlCol="0" anchor="ctr">
+            <a:normAutofit/>
+          </a:bodyPr>
+          <a:lstStyle/>
+          <a:p>
+            <a:pPr marL="0" indent="0">
               <a:lnSpc>
                 <a:spcPct val="110000"/>
               </a:lnSpc>
@@ -8492,16 +8202,16 @@
                 <a:solidFill>
                   <a:srgbClr val="1A1A2E"/>
                 </a:solidFill>
-                <a:latin typeface="Microsoft YaHei" pitchFamily="34" charset="0"/>
-                <a:ea typeface="Microsoft YaHei" pitchFamily="34" charset="-122"/>
-                <a:cs typeface="Microsoft YaHei" pitchFamily="34" charset="-120"/>
+                <a:latin typeface="微软雅黑" pitchFamily="34" charset="0"/>
+                <a:ea typeface="微软雅黑" pitchFamily="34" charset="-122"/>
+                <a:cs typeface="微软雅黑" pitchFamily="34" charset="-120"/>
               </a:rPr>
               <a:t>清华大学施路平团队</a:t>
             </a:r>
             <a:endParaRPr lang="en-US" sz="950" dirty="0"/>
           </a:p>
           <a:p>
-            <a:pPr indent="0" marL="0">
+            <a:pPr marL="0" indent="0">
               <a:lnSpc>
                 <a:spcPct val="110000"/>
               </a:lnSpc>
@@ -8512,16 +8222,16 @@
                 <a:solidFill>
                   <a:srgbClr val="1A1A2E"/>
                 </a:solidFill>
-                <a:latin typeface="Microsoft YaHei" pitchFamily="34" charset="0"/>
-                <a:ea typeface="Microsoft YaHei" pitchFamily="34" charset="-122"/>
-                <a:cs typeface="Microsoft YaHei" pitchFamily="34" charset="-120"/>
+                <a:latin typeface="微软雅黑" pitchFamily="34" charset="0"/>
+                <a:ea typeface="微软雅黑" pitchFamily="34" charset="-122"/>
+                <a:cs typeface="微软雅黑" pitchFamily="34" charset="-120"/>
               </a:rPr>
               <a:t>Nature封面论文</a:t>
             </a:r>
             <a:endParaRPr lang="en-US" sz="950" dirty="0"/>
           </a:p>
           <a:p>
-            <a:pPr indent="0" marL="0">
+            <a:pPr marL="0" indent="0">
               <a:lnSpc>
                 <a:spcPct val="110000"/>
               </a:lnSpc>
@@ -8532,9 +8242,9 @@
                 <a:solidFill>
                   <a:srgbClr val="1A1A2E"/>
                 </a:solidFill>
-                <a:latin typeface="Microsoft YaHei" pitchFamily="34" charset="0"/>
-                <a:ea typeface="Microsoft YaHei" pitchFamily="34" charset="-122"/>
-                <a:cs typeface="Microsoft YaHei" pitchFamily="34" charset="-120"/>
+                <a:latin typeface="微软雅黑" pitchFamily="34" charset="0"/>
+                <a:ea typeface="微软雅黑" pitchFamily="34" charset="-122"/>
+                <a:cs typeface="微软雅黑" pitchFamily="34" charset="-120"/>
               </a:rPr>
               <a:t>世界首款SNN+ANN融合芯片</a:t>
             </a:r>
@@ -8584,7 +8294,6 @@
           <a:solidFill>
             <a:srgbClr val="00B4D8"/>
           </a:solidFill>
-          <a:ln/>
         </p:spPr>
       </p:sp>
       <p:sp>
@@ -8602,15 +8311,14 @@
             <a:avLst/>
           </a:prstGeom>
           <a:noFill/>
-          <a:ln/>
-        </p:spPr>
-        <p:txBody>
-          <a:bodyPr wrap="square" rtlCol="0" anchor="ctr">
-            <a:normAutofit/>
-          </a:bodyPr>
-          <a:lstStyle/>
-          <a:p>
-            <a:pPr indent="0" marL="0">
+        </p:spPr>
+        <p:txBody>
+          <a:bodyPr wrap="square" rtlCol="0" anchor="ctr">
+            <a:normAutofit/>
+          </a:bodyPr>
+          <a:lstStyle/>
+          <a:p>
+            <a:pPr marL="0" indent="0">
               <a:buNone/>
             </a:pPr>
             <a:r>
@@ -8618,9 +8326,9 @@
                 <a:solidFill>
                   <a:srgbClr val="065A82"/>
                 </a:solidFill>
-                <a:latin typeface="Microsoft YaHei" pitchFamily="34" charset="0"/>
-                <a:ea typeface="Microsoft YaHei" pitchFamily="34" charset="-122"/>
-                <a:cs typeface="Microsoft YaHei" pitchFamily="34" charset="-120"/>
+                <a:latin typeface="微软雅黑" pitchFamily="34" charset="0"/>
+                <a:ea typeface="微软雅黑" pitchFamily="34" charset="-122"/>
+                <a:cs typeface="微软雅黑" pitchFamily="34" charset="-120"/>
               </a:rPr>
               <a:t>天眸芯 (2024)</a:t>
             </a:r>
@@ -8643,15 +8351,14 @@
             <a:avLst/>
           </a:prstGeom>
           <a:noFill/>
-          <a:ln/>
-        </p:spPr>
-        <p:txBody>
-          <a:bodyPr wrap="square" rtlCol="0" anchor="ctr">
-            <a:normAutofit/>
-          </a:bodyPr>
-          <a:lstStyle/>
-          <a:p>
-            <a:pPr indent="0" marL="0">
+        </p:spPr>
+        <p:txBody>
+          <a:bodyPr wrap="square" rtlCol="0" anchor="ctr">
+            <a:normAutofit/>
+          </a:bodyPr>
+          <a:lstStyle/>
+          <a:p>
+            <a:pPr marL="0" indent="0">
               <a:lnSpc>
                 <a:spcPct val="110000"/>
               </a:lnSpc>
@@ -8662,16 +8369,16 @@
                 <a:solidFill>
                   <a:srgbClr val="1A1A2E"/>
                 </a:solidFill>
-                <a:latin typeface="Microsoft YaHei" pitchFamily="34" charset="0"/>
-                <a:ea typeface="Microsoft YaHei" pitchFamily="34" charset="-122"/>
-                <a:cs typeface="Microsoft YaHei" pitchFamily="34" charset="-120"/>
+                <a:latin typeface="微软雅黑" pitchFamily="34" charset="0"/>
+                <a:ea typeface="微软雅黑" pitchFamily="34" charset="-122"/>
+                <a:cs typeface="微软雅黑" pitchFamily="34" charset="-120"/>
               </a:rPr>
               <a:t>清华大学</a:t>
             </a:r>
             <a:endParaRPr lang="en-US" sz="950" dirty="0"/>
           </a:p>
           <a:p>
-            <a:pPr indent="0" marL="0">
+            <a:pPr marL="0" indent="0">
               <a:lnSpc>
                 <a:spcPct val="110000"/>
               </a:lnSpc>
@@ -8682,16 +8389,16 @@
                 <a:solidFill>
                   <a:srgbClr val="1A1A2E"/>
                 </a:solidFill>
-                <a:latin typeface="Microsoft YaHei" pitchFamily="34" charset="0"/>
-                <a:ea typeface="Microsoft YaHei" pitchFamily="34" charset="-122"/>
-                <a:cs typeface="Microsoft YaHei" pitchFamily="34" charset="-120"/>
+                <a:latin typeface="微软雅黑" pitchFamily="34" charset="0"/>
+                <a:ea typeface="微软雅黑" pitchFamily="34" charset="-122"/>
+                <a:cs typeface="微软雅黑" pitchFamily="34" charset="-120"/>
               </a:rPr>
               <a:t>Nature封面论文</a:t>
             </a:r>
             <a:endParaRPr lang="en-US" sz="950" dirty="0"/>
           </a:p>
           <a:p>
-            <a:pPr indent="0" marL="0">
+            <a:pPr marL="0" indent="0">
               <a:lnSpc>
                 <a:spcPct val="110000"/>
               </a:lnSpc>
@@ -8702,9 +8409,9 @@
                 <a:solidFill>
                   <a:srgbClr val="1A1A2E"/>
                 </a:solidFill>
-                <a:latin typeface="Microsoft YaHei" pitchFamily="34" charset="0"/>
-                <a:ea typeface="Microsoft YaHei" pitchFamily="34" charset="-122"/>
-                <a:cs typeface="Microsoft YaHei" pitchFamily="34" charset="-120"/>
+                <a:latin typeface="微软雅黑" pitchFamily="34" charset="0"/>
+                <a:ea typeface="微软雅黑" pitchFamily="34" charset="-122"/>
+                <a:cs typeface="微软雅黑" pitchFamily="34" charset="-120"/>
               </a:rPr>
               <a:t>类脑互补视觉感知芯片</a:t>
             </a:r>
@@ -8754,7 +8461,6 @@
           <a:solidFill>
             <a:srgbClr val="00B4D8"/>
           </a:solidFill>
-          <a:ln/>
         </p:spPr>
       </p:sp>
       <p:sp>
@@ -8772,15 +8478,14 @@
             <a:avLst/>
           </a:prstGeom>
           <a:noFill/>
-          <a:ln/>
-        </p:spPr>
-        <p:txBody>
-          <a:bodyPr wrap="square" rtlCol="0" anchor="ctr">
-            <a:normAutofit/>
-          </a:bodyPr>
-          <a:lstStyle/>
-          <a:p>
-            <a:pPr indent="0" marL="0">
+        </p:spPr>
+        <p:txBody>
+          <a:bodyPr wrap="square" rtlCol="0" anchor="ctr">
+            <a:normAutofit/>
+          </a:bodyPr>
+          <a:lstStyle/>
+          <a:p>
+            <a:pPr marL="0" indent="0">
               <a:buNone/>
             </a:pPr>
             <a:r>
@@ -8788,9 +8493,9 @@
                 <a:solidFill>
                   <a:srgbClr val="065A82"/>
                 </a:solidFill>
-                <a:latin typeface="Microsoft YaHei" pitchFamily="34" charset="0"/>
-                <a:ea typeface="Microsoft YaHei" pitchFamily="34" charset="-122"/>
-                <a:cs typeface="Microsoft YaHei" pitchFamily="34" charset="-120"/>
+                <a:latin typeface="微软雅黑" pitchFamily="34" charset="0"/>
+                <a:ea typeface="微软雅黑" pitchFamily="34" charset="-122"/>
+                <a:cs typeface="微软雅黑" pitchFamily="34" charset="-120"/>
               </a:rPr>
               <a:t>产业化</a:t>
             </a:r>
@@ -8813,15 +8518,14 @@
             <a:avLst/>
           </a:prstGeom>
           <a:noFill/>
-          <a:ln/>
-        </p:spPr>
-        <p:txBody>
-          <a:bodyPr wrap="square" rtlCol="0" anchor="ctr">
-            <a:normAutofit/>
-          </a:bodyPr>
-          <a:lstStyle/>
-          <a:p>
-            <a:pPr indent="0" marL="0">
+        </p:spPr>
+        <p:txBody>
+          <a:bodyPr wrap="square" rtlCol="0" anchor="ctr">
+            <a:normAutofit/>
+          </a:bodyPr>
+          <a:lstStyle/>
+          <a:p>
+            <a:pPr marL="0" indent="0">
               <a:lnSpc>
                 <a:spcPct val="110000"/>
               </a:lnSpc>
@@ -8832,16 +8536,16 @@
                 <a:solidFill>
                   <a:srgbClr val="1A1A2E"/>
                 </a:solidFill>
-                <a:latin typeface="Microsoft YaHei" pitchFamily="34" charset="0"/>
-                <a:ea typeface="Microsoft YaHei" pitchFamily="34" charset="-122"/>
-                <a:cs typeface="Microsoft YaHei" pitchFamily="34" charset="-120"/>
+                <a:latin typeface="微软雅黑" pitchFamily="34" charset="0"/>
+                <a:ea typeface="微软雅黑" pitchFamily="34" charset="-122"/>
+                <a:cs typeface="微软雅黑" pitchFamily="34" charset="-120"/>
               </a:rPr>
               <a:t>灵汐科技推动天机芯</a:t>
             </a:r>
             <a:endParaRPr lang="en-US" sz="950" dirty="0"/>
           </a:p>
           <a:p>
-            <a:pPr indent="0" marL="0">
+            <a:pPr marL="0" indent="0">
               <a:lnSpc>
                 <a:spcPct val="110000"/>
               </a:lnSpc>
@@ -8852,16 +8556,16 @@
                 <a:solidFill>
                   <a:srgbClr val="1A1A2E"/>
                 </a:solidFill>
-                <a:latin typeface="Microsoft YaHei" pitchFamily="34" charset="0"/>
-                <a:ea typeface="Microsoft YaHei" pitchFamily="34" charset="-122"/>
-                <a:cs typeface="Microsoft YaHei" pitchFamily="34" charset="-120"/>
+                <a:latin typeface="微软雅黑" pitchFamily="34" charset="0"/>
+                <a:ea typeface="微软雅黑" pitchFamily="34" charset="-122"/>
+                <a:cs typeface="微软雅黑" pitchFamily="34" charset="-120"/>
               </a:rPr>
               <a:t>从基础研究走向商业化</a:t>
             </a:r>
             <a:endParaRPr lang="en-US" sz="950" dirty="0"/>
           </a:p>
           <a:p>
-            <a:pPr indent="0" marL="0">
+            <a:pPr marL="0" indent="0">
               <a:lnSpc>
                 <a:spcPct val="110000"/>
               </a:lnSpc>
@@ -8872,9 +8576,9 @@
                 <a:solidFill>
                   <a:srgbClr val="1A1A2E"/>
                 </a:solidFill>
-                <a:latin typeface="Microsoft YaHei" pitchFamily="34" charset="0"/>
-                <a:ea typeface="Microsoft YaHei" pitchFamily="34" charset="-122"/>
-                <a:cs typeface="Microsoft YaHei" pitchFamily="34" charset="-120"/>
+                <a:latin typeface="微软雅黑" pitchFamily="34" charset="0"/>
+                <a:ea typeface="微软雅黑" pitchFamily="34" charset="-122"/>
+                <a:cs typeface="微软雅黑" pitchFamily="34" charset="-120"/>
               </a:rPr>
               <a:t>2024世界互联网大会领先科技奖</a:t>
             </a:r>
@@ -8892,12 +8596,13 @@
 
 <file path=ppt/slides/slide6.xml><?xml version="1.0" encoding="utf-8"?>
 <p:sld xmlns:a="http://schemas.openxmlformats.org/drawingml/2006/main" xmlns:r="http://schemas.openxmlformats.org/officeDocument/2006/relationships" xmlns:p="http://schemas.openxmlformats.org/presentationml/2006/main">
-  <p:cSld name="Slide 6">
+  <p:cSld>
     <p:bg>
       <p:bgPr>
         <a:solidFill>
           <a:srgbClr val="FFFFFF"/>
         </a:solidFill>
+        <a:effectLst/>
       </p:bgPr>
     </p:bg>
     <p:spTree>
@@ -8931,7 +8636,6 @@
           <a:solidFill>
             <a:srgbClr val="065A82"/>
           </a:solidFill>
-          <a:ln/>
         </p:spPr>
       </p:sp>
       <p:sp>
@@ -8949,15 +8653,14 @@
             <a:avLst/>
           </a:prstGeom>
           <a:noFill/>
-          <a:ln/>
-        </p:spPr>
-        <p:txBody>
-          <a:bodyPr wrap="square" rtlCol="0" anchor="ctr">
-            <a:normAutofit/>
-          </a:bodyPr>
-          <a:lstStyle/>
-          <a:p>
-            <a:pPr algn="l" indent="0" marL="0">
+        </p:spPr>
+        <p:txBody>
+          <a:bodyPr wrap="square" rtlCol="0" anchor="ctr">
+            <a:normAutofit/>
+          </a:bodyPr>
+          <a:lstStyle/>
+          <a:p>
+            <a:pPr marL="0" indent="0" algn="l">
               <a:buNone/>
             </a:pPr>
             <a:r>
@@ -8965,9 +8668,9 @@
                 <a:solidFill>
                   <a:srgbClr val="FFFFFF"/>
                 </a:solidFill>
-                <a:latin typeface="Songti SC" pitchFamily="34" charset="0"/>
-                <a:ea typeface="Songti SC" pitchFamily="34" charset="-122"/>
-                <a:cs typeface="Songti SC" pitchFamily="34" charset="-120"/>
+                <a:latin typeface="Songti SC" panose="02010800040101010101" pitchFamily="34" charset="-122"/>
+                <a:ea typeface="Songti SC" panose="02010800040101010101" pitchFamily="34" charset="-122"/>
+                <a:cs typeface="Songti SC" panose="02010800040101010101" pitchFamily="34" charset="-120"/>
               </a:rPr>
               <a:t>三、现有进展与本课题定位</a:t>
             </a:r>
@@ -8990,15 +8693,14 @@
             <a:avLst/>
           </a:prstGeom>
           <a:noFill/>
-          <a:ln/>
-        </p:spPr>
-        <p:txBody>
-          <a:bodyPr wrap="square" rtlCol="0" anchor="ctr">
-            <a:normAutofit/>
-          </a:bodyPr>
-          <a:lstStyle/>
-          <a:p>
-            <a:pPr algn="l" indent="0" marL="0">
+        </p:spPr>
+        <p:txBody>
+          <a:bodyPr wrap="square" rtlCol="0" anchor="ctr">
+            <a:normAutofit/>
+          </a:bodyPr>
+          <a:lstStyle/>
+          <a:p>
+            <a:pPr marL="0" indent="0" algn="l">
               <a:buNone/>
             </a:pPr>
             <a:r>
@@ -9006,9 +8708,9 @@
                 <a:solidFill>
                   <a:srgbClr val="B0D0E0"/>
                 </a:solidFill>
-                <a:latin typeface="Microsoft YaHei" pitchFamily="34" charset="0"/>
-                <a:ea typeface="Microsoft YaHei" pitchFamily="34" charset="-122"/>
-                <a:cs typeface="Microsoft YaHei" pitchFamily="34" charset="-120"/>
+                <a:latin typeface="微软雅黑" pitchFamily="34" charset="0"/>
+                <a:ea typeface="微软雅黑" pitchFamily="34" charset="-122"/>
+                <a:cs typeface="微软雅黑" pitchFamily="34" charset="-120"/>
               </a:rPr>
               <a:t>Existing Progress &amp; Our Positioning</a:t>
             </a:r>
@@ -9056,15 +8758,14 @@
             <a:avLst/>
           </a:prstGeom>
           <a:noFill/>
-          <a:ln/>
-        </p:spPr>
-        <p:txBody>
-          <a:bodyPr wrap="square" rtlCol="0" anchor="ctr">
-            <a:normAutofit/>
-          </a:bodyPr>
-          <a:lstStyle/>
-          <a:p>
-            <a:pPr indent="0" marL="0">
+        </p:spPr>
+        <p:txBody>
+          <a:bodyPr wrap="square" rtlCol="0" anchor="ctr">
+            <a:normAutofit/>
+          </a:bodyPr>
+          <a:lstStyle/>
+          <a:p>
+            <a:pPr marL="0" indent="0">
               <a:buNone/>
             </a:pPr>
             <a:r>
@@ -9072,9 +8773,9 @@
                 <a:solidFill>
                   <a:srgbClr val="1C7293"/>
                 </a:solidFill>
-                <a:latin typeface="Microsoft YaHei" pitchFamily="34" charset="0"/>
-                <a:ea typeface="Microsoft YaHei" pitchFamily="34" charset="-122"/>
-                <a:cs typeface="Microsoft YaHei" pitchFamily="34" charset="-120"/>
+                <a:latin typeface="微软雅黑" pitchFamily="34" charset="0"/>
+                <a:ea typeface="微软雅黑" pitchFamily="34" charset="-122"/>
+                <a:cs typeface="微软雅黑" pitchFamily="34" charset="-120"/>
               </a:rPr>
               <a:t>已有研究进展</a:t>
             </a:r>
@@ -9097,7 +8798,6 @@
             <a:avLst/>
           </a:prstGeom>
           <a:noFill/>
-          <a:ln/>
         </p:spPr>
         <p:txBody>
           <a:bodyPr wrap="square" rtlCol="0" anchor="t">
@@ -9105,7 +8805,7 @@
           </a:bodyPr>
           <a:lstStyle/>
           <a:p>
-            <a:pPr algn="l" indent="0" marL="0">
+            <a:pPr marL="0" indent="0" algn="l">
               <a:lnSpc>
                 <a:spcPct val="115000"/>
               </a:lnSpc>
@@ -9116,9 +8816,9 @@
                 <a:solidFill>
                   <a:srgbClr val="1A1A2E"/>
                 </a:solidFill>
-                <a:latin typeface="Microsoft YaHei" pitchFamily="34" charset="0"/>
-                <a:ea typeface="Microsoft YaHei" pitchFamily="34" charset="-122"/>
-                <a:cs typeface="Microsoft YaHei" pitchFamily="34" charset="-120"/>
+                <a:latin typeface="微软雅黑" pitchFamily="34" charset="0"/>
+                <a:ea typeface="微软雅黑" pitchFamily="34" charset="-122"/>
+                <a:cs typeface="微软雅黑" pitchFamily="34" charset="-120"/>
               </a:rPr>
               <a:t>SNN与ANN能效对比已较为充分：Shen(2023)提出Bit Budget框架质疑"SNN天然更省电"；Xu(2024)在SENECA上完成硬件级实测对比；NeuroBench(2025, Nature Comm.)建立标准化基准；snnTorch(2023)等训练框架已成熟。</a:t>
             </a:r>
@@ -9141,15 +8841,14 @@
             <a:avLst/>
           </a:prstGeom>
           <a:noFill/>
-          <a:ln/>
-        </p:spPr>
-        <p:txBody>
-          <a:bodyPr wrap="square" rtlCol="0" anchor="ctr">
-            <a:normAutofit/>
-          </a:bodyPr>
-          <a:lstStyle/>
-          <a:p>
-            <a:pPr algn="ctr" indent="0" marL="0">
+        </p:spPr>
+        <p:txBody>
+          <a:bodyPr wrap="square" rtlCol="0" anchor="ctr">
+            <a:normAutofit/>
+          </a:bodyPr>
+          <a:lstStyle/>
+          <a:p>
+            <a:pPr marL="0" indent="0" algn="ctr">
               <a:buNone/>
             </a:pPr>
             <a:r>
@@ -9157,11 +8856,11 @@
                 <a:solidFill>
                   <a:srgbClr val="065A82"/>
                 </a:solidFill>
-                <a:latin typeface="Microsoft YaHei" pitchFamily="34" charset="0"/>
-                <a:ea typeface="Microsoft YaHei" pitchFamily="34" charset="-122"/>
-                <a:cs typeface="Microsoft YaHei" pitchFamily="34" charset="-120"/>
-              </a:rPr>
-              <a:t>本课题定位：教学级复现性验证（不声称填补研究空白）</a:t>
+                <a:latin typeface="微软雅黑" pitchFamily="34" charset="0"/>
+                <a:ea typeface="微软雅黑" pitchFamily="34" charset="-122"/>
+                <a:cs typeface="微软雅黑" pitchFamily="34" charset="-120"/>
+              </a:rPr>
+              <a:t>本课题定位：教学级复现性验证</a:t>
             </a:r>
             <a:endParaRPr lang="en-US" sz="1200" dirty="0"/>
           </a:p>
@@ -9207,15 +8906,14 @@
             <a:avLst/>
           </a:prstGeom>
           <a:noFill/>
-          <a:ln/>
-        </p:spPr>
-        <p:txBody>
-          <a:bodyPr wrap="square" rtlCol="0" anchor="ctr">
-            <a:normAutofit/>
-          </a:bodyPr>
-          <a:lstStyle/>
-          <a:p>
-            <a:pPr indent="0" marL="0">
+        </p:spPr>
+        <p:txBody>
+          <a:bodyPr wrap="square" rtlCol="0" anchor="ctr">
+            <a:normAutofit/>
+          </a:bodyPr>
+          <a:lstStyle/>
+          <a:p>
+            <a:pPr marL="0" indent="0">
               <a:buNone/>
             </a:pPr>
             <a:r>
@@ -9223,9 +8921,9 @@
                 <a:solidFill>
                   <a:srgbClr val="00B4D8"/>
                 </a:solidFill>
-                <a:latin typeface="Georgia" pitchFamily="34" charset="0"/>
-                <a:ea typeface="Georgia" pitchFamily="34" charset="-122"/>
-                <a:cs typeface="Georgia" pitchFamily="34" charset="-120"/>
+                <a:latin typeface="Georgia" panose="02040502050405090303" pitchFamily="34" charset="0"/>
+                <a:ea typeface="Georgia" panose="02040502050405090303" pitchFamily="34" charset="-122"/>
+                <a:cs typeface="Georgia" panose="02040502050405090303" pitchFamily="34" charset="-120"/>
               </a:rPr>
               <a:t>01</a:t>
             </a:r>
@@ -9248,15 +8946,14 @@
             <a:avLst/>
           </a:prstGeom>
           <a:noFill/>
-          <a:ln/>
-        </p:spPr>
-        <p:txBody>
-          <a:bodyPr wrap="square" rtlCol="0" anchor="ctr">
-            <a:normAutofit/>
-          </a:bodyPr>
-          <a:lstStyle/>
-          <a:p>
-            <a:pPr indent="0" marL="0">
+        </p:spPr>
+        <p:txBody>
+          <a:bodyPr wrap="square" rtlCol="0" anchor="ctr">
+            <a:normAutofit/>
+          </a:bodyPr>
+          <a:lstStyle/>
+          <a:p>
+            <a:pPr marL="0" indent="0">
               <a:buNone/>
             </a:pPr>
             <a:r>
@@ -9264,9 +8961,9 @@
                 <a:solidFill>
                   <a:srgbClr val="065A82"/>
                 </a:solidFill>
-                <a:latin typeface="Microsoft YaHei" pitchFamily="34" charset="0"/>
-                <a:ea typeface="Microsoft YaHei" pitchFamily="34" charset="-122"/>
-                <a:cs typeface="Microsoft YaHei" pitchFamily="34" charset="-120"/>
+                <a:latin typeface="微软雅黑" pitchFamily="34" charset="0"/>
+                <a:ea typeface="微软雅黑" pitchFamily="34" charset="-122"/>
+                <a:cs typeface="微软雅黑" pitchFamily="34" charset="-120"/>
               </a:rPr>
               <a:t>工艺窄缝</a:t>
             </a:r>
@@ -9289,15 +8986,14 @@
             <a:avLst/>
           </a:prstGeom>
           <a:noFill/>
-          <a:ln/>
-        </p:spPr>
-        <p:txBody>
-          <a:bodyPr wrap="square" rtlCol="0" anchor="ctr">
-            <a:normAutofit/>
-          </a:bodyPr>
-          <a:lstStyle/>
-          <a:p>
-            <a:pPr indent="0" marL="0">
+        </p:spPr>
+        <p:txBody>
+          <a:bodyPr wrap="square" rtlCol="0" anchor="ctr">
+            <a:normAutofit/>
+          </a:bodyPr>
+          <a:lstStyle/>
+          <a:p>
+            <a:pPr marL="0" indent="0">
               <a:lnSpc>
                 <a:spcPct val="115000"/>
               </a:lnSpc>
@@ -9308,9 +9004,9 @@
                 <a:solidFill>
                   <a:srgbClr val="1A1A2E"/>
                 </a:solidFill>
-                <a:latin typeface="Microsoft YaHei" pitchFamily="34" charset="0"/>
-                <a:ea typeface="Microsoft YaHei" pitchFamily="34" charset="-122"/>
-                <a:cs typeface="Microsoft YaHei" pitchFamily="34" charset="-120"/>
+                <a:latin typeface="微软雅黑" pitchFamily="34" charset="0"/>
+                <a:ea typeface="微软雅黑" pitchFamily="34" charset="-122"/>
+                <a:cs typeface="微软雅黑" pitchFamily="34" charset="-120"/>
               </a:rPr>
               <a:t>现有对比多针对专用芯片（Loihi/SENECA），在SMIC 0.18μm工艺下针对MLP的晶体管级复现案例较少</a:t>
             </a:r>
@@ -9358,15 +9054,14 @@
             <a:avLst/>
           </a:prstGeom>
           <a:noFill/>
-          <a:ln/>
-        </p:spPr>
-        <p:txBody>
-          <a:bodyPr wrap="square" rtlCol="0" anchor="ctr">
-            <a:normAutofit/>
-          </a:bodyPr>
-          <a:lstStyle/>
-          <a:p>
-            <a:pPr indent="0" marL="0">
+        </p:spPr>
+        <p:txBody>
+          <a:bodyPr wrap="square" rtlCol="0" anchor="ctr">
+            <a:normAutofit/>
+          </a:bodyPr>
+          <a:lstStyle/>
+          <a:p>
+            <a:pPr marL="0" indent="0">
               <a:buNone/>
             </a:pPr>
             <a:r>
@@ -9374,9 +9069,9 @@
                 <a:solidFill>
                   <a:srgbClr val="00B4D8"/>
                 </a:solidFill>
-                <a:latin typeface="Georgia" pitchFamily="34" charset="0"/>
-                <a:ea typeface="Georgia" pitchFamily="34" charset="-122"/>
-                <a:cs typeface="Georgia" pitchFamily="34" charset="-120"/>
+                <a:latin typeface="Georgia" panose="02040502050405090303" pitchFamily="34" charset="0"/>
+                <a:ea typeface="Georgia" panose="02040502050405090303" pitchFamily="34" charset="-122"/>
+                <a:cs typeface="Georgia" panose="02040502050405090303" pitchFamily="34" charset="-120"/>
               </a:rPr>
               <a:t>02</a:t>
             </a:r>
@@ -9399,15 +9094,14 @@
             <a:avLst/>
           </a:prstGeom>
           <a:noFill/>
-          <a:ln/>
-        </p:spPr>
-        <p:txBody>
-          <a:bodyPr wrap="square" rtlCol="0" anchor="ctr">
-            <a:normAutofit/>
-          </a:bodyPr>
-          <a:lstStyle/>
-          <a:p>
-            <a:pPr indent="0" marL="0">
+        </p:spPr>
+        <p:txBody>
+          <a:bodyPr wrap="square" rtlCol="0" anchor="ctr">
+            <a:normAutofit/>
+          </a:bodyPr>
+          <a:lstStyle/>
+          <a:p>
+            <a:pPr marL="0" indent="0">
               <a:buNone/>
             </a:pPr>
             <a:r>
@@ -9415,9 +9109,9 @@
                 <a:solidFill>
                   <a:srgbClr val="065A82"/>
                 </a:solidFill>
-                <a:latin typeface="Microsoft YaHei" pitchFamily="34" charset="0"/>
-                <a:ea typeface="Microsoft YaHei" pitchFamily="34" charset="-122"/>
-                <a:cs typeface="Microsoft YaHei" pitchFamily="34" charset="-120"/>
+                <a:latin typeface="微软雅黑" pitchFamily="34" charset="0"/>
+                <a:ea typeface="微软雅黑" pitchFamily="34" charset="-122"/>
+                <a:cs typeface="微软雅黑" pitchFamily="34" charset="-120"/>
               </a:rPr>
               <a:t>教学级数据</a:t>
             </a:r>
@@ -9440,15 +9134,14 @@
             <a:avLst/>
           </a:prstGeom>
           <a:noFill/>
-          <a:ln/>
-        </p:spPr>
-        <p:txBody>
-          <a:bodyPr wrap="square" rtlCol="0" anchor="ctr">
-            <a:normAutofit/>
-          </a:bodyPr>
-          <a:lstStyle/>
-          <a:p>
-            <a:pPr indent="0" marL="0">
+        </p:spPr>
+        <p:txBody>
+          <a:bodyPr wrap="square" rtlCol="0" anchor="ctr">
+            <a:normAutofit/>
+          </a:bodyPr>
+          <a:lstStyle/>
+          <a:p>
+            <a:pPr marL="0" indent="0">
               <a:lnSpc>
                 <a:spcPct val="115000"/>
               </a:lnSpc>
@@ -9459,9 +9152,9 @@
                 <a:solidFill>
                   <a:srgbClr val="1A1A2E"/>
                 </a:solidFill>
-                <a:latin typeface="Microsoft YaHei" pitchFamily="34" charset="0"/>
-                <a:ea typeface="Microsoft YaHei" pitchFamily="34" charset="-122"/>
-                <a:cs typeface="Microsoft YaHei" pitchFamily="34" charset="-120"/>
+                <a:latin typeface="微软雅黑" pitchFamily="34" charset="0"/>
+                <a:ea typeface="微软雅黑" pitchFamily="34" charset="-122"/>
+                <a:cs typeface="微软雅黑" pitchFamily="34" charset="-120"/>
               </a:rPr>
               <a:t>准确率-能耗关系已有理论框架，但软件准确率与自建电路实测功耗对应的完整教学案例仍稀缺</a:t>
             </a:r>
@@ -9509,15 +9202,14 @@
             <a:avLst/>
           </a:prstGeom>
           <a:noFill/>
-          <a:ln/>
-        </p:spPr>
-        <p:txBody>
-          <a:bodyPr wrap="square" rtlCol="0" anchor="ctr">
-            <a:normAutofit/>
-          </a:bodyPr>
-          <a:lstStyle/>
-          <a:p>
-            <a:pPr indent="0" marL="0">
+        </p:spPr>
+        <p:txBody>
+          <a:bodyPr wrap="square" rtlCol="0" anchor="ctr">
+            <a:normAutofit/>
+          </a:bodyPr>
+          <a:lstStyle/>
+          <a:p>
+            <a:pPr marL="0" indent="0">
               <a:buNone/>
             </a:pPr>
             <a:r>
@@ -9525,9 +9217,9 @@
                 <a:solidFill>
                   <a:srgbClr val="00B4D8"/>
                 </a:solidFill>
-                <a:latin typeface="Georgia" pitchFamily="34" charset="0"/>
-                <a:ea typeface="Georgia" pitchFamily="34" charset="-122"/>
-                <a:cs typeface="Georgia" pitchFamily="34" charset="-120"/>
+                <a:latin typeface="Georgia" panose="02040502050405090303" pitchFamily="34" charset="0"/>
+                <a:ea typeface="Georgia" panose="02040502050405090303" pitchFamily="34" charset="-122"/>
+                <a:cs typeface="Georgia" panose="02040502050405090303" pitchFamily="34" charset="-120"/>
               </a:rPr>
               <a:t>03</a:t>
             </a:r>
@@ -9550,15 +9242,14 @@
             <a:avLst/>
           </a:prstGeom>
           <a:noFill/>
-          <a:ln/>
-        </p:spPr>
-        <p:txBody>
-          <a:bodyPr wrap="square" rtlCol="0" anchor="ctr">
-            <a:normAutofit/>
-          </a:bodyPr>
-          <a:lstStyle/>
-          <a:p>
-            <a:pPr indent="0" marL="0">
+        </p:spPr>
+        <p:txBody>
+          <a:bodyPr wrap="square" rtlCol="0" anchor="ctr">
+            <a:normAutofit/>
+          </a:bodyPr>
+          <a:lstStyle/>
+          <a:p>
+            <a:pPr marL="0" indent="0">
               <a:buNone/>
             </a:pPr>
             <a:r>
@@ -9566,9 +9257,9 @@
                 <a:solidFill>
                   <a:srgbClr val="065A82"/>
                 </a:solidFill>
-                <a:latin typeface="Microsoft YaHei" pitchFamily="34" charset="0"/>
-                <a:ea typeface="Microsoft YaHei" pitchFamily="34" charset="-122"/>
-                <a:cs typeface="Microsoft YaHei" pitchFamily="34" charset="-120"/>
+                <a:latin typeface="微软雅黑" pitchFamily="34" charset="0"/>
+                <a:ea typeface="微软雅黑" pitchFamily="34" charset="-122"/>
+                <a:cs typeface="微软雅黑" pitchFamily="34" charset="-120"/>
               </a:rPr>
               <a:t>应用而非改进</a:t>
             </a:r>
@@ -9591,15 +9282,14 @@
             <a:avLst/>
           </a:prstGeom>
           <a:noFill/>
-          <a:ln/>
-        </p:spPr>
-        <p:txBody>
-          <a:bodyPr wrap="square" rtlCol="0" anchor="ctr">
-            <a:normAutofit/>
-          </a:bodyPr>
-          <a:lstStyle/>
-          <a:p>
-            <a:pPr indent="0" marL="0">
+        </p:spPr>
+        <p:txBody>
+          <a:bodyPr wrap="square" rtlCol="0" anchor="ctr">
+            <a:normAutofit/>
+          </a:bodyPr>
+          <a:lstStyle/>
+          <a:p>
+            <a:pPr marL="0" indent="0">
               <a:lnSpc>
                 <a:spcPct val="115000"/>
               </a:lnSpc>
@@ -9610,9 +9300,9 @@
                 <a:solidFill>
                   <a:srgbClr val="1A1A2E"/>
                 </a:solidFill>
-                <a:latin typeface="Microsoft YaHei" pitchFamily="34" charset="0"/>
-                <a:ea typeface="Microsoft YaHei" pitchFamily="34" charset="-122"/>
-                <a:cs typeface="Microsoft YaHei" pitchFamily="34" charset="-120"/>
+                <a:latin typeface="微软雅黑" pitchFamily="34" charset="0"/>
+                <a:ea typeface="微软雅黑" pitchFamily="34" charset="-122"/>
+                <a:cs typeface="微软雅黑" pitchFamily="34" charset="-120"/>
               </a:rPr>
               <a:t>转换精度损失是经典已解问题，本课题直接应用Rueckauer(2017)标准方法，关注自建电路上的表现</a:t>
             </a:r>
@@ -9660,15 +9350,14 @@
             <a:avLst/>
           </a:prstGeom>
           <a:noFill/>
-          <a:ln/>
-        </p:spPr>
-        <p:txBody>
-          <a:bodyPr wrap="square" rtlCol="0" anchor="ctr">
-            <a:normAutofit/>
-          </a:bodyPr>
-          <a:lstStyle/>
-          <a:p>
-            <a:pPr indent="0" marL="0">
+        </p:spPr>
+        <p:txBody>
+          <a:bodyPr wrap="square" rtlCol="0" anchor="ctr">
+            <a:normAutofit/>
+          </a:bodyPr>
+          <a:lstStyle/>
+          <a:p>
+            <a:pPr marL="0" indent="0">
               <a:buNone/>
             </a:pPr>
             <a:r>
@@ -9676,9 +9365,9 @@
                 <a:solidFill>
                   <a:srgbClr val="00B4D8"/>
                 </a:solidFill>
-                <a:latin typeface="Georgia" pitchFamily="34" charset="0"/>
-                <a:ea typeface="Georgia" pitchFamily="34" charset="-122"/>
-                <a:cs typeface="Georgia" pitchFamily="34" charset="-120"/>
+                <a:latin typeface="Georgia" panose="02040502050405090303" pitchFamily="34" charset="0"/>
+                <a:ea typeface="Georgia" panose="02040502050405090303" pitchFamily="34" charset="-122"/>
+                <a:cs typeface="Georgia" panose="02040502050405090303" pitchFamily="34" charset="-120"/>
               </a:rPr>
               <a:t>04</a:t>
             </a:r>
@@ -9701,15 +9390,14 @@
             <a:avLst/>
           </a:prstGeom>
           <a:noFill/>
-          <a:ln/>
-        </p:spPr>
-        <p:txBody>
-          <a:bodyPr wrap="square" rtlCol="0" anchor="ctr">
-            <a:normAutofit/>
-          </a:bodyPr>
-          <a:lstStyle/>
-          <a:p>
-            <a:pPr indent="0" marL="0">
+        </p:spPr>
+        <p:txBody>
+          <a:bodyPr wrap="square" rtlCol="0" anchor="ctr">
+            <a:normAutofit/>
+          </a:bodyPr>
+          <a:lstStyle/>
+          <a:p>
+            <a:pPr marL="0" indent="0">
               <a:buNone/>
             </a:pPr>
             <a:r>
@@ -9717,9 +9405,9 @@
                 <a:solidFill>
                   <a:srgbClr val="065A82"/>
                 </a:solidFill>
-                <a:latin typeface="Microsoft YaHei" pitchFamily="34" charset="0"/>
-                <a:ea typeface="Microsoft YaHei" pitchFamily="34" charset="-122"/>
-                <a:cs typeface="Microsoft YaHei" pitchFamily="34" charset="-120"/>
+                <a:latin typeface="微软雅黑" pitchFamily="34" charset="0"/>
+                <a:ea typeface="微软雅黑" pitchFamily="34" charset="-122"/>
+                <a:cs typeface="微软雅黑" pitchFamily="34" charset="-120"/>
               </a:rPr>
               <a:t>教学资源补充</a:t>
             </a:r>
@@ -9742,15 +9430,14 @@
             <a:avLst/>
           </a:prstGeom>
           <a:noFill/>
-          <a:ln/>
-        </p:spPr>
-        <p:txBody>
-          <a:bodyPr wrap="square" rtlCol="0" anchor="ctr">
-            <a:normAutofit/>
-          </a:bodyPr>
-          <a:lstStyle/>
-          <a:p>
-            <a:pPr indent="0" marL="0">
+        </p:spPr>
+        <p:txBody>
+          <a:bodyPr wrap="square" rtlCol="0" anchor="ctr">
+            <a:normAutofit/>
+          </a:bodyPr>
+          <a:lstStyle/>
+          <a:p>
+            <a:pPr marL="0" indent="0">
               <a:lnSpc>
                 <a:spcPct val="115000"/>
               </a:lnSpc>
@@ -9761,9 +9448,9 @@
                 <a:solidFill>
                   <a:srgbClr val="1A1A2E"/>
                 </a:solidFill>
-                <a:latin typeface="Microsoft YaHei" pitchFamily="34" charset="0"/>
-                <a:ea typeface="Microsoft YaHei" pitchFamily="34" charset="-122"/>
-                <a:cs typeface="Microsoft YaHei" pitchFamily="34" charset="-120"/>
+                <a:latin typeface="微软雅黑" pitchFamily="34" charset="0"/>
+                <a:ea typeface="微软雅黑" pitchFamily="34" charset="-122"/>
+                <a:cs typeface="微软雅黑" pitchFamily="34" charset="-120"/>
               </a:rPr>
               <a:t>NeuroBench面向系统级评测，晶体管级数字电路的完整教学设计案例仍稀缺，本课题可作参考</a:t>
             </a:r>
@@ -9781,12 +9468,13 @@
 
 <file path=ppt/slides/slide7.xml><?xml version="1.0" encoding="utf-8"?>
 <p:sld xmlns:a="http://schemas.openxmlformats.org/drawingml/2006/main" xmlns:r="http://schemas.openxmlformats.org/officeDocument/2006/relationships" xmlns:p="http://schemas.openxmlformats.org/presentationml/2006/main">
-  <p:cSld name="Slide 7">
+  <p:cSld>
     <p:bg>
       <p:bgPr>
         <a:solidFill>
           <a:srgbClr val="FFFFFF"/>
         </a:solidFill>
+        <a:effectLst/>
       </p:bgPr>
     </p:bg>
     <p:spTree>
@@ -9820,7 +9508,6 @@
           <a:solidFill>
             <a:srgbClr val="065A82"/>
           </a:solidFill>
-          <a:ln/>
         </p:spPr>
       </p:sp>
       <p:sp>
@@ -9838,15 +9525,14 @@
             <a:avLst/>
           </a:prstGeom>
           <a:noFill/>
-          <a:ln/>
-        </p:spPr>
-        <p:txBody>
-          <a:bodyPr wrap="square" rtlCol="0" anchor="ctr">
-            <a:normAutofit/>
-          </a:bodyPr>
-          <a:lstStyle/>
-          <a:p>
-            <a:pPr algn="l" indent="0" marL="0">
+        </p:spPr>
+        <p:txBody>
+          <a:bodyPr wrap="square" rtlCol="0" anchor="ctr">
+            <a:normAutofit/>
+          </a:bodyPr>
+          <a:lstStyle/>
+          <a:p>
+            <a:pPr marL="0" indent="0" algn="l">
               <a:buNone/>
             </a:pPr>
             <a:r>
@@ -9854,9 +9540,9 @@
                 <a:solidFill>
                   <a:srgbClr val="FFFFFF"/>
                 </a:solidFill>
-                <a:latin typeface="Songti SC" pitchFamily="34" charset="0"/>
-                <a:ea typeface="Songti SC" pitchFamily="34" charset="-122"/>
-                <a:cs typeface="Songti SC" pitchFamily="34" charset="-120"/>
+                <a:latin typeface="Songti SC" panose="02010800040101010101" pitchFamily="34" charset="-122"/>
+                <a:ea typeface="Songti SC" panose="02010800040101010101" pitchFamily="34" charset="-122"/>
+                <a:cs typeface="Songti SC" panose="02010800040101010101" pitchFamily="34" charset="-120"/>
               </a:rPr>
               <a:t>四、研究内容</a:t>
             </a:r>
@@ -9879,15 +9565,14 @@
             <a:avLst/>
           </a:prstGeom>
           <a:noFill/>
-          <a:ln/>
-        </p:spPr>
-        <p:txBody>
-          <a:bodyPr wrap="square" rtlCol="0" anchor="ctr">
-            <a:normAutofit/>
-          </a:bodyPr>
-          <a:lstStyle/>
-          <a:p>
-            <a:pPr algn="l" indent="0" marL="0">
+        </p:spPr>
+        <p:txBody>
+          <a:bodyPr wrap="square" rtlCol="0" anchor="ctr">
+            <a:normAutofit/>
+          </a:bodyPr>
+          <a:lstStyle/>
+          <a:p>
+            <a:pPr marL="0" indent="0" algn="l">
               <a:buNone/>
             </a:pPr>
             <a:r>
@@ -9895,9 +9580,9 @@
                 <a:solidFill>
                   <a:srgbClr val="B0D0E0"/>
                 </a:solidFill>
-                <a:latin typeface="Microsoft YaHei" pitchFamily="34" charset="0"/>
-                <a:ea typeface="Microsoft YaHei" pitchFamily="34" charset="-122"/>
-                <a:cs typeface="Microsoft YaHei" pitchFamily="34" charset="-120"/>
+                <a:latin typeface="微软雅黑" pitchFamily="34" charset="0"/>
+                <a:ea typeface="微软雅黑" pitchFamily="34" charset="-122"/>
+                <a:cs typeface="微软雅黑" pitchFamily="34" charset="-120"/>
               </a:rPr>
               <a:t>Research Content</a:t>
             </a:r>
@@ -9947,7 +9632,6 @@
           <a:solidFill>
             <a:srgbClr val="1C7293"/>
           </a:solidFill>
-          <a:ln/>
         </p:spPr>
       </p:sp>
       <p:sp>
@@ -9965,15 +9649,14 @@
             <a:avLst/>
           </a:prstGeom>
           <a:noFill/>
-          <a:ln/>
-        </p:spPr>
-        <p:txBody>
-          <a:bodyPr wrap="square" rtlCol="0" anchor="ctr">
-            <a:normAutofit/>
-          </a:bodyPr>
-          <a:lstStyle/>
-          <a:p>
-            <a:pPr algn="ctr" indent="0" marL="0">
+        </p:spPr>
+        <p:txBody>
+          <a:bodyPr wrap="square" rtlCol="0" anchor="ctr">
+            <a:normAutofit/>
+          </a:bodyPr>
+          <a:lstStyle/>
+          <a:p>
+            <a:pPr marL="0" indent="0" algn="ctr">
               <a:buNone/>
             </a:pPr>
             <a:r>
@@ -10003,15 +9686,14 @@
             <a:avLst/>
           </a:prstGeom>
           <a:noFill/>
-          <a:ln/>
-        </p:spPr>
-        <p:txBody>
-          <a:bodyPr wrap="square" rtlCol="0" anchor="ctr">
-            <a:normAutofit/>
-          </a:bodyPr>
-          <a:lstStyle/>
-          <a:p>
-            <a:pPr indent="0" marL="0">
+        </p:spPr>
+        <p:txBody>
+          <a:bodyPr wrap="square" rtlCol="0" anchor="ctr">
+            <a:normAutofit/>
+          </a:bodyPr>
+          <a:lstStyle/>
+          <a:p>
+            <a:pPr marL="0" indent="0">
               <a:buNone/>
             </a:pPr>
             <a:r>
@@ -10019,9 +9701,9 @@
                 <a:solidFill>
                   <a:srgbClr val="065A82"/>
                 </a:solidFill>
-                <a:latin typeface="Microsoft YaHei" pitchFamily="34" charset="0"/>
-                <a:ea typeface="Microsoft YaHei" pitchFamily="34" charset="-122"/>
-                <a:cs typeface="Microsoft YaHei" pitchFamily="34" charset="-120"/>
+                <a:latin typeface="微软雅黑" pitchFamily="34" charset="0"/>
+                <a:ea typeface="微软雅黑" pitchFamily="34" charset="-122"/>
+                <a:cs typeface="微软雅黑" pitchFamily="34" charset="-120"/>
               </a:rPr>
               <a:t>ANN-MLP基线</a:t>
             </a:r>
@@ -10044,15 +9726,14 @@
             <a:avLst/>
           </a:prstGeom>
           <a:noFill/>
-          <a:ln/>
-        </p:spPr>
-        <p:txBody>
-          <a:bodyPr wrap="square" rtlCol="0" anchor="ctr">
-            <a:normAutofit/>
-          </a:bodyPr>
-          <a:lstStyle/>
-          <a:p>
-            <a:pPr indent="0" marL="0">
+        </p:spPr>
+        <p:txBody>
+          <a:bodyPr wrap="square" rtlCol="0" anchor="ctr">
+            <a:normAutofit/>
+          </a:bodyPr>
+          <a:lstStyle/>
+          <a:p>
+            <a:pPr marL="0" indent="0">
               <a:lnSpc>
                 <a:spcPct val="110000"/>
               </a:lnSpc>
@@ -10063,16 +9744,16 @@
                 <a:solidFill>
                   <a:srgbClr val="1A1A2E"/>
                 </a:solidFill>
-                <a:latin typeface="Microsoft YaHei" pitchFamily="34" charset="0"/>
-                <a:ea typeface="Microsoft YaHei" pitchFamily="34" charset="-122"/>
-                <a:cs typeface="Microsoft YaHei" pitchFamily="34" charset="-120"/>
+                <a:latin typeface="微软雅黑" pitchFamily="34" charset="0"/>
+                <a:ea typeface="微软雅黑" pitchFamily="34" charset="-122"/>
+                <a:cs typeface="微软雅黑" pitchFamily="34" charset="-120"/>
               </a:rPr>
               <a:t>软件：numpy手写MLP(784-300-10, ReLU)</a:t>
             </a:r>
             <a:endParaRPr lang="en-US" sz="1000" dirty="0"/>
           </a:p>
           <a:p>
-            <a:pPr indent="0" marL="0">
+            <a:pPr marL="0" indent="0">
               <a:lnSpc>
                 <a:spcPct val="110000"/>
               </a:lnSpc>
@@ -10083,9 +9764,9 @@
                 <a:solidFill>
                   <a:srgbClr val="1A1A2E"/>
                 </a:solidFill>
-                <a:latin typeface="Microsoft YaHei" pitchFamily="34" charset="0"/>
-                <a:ea typeface="Microsoft YaHei" pitchFamily="34" charset="-122"/>
-                <a:cs typeface="Microsoft YaHei" pitchFamily="34" charset="-120"/>
+                <a:latin typeface="微软雅黑" pitchFamily="34" charset="0"/>
+                <a:ea typeface="微软雅黑" pitchFamily="34" charset="-122"/>
+                <a:cs typeface="微软雅黑" pitchFamily="34" charset="-120"/>
               </a:rPr>
               <a:t>硬件：4×4阵列乘法器+4位CLA加法器</a:t>
             </a:r>
@@ -10135,7 +9816,6 @@
           <a:solidFill>
             <a:srgbClr val="1C7293"/>
           </a:solidFill>
-          <a:ln/>
         </p:spPr>
       </p:sp>
       <p:sp>
@@ -10153,15 +9833,14 @@
             <a:avLst/>
           </a:prstGeom>
           <a:noFill/>
-          <a:ln/>
-        </p:spPr>
-        <p:txBody>
-          <a:bodyPr wrap="square" rtlCol="0" anchor="ctr">
-            <a:normAutofit/>
-          </a:bodyPr>
-          <a:lstStyle/>
-          <a:p>
-            <a:pPr algn="ctr" indent="0" marL="0">
+        </p:spPr>
+        <p:txBody>
+          <a:bodyPr wrap="square" rtlCol="0" anchor="ctr">
+            <a:normAutofit/>
+          </a:bodyPr>
+          <a:lstStyle/>
+          <a:p>
+            <a:pPr marL="0" indent="0" algn="ctr">
               <a:buNone/>
             </a:pPr>
             <a:r>
@@ -10191,15 +9870,14 @@
             <a:avLst/>
           </a:prstGeom>
           <a:noFill/>
-          <a:ln/>
-        </p:spPr>
-        <p:txBody>
-          <a:bodyPr wrap="square" rtlCol="0" anchor="ctr">
-            <a:normAutofit/>
-          </a:bodyPr>
-          <a:lstStyle/>
-          <a:p>
-            <a:pPr indent="0" marL="0">
+        </p:spPr>
+        <p:txBody>
+          <a:bodyPr wrap="square" rtlCol="0" anchor="ctr">
+            <a:normAutofit/>
+          </a:bodyPr>
+          <a:lstStyle/>
+          <a:p>
+            <a:pPr marL="0" indent="0">
               <a:buNone/>
             </a:pPr>
             <a:r>
@@ -10207,9 +9885,9 @@
                 <a:solidFill>
                   <a:srgbClr val="065A82"/>
                 </a:solidFill>
-                <a:latin typeface="Microsoft YaHei" pitchFamily="34" charset="0"/>
-                <a:ea typeface="Microsoft YaHei" pitchFamily="34" charset="-122"/>
-                <a:cs typeface="Microsoft YaHei" pitchFamily="34" charset="-120"/>
+                <a:latin typeface="微软雅黑" pitchFamily="34" charset="0"/>
+                <a:ea typeface="微软雅黑" pitchFamily="34" charset="-122"/>
+                <a:cs typeface="微软雅黑" pitchFamily="34" charset="-120"/>
               </a:rPr>
               <a:t>ANN-to-SNN转换</a:t>
             </a:r>
@@ -10232,15 +9910,14 @@
             <a:avLst/>
           </a:prstGeom>
           <a:noFill/>
-          <a:ln/>
-        </p:spPr>
-        <p:txBody>
-          <a:bodyPr wrap="square" rtlCol="0" anchor="ctr">
-            <a:normAutofit/>
-          </a:bodyPr>
-          <a:lstStyle/>
-          <a:p>
-            <a:pPr indent="0" marL="0">
+        </p:spPr>
+        <p:txBody>
+          <a:bodyPr wrap="square" rtlCol="0" anchor="ctr">
+            <a:normAutofit/>
+          </a:bodyPr>
+          <a:lstStyle/>
+          <a:p>
+            <a:pPr marL="0" indent="0">
               <a:lnSpc>
                 <a:spcPct val="110000"/>
               </a:lnSpc>
@@ -10251,16 +9928,16 @@
                 <a:solidFill>
                   <a:srgbClr val="1A1A2E"/>
                 </a:solidFill>
-                <a:latin typeface="Microsoft YaHei" pitchFamily="34" charset="0"/>
-                <a:ea typeface="Microsoft YaHei" pitchFamily="34" charset="-122"/>
-                <a:cs typeface="Microsoft YaHei" pitchFamily="34" charset="-120"/>
+                <a:latin typeface="微软雅黑" pitchFamily="34" charset="0"/>
+                <a:ea typeface="微软雅黑" pitchFamily="34" charset="-122"/>
+                <a:cs typeface="微软雅黑" pitchFamily="34" charset="-120"/>
               </a:rPr>
               <a:t>权重复用+ReLU→IF替换+泊松编码</a:t>
             </a:r>
             <a:endParaRPr lang="en-US" sz="1000" dirty="0"/>
           </a:p>
           <a:p>
-            <a:pPr indent="0" marL="0">
+            <a:pPr marL="0" indent="0">
               <a:lnSpc>
                 <a:spcPct val="110000"/>
               </a:lnSpc>
@@ -10271,9 +9948,9 @@
                 <a:solidFill>
                   <a:srgbClr val="1A1A2E"/>
                 </a:solidFill>
-                <a:latin typeface="Microsoft YaHei" pitchFamily="34" charset="0"/>
-                <a:ea typeface="Microsoft YaHei" pitchFamily="34" charset="-122"/>
-                <a:cs typeface="Microsoft YaHei" pitchFamily="34" charset="-120"/>
+                <a:latin typeface="微软雅黑" pitchFamily="34" charset="0"/>
+                <a:ea typeface="微软雅黑" pitchFamily="34" charset="-122"/>
+                <a:cs typeface="微软雅黑" pitchFamily="34" charset="-120"/>
               </a:rPr>
               <a:t>时间步仿真，MNIST准确率≥85%</a:t>
             </a:r>
@@ -10323,7 +10000,6 @@
           <a:solidFill>
             <a:srgbClr val="1C7293"/>
           </a:solidFill>
-          <a:ln/>
         </p:spPr>
       </p:sp>
       <p:sp>
@@ -10341,15 +10017,14 @@
             <a:avLst/>
           </a:prstGeom>
           <a:noFill/>
-          <a:ln/>
-        </p:spPr>
-        <p:txBody>
-          <a:bodyPr wrap="square" rtlCol="0" anchor="ctr">
-            <a:normAutofit/>
-          </a:bodyPr>
-          <a:lstStyle/>
-          <a:p>
-            <a:pPr algn="ctr" indent="0" marL="0">
+        </p:spPr>
+        <p:txBody>
+          <a:bodyPr wrap="square" rtlCol="0" anchor="ctr">
+            <a:normAutofit/>
+          </a:bodyPr>
+          <a:lstStyle/>
+          <a:p>
+            <a:pPr marL="0" indent="0" algn="ctr">
               <a:buNone/>
             </a:pPr>
             <a:r>
@@ -10379,15 +10054,14 @@
             <a:avLst/>
           </a:prstGeom>
           <a:noFill/>
-          <a:ln/>
-        </p:spPr>
-        <p:txBody>
-          <a:bodyPr wrap="square" rtlCol="0" anchor="ctr">
-            <a:normAutofit/>
-          </a:bodyPr>
-          <a:lstStyle/>
-          <a:p>
-            <a:pPr indent="0" marL="0">
+        </p:spPr>
+        <p:txBody>
+          <a:bodyPr wrap="square" rtlCol="0" anchor="ctr">
+            <a:normAutofit/>
+          </a:bodyPr>
+          <a:lstStyle/>
+          <a:p>
+            <a:pPr marL="0" indent="0">
               <a:buNone/>
             </a:pPr>
             <a:r>
@@ -10395,9 +10069,9 @@
                 <a:solidFill>
                   <a:srgbClr val="065A82"/>
                 </a:solidFill>
-                <a:latin typeface="Microsoft YaHei" pitchFamily="34" charset="0"/>
-                <a:ea typeface="Microsoft YaHei" pitchFamily="34" charset="-122"/>
-                <a:cs typeface="Microsoft YaHei" pitchFamily="34" charset="-120"/>
+                <a:latin typeface="微软雅黑" pitchFamily="34" charset="0"/>
+                <a:ea typeface="微软雅黑" pitchFamily="34" charset="-122"/>
+                <a:cs typeface="微软雅黑" pitchFamily="34" charset="-120"/>
               </a:rPr>
               <a:t>SNN-IF神经元电路</a:t>
             </a:r>
@@ -10420,15 +10094,14 @@
             <a:avLst/>
           </a:prstGeom>
           <a:noFill/>
-          <a:ln/>
-        </p:spPr>
-        <p:txBody>
-          <a:bodyPr wrap="square" rtlCol="0" anchor="ctr">
-            <a:normAutofit/>
-          </a:bodyPr>
-          <a:lstStyle/>
-          <a:p>
-            <a:pPr indent="0" marL="0">
+        </p:spPr>
+        <p:txBody>
+          <a:bodyPr wrap="square" rtlCol="0" anchor="ctr">
+            <a:normAutofit/>
+          </a:bodyPr>
+          <a:lstStyle/>
+          <a:p>
+            <a:pPr marL="0" indent="0">
               <a:lnSpc>
                 <a:spcPct val="110000"/>
               </a:lnSpc>
@@ -10439,16 +10112,16 @@
                 <a:solidFill>
                   <a:srgbClr val="1A1A2E"/>
                 </a:solidFill>
-                <a:latin typeface="Microsoft YaHei" pitchFamily="34" charset="0"/>
-                <a:ea typeface="Microsoft YaHei" pitchFamily="34" charset="-122"/>
-                <a:cs typeface="Microsoft YaHei" pitchFamily="34" charset="-120"/>
+                <a:latin typeface="微软雅黑" pitchFamily="34" charset="0"/>
+                <a:ea typeface="微软雅黑" pitchFamily="34" charset="-122"/>
+                <a:cs typeface="微软雅黑" pitchFamily="34" charset="-120"/>
               </a:rPr>
               <a:t>第一阶段：积分器(加法器+寄存器)</a:t>
             </a:r>
             <a:endParaRPr lang="en-US" sz="1000" dirty="0"/>
           </a:p>
           <a:p>
-            <a:pPr indent="0" marL="0">
+            <a:pPr marL="0" indent="0">
               <a:lnSpc>
                 <a:spcPct val="110000"/>
               </a:lnSpc>
@@ -10459,9 +10132,9 @@
                 <a:solidFill>
                   <a:srgbClr val="1A1A2E"/>
                 </a:solidFill>
-                <a:latin typeface="Microsoft YaHei" pitchFamily="34" charset="0"/>
-                <a:ea typeface="Microsoft YaHei" pitchFamily="34" charset="-122"/>
-                <a:cs typeface="Microsoft YaHei" pitchFamily="34" charset="-120"/>
+                <a:latin typeface="微软雅黑" pitchFamily="34" charset="0"/>
+                <a:ea typeface="微软雅黑" pitchFamily="34" charset="-122"/>
+                <a:cs typeface="微软雅黑" pitchFamily="34" charset="-120"/>
               </a:rPr>
               <a:t>第二阶段：IF神经元(+比较器+复位)</a:t>
             </a:r>
@@ -10511,7 +10184,6 @@
           <a:solidFill>
             <a:srgbClr val="1C7293"/>
           </a:solidFill>
-          <a:ln/>
         </p:spPr>
       </p:sp>
       <p:sp>
@@ -10529,15 +10201,14 @@
             <a:avLst/>
           </a:prstGeom>
           <a:noFill/>
-          <a:ln/>
-        </p:spPr>
-        <p:txBody>
-          <a:bodyPr wrap="square" rtlCol="0" anchor="ctr">
-            <a:normAutofit/>
-          </a:bodyPr>
-          <a:lstStyle/>
-          <a:p>
-            <a:pPr algn="ctr" indent="0" marL="0">
+        </p:spPr>
+        <p:txBody>
+          <a:bodyPr wrap="square" rtlCol="0" anchor="ctr">
+            <a:normAutofit/>
+          </a:bodyPr>
+          <a:lstStyle/>
+          <a:p>
+            <a:pPr marL="0" indent="0" algn="ctr">
               <a:buNone/>
             </a:pPr>
             <a:r>
@@ -10567,15 +10238,14 @@
             <a:avLst/>
           </a:prstGeom>
           <a:noFill/>
-          <a:ln/>
-        </p:spPr>
-        <p:txBody>
-          <a:bodyPr wrap="square" rtlCol="0" anchor="ctr">
-            <a:normAutofit/>
-          </a:bodyPr>
-          <a:lstStyle/>
-          <a:p>
-            <a:pPr indent="0" marL="0">
+        </p:spPr>
+        <p:txBody>
+          <a:bodyPr wrap="square" rtlCol="0" anchor="ctr">
+            <a:normAutofit/>
+          </a:bodyPr>
+          <a:lstStyle/>
+          <a:p>
+            <a:pPr marL="0" indent="0">
               <a:buNone/>
             </a:pPr>
             <a:r>
@@ -10583,9 +10253,9 @@
                 <a:solidFill>
                   <a:srgbClr val="065A82"/>
                 </a:solidFill>
-                <a:latin typeface="Microsoft YaHei" pitchFamily="34" charset="0"/>
-                <a:ea typeface="Microsoft YaHei" pitchFamily="34" charset="-122"/>
-                <a:cs typeface="Microsoft YaHei" pitchFamily="34" charset="-120"/>
+                <a:latin typeface="微软雅黑" pitchFamily="34" charset="0"/>
+                <a:ea typeface="微软雅黑" pitchFamily="34" charset="-122"/>
+                <a:cs typeface="微软雅黑" pitchFamily="34" charset="-120"/>
               </a:rPr>
               <a:t>对比分析</a:t>
             </a:r>
@@ -10608,15 +10278,14 @@
             <a:avLst/>
           </a:prstGeom>
           <a:noFill/>
-          <a:ln/>
-        </p:spPr>
-        <p:txBody>
-          <a:bodyPr wrap="square" rtlCol="0" anchor="ctr">
-            <a:normAutofit/>
-          </a:bodyPr>
-          <a:lstStyle/>
-          <a:p>
-            <a:pPr indent="0" marL="0">
+        </p:spPr>
+        <p:txBody>
+          <a:bodyPr wrap="square" rtlCol="0" anchor="ctr">
+            <a:normAutofit/>
+          </a:bodyPr>
+          <a:lstStyle/>
+          <a:p>
+            <a:pPr marL="0" indent="0">
               <a:lnSpc>
                 <a:spcPct val="110000"/>
               </a:lnSpc>
@@ -10627,16 +10296,16 @@
                 <a:solidFill>
                   <a:srgbClr val="1A1A2E"/>
                 </a:solidFill>
-                <a:latin typeface="Microsoft YaHei" pitchFamily="34" charset="0"/>
-                <a:ea typeface="Microsoft YaHei" pitchFamily="34" charset="-122"/>
-                <a:cs typeface="Microsoft YaHei" pitchFamily="34" charset="-120"/>
+                <a:latin typeface="微软雅黑" pitchFamily="34" charset="0"/>
+                <a:ea typeface="微软雅黑" pitchFamily="34" charset="-122"/>
+                <a:cs typeface="微软雅黑" pitchFamily="34" charset="-120"/>
               </a:rPr>
               <a:t>晶体管数/延迟/功耗三维对比</a:t>
             </a:r>
             <a:endParaRPr lang="en-US" sz="1000" dirty="0"/>
           </a:p>
           <a:p>
-            <a:pPr indent="0" marL="0">
+            <a:pPr marL="0" indent="0">
               <a:lnSpc>
                 <a:spcPct val="110000"/>
               </a:lnSpc>
@@ -10647,9 +10316,9 @@
                 <a:solidFill>
                   <a:srgbClr val="1A1A2E"/>
                 </a:solidFill>
-                <a:latin typeface="Microsoft YaHei" pitchFamily="34" charset="0"/>
-                <a:ea typeface="Microsoft YaHei" pitchFamily="34" charset="-122"/>
-                <a:cs typeface="Microsoft YaHei" pitchFamily="34" charset="-120"/>
+                <a:latin typeface="微软雅黑" pitchFamily="34" charset="0"/>
+                <a:ea typeface="微软雅黑" pitchFamily="34" charset="-122"/>
+                <a:cs typeface="微软雅黑" pitchFamily="34" charset="-120"/>
               </a:rPr>
               <a:t>验证"无需乘法器""事件驱动"优势</a:t>
             </a:r>
@@ -10699,7 +10368,6 @@
           <a:solidFill>
             <a:srgbClr val="1C7293"/>
           </a:solidFill>
-          <a:ln/>
         </p:spPr>
       </p:sp>
       <p:sp>
@@ -10717,15 +10385,14 @@
             <a:avLst/>
           </a:prstGeom>
           <a:noFill/>
-          <a:ln/>
-        </p:spPr>
-        <p:txBody>
-          <a:bodyPr wrap="square" rtlCol="0" anchor="ctr">
-            <a:normAutofit/>
-          </a:bodyPr>
-          <a:lstStyle/>
-          <a:p>
-            <a:pPr algn="ctr" indent="0" marL="0">
+        </p:spPr>
+        <p:txBody>
+          <a:bodyPr wrap="square" rtlCol="0" anchor="ctr">
+            <a:normAutofit/>
+          </a:bodyPr>
+          <a:lstStyle/>
+          <a:p>
+            <a:pPr marL="0" indent="0" algn="ctr">
               <a:buNone/>
             </a:pPr>
             <a:r>
@@ -10755,15 +10422,14 @@
             <a:avLst/>
           </a:prstGeom>
           <a:noFill/>
-          <a:ln/>
-        </p:spPr>
-        <p:txBody>
-          <a:bodyPr wrap="square" rtlCol="0" anchor="ctr">
-            <a:normAutofit/>
-          </a:bodyPr>
-          <a:lstStyle/>
-          <a:p>
-            <a:pPr indent="0" marL="0">
+        </p:spPr>
+        <p:txBody>
+          <a:bodyPr wrap="square" rtlCol="0" anchor="ctr">
+            <a:normAutofit/>
+          </a:bodyPr>
+          <a:lstStyle/>
+          <a:p>
+            <a:pPr marL="0" indent="0">
               <a:buNone/>
             </a:pPr>
             <a:r>
@@ -10771,9 +10437,9 @@
                 <a:solidFill>
                   <a:srgbClr val="065A82"/>
                 </a:solidFill>
-                <a:latin typeface="Microsoft YaHei" pitchFamily="34" charset="0"/>
-                <a:ea typeface="Microsoft YaHei" pitchFamily="34" charset="-122"/>
-                <a:cs typeface="Microsoft YaHei" pitchFamily="34" charset="-120"/>
+                <a:latin typeface="微软雅黑" pitchFamily="34" charset="0"/>
+                <a:ea typeface="微软雅黑" pitchFamily="34" charset="-122"/>
+                <a:cs typeface="微软雅黑" pitchFamily="34" charset="-120"/>
               </a:rPr>
               <a:t>Trade-off拟合</a:t>
             </a:r>
@@ -10796,15 +10462,14 @@
             <a:avLst/>
           </a:prstGeom>
           <a:noFill/>
-          <a:ln/>
-        </p:spPr>
-        <p:txBody>
-          <a:bodyPr wrap="square" rtlCol="0" anchor="ctr">
-            <a:normAutofit/>
-          </a:bodyPr>
-          <a:lstStyle/>
-          <a:p>
-            <a:pPr indent="0" marL="0">
+        </p:spPr>
+        <p:txBody>
+          <a:bodyPr wrap="square" rtlCol="0" anchor="ctr">
+            <a:normAutofit/>
+          </a:bodyPr>
+          <a:lstStyle/>
+          <a:p>
+            <a:pPr marL="0" indent="0">
               <a:lnSpc>
                 <a:spcPct val="110000"/>
               </a:lnSpc>
@@ -10815,16 +10480,16 @@
                 <a:solidFill>
                   <a:srgbClr val="1A1A2E"/>
                 </a:solidFill>
-                <a:latin typeface="Microsoft YaHei" pitchFamily="34" charset="0"/>
-                <a:ea typeface="Microsoft YaHei" pitchFamily="34" charset="-122"/>
-                <a:cs typeface="Microsoft YaHei" pitchFamily="34" charset="-120"/>
+                <a:latin typeface="微软雅黑" pitchFamily="34" charset="0"/>
+                <a:ea typeface="微软雅黑" pitchFamily="34" charset="-122"/>
+                <a:cs typeface="微软雅黑" pitchFamily="34" charset="-120"/>
               </a:rPr>
               <a:t>改变(T, Vth)获取多组数据点</a:t>
             </a:r>
             <a:endParaRPr lang="en-US" sz="1000" dirty="0"/>
           </a:p>
           <a:p>
-            <a:pPr indent="0" marL="0">
+            <a:pPr marL="0" indent="0">
               <a:lnSpc>
                 <a:spcPct val="110000"/>
               </a:lnSpc>
@@ -10835,9 +10500,9 @@
                 <a:solidFill>
                   <a:srgbClr val="1A1A2E"/>
                 </a:solidFill>
-                <a:latin typeface="Microsoft YaHei" pitchFamily="34" charset="0"/>
-                <a:ea typeface="Microsoft YaHei" pitchFamily="34" charset="-122"/>
-                <a:cs typeface="Microsoft YaHei" pitchFamily="34" charset="-120"/>
+                <a:latin typeface="微软雅黑" pitchFamily="34" charset="0"/>
+                <a:ea typeface="微软雅黑" pitchFamily="34" charset="-122"/>
+                <a:cs typeface="微软雅黑" pitchFamily="34" charset="-120"/>
               </a:rPr>
               <a:t>拟合准确率-功耗定量关系曲线</a:t>
             </a:r>
@@ -10855,12 +10520,13 @@
 
 <file path=ppt/slides/slide8.xml><?xml version="1.0" encoding="utf-8"?>
 <p:sld xmlns:a="http://schemas.openxmlformats.org/drawingml/2006/main" xmlns:r="http://schemas.openxmlformats.org/officeDocument/2006/relationships" xmlns:p="http://schemas.openxmlformats.org/presentationml/2006/main">
-  <p:cSld name="Slide 8">
+  <p:cSld>
     <p:bg>
       <p:bgPr>
         <a:solidFill>
           <a:srgbClr val="FFFFFF"/>
         </a:solidFill>
+        <a:effectLst/>
       </p:bgPr>
     </p:bg>
     <p:spTree>
@@ -10894,7 +10560,6 @@
           <a:solidFill>
             <a:srgbClr val="065A82"/>
           </a:solidFill>
-          <a:ln/>
         </p:spPr>
       </p:sp>
       <p:sp>
@@ -10912,15 +10577,14 @@
             <a:avLst/>
           </a:prstGeom>
           <a:noFill/>
-          <a:ln/>
-        </p:spPr>
-        <p:txBody>
-          <a:bodyPr wrap="square" rtlCol="0" anchor="ctr">
-            <a:normAutofit/>
-          </a:bodyPr>
-          <a:lstStyle/>
-          <a:p>
-            <a:pPr algn="l" indent="0" marL="0">
+        </p:spPr>
+        <p:txBody>
+          <a:bodyPr wrap="square" rtlCol="0" anchor="ctr">
+            <a:normAutofit/>
+          </a:bodyPr>
+          <a:lstStyle/>
+          <a:p>
+            <a:pPr marL="0" indent="0" algn="l">
               <a:buNone/>
             </a:pPr>
             <a:r>
@@ -10928,9 +10592,9 @@
                 <a:solidFill>
                   <a:srgbClr val="FFFFFF"/>
                 </a:solidFill>
-                <a:latin typeface="Songti SC" pitchFamily="34" charset="0"/>
-                <a:ea typeface="Songti SC" pitchFamily="34" charset="-122"/>
-                <a:cs typeface="Songti SC" pitchFamily="34" charset="-120"/>
+                <a:latin typeface="Songti SC" panose="02010800040101010101" pitchFamily="34" charset="-122"/>
+                <a:ea typeface="Songti SC" panose="02010800040101010101" pitchFamily="34" charset="-122"/>
+                <a:cs typeface="Songti SC" panose="02010800040101010101" pitchFamily="34" charset="-120"/>
               </a:rPr>
               <a:t>五、技术路线</a:t>
             </a:r>
@@ -10953,15 +10617,14 @@
             <a:avLst/>
           </a:prstGeom>
           <a:noFill/>
-          <a:ln/>
-        </p:spPr>
-        <p:txBody>
-          <a:bodyPr wrap="square" rtlCol="0" anchor="ctr">
-            <a:normAutofit/>
-          </a:bodyPr>
-          <a:lstStyle/>
-          <a:p>
-            <a:pPr algn="l" indent="0" marL="0">
+        </p:spPr>
+        <p:txBody>
+          <a:bodyPr wrap="square" rtlCol="0" anchor="ctr">
+            <a:normAutofit/>
+          </a:bodyPr>
+          <a:lstStyle/>
+          <a:p>
+            <a:pPr marL="0" indent="0" algn="l">
               <a:buNone/>
             </a:pPr>
             <a:r>
@@ -10969,9 +10632,9 @@
                 <a:solidFill>
                   <a:srgbClr val="B0D0E0"/>
                 </a:solidFill>
-                <a:latin typeface="Microsoft YaHei" pitchFamily="34" charset="0"/>
-                <a:ea typeface="Microsoft YaHei" pitchFamily="34" charset="-122"/>
-                <a:cs typeface="Microsoft YaHei" pitchFamily="34" charset="-120"/>
+                <a:latin typeface="微软雅黑" pitchFamily="34" charset="0"/>
+                <a:ea typeface="微软雅黑" pitchFamily="34" charset="-122"/>
+                <a:cs typeface="微软雅黑" pitchFamily="34" charset="-120"/>
               </a:rPr>
               <a:t>Technical Roadmap</a:t>
             </a:r>
@@ -11019,15 +10682,14 @@
             <a:avLst/>
           </a:prstGeom>
           <a:noFill/>
-          <a:ln/>
-        </p:spPr>
-        <p:txBody>
-          <a:bodyPr wrap="square" rtlCol="0" anchor="ctr">
-            <a:normAutofit/>
-          </a:bodyPr>
-          <a:lstStyle/>
-          <a:p>
-            <a:pPr algn="ctr" indent="0" marL="0">
+        </p:spPr>
+        <p:txBody>
+          <a:bodyPr wrap="square" rtlCol="0" anchor="ctr">
+            <a:normAutofit/>
+          </a:bodyPr>
+          <a:lstStyle/>
+          <a:p>
+            <a:pPr marL="0" indent="0" algn="ctr">
               <a:lnSpc>
                 <a:spcPct val="110000"/>
               </a:lnSpc>
@@ -11038,16 +10700,16 @@
                 <a:solidFill>
                   <a:srgbClr val="FFFFFF"/>
                 </a:solidFill>
-                <a:latin typeface="Microsoft YaHei" pitchFamily="34" charset="0"/>
-                <a:ea typeface="Microsoft YaHei" pitchFamily="34" charset="-122"/>
-                <a:cs typeface="Microsoft YaHei" pitchFamily="34" charset="-120"/>
+                <a:latin typeface="微软雅黑" pitchFamily="34" charset="0"/>
+                <a:ea typeface="微软雅黑" pitchFamily="34" charset="-122"/>
+                <a:cs typeface="微软雅黑" pitchFamily="34" charset="-120"/>
               </a:rPr>
               <a:t>Step 1</a:t>
             </a:r>
             <a:endParaRPr lang="en-US" sz="1300" dirty="0"/>
           </a:p>
           <a:p>
-            <a:pPr algn="ctr" indent="0" marL="0">
+            <a:pPr marL="0" indent="0" algn="ctr">
               <a:lnSpc>
                 <a:spcPct val="110000"/>
               </a:lnSpc>
@@ -11058,9 +10720,9 @@
                 <a:solidFill>
                   <a:srgbClr val="FFFFFF"/>
                 </a:solidFill>
-                <a:latin typeface="Microsoft YaHei" pitchFamily="34" charset="0"/>
-                <a:ea typeface="Microsoft YaHei" pitchFamily="34" charset="-122"/>
-                <a:cs typeface="Microsoft YaHei" pitchFamily="34" charset="-120"/>
+                <a:latin typeface="微软雅黑" pitchFamily="34" charset="0"/>
+                <a:ea typeface="微软雅黑" pitchFamily="34" charset="-122"/>
+                <a:cs typeface="微软雅黑" pitchFamily="34" charset="-120"/>
               </a:rPr>
               <a:t>ANN基线</a:t>
             </a:r>
@@ -11087,7 +10749,6 @@
               <a:alpha val="50000"/>
             </a:srgbClr>
           </a:solidFill>
-          <a:ln/>
         </p:spPr>
       </p:sp>
       <p:sp>
@@ -11105,15 +10766,14 @@
             <a:avLst/>
           </a:prstGeom>
           <a:noFill/>
-          <a:ln/>
-        </p:spPr>
-        <p:txBody>
-          <a:bodyPr wrap="square" rtlCol="0" anchor="ctr">
-            <a:normAutofit/>
-          </a:bodyPr>
-          <a:lstStyle/>
-          <a:p>
-            <a:pPr algn="ctr" indent="0" marL="0">
+        </p:spPr>
+        <p:txBody>
+          <a:bodyPr wrap="square" rtlCol="0" anchor="ctr">
+            <a:normAutofit/>
+          </a:bodyPr>
+          <a:lstStyle/>
+          <a:p>
+            <a:pPr marL="0" indent="0" algn="ctr">
               <a:lnSpc>
                 <a:spcPct val="110000"/>
               </a:lnSpc>
@@ -11124,16 +10784,16 @@
                 <a:solidFill>
                   <a:srgbClr val="FFFFFF"/>
                 </a:solidFill>
-                <a:latin typeface="Microsoft YaHei" pitchFamily="34" charset="0"/>
-                <a:ea typeface="Microsoft YaHei" pitchFamily="34" charset="-122"/>
-                <a:cs typeface="Microsoft YaHei" pitchFamily="34" charset="-120"/>
+                <a:latin typeface="微软雅黑" pitchFamily="34" charset="0"/>
+                <a:ea typeface="微软雅黑" pitchFamily="34" charset="-122"/>
+                <a:cs typeface="微软雅黑" pitchFamily="34" charset="-120"/>
               </a:rPr>
               <a:t>MLP训练</a:t>
             </a:r>
             <a:endParaRPr lang="en-US" sz="1000" dirty="0"/>
           </a:p>
           <a:p>
-            <a:pPr algn="ctr" indent="0" marL="0">
+            <a:pPr marL="0" indent="0" algn="ctr">
               <a:lnSpc>
                 <a:spcPct val="110000"/>
               </a:lnSpc>
@@ -11144,9 +10804,9 @@
                 <a:solidFill>
                   <a:srgbClr val="FFFFFF"/>
                 </a:solidFill>
-                <a:latin typeface="Microsoft YaHei" pitchFamily="34" charset="0"/>
-                <a:ea typeface="Microsoft YaHei" pitchFamily="34" charset="-122"/>
-                <a:cs typeface="Microsoft YaHei" pitchFamily="34" charset="-120"/>
+                <a:latin typeface="微软雅黑" pitchFamily="34" charset="0"/>
+                <a:ea typeface="微软雅黑" pitchFamily="34" charset="-122"/>
+                <a:cs typeface="微软雅黑" pitchFamily="34" charset="-120"/>
               </a:rPr>
               <a:t>MAC电路</a:t>
             </a:r>
@@ -11171,7 +10831,6 @@
           <a:solidFill>
             <a:srgbClr val="6C757D"/>
           </a:solidFill>
-          <a:ln/>
         </p:spPr>
       </p:sp>
       <p:sp>
@@ -11214,15 +10873,14 @@
             <a:avLst/>
           </a:prstGeom>
           <a:noFill/>
-          <a:ln/>
-        </p:spPr>
-        <p:txBody>
-          <a:bodyPr wrap="square" rtlCol="0" anchor="ctr">
-            <a:normAutofit/>
-          </a:bodyPr>
-          <a:lstStyle/>
-          <a:p>
-            <a:pPr algn="ctr" indent="0" marL="0">
+        </p:spPr>
+        <p:txBody>
+          <a:bodyPr wrap="square" rtlCol="0" anchor="ctr">
+            <a:normAutofit/>
+          </a:bodyPr>
+          <a:lstStyle/>
+          <a:p>
+            <a:pPr marL="0" indent="0" algn="ctr">
               <a:lnSpc>
                 <a:spcPct val="110000"/>
               </a:lnSpc>
@@ -11233,16 +10891,16 @@
                 <a:solidFill>
                   <a:srgbClr val="FFFFFF"/>
                 </a:solidFill>
-                <a:latin typeface="Microsoft YaHei" pitchFamily="34" charset="0"/>
-                <a:ea typeface="Microsoft YaHei" pitchFamily="34" charset="-122"/>
-                <a:cs typeface="Microsoft YaHei" pitchFamily="34" charset="-120"/>
+                <a:latin typeface="微软雅黑" pitchFamily="34" charset="0"/>
+                <a:ea typeface="微软雅黑" pitchFamily="34" charset="-122"/>
+                <a:cs typeface="微软雅黑" pitchFamily="34" charset="-120"/>
               </a:rPr>
               <a:t>Step 2</a:t>
             </a:r>
             <a:endParaRPr lang="en-US" sz="1300" dirty="0"/>
           </a:p>
           <a:p>
-            <a:pPr algn="ctr" indent="0" marL="0">
+            <a:pPr marL="0" indent="0" algn="ctr">
               <a:lnSpc>
                 <a:spcPct val="110000"/>
               </a:lnSpc>
@@ -11253,9 +10911,9 @@
                 <a:solidFill>
                   <a:srgbClr val="FFFFFF"/>
                 </a:solidFill>
-                <a:latin typeface="Microsoft YaHei" pitchFamily="34" charset="0"/>
-                <a:ea typeface="Microsoft YaHei" pitchFamily="34" charset="-122"/>
-                <a:cs typeface="Microsoft YaHei" pitchFamily="34" charset="-120"/>
+                <a:latin typeface="微软雅黑" pitchFamily="34" charset="0"/>
+                <a:ea typeface="微软雅黑" pitchFamily="34" charset="-122"/>
+                <a:cs typeface="微软雅黑" pitchFamily="34" charset="-120"/>
               </a:rPr>
               <a:t>SNN转换</a:t>
             </a:r>
@@ -11282,7 +10940,6 @@
               <a:alpha val="50000"/>
             </a:srgbClr>
           </a:solidFill>
-          <a:ln/>
         </p:spPr>
       </p:sp>
       <p:sp>
@@ -11300,15 +10957,14 @@
             <a:avLst/>
           </a:prstGeom>
           <a:noFill/>
-          <a:ln/>
-        </p:spPr>
-        <p:txBody>
-          <a:bodyPr wrap="square" rtlCol="0" anchor="ctr">
-            <a:normAutofit/>
-          </a:bodyPr>
-          <a:lstStyle/>
-          <a:p>
-            <a:pPr algn="ctr" indent="0" marL="0">
+        </p:spPr>
+        <p:txBody>
+          <a:bodyPr wrap="square" rtlCol="0" anchor="ctr">
+            <a:normAutofit/>
+          </a:bodyPr>
+          <a:lstStyle/>
+          <a:p>
+            <a:pPr marL="0" indent="0" algn="ctr">
               <a:lnSpc>
                 <a:spcPct val="110000"/>
               </a:lnSpc>
@@ -11319,16 +10975,16 @@
                 <a:solidFill>
                   <a:srgbClr val="FFFFFF"/>
                 </a:solidFill>
-                <a:latin typeface="Microsoft YaHei" pitchFamily="34" charset="0"/>
-                <a:ea typeface="Microsoft YaHei" pitchFamily="34" charset="-122"/>
-                <a:cs typeface="Microsoft YaHei" pitchFamily="34" charset="-120"/>
+                <a:latin typeface="微软雅黑" pitchFamily="34" charset="0"/>
+                <a:ea typeface="微软雅黑" pitchFamily="34" charset="-122"/>
+                <a:cs typeface="微软雅黑" pitchFamily="34" charset="-120"/>
               </a:rPr>
               <a:t>ANN→SNN</a:t>
             </a:r>
             <a:endParaRPr lang="en-US" sz="1000" dirty="0"/>
           </a:p>
           <a:p>
-            <a:pPr algn="ctr" indent="0" marL="0">
+            <a:pPr marL="0" indent="0" algn="ctr">
               <a:lnSpc>
                 <a:spcPct val="110000"/>
               </a:lnSpc>
@@ -11339,9 +10995,9 @@
                 <a:solidFill>
                   <a:srgbClr val="FFFFFF"/>
                 </a:solidFill>
-                <a:latin typeface="Microsoft YaHei" pitchFamily="34" charset="0"/>
-                <a:ea typeface="Microsoft YaHei" pitchFamily="34" charset="-122"/>
-                <a:cs typeface="Microsoft YaHei" pitchFamily="34" charset="-120"/>
+                <a:latin typeface="微软雅黑" pitchFamily="34" charset="0"/>
+                <a:ea typeface="微软雅黑" pitchFamily="34" charset="-122"/>
+                <a:cs typeface="微软雅黑" pitchFamily="34" charset="-120"/>
               </a:rPr>
               <a:t>泊松编码</a:t>
             </a:r>
@@ -11366,7 +11022,6 @@
           <a:solidFill>
             <a:srgbClr val="6C757D"/>
           </a:solidFill>
-          <a:ln/>
         </p:spPr>
       </p:sp>
       <p:sp>
@@ -11409,15 +11064,14 @@
             <a:avLst/>
           </a:prstGeom>
           <a:noFill/>
-          <a:ln/>
-        </p:spPr>
-        <p:txBody>
-          <a:bodyPr wrap="square" rtlCol="0" anchor="ctr">
-            <a:normAutofit/>
-          </a:bodyPr>
-          <a:lstStyle/>
-          <a:p>
-            <a:pPr algn="ctr" indent="0" marL="0">
+        </p:spPr>
+        <p:txBody>
+          <a:bodyPr wrap="square" rtlCol="0" anchor="ctr">
+            <a:normAutofit/>
+          </a:bodyPr>
+          <a:lstStyle/>
+          <a:p>
+            <a:pPr marL="0" indent="0" algn="ctr">
               <a:lnSpc>
                 <a:spcPct val="110000"/>
               </a:lnSpc>
@@ -11428,16 +11082,16 @@
                 <a:solidFill>
                   <a:srgbClr val="FFFFFF"/>
                 </a:solidFill>
-                <a:latin typeface="Microsoft YaHei" pitchFamily="34" charset="0"/>
-                <a:ea typeface="Microsoft YaHei" pitchFamily="34" charset="-122"/>
-                <a:cs typeface="Microsoft YaHei" pitchFamily="34" charset="-120"/>
+                <a:latin typeface="微软雅黑" pitchFamily="34" charset="0"/>
+                <a:ea typeface="微软雅黑" pitchFamily="34" charset="-122"/>
+                <a:cs typeface="微软雅黑" pitchFamily="34" charset="-120"/>
               </a:rPr>
               <a:t>Step 3</a:t>
             </a:r>
             <a:endParaRPr lang="en-US" sz="1300" dirty="0"/>
           </a:p>
           <a:p>
-            <a:pPr algn="ctr" indent="0" marL="0">
+            <a:pPr marL="0" indent="0" algn="ctr">
               <a:lnSpc>
                 <a:spcPct val="110000"/>
               </a:lnSpc>
@@ -11448,9 +11102,9 @@
                 <a:solidFill>
                   <a:srgbClr val="FFFFFF"/>
                 </a:solidFill>
-                <a:latin typeface="Microsoft YaHei" pitchFamily="34" charset="0"/>
-                <a:ea typeface="Microsoft YaHei" pitchFamily="34" charset="-122"/>
-                <a:cs typeface="Microsoft YaHei" pitchFamily="34" charset="-120"/>
+                <a:latin typeface="微软雅黑" pitchFamily="34" charset="0"/>
+                <a:ea typeface="微软雅黑" pitchFamily="34" charset="-122"/>
+                <a:cs typeface="微软雅黑" pitchFamily="34" charset="-120"/>
               </a:rPr>
               <a:t>IF电路</a:t>
             </a:r>
@@ -11477,7 +11131,6 @@
               <a:alpha val="50000"/>
             </a:srgbClr>
           </a:solidFill>
-          <a:ln/>
         </p:spPr>
       </p:sp>
       <p:sp>
@@ -11495,15 +11148,14 @@
             <a:avLst/>
           </a:prstGeom>
           <a:noFill/>
-          <a:ln/>
-        </p:spPr>
-        <p:txBody>
-          <a:bodyPr wrap="square" rtlCol="0" anchor="ctr">
-            <a:normAutofit/>
-          </a:bodyPr>
-          <a:lstStyle/>
-          <a:p>
-            <a:pPr algn="ctr" indent="0" marL="0">
+        </p:spPr>
+        <p:txBody>
+          <a:bodyPr wrap="square" rtlCol="0" anchor="ctr">
+            <a:normAutofit/>
+          </a:bodyPr>
+          <a:lstStyle/>
+          <a:p>
+            <a:pPr marL="0" indent="0" algn="ctr">
               <a:lnSpc>
                 <a:spcPct val="110000"/>
               </a:lnSpc>
@@ -11514,16 +11166,16 @@
                 <a:solidFill>
                   <a:srgbClr val="FFFFFF"/>
                 </a:solidFill>
-                <a:latin typeface="Microsoft YaHei" pitchFamily="34" charset="0"/>
-                <a:ea typeface="Microsoft YaHei" pitchFamily="34" charset="-122"/>
-                <a:cs typeface="Microsoft YaHei" pitchFamily="34" charset="-120"/>
+                <a:latin typeface="微软雅黑" pitchFamily="34" charset="0"/>
+                <a:ea typeface="微软雅黑" pitchFamily="34" charset="-122"/>
+                <a:cs typeface="微软雅黑" pitchFamily="34" charset="-120"/>
               </a:rPr>
               <a:t>积分器→</a:t>
             </a:r>
             <a:endParaRPr lang="en-US" sz="1000" dirty="0"/>
           </a:p>
           <a:p>
-            <a:pPr algn="ctr" indent="0" marL="0">
+            <a:pPr marL="0" indent="0" algn="ctr">
               <a:lnSpc>
                 <a:spcPct val="110000"/>
               </a:lnSpc>
@@ -11534,9 +11186,9 @@
                 <a:solidFill>
                   <a:srgbClr val="FFFFFF"/>
                 </a:solidFill>
-                <a:latin typeface="Microsoft YaHei" pitchFamily="34" charset="0"/>
-                <a:ea typeface="Microsoft YaHei" pitchFamily="34" charset="-122"/>
-                <a:cs typeface="Microsoft YaHei" pitchFamily="34" charset="-120"/>
+                <a:latin typeface="微软雅黑" pitchFamily="34" charset="0"/>
+                <a:ea typeface="微软雅黑" pitchFamily="34" charset="-122"/>
+                <a:cs typeface="微软雅黑" pitchFamily="34" charset="-120"/>
               </a:rPr>
               <a:t>IF神经元</a:t>
             </a:r>
@@ -11561,7 +11213,6 @@
           <a:solidFill>
             <a:srgbClr val="6C757D"/>
           </a:solidFill>
-          <a:ln/>
         </p:spPr>
       </p:sp>
       <p:sp>
@@ -11604,15 +11255,14 @@
             <a:avLst/>
           </a:prstGeom>
           <a:noFill/>
-          <a:ln/>
-        </p:spPr>
-        <p:txBody>
-          <a:bodyPr wrap="square" rtlCol="0" anchor="ctr">
-            <a:normAutofit/>
-          </a:bodyPr>
-          <a:lstStyle/>
-          <a:p>
-            <a:pPr algn="ctr" indent="0" marL="0">
+        </p:spPr>
+        <p:txBody>
+          <a:bodyPr wrap="square" rtlCol="0" anchor="ctr">
+            <a:normAutofit/>
+          </a:bodyPr>
+          <a:lstStyle/>
+          <a:p>
+            <a:pPr marL="0" indent="0" algn="ctr">
               <a:lnSpc>
                 <a:spcPct val="110000"/>
               </a:lnSpc>
@@ -11623,16 +11273,16 @@
                 <a:solidFill>
                   <a:srgbClr val="FFFFFF"/>
                 </a:solidFill>
-                <a:latin typeface="Microsoft YaHei" pitchFamily="34" charset="0"/>
-                <a:ea typeface="Microsoft YaHei" pitchFamily="34" charset="-122"/>
-                <a:cs typeface="Microsoft YaHei" pitchFamily="34" charset="-120"/>
+                <a:latin typeface="微软雅黑" pitchFamily="34" charset="0"/>
+                <a:ea typeface="微软雅黑" pitchFamily="34" charset="-122"/>
+                <a:cs typeface="微软雅黑" pitchFamily="34" charset="-120"/>
               </a:rPr>
               <a:t>Step 4</a:t>
             </a:r>
             <a:endParaRPr lang="en-US" sz="1300" dirty="0"/>
           </a:p>
           <a:p>
-            <a:pPr algn="ctr" indent="0" marL="0">
+            <a:pPr marL="0" indent="0" algn="ctr">
               <a:lnSpc>
                 <a:spcPct val="110000"/>
               </a:lnSpc>
@@ -11643,9 +11293,9 @@
                 <a:solidFill>
                   <a:srgbClr val="FFFFFF"/>
                 </a:solidFill>
-                <a:latin typeface="Microsoft YaHei" pitchFamily="34" charset="0"/>
-                <a:ea typeface="Microsoft YaHei" pitchFamily="34" charset="-122"/>
-                <a:cs typeface="Microsoft YaHei" pitchFamily="34" charset="-120"/>
+                <a:latin typeface="微软雅黑" pitchFamily="34" charset="0"/>
+                <a:ea typeface="微软雅黑" pitchFamily="34" charset="-122"/>
+                <a:cs typeface="微软雅黑" pitchFamily="34" charset="-120"/>
               </a:rPr>
               <a:t>对比分析</a:t>
             </a:r>
@@ -11672,7 +11322,6 @@
               <a:alpha val="50000"/>
             </a:srgbClr>
           </a:solidFill>
-          <a:ln/>
         </p:spPr>
       </p:sp>
       <p:sp>
@@ -11690,15 +11339,14 @@
             <a:avLst/>
           </a:prstGeom>
           <a:noFill/>
-          <a:ln/>
-        </p:spPr>
-        <p:txBody>
-          <a:bodyPr wrap="square" rtlCol="0" anchor="ctr">
-            <a:normAutofit/>
-          </a:bodyPr>
-          <a:lstStyle/>
-          <a:p>
-            <a:pPr algn="ctr" indent="0" marL="0">
+        </p:spPr>
+        <p:txBody>
+          <a:bodyPr wrap="square" rtlCol="0" anchor="ctr">
+            <a:normAutofit/>
+          </a:bodyPr>
+          <a:lstStyle/>
+          <a:p>
+            <a:pPr marL="0" indent="0" algn="ctr">
               <a:lnSpc>
                 <a:spcPct val="110000"/>
               </a:lnSpc>
@@ -11709,16 +11357,16 @@
                 <a:solidFill>
                   <a:srgbClr val="FFFFFF"/>
                 </a:solidFill>
-                <a:latin typeface="Microsoft YaHei" pitchFamily="34" charset="0"/>
-                <a:ea typeface="Microsoft YaHei" pitchFamily="34" charset="-122"/>
-                <a:cs typeface="Microsoft YaHei" pitchFamily="34" charset="-120"/>
+                <a:latin typeface="微软雅黑" pitchFamily="34" charset="0"/>
+                <a:ea typeface="微软雅黑" pitchFamily="34" charset="-122"/>
+                <a:cs typeface="微软雅黑" pitchFamily="34" charset="-120"/>
               </a:rPr>
               <a:t>MAC vs IF</a:t>
             </a:r>
             <a:endParaRPr lang="en-US" sz="1000" dirty="0"/>
           </a:p>
           <a:p>
-            <a:pPr algn="ctr" indent="0" marL="0">
+            <a:pPr marL="0" indent="0" algn="ctr">
               <a:lnSpc>
                 <a:spcPct val="110000"/>
               </a:lnSpc>
@@ -11729,9 +11377,9 @@
                 <a:solidFill>
                   <a:srgbClr val="FFFFFF"/>
                 </a:solidFill>
-                <a:latin typeface="Microsoft YaHei" pitchFamily="34" charset="0"/>
-                <a:ea typeface="Microsoft YaHei" pitchFamily="34" charset="-122"/>
-                <a:cs typeface="Microsoft YaHei" pitchFamily="34" charset="-120"/>
+                <a:latin typeface="微软雅黑" pitchFamily="34" charset="0"/>
+                <a:ea typeface="微软雅黑" pitchFamily="34" charset="-122"/>
+                <a:cs typeface="微软雅黑" pitchFamily="34" charset="-120"/>
               </a:rPr>
               <a:t>硬件指标</a:t>
             </a:r>
@@ -11756,7 +11404,6 @@
           <a:solidFill>
             <a:srgbClr val="6C757D"/>
           </a:solidFill>
-          <a:ln/>
         </p:spPr>
       </p:sp>
       <p:sp>
@@ -11799,15 +11446,14 @@
             <a:avLst/>
           </a:prstGeom>
           <a:noFill/>
-          <a:ln/>
-        </p:spPr>
-        <p:txBody>
-          <a:bodyPr wrap="square" rtlCol="0" anchor="ctr">
-            <a:normAutofit/>
-          </a:bodyPr>
-          <a:lstStyle/>
-          <a:p>
-            <a:pPr algn="ctr" indent="0" marL="0">
+        </p:spPr>
+        <p:txBody>
+          <a:bodyPr wrap="square" rtlCol="0" anchor="ctr">
+            <a:normAutofit/>
+          </a:bodyPr>
+          <a:lstStyle/>
+          <a:p>
+            <a:pPr marL="0" indent="0" algn="ctr">
               <a:lnSpc>
                 <a:spcPct val="110000"/>
               </a:lnSpc>
@@ -11818,16 +11464,16 @@
                 <a:solidFill>
                   <a:srgbClr val="FFFFFF"/>
                 </a:solidFill>
-                <a:latin typeface="Microsoft YaHei" pitchFamily="34" charset="0"/>
-                <a:ea typeface="Microsoft YaHei" pitchFamily="34" charset="-122"/>
-                <a:cs typeface="Microsoft YaHei" pitchFamily="34" charset="-120"/>
+                <a:latin typeface="微软雅黑" pitchFamily="34" charset="0"/>
+                <a:ea typeface="微软雅黑" pitchFamily="34" charset="-122"/>
+                <a:cs typeface="微软雅黑" pitchFamily="34" charset="-120"/>
               </a:rPr>
               <a:t>Step 5</a:t>
             </a:r>
             <a:endParaRPr lang="en-US" sz="1300" dirty="0"/>
           </a:p>
           <a:p>
-            <a:pPr algn="ctr" indent="0" marL="0">
+            <a:pPr marL="0" indent="0" algn="ctr">
               <a:lnSpc>
                 <a:spcPct val="110000"/>
               </a:lnSpc>
@@ -11838,9 +11484,9 @@
                 <a:solidFill>
                   <a:srgbClr val="FFFFFF"/>
                 </a:solidFill>
-                <a:latin typeface="Microsoft YaHei" pitchFamily="34" charset="0"/>
-                <a:ea typeface="Microsoft YaHei" pitchFamily="34" charset="-122"/>
-                <a:cs typeface="Microsoft YaHei" pitchFamily="34" charset="-120"/>
+                <a:latin typeface="微软雅黑" pitchFamily="34" charset="0"/>
+                <a:ea typeface="微软雅黑" pitchFamily="34" charset="-122"/>
+                <a:cs typeface="微软雅黑" pitchFamily="34" charset="-120"/>
               </a:rPr>
               <a:t>Trade-off</a:t>
             </a:r>
@@ -11867,7 +11513,6 @@
               <a:alpha val="50000"/>
             </a:srgbClr>
           </a:solidFill>
-          <a:ln/>
         </p:spPr>
       </p:sp>
       <p:sp>
@@ -11885,15 +11530,14 @@
             <a:avLst/>
           </a:prstGeom>
           <a:noFill/>
-          <a:ln/>
-        </p:spPr>
-        <p:txBody>
-          <a:bodyPr wrap="square" rtlCol="0" anchor="ctr">
-            <a:normAutofit/>
-          </a:bodyPr>
-          <a:lstStyle/>
-          <a:p>
-            <a:pPr algn="ctr" indent="0" marL="0">
+        </p:spPr>
+        <p:txBody>
+          <a:bodyPr wrap="square" rtlCol="0" anchor="ctr">
+            <a:normAutofit/>
+          </a:bodyPr>
+          <a:lstStyle/>
+          <a:p>
+            <a:pPr marL="0" indent="0" algn="ctr">
               <a:lnSpc>
                 <a:spcPct val="110000"/>
               </a:lnSpc>
@@ -11904,16 +11548,16 @@
                 <a:solidFill>
                   <a:srgbClr val="FFFFFF"/>
                 </a:solidFill>
-                <a:latin typeface="Microsoft YaHei" pitchFamily="34" charset="0"/>
-                <a:ea typeface="Microsoft YaHei" pitchFamily="34" charset="-122"/>
-                <a:cs typeface="Microsoft YaHei" pitchFamily="34" charset="-120"/>
+                <a:latin typeface="微软雅黑" pitchFamily="34" charset="0"/>
+                <a:ea typeface="微软雅黑" pitchFamily="34" charset="-122"/>
+                <a:cs typeface="微软雅黑" pitchFamily="34" charset="-120"/>
               </a:rPr>
               <a:t>准确率-功耗</a:t>
             </a:r>
             <a:endParaRPr lang="en-US" sz="1000" dirty="0"/>
           </a:p>
           <a:p>
-            <a:pPr algn="ctr" indent="0" marL="0">
+            <a:pPr marL="0" indent="0" algn="ctr">
               <a:lnSpc>
                 <a:spcPct val="110000"/>
               </a:lnSpc>
@@ -11924,9 +11568,9 @@
                 <a:solidFill>
                   <a:srgbClr val="FFFFFF"/>
                 </a:solidFill>
-                <a:latin typeface="Microsoft YaHei" pitchFamily="34" charset="0"/>
-                <a:ea typeface="Microsoft YaHei" pitchFamily="34" charset="-122"/>
-                <a:cs typeface="Microsoft YaHei" pitchFamily="34" charset="-120"/>
+                <a:latin typeface="微软雅黑" pitchFamily="34" charset="0"/>
+                <a:ea typeface="微软雅黑" pitchFamily="34" charset="-122"/>
+                <a:cs typeface="微软雅黑" pitchFamily="34" charset="-120"/>
               </a:rPr>
               <a:t>曲线拟合</a:t>
             </a:r>
@@ -11949,15 +11593,14 @@
             <a:avLst/>
           </a:prstGeom>
           <a:noFill/>
-          <a:ln/>
-        </p:spPr>
-        <p:txBody>
-          <a:bodyPr wrap="square" rtlCol="0" anchor="ctr">
-            <a:normAutofit/>
-          </a:bodyPr>
-          <a:lstStyle/>
-          <a:p>
-            <a:pPr algn="ctr" indent="0" marL="0">
+        </p:spPr>
+        <p:txBody>
+          <a:bodyPr wrap="square" rtlCol="0" anchor="ctr">
+            <a:normAutofit/>
+          </a:bodyPr>
+          <a:lstStyle/>
+          <a:p>
+            <a:pPr marL="0" indent="0" algn="ctr">
               <a:buNone/>
             </a:pPr>
             <a:r>
@@ -11965,9 +11608,9 @@
                 <a:solidFill>
                   <a:srgbClr val="1C7293"/>
                 </a:solidFill>
-                <a:latin typeface="Microsoft YaHei" pitchFamily="34" charset="0"/>
-                <a:ea typeface="Microsoft YaHei" pitchFamily="34" charset="-122"/>
-                <a:cs typeface="Microsoft YaHei" pitchFamily="34" charset="-120"/>
+                <a:latin typeface="微软雅黑" pitchFamily="34" charset="0"/>
+                <a:ea typeface="微软雅黑" pitchFamily="34" charset="-122"/>
+                <a:cs typeface="微软雅黑" pitchFamily="34" charset="-120"/>
               </a:rPr>
               <a:t>软件层</a:t>
             </a:r>
@@ -11990,15 +11633,14 @@
             <a:avLst/>
           </a:prstGeom>
           <a:noFill/>
-          <a:ln/>
-        </p:spPr>
-        <p:txBody>
-          <a:bodyPr wrap="square" rtlCol="0" anchor="ctr">
-            <a:normAutofit/>
-          </a:bodyPr>
-          <a:lstStyle/>
-          <a:p>
-            <a:pPr algn="ctr" indent="0" marL="0">
+        </p:spPr>
+        <p:txBody>
+          <a:bodyPr wrap="square" rtlCol="0" anchor="ctr">
+            <a:normAutofit/>
+          </a:bodyPr>
+          <a:lstStyle/>
+          <a:p>
+            <a:pPr marL="0" indent="0" algn="ctr">
               <a:buNone/>
             </a:pPr>
             <a:r>
@@ -12006,9 +11648,9 @@
                 <a:solidFill>
                   <a:srgbClr val="1C7293"/>
                 </a:solidFill>
-                <a:latin typeface="Microsoft YaHei" pitchFamily="34" charset="0"/>
-                <a:ea typeface="Microsoft YaHei" pitchFamily="34" charset="-122"/>
-                <a:cs typeface="Microsoft YaHei" pitchFamily="34" charset="-120"/>
+                <a:latin typeface="微软雅黑" pitchFamily="34" charset="0"/>
+                <a:ea typeface="微软雅黑" pitchFamily="34" charset="-122"/>
+                <a:cs typeface="微软雅黑" pitchFamily="34" charset="-120"/>
               </a:rPr>
               <a:t>硬件层</a:t>
             </a:r>
@@ -12031,15 +11673,14 @@
             <a:avLst/>
           </a:prstGeom>
           <a:noFill/>
-          <a:ln/>
-        </p:spPr>
-        <p:txBody>
-          <a:bodyPr wrap="square" rtlCol="0" anchor="ctr">
-            <a:normAutofit/>
-          </a:bodyPr>
-          <a:lstStyle/>
-          <a:p>
-            <a:pPr algn="ctr" indent="0" marL="0">
+        </p:spPr>
+        <p:txBody>
+          <a:bodyPr wrap="square" rtlCol="0" anchor="ctr">
+            <a:normAutofit/>
+          </a:bodyPr>
+          <a:lstStyle/>
+          <a:p>
+            <a:pPr marL="0" indent="0" algn="ctr">
               <a:buNone/>
             </a:pPr>
             <a:r>
@@ -12047,9 +11688,9 @@
                 <a:solidFill>
                   <a:srgbClr val="1C7293"/>
                 </a:solidFill>
-                <a:latin typeface="Microsoft YaHei" pitchFamily="34" charset="0"/>
-                <a:ea typeface="Microsoft YaHei" pitchFamily="34" charset="-122"/>
-                <a:cs typeface="Microsoft YaHei" pitchFamily="34" charset="-120"/>
+                <a:latin typeface="微软雅黑" pitchFamily="34" charset="0"/>
+                <a:ea typeface="微软雅黑" pitchFamily="34" charset="-122"/>
+                <a:cs typeface="微软雅黑" pitchFamily="34" charset="-120"/>
               </a:rPr>
               <a:t>分析层</a:t>
             </a:r>
@@ -12072,15 +11713,14 @@
             <a:avLst/>
           </a:prstGeom>
           <a:noFill/>
-          <a:ln/>
-        </p:spPr>
-        <p:txBody>
-          <a:bodyPr wrap="square" rtlCol="0" anchor="ctr">
-            <a:normAutofit/>
-          </a:bodyPr>
-          <a:lstStyle/>
-          <a:p>
-            <a:pPr algn="ctr" indent="0" marL="0">
+        </p:spPr>
+        <p:txBody>
+          <a:bodyPr wrap="square" rtlCol="0" anchor="ctr">
+            <a:normAutofit/>
+          </a:bodyPr>
+          <a:lstStyle/>
+          <a:p>
+            <a:pPr marL="0" indent="0" algn="ctr">
               <a:buNone/>
             </a:pPr>
             <a:r>
@@ -12088,9 +11728,9 @@
                 <a:solidFill>
                   <a:srgbClr val="6C757D"/>
                 </a:solidFill>
-                <a:latin typeface="Microsoft YaHei" pitchFamily="34" charset="0"/>
-                <a:ea typeface="Microsoft YaHei" pitchFamily="34" charset="-122"/>
-                <a:cs typeface="Microsoft YaHei" pitchFamily="34" charset="-120"/>
+                <a:latin typeface="微软雅黑" pitchFamily="34" charset="0"/>
+                <a:ea typeface="微软雅黑" pitchFamily="34" charset="-122"/>
+                <a:cs typeface="微软雅黑" pitchFamily="34" charset="-120"/>
               </a:rPr>
               <a:t>核心逻辑：Step 1-3并行推进（软件+硬件），Step 4依赖硬件结果，Step 5整合软件准确率与硬件功耗数据</a:t>
             </a:r>
@@ -12108,12 +11748,13 @@
 
 <file path=ppt/slides/slide9.xml><?xml version="1.0" encoding="utf-8"?>
 <p:sld xmlns:a="http://schemas.openxmlformats.org/drawingml/2006/main" xmlns:r="http://schemas.openxmlformats.org/officeDocument/2006/relationships" xmlns:p="http://schemas.openxmlformats.org/presentationml/2006/main">
-  <p:cSld name="Slide 9">
+  <p:cSld>
     <p:bg>
       <p:bgPr>
         <a:solidFill>
           <a:srgbClr val="FFFFFF"/>
         </a:solidFill>
+        <a:effectLst/>
       </p:bgPr>
     </p:bg>
     <p:spTree>
@@ -12147,7 +11788,6 @@
           <a:solidFill>
             <a:srgbClr val="065A82"/>
           </a:solidFill>
-          <a:ln/>
         </p:spPr>
       </p:sp>
       <p:sp>
@@ -12165,15 +11805,14 @@
             <a:avLst/>
           </a:prstGeom>
           <a:noFill/>
-          <a:ln/>
-        </p:spPr>
-        <p:txBody>
-          <a:bodyPr wrap="square" rtlCol="0" anchor="ctr">
-            <a:normAutofit/>
-          </a:bodyPr>
-          <a:lstStyle/>
-          <a:p>
-            <a:pPr algn="l" indent="0" marL="0">
+        </p:spPr>
+        <p:txBody>
+          <a:bodyPr wrap="square" rtlCol="0" anchor="ctr">
+            <a:normAutofit/>
+          </a:bodyPr>
+          <a:lstStyle/>
+          <a:p>
+            <a:pPr marL="0" indent="0" algn="l">
               <a:buNone/>
             </a:pPr>
             <a:r>
@@ -12181,9 +11820,9 @@
                 <a:solidFill>
                   <a:srgbClr val="FFFFFF"/>
                 </a:solidFill>
-                <a:latin typeface="Songti SC" pitchFamily="34" charset="0"/>
-                <a:ea typeface="Songti SC" pitchFamily="34" charset="-122"/>
-                <a:cs typeface="Songti SC" pitchFamily="34" charset="-120"/>
+                <a:latin typeface="Songti SC" panose="02010800040101010101" pitchFamily="34" charset="-122"/>
+                <a:ea typeface="Songti SC" panose="02010800040101010101" pitchFamily="34" charset="-122"/>
+                <a:cs typeface="Songti SC" panose="02010800040101010101" pitchFamily="34" charset="-120"/>
               </a:rPr>
               <a:t>背景知识：ANN-MAC vs SNN-IF</a:t>
             </a:r>
@@ -12206,15 +11845,14 @@
             <a:avLst/>
           </a:prstGeom>
           <a:noFill/>
-          <a:ln/>
-        </p:spPr>
-        <p:txBody>
-          <a:bodyPr wrap="square" rtlCol="0" anchor="ctr">
-            <a:normAutofit/>
-          </a:bodyPr>
-          <a:lstStyle/>
-          <a:p>
-            <a:pPr algn="l" indent="0" marL="0">
+        </p:spPr>
+        <p:txBody>
+          <a:bodyPr wrap="square" rtlCol="0" anchor="ctr">
+            <a:normAutofit/>
+          </a:bodyPr>
+          <a:lstStyle/>
+          <a:p>
+            <a:pPr marL="0" indent="0" algn="l">
               <a:buNone/>
             </a:pPr>
             <a:r>
@@ -12222,9 +11860,9 @@
                 <a:solidFill>
                   <a:srgbClr val="B0D0E0"/>
                 </a:solidFill>
-                <a:latin typeface="Microsoft YaHei" pitchFamily="34" charset="0"/>
-                <a:ea typeface="Microsoft YaHei" pitchFamily="34" charset="-122"/>
-                <a:cs typeface="Microsoft YaHei" pitchFamily="34" charset="-120"/>
+                <a:latin typeface="微软雅黑" pitchFamily="34" charset="0"/>
+                <a:ea typeface="微软雅黑" pitchFamily="34" charset="-122"/>
+                <a:cs typeface="微软雅黑" pitchFamily="34" charset="-120"/>
               </a:rPr>
               <a:t>Background: Two Computing Paradigms</a:t>
             </a:r>
@@ -12272,15 +11910,14 @@
             <a:avLst/>
           </a:prstGeom>
           <a:noFill/>
-          <a:ln/>
-        </p:spPr>
-        <p:txBody>
-          <a:bodyPr wrap="square" rtlCol="0" anchor="ctr">
-            <a:normAutofit/>
-          </a:bodyPr>
-          <a:lstStyle/>
-          <a:p>
-            <a:pPr algn="ctr" indent="0" marL="0">
+        </p:spPr>
+        <p:txBody>
+          <a:bodyPr wrap="square" rtlCol="0" anchor="ctr">
+            <a:normAutofit/>
+          </a:bodyPr>
+          <a:lstStyle/>
+          <a:p>
+            <a:pPr marL="0" indent="0" algn="ctr">
               <a:buNone/>
             </a:pPr>
             <a:r>
@@ -12288,9 +11925,9 @@
                 <a:solidFill>
                   <a:srgbClr val="065A82"/>
                 </a:solidFill>
-                <a:latin typeface="Microsoft YaHei" pitchFamily="34" charset="0"/>
-                <a:ea typeface="Microsoft YaHei" pitchFamily="34" charset="-122"/>
-                <a:cs typeface="Microsoft YaHei" pitchFamily="34" charset="-120"/>
+                <a:latin typeface="微软雅黑" pitchFamily="34" charset="0"/>
+                <a:ea typeface="微软雅黑" pitchFamily="34" charset="-122"/>
+                <a:cs typeface="微软雅黑" pitchFamily="34" charset="-120"/>
               </a:rPr>
               <a:t>ANN-MAC 乘加单元</a:t>
             </a:r>
@@ -12313,15 +11950,14 @@
             <a:avLst/>
           </a:prstGeom>
           <a:noFill/>
-          <a:ln/>
-        </p:spPr>
-        <p:txBody>
-          <a:bodyPr wrap="square" rtlCol="0" anchor="ctr">
-            <a:normAutofit/>
-          </a:bodyPr>
-          <a:lstStyle/>
-          <a:p>
-            <a:pPr indent="0" marL="0">
+        </p:spPr>
+        <p:txBody>
+          <a:bodyPr wrap="square" rtlCol="0" anchor="ctr">
+            <a:normAutofit/>
+          </a:bodyPr>
+          <a:lstStyle/>
+          <a:p>
+            <a:pPr marL="0" indent="0">
               <a:buNone/>
             </a:pPr>
             <a:r>
@@ -12329,9 +11965,9 @@
                 <a:solidFill>
                   <a:srgbClr val="1A1A2E"/>
                 </a:solidFill>
-                <a:latin typeface="Microsoft YaHei" pitchFamily="34" charset="0"/>
-                <a:ea typeface="Microsoft YaHei" pitchFamily="34" charset="-122"/>
-                <a:cs typeface="Microsoft YaHei" pitchFamily="34" charset="-120"/>
+                <a:latin typeface="微软雅黑" pitchFamily="34" charset="0"/>
+                <a:ea typeface="微软雅黑" pitchFamily="34" charset="-122"/>
+                <a:cs typeface="微软雅黑" pitchFamily="34" charset="-120"/>
               </a:rPr>
               <a:t>• 信息表示：连续数值 (float32)</a:t>
             </a:r>
@@ -12354,15 +11990,14 @@
             <a:avLst/>
           </a:prstGeom>
           <a:noFill/>
-          <a:ln/>
-        </p:spPr>
-        <p:txBody>
-          <a:bodyPr wrap="square" rtlCol="0" anchor="ctr">
-            <a:normAutofit/>
-          </a:bodyPr>
-          <a:lstStyle/>
-          <a:p>
-            <a:pPr indent="0" marL="0">
+        </p:spPr>
+        <p:txBody>
+          <a:bodyPr wrap="square" rtlCol="0" anchor="ctr">
+            <a:normAutofit/>
+          </a:bodyPr>
+          <a:lstStyle/>
+          <a:p>
+            <a:pPr marL="0" indent="0">
               <a:buNone/>
             </a:pPr>
             <a:r>
@@ -12370,9 +12005,9 @@
                 <a:solidFill>
                   <a:srgbClr val="1A1A2E"/>
                 </a:solidFill>
-                <a:latin typeface="Microsoft YaHei" pitchFamily="34" charset="0"/>
-                <a:ea typeface="Microsoft YaHei" pitchFamily="34" charset="-122"/>
-                <a:cs typeface="Microsoft YaHei" pitchFamily="34" charset="-120"/>
+                <a:latin typeface="微软雅黑" pitchFamily="34" charset="0"/>
+                <a:ea typeface="微软雅黑" pitchFamily="34" charset="-122"/>
+                <a:cs typeface="微软雅黑" pitchFamily="34" charset="-120"/>
               </a:rPr>
               <a:t>• 核心运算：乘法+加法 (MAC)</a:t>
             </a:r>
@@ -12395,15 +12030,14 @@
             <a:avLst/>
           </a:prstGeom>
           <a:noFill/>
-          <a:ln/>
-        </p:spPr>
-        <p:txBody>
-          <a:bodyPr wrap="square" rtlCol="0" anchor="ctr">
-            <a:normAutofit/>
-          </a:bodyPr>
-          <a:lstStyle/>
-          <a:p>
-            <a:pPr indent="0" marL="0">
+        </p:spPr>
+        <p:txBody>
+          <a:bodyPr wrap="square" rtlCol="0" anchor="ctr">
+            <a:normAutofit/>
+          </a:bodyPr>
+          <a:lstStyle/>
+          <a:p>
+            <a:pPr marL="0" indent="0">
               <a:buNone/>
             </a:pPr>
             <a:r>
@@ -12411,9 +12045,9 @@
                 <a:solidFill>
                   <a:srgbClr val="1A1A2E"/>
                 </a:solidFill>
-                <a:latin typeface="Microsoft YaHei" pitchFamily="34" charset="0"/>
-                <a:ea typeface="Microsoft YaHei" pitchFamily="34" charset="-122"/>
-                <a:cs typeface="Microsoft YaHei" pitchFamily="34" charset="-120"/>
+                <a:latin typeface="微软雅黑" pitchFamily="34" charset="0"/>
+                <a:ea typeface="微软雅黑" pitchFamily="34" charset="-122"/>
+                <a:cs typeface="微软雅黑" pitchFamily="34" charset="-120"/>
               </a:rPr>
               <a:t>• 计算模式：持续计算（所有神经元都运算）</a:t>
             </a:r>
@@ -12436,15 +12070,14 @@
             <a:avLst/>
           </a:prstGeom>
           <a:noFill/>
-          <a:ln/>
-        </p:spPr>
-        <p:txBody>
-          <a:bodyPr wrap="square" rtlCol="0" anchor="ctr">
-            <a:normAutofit/>
-          </a:bodyPr>
-          <a:lstStyle/>
-          <a:p>
-            <a:pPr indent="0" marL="0">
+        </p:spPr>
+        <p:txBody>
+          <a:bodyPr wrap="square" rtlCol="0" anchor="ctr">
+            <a:normAutofit/>
+          </a:bodyPr>
+          <a:lstStyle/>
+          <a:p>
+            <a:pPr marL="0" indent="0">
               <a:buNone/>
             </a:pPr>
             <a:r>
@@ -12452,9 +12085,9 @@
                 <a:solidFill>
                   <a:srgbClr val="1A1A2E"/>
                 </a:solidFill>
-                <a:latin typeface="Microsoft YaHei" pitchFamily="34" charset="0"/>
-                <a:ea typeface="Microsoft YaHei" pitchFamily="34" charset="-122"/>
-                <a:cs typeface="Microsoft YaHei" pitchFamily="34" charset="-120"/>
+                <a:latin typeface="微软雅黑" pitchFamily="34" charset="0"/>
+                <a:ea typeface="微软雅黑" pitchFamily="34" charset="-122"/>
+                <a:cs typeface="微软雅黑" pitchFamily="34" charset="-120"/>
               </a:rPr>
               <a:t>• 需要乘法器：是（4×4阵列乘法器）</a:t>
             </a:r>
@@ -12477,15 +12110,14 @@
             <a:avLst/>
           </a:prstGeom>
           <a:noFill/>
-          <a:ln/>
-        </p:spPr>
-        <p:txBody>
-          <a:bodyPr wrap="square" rtlCol="0" anchor="ctr">
-            <a:normAutofit/>
-          </a:bodyPr>
-          <a:lstStyle/>
-          <a:p>
-            <a:pPr indent="0" marL="0">
+        </p:spPr>
+        <p:txBody>
+          <a:bodyPr wrap="square" rtlCol="0" anchor="ctr">
+            <a:normAutofit/>
+          </a:bodyPr>
+          <a:lstStyle/>
+          <a:p>
+            <a:pPr marL="0" indent="0">
               <a:buNone/>
             </a:pPr>
             <a:r>
@@ -12493,9 +12125,9 @@
                 <a:solidFill>
                   <a:srgbClr val="1A1A2E"/>
                 </a:solidFill>
-                <a:latin typeface="Microsoft YaHei" pitchFamily="34" charset="0"/>
-                <a:ea typeface="Microsoft YaHei" pitchFamily="34" charset="-122"/>
-                <a:cs typeface="Microsoft YaHei" pitchFamily="34" charset="-120"/>
+                <a:latin typeface="微软雅黑" pitchFamily="34" charset="0"/>
+                <a:ea typeface="微软雅黑" pitchFamily="34" charset="-122"/>
+                <a:cs typeface="微软雅黑" pitchFamily="34" charset="-120"/>
               </a:rPr>
               <a:t>• 事件驱动：否</a:t>
             </a:r>
@@ -12518,15 +12150,14 @@
             <a:avLst/>
           </a:prstGeom>
           <a:noFill/>
-          <a:ln/>
-        </p:spPr>
-        <p:txBody>
-          <a:bodyPr wrap="square" rtlCol="0" anchor="ctr">
-            <a:normAutofit/>
-          </a:bodyPr>
-          <a:lstStyle/>
-          <a:p>
-            <a:pPr indent="0" marL="0">
+        </p:spPr>
+        <p:txBody>
+          <a:bodyPr wrap="square" rtlCol="0" anchor="ctr">
+            <a:normAutofit/>
+          </a:bodyPr>
+          <a:lstStyle/>
+          <a:p>
+            <a:pPr marL="0" indent="0">
               <a:buNone/>
             </a:pPr>
             <a:r>
@@ -12534,9 +12165,9 @@
                 <a:solidFill>
                   <a:srgbClr val="1A1A2E"/>
                 </a:solidFill>
-                <a:latin typeface="Microsoft YaHei" pitchFamily="34" charset="0"/>
-                <a:ea typeface="Microsoft YaHei" pitchFamily="34" charset="-122"/>
-                <a:cs typeface="Microsoft YaHei" pitchFamily="34" charset="-120"/>
+                <a:latin typeface="微软雅黑" pitchFamily="34" charset="0"/>
+                <a:ea typeface="微软雅黑" pitchFamily="34" charset="-122"/>
+                <a:cs typeface="微软雅黑" pitchFamily="34" charset="-120"/>
               </a:rPr>
               <a:t>• 功耗特性：始终高功耗</a:t>
             </a:r>
@@ -12584,15 +12215,14 @@
             <a:avLst/>
           </a:prstGeom>
           <a:noFill/>
-          <a:ln/>
-        </p:spPr>
-        <p:txBody>
-          <a:bodyPr wrap="square" rtlCol="0" anchor="ctr">
-            <a:normAutofit/>
-          </a:bodyPr>
-          <a:lstStyle/>
-          <a:p>
-            <a:pPr algn="ctr" indent="0" marL="0">
+        </p:spPr>
+        <p:txBody>
+          <a:bodyPr wrap="square" rtlCol="0" anchor="ctr">
+            <a:normAutofit/>
+          </a:bodyPr>
+          <a:lstStyle/>
+          <a:p>
+            <a:pPr marL="0" indent="0" algn="ctr">
               <a:buNone/>
             </a:pPr>
             <a:r>
@@ -12600,9 +12230,9 @@
                 <a:solidFill>
                   <a:srgbClr val="1C7293"/>
                 </a:solidFill>
-                <a:latin typeface="Microsoft YaHei" pitchFamily="34" charset="0"/>
-                <a:ea typeface="Microsoft YaHei" pitchFamily="34" charset="-122"/>
-                <a:cs typeface="Microsoft YaHei" pitchFamily="34" charset="-120"/>
+                <a:latin typeface="微软雅黑" pitchFamily="34" charset="0"/>
+                <a:ea typeface="微软雅黑" pitchFamily="34" charset="-122"/>
+                <a:cs typeface="微软雅黑" pitchFamily="34" charset="-120"/>
               </a:rPr>
               <a:t>SNN-IF 脉冲神经元</a:t>
             </a:r>
@@ -12625,15 +12255,14 @@
             <a:avLst/>
           </a:prstGeom>
           <a:noFill/>
-          <a:ln/>
-        </p:spPr>
-        <p:txBody>
-          <a:bodyPr wrap="square" rtlCol="0" anchor="ctr">
-            <a:normAutofit/>
-          </a:bodyPr>
-          <a:lstStyle/>
-          <a:p>
-            <a:pPr indent="0" marL="0">
+        </p:spPr>
+        <p:txBody>
+          <a:bodyPr wrap="square" rtlCol="0" anchor="ctr">
+            <a:normAutofit/>
+          </a:bodyPr>
+          <a:lstStyle/>
+          <a:p>
+            <a:pPr marL="0" indent="0">
               <a:buNone/>
             </a:pPr>
             <a:r>
@@ -12641,9 +12270,9 @@
                 <a:solidFill>
                   <a:srgbClr val="1A1A2E"/>
                 </a:solidFill>
-                <a:latin typeface="Microsoft YaHei" pitchFamily="34" charset="0"/>
-                <a:ea typeface="Microsoft YaHei" pitchFamily="34" charset="-122"/>
-                <a:cs typeface="Microsoft YaHei" pitchFamily="34" charset="-120"/>
+                <a:latin typeface="微软雅黑" pitchFamily="34" charset="0"/>
+                <a:ea typeface="微软雅黑" pitchFamily="34" charset="-122"/>
+                <a:cs typeface="微软雅黑" pitchFamily="34" charset="-120"/>
               </a:rPr>
               <a:t>• 信息表示：离散脉冲 (0/1 spike)</a:t>
             </a:r>
@@ -12666,15 +12295,14 @@
             <a:avLst/>
           </a:prstGeom>
           <a:noFill/>
-          <a:ln/>
-        </p:spPr>
-        <p:txBody>
-          <a:bodyPr wrap="square" rtlCol="0" anchor="ctr">
-            <a:normAutofit/>
-          </a:bodyPr>
-          <a:lstStyle/>
-          <a:p>
-            <a:pPr indent="0" marL="0">
+        </p:spPr>
+        <p:txBody>
+          <a:bodyPr wrap="square" rtlCol="0" anchor="ctr">
+            <a:normAutofit/>
+          </a:bodyPr>
+          <a:lstStyle/>
+          <a:p>
+            <a:pPr marL="0" indent="0">
               <a:buNone/>
             </a:pPr>
             <a:r>
@@ -12682,9 +12310,9 @@
                 <a:solidFill>
                   <a:srgbClr val="1A1A2E"/>
                 </a:solidFill>
-                <a:latin typeface="Microsoft YaHei" pitchFamily="34" charset="0"/>
-                <a:ea typeface="Microsoft YaHei" pitchFamily="34" charset="-122"/>
-                <a:cs typeface="Microsoft YaHei" pitchFamily="34" charset="-120"/>
+                <a:latin typeface="微软雅黑" pitchFamily="34" charset="0"/>
+                <a:ea typeface="微软雅黑" pitchFamily="34" charset="-122"/>
+                <a:cs typeface="微软雅黑" pitchFamily="34" charset="-120"/>
               </a:rPr>
               <a:t>• 核心运算：脉冲累加+阈值触发（无需乘法）</a:t>
             </a:r>
@@ -12707,15 +12335,14 @@
             <a:avLst/>
           </a:prstGeom>
           <a:noFill/>
-          <a:ln/>
-        </p:spPr>
-        <p:txBody>
-          <a:bodyPr wrap="square" rtlCol="0" anchor="ctr">
-            <a:normAutofit/>
-          </a:bodyPr>
-          <a:lstStyle/>
-          <a:p>
-            <a:pPr indent="0" marL="0">
+        </p:spPr>
+        <p:txBody>
+          <a:bodyPr wrap="square" rtlCol="0" anchor="ctr">
+            <a:normAutofit/>
+          </a:bodyPr>
+          <a:lstStyle/>
+          <a:p>
+            <a:pPr marL="0" indent="0">
               <a:buNone/>
             </a:pPr>
             <a:r>
@@ -12723,9 +12350,9 @@
                 <a:solidFill>
                   <a:srgbClr val="1A1A2E"/>
                 </a:solidFill>
-                <a:latin typeface="Microsoft YaHei" pitchFamily="34" charset="0"/>
-                <a:ea typeface="Microsoft YaHei" pitchFamily="34" charset="-122"/>
-                <a:cs typeface="Microsoft YaHei" pitchFamily="34" charset="-120"/>
+                <a:latin typeface="微软雅黑" pitchFamily="34" charset="0"/>
+                <a:ea typeface="微软雅黑" pitchFamily="34" charset="-122"/>
+                <a:cs typeface="微软雅黑" pitchFamily="34" charset="-120"/>
               </a:rPr>
               <a:t>• 计算模式：事件驱动（仅脉冲触发时运算）</a:t>
             </a:r>
@@ -12748,15 +12375,14 @@
             <a:avLst/>
           </a:prstGeom>
           <a:noFill/>
-          <a:ln/>
-        </p:spPr>
-        <p:txBody>
-          <a:bodyPr wrap="square" rtlCol="0" anchor="ctr">
-            <a:normAutofit/>
-          </a:bodyPr>
-          <a:lstStyle/>
-          <a:p>
-            <a:pPr indent="0" marL="0">
+        </p:spPr>
+        <p:txBody>
+          <a:bodyPr wrap="square" rtlCol="0" anchor="ctr">
+            <a:normAutofit/>
+          </a:bodyPr>
+          <a:lstStyle/>
+          <a:p>
+            <a:pPr marL="0" indent="0">
               <a:buNone/>
             </a:pPr>
             <a:r>
@@ -12764,9 +12390,9 @@
                 <a:solidFill>
                   <a:srgbClr val="1A1A2E"/>
                 </a:solidFill>
-                <a:latin typeface="Microsoft YaHei" pitchFamily="34" charset="0"/>
-                <a:ea typeface="Microsoft YaHei" pitchFamily="34" charset="-122"/>
-                <a:cs typeface="Microsoft YaHei" pitchFamily="34" charset="-120"/>
+                <a:latin typeface="微软雅黑" pitchFamily="34" charset="0"/>
+                <a:ea typeface="微软雅黑" pitchFamily="34" charset="-122"/>
+                <a:cs typeface="微软雅黑" pitchFamily="34" charset="-120"/>
               </a:rPr>
               <a:t>• 需要乘法器：否（MUX代替，显著降低硬件资源）</a:t>
             </a:r>
@@ -12789,15 +12415,14 @@
             <a:avLst/>
           </a:prstGeom>
           <a:noFill/>
-          <a:ln/>
-        </p:spPr>
-        <p:txBody>
-          <a:bodyPr wrap="square" rtlCol="0" anchor="ctr">
-            <a:normAutofit/>
-          </a:bodyPr>
-          <a:lstStyle/>
-          <a:p>
-            <a:pPr indent="0" marL="0">
+        </p:spPr>
+        <p:txBody>
+          <a:bodyPr wrap="square" rtlCol="0" anchor="ctr">
+            <a:normAutofit/>
+          </a:bodyPr>
+          <a:lstStyle/>
+          <a:p>
+            <a:pPr marL="0" indent="0">
               <a:buNone/>
             </a:pPr>
             <a:r>
@@ -12805,9 +12430,9 @@
                 <a:solidFill>
                   <a:srgbClr val="1A1A2E"/>
                 </a:solidFill>
-                <a:latin typeface="Microsoft YaHei" pitchFamily="34" charset="0"/>
-                <a:ea typeface="Microsoft YaHei" pitchFamily="34" charset="-122"/>
-                <a:cs typeface="Microsoft YaHei" pitchFamily="34" charset="-120"/>
+                <a:latin typeface="微软雅黑" pitchFamily="34" charset="0"/>
+                <a:ea typeface="微软雅黑" pitchFamily="34" charset="-122"/>
+                <a:cs typeface="微软雅黑" pitchFamily="34" charset="-120"/>
               </a:rPr>
               <a:t>• 事件驱动：是（脉冲稀疏→低功耗）</a:t>
             </a:r>
@@ -12830,15 +12455,14 @@
             <a:avLst/>
           </a:prstGeom>
           <a:noFill/>
-          <a:ln/>
-        </p:spPr>
-        <p:txBody>
-          <a:bodyPr wrap="square" rtlCol="0" anchor="ctr">
-            <a:normAutofit/>
-          </a:bodyPr>
-          <a:lstStyle/>
-          <a:p>
-            <a:pPr indent="0" marL="0">
+        </p:spPr>
+        <p:txBody>
+          <a:bodyPr wrap="square" rtlCol="0" anchor="ctr">
+            <a:normAutofit/>
+          </a:bodyPr>
+          <a:lstStyle/>
+          <a:p>
+            <a:pPr marL="0" indent="0">
               <a:buNone/>
             </a:pPr>
             <a:r>
@@ -12846,9 +12470,9 @@
                 <a:solidFill>
                   <a:srgbClr val="1A1A2E"/>
                 </a:solidFill>
-                <a:latin typeface="Microsoft YaHei" pitchFamily="34" charset="0"/>
-                <a:ea typeface="Microsoft YaHei" pitchFamily="34" charset="-122"/>
-                <a:cs typeface="Microsoft YaHei" pitchFamily="34" charset="-120"/>
+                <a:latin typeface="微软雅黑" pitchFamily="34" charset="0"/>
+                <a:ea typeface="微软雅黑" pitchFamily="34" charset="-122"/>
+                <a:cs typeface="微软雅黑" pitchFamily="34" charset="-120"/>
               </a:rPr>
               <a:t>• 功耗特性：脉冲稀疏→低功耗</a:t>
             </a:r>
@@ -12871,15 +12495,14 @@
             <a:avLst/>
           </a:prstGeom>
           <a:noFill/>
-          <a:ln/>
-        </p:spPr>
-        <p:txBody>
-          <a:bodyPr wrap="square" rtlCol="0" anchor="ctr">
-            <a:normAutofit/>
-          </a:bodyPr>
-          <a:lstStyle/>
-          <a:p>
-            <a:pPr algn="ctr" indent="0" marL="0">
+        </p:spPr>
+        <p:txBody>
+          <a:bodyPr wrap="square" rtlCol="0" anchor="ctr">
+            <a:normAutofit/>
+          </a:bodyPr>
+          <a:lstStyle/>
+          <a:p>
+            <a:pPr marL="0" indent="0" algn="ctr">
               <a:buNone/>
             </a:pPr>
             <a:r>
@@ -12887,9 +12510,9 @@
                 <a:solidFill>
                   <a:srgbClr val="6C757D"/>
                 </a:solidFill>
-                <a:latin typeface="Microsoft YaHei" pitchFamily="34" charset="0"/>
-                <a:ea typeface="Microsoft YaHei" pitchFamily="34" charset="-122"/>
-                <a:cs typeface="Microsoft YaHei" pitchFamily="34" charset="-120"/>
+                <a:latin typeface="微软雅黑" pitchFamily="34" charset="0"/>
+                <a:ea typeface="微软雅黑" pitchFamily="34" charset="-122"/>
+                <a:cs typeface="微软雅黑" pitchFamily="34" charset="-120"/>
               </a:rPr>
               <a:t>IF模型：V[t+1] = V[t] + I[t]；当 V ≥ 阈值 → 发放脉冲，V 复位（Lapicque, 1907）</a:t>
             </a:r>
@@ -12903,6 +12526,132 @@
     <a:masterClrMapping/>
   </p:clrMapOvr>
 </p:sld>
+</file>
+
+<file path=ppt/tags/tag1.xml><?xml version="1.0" encoding="utf-8"?>
+<p:tagLst xmlns:p="http://schemas.openxmlformats.org/presentationml/2006/main">
+  <p:tag name="KSO_WM_DIAGRAM_VIRTUALLY_FRAME" val="{&quot;height&quot;:254.88000000000002,&quot;left&quot;:129.6,&quot;top&quot;:90,&quot;width&quot;:460.8}"/>
+</p:tagLst>
+</file>
+
+<file path=ppt/tags/tag10.xml><?xml version="1.0" encoding="utf-8"?>
+<p:tagLst xmlns:p="http://schemas.openxmlformats.org/presentationml/2006/main">
+  <p:tag name="KSO_WM_DIAGRAM_VIRTUALLY_FRAME" val="{&quot;height&quot;:254.88000000000002,&quot;left&quot;:129.6,&quot;top&quot;:90,&quot;width&quot;:460.8}"/>
+</p:tagLst>
+</file>
+
+<file path=ppt/tags/tag11.xml><?xml version="1.0" encoding="utf-8"?>
+<p:tagLst xmlns:p="http://schemas.openxmlformats.org/presentationml/2006/main">
+  <p:tag name="KSO_WM_DIAGRAM_VIRTUALLY_FRAME" val="{&quot;height&quot;:254.88000000000002,&quot;left&quot;:129.6,&quot;top&quot;:90,&quot;width&quot;:460.8}"/>
+</p:tagLst>
+</file>
+
+<file path=ppt/tags/tag12.xml><?xml version="1.0" encoding="utf-8"?>
+<p:tagLst xmlns:p="http://schemas.openxmlformats.org/presentationml/2006/main">
+  <p:tag name="KSO_WM_DIAGRAM_VIRTUALLY_FRAME" val="{&quot;height&quot;:254.88000000000002,&quot;left&quot;:129.6,&quot;top&quot;:90,&quot;width&quot;:460.8}"/>
+</p:tagLst>
+</file>
+
+<file path=ppt/tags/tag13.xml><?xml version="1.0" encoding="utf-8"?>
+<p:tagLst xmlns:p="http://schemas.openxmlformats.org/presentationml/2006/main">
+  <p:tag name="KSO_WM_DIAGRAM_VIRTUALLY_FRAME" val="{&quot;height&quot;:254.88000000000002,&quot;left&quot;:129.6,&quot;top&quot;:90,&quot;width&quot;:460.8}"/>
+</p:tagLst>
+</file>
+
+<file path=ppt/tags/tag14.xml><?xml version="1.0" encoding="utf-8"?>
+<p:tagLst xmlns:p="http://schemas.openxmlformats.org/presentationml/2006/main">
+  <p:tag name="KSO_WM_DIAGRAM_VIRTUALLY_FRAME" val="{&quot;height&quot;:254.88000000000002,&quot;left&quot;:129.6,&quot;top&quot;:90,&quot;width&quot;:460.8}"/>
+</p:tagLst>
+</file>
+
+<file path=ppt/tags/tag15.xml><?xml version="1.0" encoding="utf-8"?>
+<p:tagLst xmlns:p="http://schemas.openxmlformats.org/presentationml/2006/main">
+  <p:tag name="KSO_WM_DIAGRAM_VIRTUALLY_FRAME" val="{&quot;height&quot;:254.88000000000002,&quot;left&quot;:129.6,&quot;top&quot;:90,&quot;width&quot;:460.8}"/>
+</p:tagLst>
+</file>
+
+<file path=ppt/tags/tag16.xml><?xml version="1.0" encoding="utf-8"?>
+<p:tagLst xmlns:p="http://schemas.openxmlformats.org/presentationml/2006/main">
+  <p:tag name="KSO_WM_DIAGRAM_VIRTUALLY_FRAME" val="{&quot;height&quot;:254.88000000000002,&quot;left&quot;:129.6,&quot;top&quot;:90,&quot;width&quot;:460.8}"/>
+</p:tagLst>
+</file>
+
+<file path=ppt/tags/tag17.xml><?xml version="1.0" encoding="utf-8"?>
+<p:tagLst xmlns:p="http://schemas.openxmlformats.org/presentationml/2006/main">
+  <p:tag name="KSO_WM_DIAGRAM_VIRTUALLY_FRAME" val="{&quot;height&quot;:254.88000000000002,&quot;left&quot;:129.6,&quot;top&quot;:90,&quot;width&quot;:460.8}"/>
+</p:tagLst>
+</file>
+
+<file path=ppt/tags/tag18.xml><?xml version="1.0" encoding="utf-8"?>
+<p:tagLst xmlns:p="http://schemas.openxmlformats.org/presentationml/2006/main">
+  <p:tag name="KSO_WM_DIAGRAM_VIRTUALLY_FRAME" val="{&quot;height&quot;:254.88000000000002,&quot;left&quot;:129.6,&quot;top&quot;:90,&quot;width&quot;:460.8}"/>
+</p:tagLst>
+</file>
+
+<file path=ppt/tags/tag19.xml><?xml version="1.0" encoding="utf-8"?>
+<p:tagLst xmlns:p="http://schemas.openxmlformats.org/presentationml/2006/main">
+  <p:tag name="KSO_WM_DIAGRAM_VIRTUALLY_FRAME" val="{&quot;height&quot;:254.88000000000002,&quot;left&quot;:129.6,&quot;top&quot;:90,&quot;width&quot;:460.8}"/>
+</p:tagLst>
+</file>
+
+<file path=ppt/tags/tag2.xml><?xml version="1.0" encoding="utf-8"?>
+<p:tagLst xmlns:p="http://schemas.openxmlformats.org/presentationml/2006/main">
+  <p:tag name="KSO_WM_DIAGRAM_VIRTUALLY_FRAME" val="{&quot;height&quot;:254.88000000000002,&quot;left&quot;:129.6,&quot;top&quot;:90,&quot;width&quot;:460.8}"/>
+</p:tagLst>
+</file>
+
+<file path=ppt/tags/tag20.xml><?xml version="1.0" encoding="utf-8"?>
+<p:tagLst xmlns:p="http://schemas.openxmlformats.org/presentationml/2006/main">
+  <p:tag name="KSO_WM_DIAGRAM_VIRTUALLY_FRAME" val="{&quot;height&quot;:254.88000000000002,&quot;left&quot;:129.6,&quot;top&quot;:90,&quot;width&quot;:460.8}"/>
+</p:tagLst>
+</file>
+
+<file path=ppt/tags/tag21.xml><?xml version="1.0" encoding="utf-8"?>
+<p:tagLst xmlns:p="http://schemas.openxmlformats.org/presentationml/2006/main">
+  <p:tag name="KSO_WM_DIAGRAM_VIRTUALLY_FRAME" val="{&quot;height&quot;:254.88000000000002,&quot;left&quot;:129.6,&quot;top&quot;:90,&quot;width&quot;:460.8}"/>
+</p:tagLst>
+</file>
+
+<file path=ppt/tags/tag3.xml><?xml version="1.0" encoding="utf-8"?>
+<p:tagLst xmlns:p="http://schemas.openxmlformats.org/presentationml/2006/main">
+  <p:tag name="KSO_WM_DIAGRAM_VIRTUALLY_FRAME" val="{&quot;height&quot;:254.88000000000002,&quot;left&quot;:129.6,&quot;top&quot;:90,&quot;width&quot;:460.8}"/>
+</p:tagLst>
+</file>
+
+<file path=ppt/tags/tag4.xml><?xml version="1.0" encoding="utf-8"?>
+<p:tagLst xmlns:p="http://schemas.openxmlformats.org/presentationml/2006/main">
+  <p:tag name="KSO_WM_DIAGRAM_VIRTUALLY_FRAME" val="{&quot;height&quot;:254.88000000000002,&quot;left&quot;:129.6,&quot;top&quot;:90,&quot;width&quot;:460.8}"/>
+</p:tagLst>
+</file>
+
+<file path=ppt/tags/tag5.xml><?xml version="1.0" encoding="utf-8"?>
+<p:tagLst xmlns:p="http://schemas.openxmlformats.org/presentationml/2006/main">
+  <p:tag name="KSO_WM_DIAGRAM_VIRTUALLY_FRAME" val="{&quot;height&quot;:254.88000000000002,&quot;left&quot;:129.6,&quot;top&quot;:90,&quot;width&quot;:460.8}"/>
+</p:tagLst>
+</file>
+
+<file path=ppt/tags/tag6.xml><?xml version="1.0" encoding="utf-8"?>
+<p:tagLst xmlns:p="http://schemas.openxmlformats.org/presentationml/2006/main">
+  <p:tag name="KSO_WM_DIAGRAM_VIRTUALLY_FRAME" val="{&quot;height&quot;:254.88000000000002,&quot;left&quot;:129.6,&quot;top&quot;:90,&quot;width&quot;:460.8}"/>
+</p:tagLst>
+</file>
+
+<file path=ppt/tags/tag7.xml><?xml version="1.0" encoding="utf-8"?>
+<p:tagLst xmlns:p="http://schemas.openxmlformats.org/presentationml/2006/main">
+  <p:tag name="KSO_WM_DIAGRAM_VIRTUALLY_FRAME" val="{&quot;height&quot;:254.88000000000002,&quot;left&quot;:129.6,&quot;top&quot;:90,&quot;width&quot;:460.8}"/>
+</p:tagLst>
+</file>
+
+<file path=ppt/tags/tag8.xml><?xml version="1.0" encoding="utf-8"?>
+<p:tagLst xmlns:p="http://schemas.openxmlformats.org/presentationml/2006/main">
+  <p:tag name="KSO_WM_DIAGRAM_VIRTUALLY_FRAME" val="{&quot;height&quot;:254.88000000000002,&quot;left&quot;:129.6,&quot;top&quot;:90,&quot;width&quot;:460.8}"/>
+</p:tagLst>
+</file>
+
+<file path=ppt/tags/tag9.xml><?xml version="1.0" encoding="utf-8"?>
+<p:tagLst xmlns:p="http://schemas.openxmlformats.org/presentationml/2006/main">
+  <p:tag name="KSO_WM_DIAGRAM_VIRTUALLY_FRAME" val="{&quot;height&quot;:254.88000000000002,&quot;left&quot;:129.6,&quot;top&quot;:90,&quot;width&quot;:460.8}"/>
+</p:tagLst>
 </file>
 
 <file path=ppt/theme/theme1.xml><?xml version="1.0" encoding="utf-8"?>
@@ -12948,7 +12697,7 @@
     </a:clrScheme>
     <a:fontScheme name="Office">
       <a:majorFont>
-        <a:latin typeface="Calibri Light" panose="020F0302020204030204"/>
+        <a:latin typeface="Calibri Light"/>
         <a:ea typeface=""/>
         <a:cs typeface=""/>
         <a:font script="Jpan" typeface="游ゴシック Light"/>
@@ -12981,26 +12730,9 @@
         <a:font script="Viet" typeface="Times New Roman"/>
         <a:font script="Uigh" typeface="Microsoft Uighur"/>
         <a:font script="Geor" typeface="Sylfaen"/>
-        <a:font script="Armn" typeface="Arial"/>
-        <a:font script="Bugi" typeface="Leelawadee UI"/>
-        <a:font script="Bopo" typeface="Microsoft JhengHei"/>
-        <a:font script="Java" typeface="Javanese Text"/>
-        <a:font script="Lisu" typeface="Segoe UI"/>
-        <a:font script="Mymr" typeface="Myanmar Text"/>
-        <a:font script="Nkoo" typeface="Ebrima"/>
-        <a:font script="Olck" typeface="Nirmala UI"/>
-        <a:font script="Osma" typeface="Ebrima"/>
-        <a:font script="Phag" typeface="Phagspa"/>
-        <a:font script="Syrn" typeface="Estrangelo Edessa"/>
-        <a:font script="Syrj" typeface="Estrangelo Edessa"/>
-        <a:font script="Syre" typeface="Estrangelo Edessa"/>
-        <a:font script="Sora" typeface="Nirmala UI"/>
-        <a:font script="Tale" typeface="Microsoft Tai Le"/>
-        <a:font script="Talu" typeface="Microsoft New Tai Lue"/>
-        <a:font script="Tfng" typeface="Ebrima"/>
       </a:majorFont>
       <a:minorFont>
-        <a:latin typeface="Calibri" panose="020F0502020204030204"/>
+        <a:latin typeface="Calibri"/>
         <a:ea typeface=""/>
         <a:cs typeface=""/>
         <a:font script="Jpan" typeface="游ゴシック"/>
@@ -13033,23 +12765,6 @@
         <a:font script="Viet" typeface="Arial"/>
         <a:font script="Uigh" typeface="Microsoft Uighur"/>
         <a:font script="Geor" typeface="Sylfaen"/>
-        <a:font script="Armn" typeface="Arial"/>
-        <a:font script="Bugi" typeface="Leelawadee UI"/>
-        <a:font script="Bopo" typeface="Microsoft JhengHei"/>
-        <a:font script="Java" typeface="Javanese Text"/>
-        <a:font script="Lisu" typeface="Segoe UI"/>
-        <a:font script="Mymr" typeface="Myanmar Text"/>
-        <a:font script="Nkoo" typeface="Ebrima"/>
-        <a:font script="Olck" typeface="Nirmala UI"/>
-        <a:font script="Osma" typeface="Ebrima"/>
-        <a:font script="Phag" typeface="Phagspa"/>
-        <a:font script="Syrn" typeface="Estrangelo Edessa"/>
-        <a:font script="Syrj" typeface="Estrangelo Edessa"/>
-        <a:font script="Syre" typeface="Estrangelo Edessa"/>
-        <a:font script="Sora" typeface="Nirmala UI"/>
-        <a:font script="Tale" typeface="Microsoft Tai Le"/>
-        <a:font script="Talu" typeface="Microsoft New Tai Lue"/>
-        <a:font script="Tfng" typeface="Ebrima"/>
       </a:minorFont>
     </a:fontScheme>
     <a:fmtScheme name="Office">
@@ -13190,8 +12905,265 @@
       </a:bgFillStyleLst>
     </a:fmtScheme>
   </a:themeElements>
-  <a:objectDefaults/>
-  <a:extraClrSchemeLst/>
+  <a:extLst>
+    <a:ext uri="{05A4C25C-085E-4340-85A3-A5531E510DB2}">
+      <thm15:themeFamily xmlns:thm15="http://schemas.microsoft.com/office/thememl/2012/main" name="Office Theme" id="{62F939B6-93AF-4DB8-9C6B-D6C7DFDC589F}" vid="{4A3C46E8-61CC-4603-A589-7422A47A8E4A}"/>
+    </a:ext>
+  </a:extLst>
+</a:theme>
+</file>
+
+<file path=ppt/theme/theme2.xml><?xml version="1.0" encoding="utf-8"?>
+<a:theme xmlns:a="http://schemas.openxmlformats.org/drawingml/2006/main" name="Office Theme">
+  <a:themeElements>
+    <a:clrScheme name="Office">
+      <a:dk1>
+        <a:sysClr val="windowText" lastClr="000000"/>
+      </a:dk1>
+      <a:lt1>
+        <a:sysClr val="window" lastClr="FFFFFF"/>
+      </a:lt1>
+      <a:dk2>
+        <a:srgbClr val="44546A"/>
+      </a:dk2>
+      <a:lt2>
+        <a:srgbClr val="E7E6E6"/>
+      </a:lt2>
+      <a:accent1>
+        <a:srgbClr val="4472C4"/>
+      </a:accent1>
+      <a:accent2>
+        <a:srgbClr val="ED7D31"/>
+      </a:accent2>
+      <a:accent3>
+        <a:srgbClr val="A5A5A5"/>
+      </a:accent3>
+      <a:accent4>
+        <a:srgbClr val="FFC000"/>
+      </a:accent4>
+      <a:accent5>
+        <a:srgbClr val="5B9BD5"/>
+      </a:accent5>
+      <a:accent6>
+        <a:srgbClr val="70AD47"/>
+      </a:accent6>
+      <a:hlink>
+        <a:srgbClr val="0563C1"/>
+      </a:hlink>
+      <a:folHlink>
+        <a:srgbClr val="954F72"/>
+      </a:folHlink>
+    </a:clrScheme>
+    <a:fontScheme name="Office">
+      <a:majorFont>
+        <a:latin typeface="Calibri Light"/>
+        <a:ea typeface=""/>
+        <a:cs typeface=""/>
+        <a:font script="Jpan" typeface="游ゴシック Light"/>
+        <a:font script="Hang" typeface="맑은 고딕"/>
+        <a:font script="Hans" typeface="等线 Light"/>
+        <a:font script="Hant" typeface="新細明體"/>
+        <a:font script="Arab" typeface="Times New Roman"/>
+        <a:font script="Hebr" typeface="Times New Roman"/>
+        <a:font script="Thai" typeface="Angsana New"/>
+        <a:font script="Ethi" typeface="Nyala"/>
+        <a:font script="Beng" typeface="Vrinda"/>
+        <a:font script="Gujr" typeface="Shruti"/>
+        <a:font script="Khmr" typeface="MoolBoran"/>
+        <a:font script="Knda" typeface="Tunga"/>
+        <a:font script="Guru" typeface="Raavi"/>
+        <a:font script="Cans" typeface="Euphemia"/>
+        <a:font script="Cher" typeface="Plantagenet Cherokee"/>
+        <a:font script="Yiii" typeface="Microsoft Yi Baiti"/>
+        <a:font script="Tibt" typeface="Microsoft Himalaya"/>
+        <a:font script="Thaa" typeface="MV Boli"/>
+        <a:font script="Deva" typeface="Mangal"/>
+        <a:font script="Telu" typeface="Gautami"/>
+        <a:font script="Taml" typeface="Latha"/>
+        <a:font script="Syrc" typeface="Estrangelo Edessa"/>
+        <a:font script="Orya" typeface="Kalinga"/>
+        <a:font script="Mlym" typeface="Kartika"/>
+        <a:font script="Laoo" typeface="DokChampa"/>
+        <a:font script="Sinh" typeface="Iskoola Pota"/>
+        <a:font script="Mong" typeface="Mongolian Baiti"/>
+        <a:font script="Viet" typeface="Times New Roman"/>
+        <a:font script="Uigh" typeface="Microsoft Uighur"/>
+        <a:font script="Geor" typeface="Sylfaen"/>
+      </a:majorFont>
+      <a:minorFont>
+        <a:latin typeface="Calibri"/>
+        <a:ea typeface=""/>
+        <a:cs typeface=""/>
+        <a:font script="Jpan" typeface="游ゴシック"/>
+        <a:font script="Hang" typeface="맑은 고딕"/>
+        <a:font script="Hans" typeface="等线"/>
+        <a:font script="Hant" typeface="新細明體"/>
+        <a:font script="Arab" typeface="Arial"/>
+        <a:font script="Hebr" typeface="Arial"/>
+        <a:font script="Thai" typeface="Cordia New"/>
+        <a:font script="Ethi" typeface="Nyala"/>
+        <a:font script="Beng" typeface="Vrinda"/>
+        <a:font script="Gujr" typeface="Shruti"/>
+        <a:font script="Khmr" typeface="DaunPenh"/>
+        <a:font script="Knda" typeface="Tunga"/>
+        <a:font script="Guru" typeface="Raavi"/>
+        <a:font script="Cans" typeface="Euphemia"/>
+        <a:font script="Cher" typeface="Plantagenet Cherokee"/>
+        <a:font script="Yiii" typeface="Microsoft Yi Baiti"/>
+        <a:font script="Tibt" typeface="Microsoft Himalaya"/>
+        <a:font script="Thaa" typeface="MV Boli"/>
+        <a:font script="Deva" typeface="Mangal"/>
+        <a:font script="Telu" typeface="Gautami"/>
+        <a:font script="Taml" typeface="Latha"/>
+        <a:font script="Syrc" typeface="Estrangelo Edessa"/>
+        <a:font script="Orya" typeface="Kalinga"/>
+        <a:font script="Mlym" typeface="Kartika"/>
+        <a:font script="Laoo" typeface="DokChampa"/>
+        <a:font script="Sinh" typeface="Iskoola Pota"/>
+        <a:font script="Mong" typeface="Mongolian Baiti"/>
+        <a:font script="Viet" typeface="Arial"/>
+        <a:font script="Uigh" typeface="Microsoft Uighur"/>
+        <a:font script="Geor" typeface="Sylfaen"/>
+      </a:minorFont>
+    </a:fontScheme>
+    <a:fmtScheme name="Office">
+      <a:fillStyleLst>
+        <a:solidFill>
+          <a:schemeClr val="phClr"/>
+        </a:solidFill>
+        <a:gradFill rotWithShape="1">
+          <a:gsLst>
+            <a:gs pos="0">
+              <a:schemeClr val="phClr">
+                <a:lumMod val="110000"/>
+                <a:satMod val="105000"/>
+                <a:tint val="67000"/>
+              </a:schemeClr>
+            </a:gs>
+            <a:gs pos="50000">
+              <a:schemeClr val="phClr">
+                <a:lumMod val="105000"/>
+                <a:satMod val="103000"/>
+                <a:tint val="73000"/>
+              </a:schemeClr>
+            </a:gs>
+            <a:gs pos="100000">
+              <a:schemeClr val="phClr">
+                <a:lumMod val="105000"/>
+                <a:satMod val="109000"/>
+                <a:tint val="81000"/>
+              </a:schemeClr>
+            </a:gs>
+          </a:gsLst>
+          <a:lin ang="5400000" scaled="0"/>
+        </a:gradFill>
+        <a:gradFill rotWithShape="1">
+          <a:gsLst>
+            <a:gs pos="0">
+              <a:schemeClr val="phClr">
+                <a:satMod val="103000"/>
+                <a:lumMod val="102000"/>
+                <a:tint val="94000"/>
+              </a:schemeClr>
+            </a:gs>
+            <a:gs pos="50000">
+              <a:schemeClr val="phClr">
+                <a:satMod val="110000"/>
+                <a:lumMod val="100000"/>
+                <a:shade val="100000"/>
+              </a:schemeClr>
+            </a:gs>
+            <a:gs pos="100000">
+              <a:schemeClr val="phClr">
+                <a:lumMod val="99000"/>
+                <a:satMod val="120000"/>
+                <a:shade val="78000"/>
+              </a:schemeClr>
+            </a:gs>
+          </a:gsLst>
+          <a:lin ang="5400000" scaled="0"/>
+        </a:gradFill>
+      </a:fillStyleLst>
+      <a:lnStyleLst>
+        <a:ln w="6350" cap="flat" cmpd="sng" algn="ctr">
+          <a:solidFill>
+            <a:schemeClr val="phClr"/>
+          </a:solidFill>
+          <a:prstDash val="solid"/>
+          <a:miter lim="800000"/>
+        </a:ln>
+        <a:ln w="12700" cap="flat" cmpd="sng" algn="ctr">
+          <a:solidFill>
+            <a:schemeClr val="phClr"/>
+          </a:solidFill>
+          <a:prstDash val="solid"/>
+          <a:miter lim="800000"/>
+        </a:ln>
+        <a:ln w="19050" cap="flat" cmpd="sng" algn="ctr">
+          <a:solidFill>
+            <a:schemeClr val="phClr"/>
+          </a:solidFill>
+          <a:prstDash val="solid"/>
+          <a:miter lim="800000"/>
+        </a:ln>
+      </a:lnStyleLst>
+      <a:effectStyleLst>
+        <a:effectStyle>
+          <a:effectLst/>
+        </a:effectStyle>
+        <a:effectStyle>
+          <a:effectLst/>
+        </a:effectStyle>
+        <a:effectStyle>
+          <a:effectLst>
+            <a:outerShdw blurRad="57150" dist="19050" dir="5400000" algn="ctr" rotWithShape="0">
+              <a:srgbClr val="000000">
+                <a:alpha val="63000"/>
+              </a:srgbClr>
+            </a:outerShdw>
+          </a:effectLst>
+        </a:effectStyle>
+      </a:effectStyleLst>
+      <a:bgFillStyleLst>
+        <a:solidFill>
+          <a:schemeClr val="phClr"/>
+        </a:solidFill>
+        <a:solidFill>
+          <a:schemeClr val="phClr">
+            <a:tint val="95000"/>
+            <a:satMod val="170000"/>
+          </a:schemeClr>
+        </a:solidFill>
+        <a:gradFill rotWithShape="1">
+          <a:gsLst>
+            <a:gs pos="0">
+              <a:schemeClr val="phClr">
+                <a:tint val="93000"/>
+                <a:satMod val="150000"/>
+                <a:shade val="98000"/>
+                <a:lumMod val="102000"/>
+              </a:schemeClr>
+            </a:gs>
+            <a:gs pos="50000">
+              <a:schemeClr val="phClr">
+                <a:tint val="98000"/>
+                <a:satMod val="130000"/>
+                <a:shade val="90000"/>
+                <a:lumMod val="103000"/>
+              </a:schemeClr>
+            </a:gs>
+            <a:gs pos="100000">
+              <a:schemeClr val="phClr">
+                <a:shade val="63000"/>
+                <a:satMod val="120000"/>
+              </a:schemeClr>
+            </a:gs>
+          </a:gsLst>
+          <a:lin ang="5400000" scaled="0"/>
+        </a:gradFill>
+      </a:bgFillStyleLst>
+    </a:fmtScheme>
+  </a:themeElements>
   <a:extLst>
     <a:ext uri="{05A4C25C-085E-4340-85A3-A5531E510DB2}">
       <thm15:themeFamily xmlns:thm15="http://schemas.microsoft.com/office/thememl/2012/main" name="Office Theme" id="{62F939B6-93AF-4DB8-9C6B-D6C7DFDC589F}" vid="{4A3C46E8-61CC-4603-A589-7422A47A8E4A}"/>
